--- a/blocks/A_ros2_basics/M03_pubsub/M03_Publisher_Subscriber_직접_작성.pptx
+++ b/blocks/A_ros2_basics/M03_pubsub/M03_Publisher_Subscriber_직접_작성.pptx
@@ -31,6 +31,7 @@
     <p:sldId id="279" r:id="rId31"/>
     <p:sldId id="280" r:id="rId32"/>
     <p:sldId id="281" r:id="rId33"/>
+    <p:sldId id="282" r:id="rId34"/>
   </p:sldIdLst>
   <p:sldSz cx="12191999" cy="6858000" type="screen4x3"/>
   <p:notesSz cx="6858000" cy="9144000"/>
@@ -1247,7 +1248,7 @@
           <a:lstStyle/>
           <a:p>
             <a:r>
-              <a:t>[설명] ~/agv_ws/src/agv_control/agv_control/velocity_monitor.py의 전체 파일을 1/2 구간으로 작성한다.</a:t>
+              <a:t>[설명] ~/agv_ws/src/agv_control/agv_control/velocity_monitor.py의 전체 파일을 1/3 구간으로 작성한다.</a:t>
             </a:r>
           </a:p>
           <a:p>
@@ -1337,7 +1338,7 @@
           <a:lstStyle/>
           <a:p>
             <a:r>
-              <a:t>[설명] ~/agv_ws/src/agv_control/agv_control/velocity_monitor.py의 전체 파일을 2/2 구간으로 작성한다.</a:t>
+              <a:t>[설명] ~/agv_ws/src/agv_control/agv_control/velocity_monitor.py의 전체 파일을 2/3 구간으로 작성한다.</a:t>
             </a:r>
           </a:p>
           <a:p>
@@ -1427,12 +1428,12 @@
           <a:lstStyle/>
           <a:p>
             <a:r>
-              <a:t>[설명] ~/agv_ws/src/agv_control/setup.py의 전체 파일을 1/1 구간으로 작성한다.</a:t>
-            </a:r>
-          </a:p>
-          <a:p>
-            <a:r>
-              <a:t>[실행] nano ~/agv_ws/src/agv_control/setup.py</a:t>
+              <a:t>[설명] ~/agv_ws/src/agv_control/agv_control/velocity_monitor.py의 전체 파일을 3/3 구간으로 작성한다.</a:t>
+            </a:r>
+          </a:p>
+          <a:p>
+            <a:r>
+              <a:t>[실행] nano ~/agv_ws/src/agv_control/agv_control/velocity_monitor.py</a:t>
             </a:r>
           </a:p>
           <a:p>
@@ -1607,27 +1608,17 @@
           <a:lstStyle/>
           <a:p>
             <a:r>
-              <a:t>[설명] build/source/run을 생략 없이 실행한다.</a:t>
-            </a:r>
-          </a:p>
-          <a:p>
-            <a:r>
-              <a:t>[실행] cd ~/agv_ws &amp;&amp; source install/setup.bash</a:t>
-            </a:r>
-          </a:p>
-          <a:p>
-            <a:r>
-              <a:t>ros2 run agv_control counter_publisher</a:t>
-            </a:r>
-          </a:p>
-          <a:p>
-            <a:r>
-              <a:t># 새 터미널: ros2 run agv_control counter_monitor</a:t>
-            </a:r>
-          </a:p>
-          <a:p>
-            <a:r>
-              <a:t>[확인] /counter와 /cmd_vel의 값·message type·연결 수를 terminal에서 확인한다.</a:t>
+              <a:t>[설명] ~/agv_ws/src/agv_control/setup.py의 전체 파일을 1/1 구간으로 작성한다.</a:t>
+            </a:r>
+          </a:p>
+          <a:p>
+            <a:r>
+              <a:t>[실행] nano ~/agv_ws/src/agv_control/setup.py</a:t>
+            </a:r>
+          </a:p>
+          <a:p>
+            <a:r>
+              <a:t>[확인] 코드를 저장하고 다음 코드 슬라이드 또는 build 단계로 이동한다.</a:t>
             </a:r>
           </a:p>
           <a:p>
@@ -1637,7 +1628,7 @@
           </a:p>
           <a:p>
             <a:r>
-              <a:t>[오류] 오류가 나면 현재 폴더, source, 파일 경로를 먼저 확인한다.</a:t>
+              <a:t>[오류] 들여쓰기·XML 태그·따옴표가 슬라이드와 정확히 같은지 확인한다.</a:t>
             </a:r>
           </a:p>
         </p:txBody>
@@ -1707,17 +1698,27 @@
           <a:lstStyle/>
           <a:p>
             <a:r>
-              <a:t>[설명] 실제 Ubuntu/ROS 2 환경에서 생성한 검증 화면이다.</a:t>
-            </a:r>
-          </a:p>
-          <a:p>
-            <a:r>
-              <a:t>[실행] 슬라이드의 명령 또는 파일 작성 단계를 진행한다.</a:t>
-            </a:r>
-          </a:p>
-          <a:p>
-            <a:r>
-              <a:t>[확인] 캡처의 명령과 다음 슬라이드의 검증 명령을 비교한다.</a:t>
+              <a:t>[설명] build/source/run을 생략 없이 실행한다.</a:t>
+            </a:r>
+          </a:p>
+          <a:p>
+            <a:r>
+              <a:t>[실행] cd ~/agv_ws &amp;&amp; source install/setup.bash</a:t>
+            </a:r>
+          </a:p>
+          <a:p>
+            <a:r>
+              <a:t>ros2 run agv_control counter_publisher</a:t>
+            </a:r>
+          </a:p>
+          <a:p>
+            <a:r>
+              <a:t># 새 터미널: ros2 run agv_control counter_monitor</a:t>
+            </a:r>
+          </a:p>
+          <a:p>
+            <a:r>
+              <a:t>[확인] /counter와 /cmd_vel의 값·message type·연결 수를 terminal에서 확인한다.</a:t>
             </a:r>
           </a:p>
           <a:p>
@@ -1797,27 +1798,17 @@
           <a:lstStyle/>
           <a:p>
             <a:r>
-              <a:t>[설명] 검증 명령은 GUI 결과와 별도로 실행해 재현 가능한 완료 기준을 만든다.</a:t>
-            </a:r>
-          </a:p>
-          <a:p>
-            <a:r>
-              <a:t>[실행] ros2 topic info /counter</a:t>
-            </a:r>
-          </a:p>
-          <a:p>
-            <a:r>
-              <a:t>ros2 topic echo /counter --once</a:t>
-            </a:r>
-          </a:p>
-          <a:p>
-            <a:r>
-              <a:t>ros2 interface show geometry_msgs/msg/Twist</a:t>
-            </a:r>
-          </a:p>
-          <a:p>
-            <a:r>
-              <a:t>[확인] /counter와 /cmd_vel의 값·message type·연결 수를 terminal에서 확인한다.</a:t>
+              <a:t>[설명] 실제 Ubuntu/ROS 2 환경에서 생성한 검증 화면이다.</a:t>
+            </a:r>
+          </a:p>
+          <a:p>
+            <a:r>
+              <a:t>[실행] 슬라이드의 명령 또는 파일 작성 단계를 진행한다.</a:t>
+            </a:r>
+          </a:p>
+          <a:p>
+            <a:r>
+              <a:t>[확인] 캡처의 명령과 다음 슬라이드의 검증 명령을 비교한다.</a:t>
             </a:r>
           </a:p>
           <a:p>
@@ -1897,17 +1888,27 @@
           <a:lstStyle/>
           <a:p>
             <a:r>
-              <a:t>[설명] 오류를 대신 해결하지 말고 증상부터 우선 확인 순서대로 교육생이 실행하게 한다.</a:t>
-            </a:r>
-          </a:p>
-          <a:p>
-            <a:r>
-              <a:t>[실행] 슬라이드의 명령 또는 파일 작성 단계를 진행한다.</a:t>
-            </a:r>
-          </a:p>
-          <a:p>
-            <a:r>
-              <a:t>[확인] 수정 뒤 첫 검증 명령을 다시 실행한다.</a:t>
+              <a:t>[설명] 검증 명령은 GUI 결과와 별도로 실행해 재현 가능한 완료 기준을 만든다.</a:t>
+            </a:r>
+          </a:p>
+          <a:p>
+            <a:r>
+              <a:t>[실행] ros2 topic info /counter</a:t>
+            </a:r>
+          </a:p>
+          <a:p>
+            <a:r>
+              <a:t>ros2 topic echo /counter --once</a:t>
+            </a:r>
+          </a:p>
+          <a:p>
+            <a:r>
+              <a:t>ros2 interface show geometry_msgs/msg/Twist</a:t>
+            </a:r>
+          </a:p>
+          <a:p>
+            <a:r>
+              <a:t>[확인] /counter와 /cmd_vel의 값·message type·연결 수를 terminal에서 확인한다.</a:t>
             </a:r>
           </a:p>
           <a:p>
@@ -1917,7 +1918,7 @@
           </a:p>
           <a:p>
             <a:r>
-              <a:t>[오류] 슬라이드의 두 대표 오류를 먼저 사용한다.</a:t>
+              <a:t>[오류] 오류가 나면 현재 폴더, source, 파일 경로를 먼저 확인한다.</a:t>
             </a:r>
           </a:p>
         </p:txBody>
@@ -1987,7 +1988,7 @@
           <a:lstStyle/>
           <a:p>
             <a:r>
-              <a:t>[설명] 교육생이 직접 한 값만 바꿔 원인과 결과를 연결하게 한다.</a:t>
+              <a:t>[설명] 오류를 대신 해결하지 말고 증상부터 우선 확인 순서대로 교육생이 실행하게 한다.</a:t>
             </a:r>
           </a:p>
           <a:p>
@@ -1997,7 +1998,7 @@
           </a:p>
           <a:p>
             <a:r>
-              <a:t>[확인] 원래 값과 변경 값을 모두 기록한다.</a:t>
+              <a:t>[확인] 수정 뒤 첫 검증 명령을 다시 실행한다.</a:t>
             </a:r>
           </a:p>
           <a:p>
@@ -2007,7 +2008,7 @@
           </a:p>
           <a:p>
             <a:r>
-              <a:t>[오류] 오류가 나면 현재 폴더, source, 파일 경로를 먼저 확인한다.</a:t>
+              <a:t>[오류] 슬라이드의 두 대표 오류를 먼저 사용한다.</a:t>
             </a:r>
           </a:p>
         </p:txBody>
@@ -2077,7 +2078,7 @@
           <a:lstStyle/>
           <a:p>
             <a:r>
-              <a:t>[설명] 교육생이 Complete·캡처·로그를 저장했는지 확인하고 다음 모듈의 시작 상태를 읽는다.</a:t>
+              <a:t>[설명] 교육생이 직접 한 값만 바꿔 원인과 결과를 연결하게 한다.</a:t>
             </a:r>
           </a:p>
           <a:p>
@@ -2087,7 +2088,7 @@
           </a:p>
           <a:p>
             <a:r>
-              <a:t>[확인] M04 TF2 frame 시작 조건을 말할 수 있다.</a:t>
+              <a:t>[확인] 원래 값과 변경 값을 모두 기록한다.</a:t>
             </a:r>
           </a:p>
           <a:p>
@@ -2123,6 +2124,96 @@
 </file>
 
 <file path=ppt/notesSlides/notesSlide26.xml><?xml version="1.0" encoding="utf-8"?>
+<p:notes xmlns:a="http://schemas.openxmlformats.org/drawingml/2006/main" xmlns:p="http://schemas.openxmlformats.org/presentationml/2006/main" xmlns:r="http://schemas.openxmlformats.org/officeDocument/2006/relationships">
+  <p:cSld>
+    <p:spTree>
+      <p:nvGrpSpPr>
+        <p:cNvPr id="1" name=""/>
+        <p:cNvGrpSpPr/>
+        <p:nvPr/>
+      </p:nvGrpSpPr>
+      <p:grpSpPr>
+        <a:xfrm>
+          <a:off x="0" y="0"/>
+          <a:ext cx="0" cy="0"/>
+          <a:chOff x="0" y="0"/>
+          <a:chExt cx="0" cy="0"/>
+        </a:xfrm>
+      </p:grpSpPr>
+      <p:sp>
+        <p:nvSpPr>
+          <p:cNvPr id="2" name="Slide Image Placeholder 1"/>
+          <p:cNvSpPr>
+            <a:spLocks noGrp="1"/>
+          </p:cNvSpPr>
+          <p:nvPr>
+            <p:ph type="sldImg" idx="2"/>
+          </p:nvPr>
+        </p:nvSpPr>
+        <p:spPr/>
+      </p:sp>
+      <p:sp>
+        <p:nvSpPr>
+          <p:cNvPr id="3" name="Notes Placeholder 2"/>
+          <p:cNvSpPr>
+            <a:spLocks noGrp="1"/>
+          </p:cNvSpPr>
+          <p:nvPr>
+            <p:ph type="body" idx="3" sz="quarter"/>
+          </p:nvPr>
+        </p:nvSpPr>
+        <p:spPr/>
+        <p:txBody>
+          <a:bodyPr/>
+          <a:lstStyle/>
+          <a:p>
+            <a:r>
+              <a:t>[설명] 교육생이 Complete·캡처·로그를 저장했는지 확인하고 다음 모듈의 시작 상태를 읽는다.</a:t>
+            </a:r>
+          </a:p>
+          <a:p>
+            <a:r>
+              <a:t>[실행] 슬라이드의 명령 또는 파일 작성 단계를 진행한다.</a:t>
+            </a:r>
+          </a:p>
+          <a:p>
+            <a:r>
+              <a:t>[확인] M04 TF2 frame 시작 조건을 말할 수 있다.</a:t>
+            </a:r>
+          </a:p>
+          <a:p>
+            <a:r>
+              <a:t>[멈춤] 교육생이 현재 체크포인트를 통과할 때까지 기다린다.</a:t>
+            </a:r>
+          </a:p>
+          <a:p>
+            <a:r>
+              <a:t>[오류] 오류가 나면 현재 폴더, source, 파일 경로를 먼저 확인한다.</a:t>
+            </a:r>
+          </a:p>
+        </p:txBody>
+      </p:sp>
+      <p:sp>
+        <p:nvSpPr>
+          <p:cNvPr id="4" name="Slide Number Placeholder 3"/>
+          <p:cNvSpPr>
+            <a:spLocks noGrp="1"/>
+          </p:cNvSpPr>
+          <p:nvPr>
+            <p:ph type="sldNum" idx="5" sz="quarter"/>
+          </p:nvPr>
+        </p:nvSpPr>
+        <p:spPr/>
+      </p:sp>
+    </p:spTree>
+  </p:cSld>
+  <p:clrMapOvr>
+    <a:masterClrMapping/>
+  </p:clrMapOvr>
+</p:notes>
+</file>
+
+<file path=ppt/notesSlides/notesSlide27.xml><?xml version="1.0" encoding="utf-8"?>
 <p:notes xmlns:a="http://schemas.openxmlformats.org/drawingml/2006/main" xmlns:p="http://schemas.openxmlformats.org/presentationml/2006/main" xmlns:r="http://schemas.openxmlformats.org/officeDocument/2006/relationships">
   <p:cSld>
     <p:spTree>
@@ -6403,8 +6494,8 @@
         </p:nvSpPr>
         <p:spPr>
           <a:xfrm>
-            <a:off x="658368" y="1682496"/>
-            <a:ext cx="10972800" cy="347472"/>
+            <a:off x="658368" y="1627632"/>
+            <a:ext cx="10972800" cy="256032"/>
           </a:xfrm>
           <a:prstGeom prst="rect">
             <a:avLst/>
@@ -6421,7 +6512,7 @@
               <a:spcAft>
                 <a:spcPts val="0"/>
               </a:spcAft>
-              <a:defRPr sz="1700" b="1">
+              <a:defRPr sz="1500" b="1">
                 <a:solidFill>
                   <a:srgbClr val="122C4E"/>
                 </a:solidFill>
@@ -6442,8 +6533,8 @@
         </p:nvSpPr>
         <p:spPr>
           <a:xfrm>
-            <a:off x="658368" y="2103120"/>
-            <a:ext cx="10972800" cy="493776"/>
+            <a:off x="658368" y="1956816"/>
+            <a:ext cx="10972800" cy="603504"/>
           </a:xfrm>
           <a:prstGeom prst="rect">
             <a:avLst/>
@@ -6487,7 +6578,11 @@
               </a:defRPr>
             </a:pPr>
             <a:r>
-              <a:t>파일 생성/열기: mkdir -p ~/agv_ws/src/agv_control/agv_control    &amp;&amp;    nano ~/agv_ws/src/agv_control/agv_control/counter_publisher.py</a:t>
+              <a:t>파일 생성: mkdir -p ~/agv_ws/src/agv_control/agv_control</a:t>
+            </a:r>
+            <a:br/>
+            <a:r>
+              <a:t>파일 열기: nano ~/agv_ws/src/agv_control/agv_control/counter_publisher.py</a:t>
             </a:r>
           </a:p>
         </p:txBody>
@@ -6500,8 +6595,8 @@
         </p:nvSpPr>
         <p:spPr>
           <a:xfrm>
-            <a:off x="658368" y="2761488"/>
-            <a:ext cx="10972800" cy="3383280"/>
+            <a:off x="658368" y="2706624"/>
+            <a:ext cx="10972800" cy="3364992"/>
           </a:xfrm>
           <a:prstGeom prst="rect">
             <a:avLst/>
@@ -6545,6 +6640,14 @@
               </a:defRPr>
             </a:pPr>
             <a:r>
+              <a:t>    def publish_counter(self):</a:t>
+            </a:r>
+            <a:br/>
+            <a:r>
+              <a:t>        message = Int32(data=self.value)</a:t>
+            </a:r>
+            <a:br/>
+            <a:r>
               <a:t>        self.publisher.publish(message)</a:t>
             </a:r>
             <a:br/>
@@ -6580,22 +6683,6 @@
             <a:r>
               <a:t>    except KeyboardInterrupt:</a:t>
             </a:r>
-            <a:br/>
-            <a:r>
-              <a:t>        pass</a:t>
-            </a:r>
-            <a:br/>
-            <a:r>
-              <a:t>    finally:</a:t>
-            </a:r>
-            <a:br/>
-            <a:r>
-              <a:t>        node.destroy_node()</a:t>
-            </a:r>
-            <a:br/>
-            <a:r>
-              <a:t>        if rclpy.ok():</a:t>
-            </a:r>
           </a:p>
         </p:txBody>
       </p:sp>
@@ -6607,7 +6694,7 @@
         </p:nvSpPr>
         <p:spPr>
           <a:xfrm>
-            <a:off x="749808" y="6199632"/>
+            <a:off x="749808" y="6181344"/>
             <a:ext cx="10789920" cy="201168"/>
           </a:xfrm>
           <a:prstGeom prst="rect">
@@ -6878,8 +6965,8 @@
         </p:nvSpPr>
         <p:spPr>
           <a:xfrm>
-            <a:off x="658368" y="1682496"/>
-            <a:ext cx="10972800" cy="347472"/>
+            <a:off x="658368" y="1627632"/>
+            <a:ext cx="10972800" cy="256032"/>
           </a:xfrm>
           <a:prstGeom prst="rect">
             <a:avLst/>
@@ -6896,7 +6983,7 @@
               <a:spcAft>
                 <a:spcPts val="0"/>
               </a:spcAft>
-              <a:defRPr sz="1700" b="1">
+              <a:defRPr sz="1500" b="1">
                 <a:solidFill>
                   <a:srgbClr val="122C4E"/>
                 </a:solidFill>
@@ -6917,8 +7004,8 @@
         </p:nvSpPr>
         <p:spPr>
           <a:xfrm>
-            <a:off x="658368" y="2103120"/>
-            <a:ext cx="10972800" cy="493776"/>
+            <a:off x="658368" y="1956816"/>
+            <a:ext cx="10972800" cy="603504"/>
           </a:xfrm>
           <a:prstGeom prst="rect">
             <a:avLst/>
@@ -6962,7 +7049,11 @@
               </a:defRPr>
             </a:pPr>
             <a:r>
-              <a:t>파일 생성/열기: mkdir -p ~/agv_ws/src/agv_control/agv_control    &amp;&amp;    nano ~/agv_ws/src/agv_control/agv_control/counter_publisher.py</a:t>
+              <a:t>파일 생성: mkdir -p ~/agv_ws/src/agv_control/agv_control</a:t>
+            </a:r>
+            <a:br/>
+            <a:r>
+              <a:t>파일 열기: nano ~/agv_ws/src/agv_control/agv_control/counter_publisher.py</a:t>
             </a:r>
           </a:p>
         </p:txBody>
@@ -6975,8 +7066,8 @@
         </p:nvSpPr>
         <p:spPr>
           <a:xfrm>
-            <a:off x="658368" y="2761488"/>
-            <a:ext cx="10972800" cy="3383280"/>
+            <a:off x="658368" y="2706624"/>
+            <a:ext cx="10972800" cy="3364992"/>
           </a:xfrm>
           <a:prstGeom prst="rect">
             <a:avLst/>
@@ -7020,6 +7111,22 @@
               </a:defRPr>
             </a:pPr>
             <a:r>
+              <a:t>        pass</a:t>
+            </a:r>
+            <a:br/>
+            <a:r>
+              <a:t>    finally:</a:t>
+            </a:r>
+            <a:br/>
+            <a:r>
+              <a:t>        node.destroy_node()</a:t>
+            </a:r>
+            <a:br/>
+            <a:r>
+              <a:t>        if rclpy.ok():</a:t>
+            </a:r>
+            <a:br/>
+            <a:r>
               <a:t>            rclpy.shutdown()</a:t>
             </a:r>
           </a:p>
@@ -7033,7 +7140,7 @@
         </p:nvSpPr>
         <p:spPr>
           <a:xfrm>
-            <a:off x="749808" y="6199632"/>
+            <a:off x="749808" y="6181344"/>
             <a:ext cx="10789920" cy="201168"/>
           </a:xfrm>
           <a:prstGeom prst="rect">
@@ -7304,8 +7411,8 @@
         </p:nvSpPr>
         <p:spPr>
           <a:xfrm>
-            <a:off x="658368" y="1682496"/>
-            <a:ext cx="10972800" cy="347472"/>
+            <a:off x="658368" y="1627632"/>
+            <a:ext cx="10972800" cy="256032"/>
           </a:xfrm>
           <a:prstGeom prst="rect">
             <a:avLst/>
@@ -7322,7 +7429,7 @@
               <a:spcAft>
                 <a:spcPts val="0"/>
               </a:spcAft>
-              <a:defRPr sz="1700" b="1">
+              <a:defRPr sz="1500" b="1">
                 <a:solidFill>
                   <a:srgbClr val="122C4E"/>
                 </a:solidFill>
@@ -7343,8 +7450,8 @@
         </p:nvSpPr>
         <p:spPr>
           <a:xfrm>
-            <a:off x="658368" y="2103120"/>
-            <a:ext cx="10972800" cy="493776"/>
+            <a:off x="658368" y="1956816"/>
+            <a:ext cx="10972800" cy="603504"/>
           </a:xfrm>
           <a:prstGeom prst="rect">
             <a:avLst/>
@@ -7388,7 +7495,11 @@
               </a:defRPr>
             </a:pPr>
             <a:r>
-              <a:t>파일 생성/열기: mkdir -p ~/agv_ws/src/agv_control/agv_control    &amp;&amp;    nano ~/agv_ws/src/agv_control/agv_control/counter_monitor.py</a:t>
+              <a:t>파일 생성: mkdir -p ~/agv_ws/src/agv_control/agv_control</a:t>
+            </a:r>
+            <a:br/>
+            <a:r>
+              <a:t>파일 열기: nano ~/agv_ws/src/agv_control/agv_control/counter_monitor.py</a:t>
             </a:r>
           </a:p>
         </p:txBody>
@@ -7401,8 +7512,8 @@
         </p:nvSpPr>
         <p:spPr>
           <a:xfrm>
-            <a:off x="658368" y="2761488"/>
-            <a:ext cx="10972800" cy="3383280"/>
+            <a:off x="658368" y="2706624"/>
+            <a:ext cx="10972800" cy="3364992"/>
           </a:xfrm>
           <a:prstGeom prst="rect">
             <a:avLst/>
@@ -7483,11 +7594,6 @@
             <a:r>
               <a:t>        self.get_logger().info(f'received /counter: {message.data}')</a:t>
             </a:r>
-            <a:br/>
-            <a:br/>
-            <a:r>
-              <a:t>def main():</a:t>
-            </a:r>
           </a:p>
         </p:txBody>
       </p:sp>
@@ -7499,7 +7605,7 @@
         </p:nvSpPr>
         <p:spPr>
           <a:xfrm>
-            <a:off x="749808" y="6199632"/>
+            <a:off x="749808" y="6181344"/>
             <a:ext cx="10789920" cy="201168"/>
           </a:xfrm>
           <a:prstGeom prst="rect">
@@ -7770,8 +7876,8 @@
         </p:nvSpPr>
         <p:spPr>
           <a:xfrm>
-            <a:off x="658368" y="1682496"/>
-            <a:ext cx="10972800" cy="347472"/>
+            <a:off x="658368" y="1627632"/>
+            <a:ext cx="10972800" cy="256032"/>
           </a:xfrm>
           <a:prstGeom prst="rect">
             <a:avLst/>
@@ -7788,7 +7894,7 @@
               <a:spcAft>
                 <a:spcPts val="0"/>
               </a:spcAft>
-              <a:defRPr sz="1700" b="1">
+              <a:defRPr sz="1500" b="1">
                 <a:solidFill>
                   <a:srgbClr val="122C4E"/>
                 </a:solidFill>
@@ -7809,8 +7915,8 @@
         </p:nvSpPr>
         <p:spPr>
           <a:xfrm>
-            <a:off x="658368" y="2103120"/>
-            <a:ext cx="10972800" cy="493776"/>
+            <a:off x="658368" y="1956816"/>
+            <a:ext cx="10972800" cy="603504"/>
           </a:xfrm>
           <a:prstGeom prst="rect">
             <a:avLst/>
@@ -7854,7 +7960,11 @@
               </a:defRPr>
             </a:pPr>
             <a:r>
-              <a:t>파일 생성/열기: mkdir -p ~/agv_ws/src/agv_control/agv_control    &amp;&amp;    nano ~/agv_ws/src/agv_control/agv_control/counter_monitor.py</a:t>
+              <a:t>파일 생성: mkdir -p ~/agv_ws/src/agv_control/agv_control</a:t>
+            </a:r>
+            <a:br/>
+            <a:r>
+              <a:t>파일 열기: nano ~/agv_ws/src/agv_control/agv_control/counter_monitor.py</a:t>
             </a:r>
           </a:p>
         </p:txBody>
@@ -7867,8 +7977,8 @@
         </p:nvSpPr>
         <p:spPr>
           <a:xfrm>
-            <a:off x="658368" y="2761488"/>
-            <a:ext cx="10972800" cy="3383280"/>
+            <a:off x="658368" y="2706624"/>
+            <a:ext cx="10972800" cy="3364992"/>
           </a:xfrm>
           <a:prstGeom prst="rect">
             <a:avLst/>
@@ -7911,6 +8021,11 @@
                 <a:latin typeface="DejaVu Sans Mono"/>
               </a:defRPr>
             </a:pPr>
+            <a:br/>
+            <a:r>
+              <a:t>def main():</a:t>
+            </a:r>
+            <a:br/>
             <a:r>
               <a:t>    rclpy.init()</a:t>
             </a:r>
@@ -7961,7 +8076,7 @@
         </p:nvSpPr>
         <p:spPr>
           <a:xfrm>
-            <a:off x="749808" y="6199632"/>
+            <a:off x="749808" y="6181344"/>
             <a:ext cx="10789920" cy="201168"/>
           </a:xfrm>
           <a:prstGeom prst="rect">
@@ -8232,8 +8347,8 @@
         </p:nvSpPr>
         <p:spPr>
           <a:xfrm>
-            <a:off x="658368" y="1682496"/>
-            <a:ext cx="10972800" cy="347472"/>
+            <a:off x="658368" y="1627632"/>
+            <a:ext cx="10972800" cy="256032"/>
           </a:xfrm>
           <a:prstGeom prst="rect">
             <a:avLst/>
@@ -8250,7 +8365,7 @@
               <a:spcAft>
                 <a:spcPts val="0"/>
               </a:spcAft>
-              <a:defRPr sz="1700" b="1">
+              <a:defRPr sz="1500" b="1">
                 <a:solidFill>
                   <a:srgbClr val="122C4E"/>
                 </a:solidFill>
@@ -8271,8 +8386,8 @@
         </p:nvSpPr>
         <p:spPr>
           <a:xfrm>
-            <a:off x="658368" y="2103120"/>
-            <a:ext cx="10972800" cy="493776"/>
+            <a:off x="658368" y="1956816"/>
+            <a:ext cx="10972800" cy="603504"/>
           </a:xfrm>
           <a:prstGeom prst="rect">
             <a:avLst/>
@@ -8316,7 +8431,11 @@
               </a:defRPr>
             </a:pPr>
             <a:r>
-              <a:t>파일 생성/열기: mkdir -p ~/agv_ws/src/agv_control/agv_control    &amp;&amp;    nano ~/agv_ws/src/agv_control/agv_control/cmd_test_node.py</a:t>
+              <a:t>파일 생성: mkdir -p ~/agv_ws/src/agv_control/agv_control</a:t>
+            </a:r>
+            <a:br/>
+            <a:r>
+              <a:t>파일 열기: nano ~/agv_ws/src/agv_control/agv_control/cmd_test_node.py</a:t>
             </a:r>
           </a:p>
         </p:txBody>
@@ -8329,8 +8448,8 @@
         </p:nvSpPr>
         <p:spPr>
           <a:xfrm>
-            <a:off x="658368" y="2761488"/>
-            <a:ext cx="10972800" cy="3383280"/>
+            <a:off x="658368" y="2706624"/>
+            <a:ext cx="10972800" cy="3364992"/>
           </a:xfrm>
           <a:prstGeom prst="rect">
             <a:avLst/>
@@ -8414,11 +8533,6 @@
             <a:r>
               <a:t>        self.remaining = 30</a:t>
             </a:r>
-            <a:br/>
-            <a:r>
-              <a:t>        self.create_timer(0.1, self.publish_once)</a:t>
-            </a:r>
-            <a:br/>
           </a:p>
         </p:txBody>
       </p:sp>
@@ -8430,7 +8544,7 @@
         </p:nvSpPr>
         <p:spPr>
           <a:xfrm>
-            <a:off x="749808" y="6199632"/>
+            <a:off x="749808" y="6181344"/>
             <a:ext cx="10789920" cy="201168"/>
           </a:xfrm>
           <a:prstGeom prst="rect">
@@ -8701,8 +8815,8 @@
         </p:nvSpPr>
         <p:spPr>
           <a:xfrm>
-            <a:off x="658368" y="1682496"/>
-            <a:ext cx="10972800" cy="347472"/>
+            <a:off x="658368" y="1627632"/>
+            <a:ext cx="10972800" cy="256032"/>
           </a:xfrm>
           <a:prstGeom prst="rect">
             <a:avLst/>
@@ -8719,7 +8833,7 @@
               <a:spcAft>
                 <a:spcPts val="0"/>
               </a:spcAft>
-              <a:defRPr sz="1700" b="1">
+              <a:defRPr sz="1500" b="1">
                 <a:solidFill>
                   <a:srgbClr val="122C4E"/>
                 </a:solidFill>
@@ -8740,8 +8854,8 @@
         </p:nvSpPr>
         <p:spPr>
           <a:xfrm>
-            <a:off x="658368" y="2103120"/>
-            <a:ext cx="10972800" cy="493776"/>
+            <a:off x="658368" y="1956816"/>
+            <a:ext cx="10972800" cy="603504"/>
           </a:xfrm>
           <a:prstGeom prst="rect">
             <a:avLst/>
@@ -8785,7 +8899,11 @@
               </a:defRPr>
             </a:pPr>
             <a:r>
-              <a:t>파일 생성/열기: mkdir -p ~/agv_ws/src/agv_control/agv_control    &amp;&amp;    nano ~/agv_ws/src/agv_control/agv_control/cmd_test_node.py</a:t>
+              <a:t>파일 생성: mkdir -p ~/agv_ws/src/agv_control/agv_control</a:t>
+            </a:r>
+            <a:br/>
+            <a:r>
+              <a:t>파일 열기: nano ~/agv_ws/src/agv_control/agv_control/cmd_test_node.py</a:t>
             </a:r>
           </a:p>
         </p:txBody>
@@ -8798,8 +8916,8 @@
         </p:nvSpPr>
         <p:spPr>
           <a:xfrm>
-            <a:off x="658368" y="2761488"/>
-            <a:ext cx="10972800" cy="3383280"/>
+            <a:off x="658368" y="2706624"/>
+            <a:ext cx="10972800" cy="3364992"/>
           </a:xfrm>
           <a:prstGeom prst="rect">
             <a:avLst/>
@@ -8843,56 +8961,48 @@
               </a:defRPr>
             </a:pPr>
             <a:r>
-              <a:t>    def publish_once(self):</a:t>
-            </a:r>
-            <a:br/>
-            <a:r>
-              <a:t>        command = Twist()</a:t>
-            </a:r>
-            <a:br/>
-            <a:r>
-              <a:t>        if self.remaining &gt; 0:</a:t>
-            </a:r>
-            <a:br/>
-            <a:r>
-              <a:t>            command.linear.x = self.get_parameter('linear_speed').value</a:t>
-            </a:r>
-            <a:br/>
-            <a:r>
-              <a:t>            command.angular.z = self.get_parameter('angular_speed').value</a:t>
-            </a:r>
-            <a:br/>
-            <a:r>
-              <a:t>            self.remaining -= 1</a:t>
-            </a:r>
-            <a:br/>
-            <a:r>
-              <a:t>        self.publisher.publish(command)</a:t>
-            </a:r>
-            <a:br/>
-            <a:r>
-              <a:t>        if self.remaining == 0:</a:t>
-            </a:r>
-            <a:br/>
-            <a:r>
-              <a:t>            self.get_logger().info('test command finished; publishing zero Twist')</a:t>
-            </a:r>
-            <a:br/>
-            <a:r>
-              <a:t>            self.remaining = -1</a:t>
+              <a:t>        self.create_timer(0.1, self.publish_once)</a:t>
             </a:r>
             <a:br/>
             <a:br/>
             <a:r>
-              <a:t>def main():</a:t>
+              <a:t>    def publish_once(self):</a:t>
             </a:r>
             <a:br/>
             <a:r>
-              <a:t>    rclpy.init()</a:t>
+              <a:t>        command = Twist()</a:t>
             </a:r>
             <a:br/>
             <a:r>
-              <a:t>    node = CmdTestNode()</a:t>
+              <a:t>        if self.remaining &gt; 0:</a:t>
+            </a:r>
+            <a:br/>
+            <a:r>
+              <a:t>            command.linear.x = self.get_parameter('linear_speed').value</a:t>
+            </a:r>
+            <a:br/>
+            <a:r>
+              <a:t>            command.angular.z = self.get_parameter('angular_speed').value</a:t>
+            </a:r>
+            <a:br/>
+            <a:r>
+              <a:t>            self.remaining -= 1</a:t>
+            </a:r>
+            <a:br/>
+            <a:r>
+              <a:t>        self.publisher.publish(command)</a:t>
+            </a:r>
+            <a:br/>
+            <a:r>
+              <a:t>        if self.remaining == 0:</a:t>
+            </a:r>
+            <a:br/>
+            <a:r>
+              <a:t>            self.get_logger().info('test command finished; publishing zero Twist')</a:t>
+            </a:r>
+            <a:br/>
+            <a:r>
+              <a:t>            self.remaining = -1</a:t>
             </a:r>
           </a:p>
         </p:txBody>
@@ -8905,7 +9015,7 @@
         </p:nvSpPr>
         <p:spPr>
           <a:xfrm>
-            <a:off x="749808" y="6199632"/>
+            <a:off x="749808" y="6181344"/>
             <a:ext cx="10789920" cy="201168"/>
           </a:xfrm>
           <a:prstGeom prst="rect">
@@ -9176,8 +9286,8 @@
         </p:nvSpPr>
         <p:spPr>
           <a:xfrm>
-            <a:off x="658368" y="1682496"/>
-            <a:ext cx="10972800" cy="347472"/>
+            <a:off x="658368" y="1627632"/>
+            <a:ext cx="10972800" cy="256032"/>
           </a:xfrm>
           <a:prstGeom prst="rect">
             <a:avLst/>
@@ -9194,7 +9304,7 @@
               <a:spcAft>
                 <a:spcPts val="0"/>
               </a:spcAft>
-              <a:defRPr sz="1700" b="1">
+              <a:defRPr sz="1500" b="1">
                 <a:solidFill>
                   <a:srgbClr val="122C4E"/>
                 </a:solidFill>
@@ -9215,8 +9325,8 @@
         </p:nvSpPr>
         <p:spPr>
           <a:xfrm>
-            <a:off x="658368" y="2103120"/>
-            <a:ext cx="10972800" cy="493776"/>
+            <a:off x="658368" y="1956816"/>
+            <a:ext cx="10972800" cy="603504"/>
           </a:xfrm>
           <a:prstGeom prst="rect">
             <a:avLst/>
@@ -9260,7 +9370,11 @@
               </a:defRPr>
             </a:pPr>
             <a:r>
-              <a:t>파일 생성/열기: mkdir -p ~/agv_ws/src/agv_control/agv_control    &amp;&amp;    nano ~/agv_ws/src/agv_control/agv_control/cmd_test_node.py</a:t>
+              <a:t>파일 생성: mkdir -p ~/agv_ws/src/agv_control/agv_control</a:t>
+            </a:r>
+            <a:br/>
+            <a:r>
+              <a:t>파일 열기: nano ~/agv_ws/src/agv_control/agv_control/cmd_test_node.py</a:t>
             </a:r>
           </a:p>
         </p:txBody>
@@ -9273,8 +9387,8 @@
         </p:nvSpPr>
         <p:spPr>
           <a:xfrm>
-            <a:off x="658368" y="2761488"/>
-            <a:ext cx="10972800" cy="3383280"/>
+            <a:off x="658368" y="2706624"/>
+            <a:ext cx="10972800" cy="3364992"/>
           </a:xfrm>
           <a:prstGeom prst="rect">
             <a:avLst/>
@@ -9317,6 +9431,19 @@
                 <a:latin typeface="DejaVu Sans Mono"/>
               </a:defRPr>
             </a:pPr>
+            <a:br/>
+            <a:r>
+              <a:t>def main():</a:t>
+            </a:r>
+            <a:br/>
+            <a:r>
+              <a:t>    rclpy.init()</a:t>
+            </a:r>
+            <a:br/>
+            <a:r>
+              <a:t>    node = CmdTestNode()</a:t>
+            </a:r>
+            <a:br/>
             <a:r>
               <a:t>    try:</a:t>
             </a:r>
@@ -9359,7 +9486,7 @@
         </p:nvSpPr>
         <p:spPr>
           <a:xfrm>
-            <a:off x="749808" y="6199632"/>
+            <a:off x="749808" y="6181344"/>
             <a:ext cx="10789920" cy="201168"/>
           </a:xfrm>
           <a:prstGeom prst="rect">
@@ -9442,7 +9569,7 @@
               </a:defRPr>
             </a:pPr>
             <a:r>
-              <a:t>파일을 새로 만들고 저장한다 (1/2)</a:t>
+              <a:t>파일을 새로 만들고 저장한다 (1/3)</a:t>
             </a:r>
           </a:p>
         </p:txBody>
@@ -9617,7 +9744,7 @@
               </a:defRPr>
             </a:pPr>
             <a:r>
-              <a:t>현재 단계 11/13    |    현재 폴더 ~/agv_ws    |    현재 터미널</a:t>
+              <a:t>현재 단계 11/14    |    현재 폴더 ~/agv_ws    |    현재 터미널</a:t>
             </a:r>
           </a:p>
         </p:txBody>
@@ -9630,8 +9757,8 @@
         </p:nvSpPr>
         <p:spPr>
           <a:xfrm>
-            <a:off x="658368" y="1682496"/>
-            <a:ext cx="10972800" cy="347472"/>
+            <a:off x="658368" y="1627632"/>
+            <a:ext cx="10972800" cy="256032"/>
           </a:xfrm>
           <a:prstGeom prst="rect">
             <a:avLst/>
@@ -9648,7 +9775,7 @@
               <a:spcAft>
                 <a:spcPts val="0"/>
               </a:spcAft>
-              <a:defRPr sz="1700" b="1">
+              <a:defRPr sz="1500" b="1">
                 <a:solidFill>
                   <a:srgbClr val="122C4E"/>
                 </a:solidFill>
@@ -9669,8 +9796,8 @@
         </p:nvSpPr>
         <p:spPr>
           <a:xfrm>
-            <a:off x="658368" y="2103120"/>
-            <a:ext cx="10972800" cy="493776"/>
+            <a:off x="658368" y="1956816"/>
+            <a:ext cx="10972800" cy="603504"/>
           </a:xfrm>
           <a:prstGeom prst="rect">
             <a:avLst/>
@@ -9714,7 +9841,11 @@
               </a:defRPr>
             </a:pPr>
             <a:r>
-              <a:t>파일 생성/열기: mkdir -p ~/agv_ws/src/agv_control/agv_control    &amp;&amp;    nano ~/agv_ws/src/agv_control/agv_control/velocity_monitor.py</a:t>
+              <a:t>파일 생성: mkdir -p ~/agv_ws/src/agv_control/agv_control</a:t>
+            </a:r>
+            <a:br/>
+            <a:r>
+              <a:t>파일 열기: nano ~/agv_ws/src/agv_control/agv_control/velocity_monitor.py</a:t>
             </a:r>
           </a:p>
         </p:txBody>
@@ -9727,8 +9858,8 @@
         </p:nvSpPr>
         <p:spPr>
           <a:xfrm>
-            <a:off x="658368" y="2761488"/>
-            <a:ext cx="10972800" cy="3383280"/>
+            <a:off x="658368" y="2706624"/>
+            <a:ext cx="10972800" cy="3364992"/>
           </a:xfrm>
           <a:prstGeom prst="rect">
             <a:avLst/>
@@ -9809,11 +9940,6 @@
             <a:r>
               <a:t>        self.get_logger().info('cmd_vel linear.x=%.3f angular.z=%.3f' % (message.linear.x,</a:t>
             </a:r>
-            <a:br/>
-            <a:r>
-              <a:t>             message.angular.z))</a:t>
-            </a:r>
-            <a:br/>
           </a:p>
         </p:txBody>
       </p:sp>
@@ -9825,7 +9951,7 @@
         </p:nvSpPr>
         <p:spPr>
           <a:xfrm>
-            <a:off x="749808" y="6199632"/>
+            <a:off x="749808" y="6181344"/>
             <a:ext cx="10789920" cy="201168"/>
           </a:xfrm>
           <a:prstGeom prst="rect">
@@ -9851,7 +9977,7 @@
               </a:defRPr>
             </a:pPr>
             <a:r>
-              <a:t>파일 전체 1/2 · 이 슬라이드 다음에 같은 파일의 나머지 줄이 이어집니다.</a:t>
+              <a:t>파일 전체 1/3 · 이 슬라이드 다음에 같은 파일의 나머지 줄이 이어집니다.</a:t>
             </a:r>
           </a:p>
         </p:txBody>
@@ -9908,7 +10034,7 @@
               </a:defRPr>
             </a:pPr>
             <a:r>
-              <a:t>파일을 계속 작성하고 저장한다 (2/2)</a:t>
+              <a:t>파일을 계속 작성하고 저장한다 (2/3)</a:t>
             </a:r>
           </a:p>
         </p:txBody>
@@ -10083,7 +10209,7 @@
               </a:defRPr>
             </a:pPr>
             <a:r>
-              <a:t>현재 단계 12/13    |    현재 폴더 ~/agv_ws    |    현재 터미널</a:t>
+              <a:t>현재 단계 12/14    |    현재 폴더 ~/agv_ws    |    현재 터미널</a:t>
             </a:r>
           </a:p>
         </p:txBody>
@@ -10096,8 +10222,8 @@
         </p:nvSpPr>
         <p:spPr>
           <a:xfrm>
-            <a:off x="658368" y="1682496"/>
-            <a:ext cx="10972800" cy="347472"/>
+            <a:off x="658368" y="1627632"/>
+            <a:ext cx="10972800" cy="256032"/>
           </a:xfrm>
           <a:prstGeom prst="rect">
             <a:avLst/>
@@ -10114,7 +10240,7 @@
               <a:spcAft>
                 <a:spcPts val="0"/>
               </a:spcAft>
-              <a:defRPr sz="1700" b="1">
+              <a:defRPr sz="1500" b="1">
                 <a:solidFill>
                   <a:srgbClr val="122C4E"/>
                 </a:solidFill>
@@ -10135,8 +10261,8 @@
         </p:nvSpPr>
         <p:spPr>
           <a:xfrm>
-            <a:off x="658368" y="2103120"/>
-            <a:ext cx="10972800" cy="493776"/>
+            <a:off x="658368" y="1956816"/>
+            <a:ext cx="10972800" cy="603504"/>
           </a:xfrm>
           <a:prstGeom prst="rect">
             <a:avLst/>
@@ -10180,7 +10306,11 @@
               </a:defRPr>
             </a:pPr>
             <a:r>
-              <a:t>파일 생성/열기: mkdir -p ~/agv_ws/src/agv_control/agv_control    &amp;&amp;    nano ~/agv_ws/src/agv_control/agv_control/velocity_monitor.py</a:t>
+              <a:t>파일 생성: mkdir -p ~/agv_ws/src/agv_control/agv_control</a:t>
+            </a:r>
+            <a:br/>
+            <a:r>
+              <a:t>파일 열기: nano ~/agv_ws/src/agv_control/agv_control/velocity_monitor.py</a:t>
             </a:r>
           </a:p>
         </p:txBody>
@@ -10193,8 +10323,8 @@
         </p:nvSpPr>
         <p:spPr>
           <a:xfrm>
-            <a:off x="658368" y="2761488"/>
-            <a:ext cx="10972800" cy="3383280"/>
+            <a:off x="658368" y="2706624"/>
+            <a:ext cx="10972800" cy="3364992"/>
           </a:xfrm>
           <a:prstGeom prst="rect">
             <a:avLst/>
@@ -10238,6 +10368,11 @@
               </a:defRPr>
             </a:pPr>
             <a:r>
+              <a:t>             message.angular.z))</a:t>
+            </a:r>
+            <a:br/>
+            <a:br/>
+            <a:r>
               <a:t>def main():</a:t>
             </a:r>
             <a:br/>
@@ -10275,10 +10410,6 @@
             <a:br/>
             <a:r>
               <a:t>        if rclpy.ok():</a:t>
-            </a:r>
-            <a:br/>
-            <a:r>
-              <a:t>            rclpy.shutdown()</a:t>
             </a:r>
           </a:p>
         </p:txBody>
@@ -10291,7 +10422,7 @@
         </p:nvSpPr>
         <p:spPr>
           <a:xfrm>
-            <a:off x="749808" y="6199632"/>
+            <a:off x="749808" y="6181344"/>
             <a:ext cx="10789920" cy="201168"/>
           </a:xfrm>
           <a:prstGeom prst="rect">
@@ -10317,7 +10448,7 @@
               </a:defRPr>
             </a:pPr>
             <a:r>
-              <a:t>파일 전체 2/2 · 이 슬라이드 다음에 같은 파일의 나머지 줄이 이어집니다.</a:t>
+              <a:t>파일 전체 2/3 · 이 슬라이드 다음에 같은 파일의 나머지 줄이 이어집니다.</a:t>
             </a:r>
           </a:p>
         </p:txBody>
@@ -10374,7 +10505,7 @@
               </a:defRPr>
             </a:pPr>
             <a:r>
-              <a:t>파일을 새로 만들고 저장한다 (1/1)</a:t>
+              <a:t>파일을 계속 작성하고 저장한다 (3/3)</a:t>
             </a:r>
           </a:p>
         </p:txBody>
@@ -10413,7 +10544,7 @@
               </a:defRPr>
             </a:pPr>
             <a:r>
-              <a:t>~/agv_ws/src/agv_control/setup.py</a:t>
+              <a:t>~/agv_ws/src/agv_control/agv_control/velocity_monitor.py</a:t>
             </a:r>
           </a:p>
         </p:txBody>
@@ -10562,8 +10693,8 @@
         </p:nvSpPr>
         <p:spPr>
           <a:xfrm>
-            <a:off x="658368" y="1682496"/>
-            <a:ext cx="10972800" cy="347472"/>
+            <a:off x="658368" y="1627632"/>
+            <a:ext cx="10972800" cy="256032"/>
           </a:xfrm>
           <a:prstGeom prst="rect">
             <a:avLst/>
@@ -10580,7 +10711,7 @@
               <a:spcAft>
                 <a:spcPts val="0"/>
               </a:spcAft>
-              <a:defRPr sz="1700" b="1">
+              <a:defRPr sz="1500" b="1">
                 <a:solidFill>
                   <a:srgbClr val="122C4E"/>
                 </a:solidFill>
@@ -10601,8 +10732,8 @@
         </p:nvSpPr>
         <p:spPr>
           <a:xfrm>
-            <a:off x="658368" y="2103120"/>
-            <a:ext cx="10972800" cy="493776"/>
+            <a:off x="658368" y="1956816"/>
+            <a:ext cx="10972800" cy="603504"/>
           </a:xfrm>
           <a:prstGeom prst="rect">
             <a:avLst/>
@@ -10646,7 +10777,11 @@
               </a:defRPr>
             </a:pPr>
             <a:r>
-              <a:t>파일 생성/열기: mkdir -p ~/agv_ws/src/agv_control    &amp;&amp;    nano ~/agv_ws/src/agv_control/setup.py</a:t>
+              <a:t>파일 생성: mkdir -p ~/agv_ws/src/agv_control/agv_control</a:t>
+            </a:r>
+            <a:br/>
+            <a:r>
+              <a:t>파일 열기: nano ~/agv_ws/src/agv_control/agv_control/velocity_monitor.py</a:t>
             </a:r>
           </a:p>
         </p:txBody>
@@ -10659,8 +10794,8 @@
         </p:nvSpPr>
         <p:spPr>
           <a:xfrm>
-            <a:off x="658368" y="2761488"/>
-            <a:ext cx="10972800" cy="3383280"/>
+            <a:off x="658368" y="2706624"/>
+            <a:ext cx="10972800" cy="3364992"/>
           </a:xfrm>
           <a:prstGeom prst="rect">
             <a:avLst/>
@@ -10704,51 +10839,7 @@
               </a:defRPr>
             </a:pPr>
             <a:r>
-              <a:t>from setuptools import find_packages, setup</a:t>
-            </a:r>
-            <a:br/>
-            <a:r>
-              <a:t>package_name = 'agv_control'</a:t>
-            </a:r>
-            <a:br/>
-            <a:r>
-              <a:t>setup(name=package_name, version='0.1.0', packages=find_packages(exclude=['test']),</a:t>
-            </a:r>
-            <a:br/>
-            <a:r>
-              <a:t>    data_files=[('share/ament_index/resource_index/packages',</a:t>
-            </a:r>
-            <a:br/>
-            <a:r>
-              <a:t>    ['resource/' + package_name]), ('share/' + package_name, ['package.xml']),</a:t>
-            </a:r>
-            <a:br/>
-            <a:r>
-              <a:t>    ('share/' + package_name + '/config', ['config/controllers.yaml'])],</a:t>
-            </a:r>
-            <a:br/>
-            <a:r>
-              <a:t>    install_requires=['setuptools'], zip_safe=True, maintainer='AGV student',</a:t>
-            </a:r>
-            <a:br/>
-            <a:r>
-              <a:t>    maintainer_email='student@example.com', license='Apache-2.0',</a:t>
-            </a:r>
-            <a:br/>
-            <a:r>
-              <a:t>    entry_points={'console_scripts': ['counter_publisher = agv_control.counter_publisher:main',</a:t>
-            </a:r>
-            <a:br/>
-            <a:r>
-              <a:t>     'counter_monitor = agv_control.counter_monitor:main', 'cmd_test_node = agv_control.cmd_test_node:main',</a:t>
-            </a:r>
-            <a:br/>
-            <a:r>
-              <a:t>     'velocity_monitor = agv_control.velocity_monitor:main', 'safety_controller = agv_control.safety_controller:main',</a:t>
-            </a:r>
-            <a:br/>
-            <a:r>
-              <a:t>     'pid_controller = agv_control.pid_controller:main']})</a:t>
+              <a:t>            rclpy.shutdown()</a:t>
             </a:r>
           </a:p>
         </p:txBody>
@@ -10761,7 +10852,7 @@
         </p:nvSpPr>
         <p:spPr>
           <a:xfrm>
-            <a:off x="749808" y="6199632"/>
+            <a:off x="749808" y="6181344"/>
             <a:ext cx="10789920" cy="201168"/>
           </a:xfrm>
           <a:prstGeom prst="rect">
@@ -10787,7 +10878,7 @@
               </a:defRPr>
             </a:pPr>
             <a:r>
-              <a:t>파일 전체 1/1 · 이 슬라이드 다음에 같은 파일의 나머지 줄이 이어집니다.</a:t>
+              <a:t>파일 전체 3/3 · 이 슬라이드 다음에 같은 파일의 나머지 줄이 이어집니다.</a:t>
             </a:r>
           </a:p>
         </p:txBody>
@@ -11305,7 +11396,7 @@
               </a:defRPr>
             </a:pPr>
             <a:r>
-              <a:t>build → source → run 순서로 실행한다</a:t>
+              <a:t>파일을 새로 만들고 저장한다 (1/1)</a:t>
             </a:r>
           </a:p>
         </p:txBody>
@@ -11344,7 +11435,7 @@
               </a:defRPr>
             </a:pPr>
             <a:r>
-              <a:t>새 파일 또는 수정 파일은 build와 source 뒤에만 실행 이름·설정에 반영됩니다.</a:t>
+              <a:t>~/agv_ws/src/agv_control/setup.py</a:t>
             </a:r>
           </a:p>
         </p:txBody>
@@ -11480,23 +11571,124 @@
               </a:defRPr>
             </a:pPr>
             <a:r>
-              <a:t>현재 단계 실행    |    현재 폴더 ~/agv_ws    |    현재 터미널</a:t>
-            </a:r>
-          </a:p>
-        </p:txBody>
-      </p:sp>
-      <p:sp>
-        <p:nvSpPr>
-          <p:cNvPr id="7" name="Rounded Rectangle 6"/>
+              <a:t>현재 단계 14/15    |    현재 폴더 ~/agv_ws    |    현재 터미널</a:t>
+            </a:r>
+          </a:p>
+        </p:txBody>
+      </p:sp>
+      <p:sp>
+        <p:nvSpPr>
+          <p:cNvPr id="7" name="TextBox 6"/>
+          <p:cNvSpPr txBox="1"/>
+          <p:nvPr/>
+        </p:nvSpPr>
+        <p:spPr>
+          <a:xfrm>
+            <a:off x="658368" y="1627632"/>
+            <a:ext cx="10972800" cy="256032"/>
+          </a:xfrm>
+          <a:prstGeom prst="rect">
+            <a:avLst/>
+          </a:prstGeom>
+          <a:noFill/>
+        </p:spPr>
+        <p:txBody>
+          <a:bodyPr wrap="square" lIns="73152" rIns="73152" tIns="36576" bIns="36576">
+            <a:spAutoFit/>
+          </a:bodyPr>
+          <a:lstStyle/>
+          <a:p>
+            <a:pPr algn="l">
+              <a:spcAft>
+                <a:spcPts val="0"/>
+              </a:spcAft>
+              <a:defRPr sz="1500" b="1">
+                <a:solidFill>
+                  <a:srgbClr val="122C4E"/>
+                </a:solidFill>
+                <a:latin typeface="Noto Sans CJK KR"/>
+              </a:defRPr>
+            </a:pPr>
+            <a:r>
+              <a:t>이번 단계: 파일의 전체 내용을 중간 생략 없이 작성합니다. 아래 줄 범위를 끝까지 입력하세요.</a:t>
+            </a:r>
+          </a:p>
+        </p:txBody>
+      </p:sp>
+      <p:sp>
+        <p:nvSpPr>
+          <p:cNvPr id="8" name="Rectangle 7"/>
           <p:cNvSpPr/>
           <p:nvPr/>
         </p:nvSpPr>
         <p:spPr>
           <a:xfrm>
-            <a:off x="658368" y="1700784"/>
-            <a:ext cx="10972800" cy="3182112"/>
-          </a:xfrm>
-          <a:prstGeom prst="roundRect">
+            <a:off x="658368" y="1956816"/>
+            <a:ext cx="10972800" cy="603504"/>
+          </a:xfrm>
+          <a:prstGeom prst="rect">
+            <a:avLst/>
+          </a:prstGeom>
+          <a:solidFill>
+            <a:srgbClr val="F4F7FB"/>
+          </a:solidFill>
+          <a:ln>
+            <a:solidFill>
+              <a:srgbClr val="F4F7FB"/>
+            </a:solidFill>
+          </a:ln>
+        </p:spPr>
+        <p:style>
+          <a:lnRef idx="1">
+            <a:schemeClr val="accent1"/>
+          </a:lnRef>
+          <a:fillRef idx="3">
+            <a:schemeClr val="accent1"/>
+          </a:fillRef>
+          <a:effectRef idx="2">
+            <a:schemeClr val="accent1"/>
+          </a:effectRef>
+          <a:fontRef idx="minor">
+            <a:schemeClr val="lt1"/>
+          </a:fontRef>
+        </p:style>
+        <p:txBody>
+          <a:bodyPr rtlCol="0" anchor="ctr" wrap="square" lIns="73152" rIns="73152" tIns="36576" bIns="36576"/>
+          <a:lstStyle/>
+          <a:p>
+            <a:pPr algn="l">
+              <a:spcAft>
+                <a:spcPts val="0"/>
+              </a:spcAft>
+              <a:defRPr sz="1400" b="0">
+                <a:solidFill>
+                  <a:srgbClr val="122C4E"/>
+                </a:solidFill>
+                <a:latin typeface="DejaVu Sans Mono"/>
+              </a:defRPr>
+            </a:pPr>
+            <a:r>
+              <a:t>파일 생성: mkdir -p ~/agv_ws/src/agv_control</a:t>
+            </a:r>
+            <a:br/>
+            <a:r>
+              <a:t>파일 열기: nano ~/agv_ws/src/agv_control/setup.py</a:t>
+            </a:r>
+          </a:p>
+        </p:txBody>
+      </p:sp>
+      <p:sp>
+        <p:nvSpPr>
+          <p:cNvPr id="9" name="Rectangle 8"/>
+          <p:cNvSpPr/>
+          <p:nvPr/>
+        </p:nvSpPr>
+        <p:spPr>
+          <a:xfrm>
+            <a:off x="658368" y="2706624"/>
+            <a:ext cx="10972800" cy="3364992"/>
+          </a:xfrm>
+          <a:prstGeom prst="rect">
             <a:avLst/>
           </a:prstGeom>
           <a:solidFill>
@@ -11523,14 +11715,14 @@
           </a:fontRef>
         </p:style>
         <p:txBody>
-          <a:bodyPr rtlCol="0" anchor="ctr" wrap="square" lIns="73152" rIns="73152" tIns="36576" bIns="36576"/>
+          <a:bodyPr rtlCol="0" anchor="ctr" wrap="square" lIns="164592" rIns="164592" tIns="109728" bIns="36576"/>
           <a:lstStyle/>
           <a:p>
             <a:pPr algn="l">
               <a:spcAft>
                 <a:spcPts val="0"/>
               </a:spcAft>
-              <a:defRPr sz="1600" b="0">
+              <a:defRPr sz="1400" b="0">
                 <a:solidFill>
                   <a:srgbClr val="FFFFFF"/>
                 </a:solidFill>
@@ -11538,29 +11730,65 @@
               </a:defRPr>
             </a:pPr>
             <a:r>
-              <a:t>cd ~/agv_ws &amp;&amp; source install/setup.bash</a:t>
+              <a:t>from setuptools import find_packages, setup</a:t>
             </a:r>
             <a:br/>
             <a:r>
-              <a:t>ros2 run agv_control counter_publisher</a:t>
+              <a:t>package_name = 'agv_control'</a:t>
             </a:r>
             <a:br/>
             <a:r>
-              <a:t># 새 터미널: ros2 run agv_control counter_monitor</a:t>
-            </a:r>
-          </a:p>
-        </p:txBody>
-      </p:sp>
-      <p:sp>
-        <p:nvSpPr>
-          <p:cNvPr id="8" name="TextBox 7"/>
+              <a:t>setup(name=package_name, version='0.1.0', packages=find_packages(exclude=['test']),</a:t>
+            </a:r>
+            <a:br/>
+            <a:r>
+              <a:t>    data_files=[('share/ament_index/resource_index/packages',</a:t>
+            </a:r>
+            <a:br/>
+            <a:r>
+              <a:t>    ['resource/' + package_name]), ('share/' + package_name, ['package.xml']),</a:t>
+            </a:r>
+            <a:br/>
+            <a:r>
+              <a:t>    ('share/' + package_name + '/config', ['config/controllers.yaml'])],</a:t>
+            </a:r>
+            <a:br/>
+            <a:r>
+              <a:t>    install_requires=['setuptools'], zip_safe=True, maintainer='AGV student',</a:t>
+            </a:r>
+            <a:br/>
+            <a:r>
+              <a:t>    maintainer_email='student@example.com', license='Apache-2.0',</a:t>
+            </a:r>
+            <a:br/>
+            <a:r>
+              <a:t>    entry_points={'console_scripts': ['counter_publisher = agv_control.counter_publisher:main',</a:t>
+            </a:r>
+            <a:br/>
+            <a:r>
+              <a:t>     'counter_monitor = agv_control.counter_monitor:main', 'cmd_test_node = agv_control.cmd_test_node:main',</a:t>
+            </a:r>
+            <a:br/>
+            <a:r>
+              <a:t>     'velocity_monitor = agv_control.velocity_monitor:main', 'safety_controller = agv_control.safety_controller:main',</a:t>
+            </a:r>
+            <a:br/>
+            <a:r>
+              <a:t>     'pid_controller = agv_control.pid_controller:main']})</a:t>
+            </a:r>
+          </a:p>
+        </p:txBody>
+      </p:sp>
+      <p:sp>
+        <p:nvSpPr>
+          <p:cNvPr id="10" name="TextBox 9"/>
           <p:cNvSpPr txBox="1"/>
           <p:nvPr/>
         </p:nvSpPr>
         <p:spPr>
           <a:xfrm>
-            <a:off x="786384" y="5239512"/>
-            <a:ext cx="1261872" cy="237744"/>
+            <a:off x="749808" y="6181344"/>
+            <a:ext cx="10789920" cy="201168"/>
           </a:xfrm>
           <a:prstGeom prst="rect">
             <a:avLst/>
@@ -11577,54 +11805,15 @@
               <a:spcAft>
                 <a:spcPts val="0"/>
               </a:spcAft>
-              <a:defRPr sz="1800" b="1">
-                <a:solidFill>
-                  <a:srgbClr val="2A8B5A"/>
-                </a:solidFill>
-                <a:latin typeface="Noto Sans CJK KR"/>
-              </a:defRPr>
-            </a:pPr>
-            <a:r>
-              <a:t>확인 기준</a:t>
-            </a:r>
-          </a:p>
-        </p:txBody>
-      </p:sp>
-      <p:sp>
-        <p:nvSpPr>
-          <p:cNvPr id="9" name="TextBox 8"/>
-          <p:cNvSpPr txBox="1"/>
-          <p:nvPr/>
-        </p:nvSpPr>
-        <p:spPr>
-          <a:xfrm>
-            <a:off x="786384" y="5532120"/>
-            <a:ext cx="10469880" cy="420624"/>
-          </a:xfrm>
-          <a:prstGeom prst="rect">
-            <a:avLst/>
-          </a:prstGeom>
-          <a:noFill/>
-        </p:spPr>
-        <p:txBody>
-          <a:bodyPr wrap="square" lIns="73152" rIns="73152" tIns="36576" bIns="36576">
-            <a:spAutoFit/>
-          </a:bodyPr>
-          <a:lstStyle/>
-          <a:p>
-            <a:pPr algn="l">
-              <a:spcAft>
-                <a:spcPts val="0"/>
-              </a:spcAft>
-              <a:defRPr sz="1800" b="0">
-                <a:solidFill>
-                  <a:srgbClr val="122C4E"/>
-                </a:solidFill>
-                <a:latin typeface="Noto Sans CJK KR"/>
-              </a:defRPr>
-            </a:pPr>
-            <a:r>
-              <a:t>/counter와 /cmd_vel의 값·message type·연결 수를 terminal에서 확인한다.</a:t>
+              <a:defRPr sz="1000" b="0">
+                <a:solidFill>
+                  <a:srgbClr val="5C6672"/>
+                </a:solidFill>
+                <a:latin typeface="Noto Sans CJK KR"/>
+              </a:defRPr>
+            </a:pPr>
+            <a:r>
+              <a:t>파일 전체 1/1 · 이 슬라이드 다음에 같은 파일의 나머지 줄이 이어집니다.</a:t>
             </a:r>
           </a:p>
         </p:txBody>
@@ -11681,7 +11870,7 @@
               </a:defRPr>
             </a:pPr>
             <a:r>
-              <a:t>정상 결과: 실제 환경에서 확인한 출력</a:t>
+              <a:t>build → source → run 순서로 실행한다</a:t>
             </a:r>
           </a:p>
         </p:txBody>
@@ -11720,7 +11909,7 @@
               </a:defRPr>
             </a:pPr>
             <a:r>
-              <a:t>실제 ROS 2 환경의 파일·패키지·구성 검증 로그</a:t>
+              <a:t>새 파일 또는 수정 파일은 build와 source 뒤에만 실행 이름·설정에 반영됩니다.</a:t>
             </a:r>
           </a:p>
         </p:txBody>
@@ -11803,40 +11992,140 @@
           </a:p>
         </p:txBody>
       </p:sp>
-      <p:pic>
-        <p:nvPicPr>
-          <p:cNvPr id="6" name="Picture 5" descr="validation_terminal.png"/>
-          <p:cNvPicPr>
-            <a:picLocks noChangeAspect="1"/>
-          </p:cNvPicPr>
-          <p:nvPr/>
-        </p:nvPicPr>
-        <p:blipFill>
-          <a:blip r:embed="rId2"/>
-          <a:stretch>
-            <a:fillRect/>
-          </a:stretch>
-        </p:blipFill>
-        <p:spPr>
-          <a:xfrm>
-            <a:off x="790956" y="1453970"/>
-            <a:ext cx="10607040" cy="4599282"/>
-          </a:xfrm>
-          <a:prstGeom prst="rect">
-            <a:avLst/>
-          </a:prstGeom>
-        </p:spPr>
-      </p:pic>
-      <p:sp>
-        <p:nvSpPr>
-          <p:cNvPr id="7" name="TextBox 6"/>
+      <p:sp>
+        <p:nvSpPr>
+          <p:cNvPr id="6" name="Rectangle 5"/>
+          <p:cNvSpPr/>
+          <p:nvPr/>
+        </p:nvSpPr>
+        <p:spPr>
+          <a:xfrm>
+            <a:off x="566928" y="1188720"/>
+            <a:ext cx="11064240" cy="347472"/>
+          </a:xfrm>
+          <a:prstGeom prst="rect">
+            <a:avLst/>
+          </a:prstGeom>
+          <a:solidFill>
+            <a:srgbClr val="F4F7FB"/>
+          </a:solidFill>
+          <a:ln>
+            <a:solidFill>
+              <a:srgbClr val="F4F7FB"/>
+            </a:solidFill>
+          </a:ln>
+        </p:spPr>
+        <p:style>
+          <a:lnRef idx="1">
+            <a:schemeClr val="accent1"/>
+          </a:lnRef>
+          <a:fillRef idx="3">
+            <a:schemeClr val="accent1"/>
+          </a:fillRef>
+          <a:effectRef idx="2">
+            <a:schemeClr val="accent1"/>
+          </a:effectRef>
+          <a:fontRef idx="minor">
+            <a:schemeClr val="lt1"/>
+          </a:fontRef>
+        </p:style>
+        <p:txBody>
+          <a:bodyPr rtlCol="0" anchor="ctr" wrap="square" lIns="73152" rIns="73152" tIns="36576" bIns="36576"/>
+          <a:lstStyle/>
+          <a:p>
+            <a:pPr algn="l">
+              <a:spcAft>
+                <a:spcPts val="0"/>
+              </a:spcAft>
+              <a:defRPr sz="1300" b="1">
+                <a:solidFill>
+                  <a:srgbClr val="122C4E"/>
+                </a:solidFill>
+                <a:latin typeface="Noto Sans CJK KR"/>
+              </a:defRPr>
+            </a:pPr>
+            <a:r>
+              <a:t>현재 단계 실행    |    현재 폴더 ~/agv_ws    |    현재 터미널</a:t>
+            </a:r>
+          </a:p>
+        </p:txBody>
+      </p:sp>
+      <p:sp>
+        <p:nvSpPr>
+          <p:cNvPr id="7" name="Rounded Rectangle 6"/>
+          <p:cNvSpPr/>
+          <p:nvPr/>
+        </p:nvSpPr>
+        <p:spPr>
+          <a:xfrm>
+            <a:off x="658368" y="1700784"/>
+            <a:ext cx="10972800" cy="3182112"/>
+          </a:xfrm>
+          <a:prstGeom prst="roundRect">
+            <a:avLst/>
+          </a:prstGeom>
+          <a:solidFill>
+            <a:srgbClr val="1D232D"/>
+          </a:solidFill>
+          <a:ln>
+            <a:solidFill>
+              <a:srgbClr val="1D232D"/>
+            </a:solidFill>
+          </a:ln>
+        </p:spPr>
+        <p:style>
+          <a:lnRef idx="1">
+            <a:schemeClr val="accent1"/>
+          </a:lnRef>
+          <a:fillRef idx="3">
+            <a:schemeClr val="accent1"/>
+          </a:fillRef>
+          <a:effectRef idx="2">
+            <a:schemeClr val="accent1"/>
+          </a:effectRef>
+          <a:fontRef idx="minor">
+            <a:schemeClr val="lt1"/>
+          </a:fontRef>
+        </p:style>
+        <p:txBody>
+          <a:bodyPr rtlCol="0" anchor="ctr" wrap="square" lIns="73152" rIns="73152" tIns="36576" bIns="36576"/>
+          <a:lstStyle/>
+          <a:p>
+            <a:pPr algn="l">
+              <a:spcAft>
+                <a:spcPts val="0"/>
+              </a:spcAft>
+              <a:defRPr sz="1600" b="0">
+                <a:solidFill>
+                  <a:srgbClr val="FFFFFF"/>
+                </a:solidFill>
+                <a:latin typeface="DejaVu Sans Mono"/>
+              </a:defRPr>
+            </a:pPr>
+            <a:r>
+              <a:t>cd ~/agv_ws &amp;&amp; source install/setup.bash</a:t>
+            </a:r>
+            <a:br/>
+            <a:r>
+              <a:t>ros2 run agv_control counter_publisher</a:t>
+            </a:r>
+            <a:br/>
+            <a:r>
+              <a:t># 새 터미널: ros2 run agv_control counter_monitor</a:t>
+            </a:r>
+          </a:p>
+        </p:txBody>
+      </p:sp>
+      <p:sp>
+        <p:nvSpPr>
+          <p:cNvPr id="8" name="TextBox 7"/>
           <p:cNvSpPr txBox="1"/>
           <p:nvPr/>
         </p:nvSpPr>
         <p:spPr>
           <a:xfrm>
-            <a:off x="777240" y="6217920"/>
-            <a:ext cx="10607040" cy="182880"/>
+            <a:off x="786384" y="5239512"/>
+            <a:ext cx="1261872" cy="237744"/>
           </a:xfrm>
           <a:prstGeom prst="rect">
             <a:avLst/>
@@ -11849,11 +12138,11 @@
           </a:bodyPr>
           <a:lstStyle/>
           <a:p>
-            <a:pPr algn="ctr">
-              <a:spcAft>
-                <a:spcPts val="0"/>
-              </a:spcAft>
-              <a:defRPr sz="1100" b="1">
+            <a:pPr algn="l">
+              <a:spcAft>
+                <a:spcPts val="0"/>
+              </a:spcAft>
+              <a:defRPr sz="1800" b="1">
                 <a:solidFill>
                   <a:srgbClr val="2A8B5A"/>
                 </a:solidFill>
@@ -11861,7 +12150,46 @@
               </a:defRPr>
             </a:pPr>
             <a:r>
-              <a:t>① 명령/설정  ② 정상 출력 또는 화면  ③ 다음 검증 명령으로 재확인</a:t>
+              <a:t>확인 기준</a:t>
+            </a:r>
+          </a:p>
+        </p:txBody>
+      </p:sp>
+      <p:sp>
+        <p:nvSpPr>
+          <p:cNvPr id="9" name="TextBox 8"/>
+          <p:cNvSpPr txBox="1"/>
+          <p:nvPr/>
+        </p:nvSpPr>
+        <p:spPr>
+          <a:xfrm>
+            <a:off x="786384" y="5532120"/>
+            <a:ext cx="10469880" cy="420624"/>
+          </a:xfrm>
+          <a:prstGeom prst="rect">
+            <a:avLst/>
+          </a:prstGeom>
+          <a:noFill/>
+        </p:spPr>
+        <p:txBody>
+          <a:bodyPr wrap="square" lIns="73152" rIns="73152" tIns="36576" bIns="36576">
+            <a:spAutoFit/>
+          </a:bodyPr>
+          <a:lstStyle/>
+          <a:p>
+            <a:pPr algn="l">
+              <a:spcAft>
+                <a:spcPts val="0"/>
+              </a:spcAft>
+              <a:defRPr sz="1800" b="0">
+                <a:solidFill>
+                  <a:srgbClr val="122C4E"/>
+                </a:solidFill>
+                <a:latin typeface="Noto Sans CJK KR"/>
+              </a:defRPr>
+            </a:pPr>
+            <a:r>
+              <a:t>/counter와 /cmd_vel의 값·message type·연결 수를 terminal에서 확인한다.</a:t>
             </a:r>
           </a:p>
         </p:txBody>
@@ -11918,7 +12246,7 @@
               </a:defRPr>
             </a:pPr>
             <a:r>
-              <a:t>객관적 검증 명령으로 완료를 확인한다</a:t>
+              <a:t>정상 결과: 실제 환경에서 확인한 출력</a:t>
             </a:r>
           </a:p>
         </p:txBody>
@@ -11957,7 +12285,7 @@
               </a:defRPr>
             </a:pPr>
             <a:r>
-              <a:t>화면만 보지 말고 topic·frame·파일·parameter를 다시 확인합니다.</a:t>
+              <a:t>실제 ROS 2 환경의 파일·패키지·구성 검증 로그</a:t>
             </a:r>
           </a:p>
         </p:txBody>
@@ -12040,210 +12368,40 @@
           </a:p>
         </p:txBody>
       </p:sp>
-      <p:sp>
-        <p:nvSpPr>
-          <p:cNvPr id="6" name="Rectangle 5"/>
-          <p:cNvSpPr/>
-          <p:nvPr/>
-        </p:nvSpPr>
-        <p:spPr>
-          <a:xfrm>
-            <a:off x="566928" y="1188720"/>
-            <a:ext cx="11064240" cy="347472"/>
-          </a:xfrm>
-          <a:prstGeom prst="rect">
-            <a:avLst/>
-          </a:prstGeom>
-          <a:solidFill>
-            <a:srgbClr val="F4F7FB"/>
-          </a:solidFill>
-          <a:ln>
-            <a:solidFill>
-              <a:srgbClr val="F4F7FB"/>
-            </a:solidFill>
-          </a:ln>
-        </p:spPr>
-        <p:style>
-          <a:lnRef idx="1">
-            <a:schemeClr val="accent1"/>
-          </a:lnRef>
-          <a:fillRef idx="3">
-            <a:schemeClr val="accent1"/>
-          </a:fillRef>
-          <a:effectRef idx="2">
-            <a:schemeClr val="accent1"/>
-          </a:effectRef>
-          <a:fontRef idx="minor">
-            <a:schemeClr val="lt1"/>
-          </a:fontRef>
-        </p:style>
-        <p:txBody>
-          <a:bodyPr rtlCol="0" anchor="ctr" wrap="square" lIns="73152" rIns="73152" tIns="36576" bIns="36576"/>
-          <a:lstStyle/>
-          <a:p>
-            <a:pPr algn="l">
-              <a:spcAft>
-                <a:spcPts val="0"/>
-              </a:spcAft>
-              <a:defRPr sz="1300" b="1">
-                <a:solidFill>
-                  <a:srgbClr val="122C4E"/>
-                </a:solidFill>
-                <a:latin typeface="Noto Sans CJK KR"/>
-              </a:defRPr>
-            </a:pPr>
-            <a:r>
-              <a:t>현재 단계 검증    |    현재 폴더 ~/agv_ws    |    현재 터미널</a:t>
-            </a:r>
-          </a:p>
-        </p:txBody>
-      </p:sp>
-      <p:sp>
-        <p:nvSpPr>
-          <p:cNvPr id="7" name="Rounded Rectangle 6"/>
-          <p:cNvSpPr/>
-          <p:nvPr/>
-        </p:nvSpPr>
-        <p:spPr>
-          <a:xfrm>
-            <a:off x="658368" y="1755648"/>
-            <a:ext cx="10972800" cy="2148840"/>
-          </a:xfrm>
-          <a:prstGeom prst="roundRect">
-            <a:avLst/>
-          </a:prstGeom>
-          <a:solidFill>
-            <a:srgbClr val="1D232D"/>
-          </a:solidFill>
-          <a:ln>
-            <a:solidFill>
-              <a:srgbClr val="1D232D"/>
-            </a:solidFill>
-          </a:ln>
-        </p:spPr>
-        <p:style>
-          <a:lnRef idx="1">
-            <a:schemeClr val="accent1"/>
-          </a:lnRef>
-          <a:fillRef idx="3">
-            <a:schemeClr val="accent1"/>
-          </a:fillRef>
-          <a:effectRef idx="2">
-            <a:schemeClr val="accent1"/>
-          </a:effectRef>
-          <a:fontRef idx="minor">
-            <a:schemeClr val="lt1"/>
-          </a:fontRef>
-        </p:style>
-        <p:txBody>
-          <a:bodyPr rtlCol="0" anchor="ctr" wrap="square" lIns="73152" rIns="73152" tIns="36576" bIns="36576"/>
-          <a:lstStyle/>
-          <a:p>
-            <a:pPr algn="l">
-              <a:spcAft>
-                <a:spcPts val="0"/>
-              </a:spcAft>
-              <a:defRPr sz="1600" b="0">
-                <a:solidFill>
-                  <a:srgbClr val="FFFFFF"/>
-                </a:solidFill>
-                <a:latin typeface="DejaVu Sans Mono"/>
-              </a:defRPr>
-            </a:pPr>
-            <a:r>
-              <a:t>ros2 topic info /counter</a:t>
-            </a:r>
-            <a:br/>
-            <a:r>
-              <a:t>ros2 topic echo /counter --once</a:t>
-            </a:r>
-            <a:br/>
-            <a:r>
-              <a:t>ros2 interface show geometry_msgs/msg/Twist</a:t>
-            </a:r>
-          </a:p>
-        </p:txBody>
-      </p:sp>
-      <p:sp>
-        <p:nvSpPr>
-          <p:cNvPr id="8" name="Rounded Rectangle 7"/>
-          <p:cNvSpPr/>
-          <p:nvPr/>
-        </p:nvSpPr>
-        <p:spPr>
-          <a:xfrm>
-            <a:off x="658368" y="4206240"/>
-            <a:ext cx="10972800" cy="1554480"/>
-          </a:xfrm>
-          <a:prstGeom prst="roundRect">
-            <a:avLst/>
-          </a:prstGeom>
-          <a:solidFill>
-            <a:srgbClr val="F4F7FB"/>
-          </a:solidFill>
-          <a:ln>
-            <a:solidFill>
-              <a:srgbClr val="D1DFD5"/>
-            </a:solidFill>
-          </a:ln>
-        </p:spPr>
-        <p:style>
-          <a:lnRef idx="1">
-            <a:schemeClr val="accent1"/>
-          </a:lnRef>
-          <a:fillRef idx="3">
-            <a:schemeClr val="accent1"/>
-          </a:fillRef>
-          <a:effectRef idx="2">
-            <a:schemeClr val="accent1"/>
-          </a:effectRef>
-          <a:fontRef idx="minor">
-            <a:schemeClr val="lt1"/>
-          </a:fontRef>
-        </p:style>
-        <p:txBody>
-          <a:bodyPr rtlCol="0" anchor="ctr" wrap="square" lIns="73152" rIns="73152" tIns="36576" bIns="36576"/>
-          <a:lstStyle/>
-          <a:p>
-            <a:pPr algn="l">
-              <a:spcAft>
-                <a:spcPts val="0"/>
-              </a:spcAft>
-              <a:defRPr sz="1800" b="1">
-                <a:solidFill>
-                  <a:srgbClr val="2A8B5A"/>
-                </a:solidFill>
-                <a:latin typeface="Noto Sans CJK KR"/>
-              </a:defRPr>
-            </a:pPr>
-            <a:r>
-              <a:t>완료 체크</a:t>
-            </a:r>
-            <a:br/>
-            <a:r>
-              <a:t>□ 명령이 오류 없이 실행된다.</a:t>
-            </a:r>
-            <a:br/>
-            <a:r>
-              <a:t>□ 기대한 파일·topic·frame·parameter 이름이 보인다.</a:t>
-            </a:r>
-            <a:br/>
-            <a:r>
-              <a:t>□ 값의 단위와 방향을 한 문장으로 설명할 수 있다.</a:t>
-            </a:r>
-          </a:p>
-        </p:txBody>
-      </p:sp>
-      <p:sp>
-        <p:nvSpPr>
-          <p:cNvPr id="9" name="TextBox 8"/>
+      <p:pic>
+        <p:nvPicPr>
+          <p:cNvPr id="6" name="Picture 5" descr="validation_terminal.png"/>
+          <p:cNvPicPr>
+            <a:picLocks noChangeAspect="1"/>
+          </p:cNvPicPr>
+          <p:nvPr/>
+        </p:nvPicPr>
+        <p:blipFill>
+          <a:blip r:embed="rId2"/>
+          <a:stretch>
+            <a:fillRect/>
+          </a:stretch>
+        </p:blipFill>
+        <p:spPr>
+          <a:xfrm>
+            <a:off x="790956" y="1453970"/>
+            <a:ext cx="10607040" cy="4599282"/>
+          </a:xfrm>
+          <a:prstGeom prst="rect">
+            <a:avLst/>
+          </a:prstGeom>
+        </p:spPr>
+      </p:pic>
+      <p:sp>
+        <p:nvSpPr>
+          <p:cNvPr id="7" name="TextBox 6"/>
           <p:cNvSpPr txBox="1"/>
           <p:nvPr/>
         </p:nvSpPr>
         <p:spPr>
           <a:xfrm>
-            <a:off x="731520" y="5989320"/>
-            <a:ext cx="10789920" cy="237744"/>
+            <a:off x="777240" y="6217920"/>
+            <a:ext cx="10607040" cy="182880"/>
           </a:xfrm>
           <a:prstGeom prst="rect">
             <a:avLst/>
@@ -12256,19 +12414,19 @@
           </a:bodyPr>
           <a:lstStyle/>
           <a:p>
-            <a:pPr algn="l">
-              <a:spcAft>
-                <a:spcPts val="0"/>
-              </a:spcAft>
-              <a:defRPr sz="1500" b="1">
-                <a:solidFill>
-                  <a:srgbClr val="122C4E"/>
-                </a:solidFill>
-                <a:latin typeface="Noto Sans CJK KR"/>
-              </a:defRPr>
-            </a:pPr>
-            <a:r>
-              <a:t>완료 조건: /counter와 /cmd_vel의 값·message type·연결 수를 terminal에서 확인한다.</a:t>
+            <a:pPr algn="ctr">
+              <a:spcAft>
+                <a:spcPts val="0"/>
+              </a:spcAft>
+              <a:defRPr sz="1100" b="1">
+                <a:solidFill>
+                  <a:srgbClr val="2A8B5A"/>
+                </a:solidFill>
+                <a:latin typeface="Noto Sans CJK KR"/>
+              </a:defRPr>
+            </a:pPr>
+            <a:r>
+              <a:t>① 명령/설정  ② 정상 출력 또는 화면  ③ 다음 검증 명령으로 재확인</a:t>
             </a:r>
           </a:p>
         </p:txBody>
@@ -12325,7 +12483,7 @@
               </a:defRPr>
             </a:pPr>
             <a:r>
-              <a:t>막히면: 증상 → 우선 확인 → 재검증</a:t>
+              <a:t>객관적 검증 명령으로 완료를 확인한다</a:t>
             </a:r>
           </a:p>
         </p:txBody>
@@ -12364,7 +12522,7 @@
               </a:defRPr>
             </a:pPr>
             <a:r>
-              <a:t>오류 메시지를 숨기지 않고 같은 순서로 점검합니다.</a:t>
+              <a:t>화면만 보지 말고 topic·frame·파일·parameter를 다시 확인합니다.</a:t>
             </a:r>
           </a:p>
         </p:txBody>
@@ -12500,7 +12658,7 @@
               </a:defRPr>
             </a:pPr>
             <a:r>
-              <a:t>현재 단계 오류 대응    |    현재 폴더 ~/agv_ws    |    현재 터미널</a:t>
+              <a:t>현재 단계 검증    |    현재 폴더 ~/agv_ws    |    현재 터미널</a:t>
             </a:r>
           </a:p>
         </p:txBody>
@@ -12513,18 +12671,18 @@
         </p:nvSpPr>
         <p:spPr>
           <a:xfrm>
-            <a:off x="694944" y="1755648"/>
-            <a:ext cx="10972800" cy="1115568"/>
+            <a:off x="658368" y="1755648"/>
+            <a:ext cx="10972800" cy="2148840"/>
           </a:xfrm>
           <a:prstGeom prst="roundRect">
             <a:avLst/>
           </a:prstGeom>
           <a:solidFill>
-            <a:srgbClr val="FFF7F4"/>
+            <a:srgbClr val="1D232D"/>
           </a:solidFill>
           <a:ln>
             <a:solidFill>
-              <a:srgbClr val="EDBEB4"/>
+              <a:srgbClr val="1D232D"/>
             </a:solidFill>
           </a:ln>
         </p:spPr>
@@ -12543,115 +12701,54 @@
           </a:fontRef>
         </p:style>
         <p:txBody>
-          <a:bodyPr rtlCol="0" anchor="ctr"/>
-          <a:lstStyle/>
-          <a:p>
-            <a:pPr algn="ctr"/>
-          </a:p>
-        </p:txBody>
-      </p:sp>
-      <p:sp>
-        <p:nvSpPr>
-          <p:cNvPr id="8" name="TextBox 7"/>
-          <p:cNvSpPr txBox="1"/>
-          <p:nvPr/>
-        </p:nvSpPr>
-        <p:spPr>
-          <a:xfrm>
-            <a:off x="896112" y="1901952"/>
-            <a:ext cx="2926080" cy="274320"/>
-          </a:xfrm>
-          <a:prstGeom prst="rect">
-            <a:avLst/>
-          </a:prstGeom>
-          <a:noFill/>
-        </p:spPr>
-        <p:txBody>
-          <a:bodyPr wrap="square" lIns="73152" rIns="73152" tIns="36576" bIns="36576">
-            <a:spAutoFit/>
-          </a:bodyPr>
+          <a:bodyPr rtlCol="0" anchor="ctr" wrap="square" lIns="73152" rIns="73152" tIns="36576" bIns="36576"/>
           <a:lstStyle/>
           <a:p>
             <a:pPr algn="l">
               <a:spcAft>
                 <a:spcPts val="0"/>
               </a:spcAft>
-              <a:defRPr sz="1800" b="1">
-                <a:solidFill>
-                  <a:srgbClr val="BE3B3B"/>
-                </a:solidFill>
-                <a:latin typeface="Noto Sans CJK KR"/>
-              </a:defRPr>
-            </a:pPr>
-            <a:r>
-              <a:t>증상 1: No executable found</a:t>
-            </a:r>
-          </a:p>
-        </p:txBody>
-      </p:sp>
-      <p:sp>
-        <p:nvSpPr>
-          <p:cNvPr id="9" name="TextBox 8"/>
-          <p:cNvSpPr txBox="1"/>
-          <p:nvPr/>
-        </p:nvSpPr>
-        <p:spPr>
-          <a:xfrm>
-            <a:off x="3794760" y="1883664"/>
-            <a:ext cx="7543800" cy="621792"/>
-          </a:xfrm>
-          <a:prstGeom prst="rect">
-            <a:avLst/>
-          </a:prstGeom>
-          <a:noFill/>
-        </p:spPr>
-        <p:txBody>
-          <a:bodyPr wrap="square" lIns="73152" rIns="73152" tIns="36576" bIns="36576">
-            <a:spAutoFit/>
-          </a:bodyPr>
-          <a:lstStyle/>
-          <a:p>
-            <a:pPr algn="l">
-              <a:spcAft>
-                <a:spcPts val="0"/>
-              </a:spcAft>
               <a:defRPr sz="1600" b="0">
                 <a:solidFill>
-                  <a:srgbClr val="122C4E"/>
-                </a:solidFill>
-                <a:latin typeface="Noto Sans CJK KR"/>
-              </a:defRPr>
-            </a:pPr>
-            <a:r>
-              <a:t>우선 확인: setup.py entry_points·재빌드·source 순서로 확인한다.</a:t>
+                  <a:srgbClr val="FFFFFF"/>
+                </a:solidFill>
+                <a:latin typeface="DejaVu Sans Mono"/>
+              </a:defRPr>
+            </a:pPr>
+            <a:r>
+              <a:t>ros2 topic info /counter</a:t>
             </a:r>
             <a:br/>
             <a:r>
-              <a:t>수정 후: ros2 topic info /counter</a:t>
-            </a:r>
-          </a:p>
-        </p:txBody>
-      </p:sp>
-      <p:sp>
-        <p:nvSpPr>
-          <p:cNvPr id="10" name="Rounded Rectangle 9"/>
+              <a:t>ros2 topic echo /counter --once</a:t>
+            </a:r>
+            <a:br/>
+            <a:r>
+              <a:t>ros2 interface show geometry_msgs/msg/Twist</a:t>
+            </a:r>
+          </a:p>
+        </p:txBody>
+      </p:sp>
+      <p:sp>
+        <p:nvSpPr>
+          <p:cNvPr id="8" name="Rounded Rectangle 7"/>
           <p:cNvSpPr/>
           <p:nvPr/>
         </p:nvSpPr>
         <p:spPr>
           <a:xfrm>
-            <a:off x="694944" y="3172968"/>
-            <a:ext cx="10972800" cy="1115568"/>
+            <a:off x="658368" y="4206240"/>
+            <a:ext cx="10972800" cy="1554480"/>
           </a:xfrm>
           <a:prstGeom prst="roundRect">
             <a:avLst/>
           </a:prstGeom>
           <a:solidFill>
-            <a:srgbClr val="FFF7F4"/>
+            <a:srgbClr val="F4F7FB"/>
           </a:solidFill>
           <a:ln>
             <a:solidFill>
-              <a:srgbClr val="EDBEB4"/>
+              <a:srgbClr val="D1DFD5"/>
             </a:solidFill>
           </a:ln>
         </p:spPr>
@@ -12670,23 +12767,48 @@
           </a:fontRef>
         </p:style>
         <p:txBody>
-          <a:bodyPr rtlCol="0" anchor="ctr"/>
-          <a:lstStyle/>
-          <a:p>
-            <a:pPr algn="ctr"/>
-          </a:p>
-        </p:txBody>
-      </p:sp>
-      <p:sp>
-        <p:nvSpPr>
-          <p:cNvPr id="11" name="TextBox 10"/>
+          <a:bodyPr rtlCol="0" anchor="ctr" wrap="square" lIns="73152" rIns="73152" tIns="36576" bIns="36576"/>
+          <a:lstStyle/>
+          <a:p>
+            <a:pPr algn="l">
+              <a:spcAft>
+                <a:spcPts val="0"/>
+              </a:spcAft>
+              <a:defRPr sz="1800" b="1">
+                <a:solidFill>
+                  <a:srgbClr val="2A8B5A"/>
+                </a:solidFill>
+                <a:latin typeface="Noto Sans CJK KR"/>
+              </a:defRPr>
+            </a:pPr>
+            <a:r>
+              <a:t>완료 체크</a:t>
+            </a:r>
+            <a:br/>
+            <a:r>
+              <a:t>□ 명령이 오류 없이 실행된다.</a:t>
+            </a:r>
+            <a:br/>
+            <a:r>
+              <a:t>□ 기대한 파일·topic·frame·parameter 이름이 보인다.</a:t>
+            </a:r>
+            <a:br/>
+            <a:r>
+              <a:t>□ 값의 단위와 방향을 한 문장으로 설명할 수 있다.</a:t>
+            </a:r>
+          </a:p>
+        </p:txBody>
+      </p:sp>
+      <p:sp>
+        <p:nvSpPr>
+          <p:cNvPr id="9" name="TextBox 8"/>
           <p:cNvSpPr txBox="1"/>
           <p:nvPr/>
         </p:nvSpPr>
         <p:spPr>
           <a:xfrm>
-            <a:off x="896112" y="3319272"/>
-            <a:ext cx="2926080" cy="274320"/>
+            <a:off x="731520" y="5989320"/>
+            <a:ext cx="10789920" cy="237744"/>
           </a:xfrm>
           <a:prstGeom prst="rect">
             <a:avLst/>
@@ -12703,46 +12825,7 @@
               <a:spcAft>
                 <a:spcPts val="0"/>
               </a:spcAft>
-              <a:defRPr sz="1800" b="1">
-                <a:solidFill>
-                  <a:srgbClr val="BE3B3B"/>
-                </a:solidFill>
-                <a:latin typeface="Noto Sans CJK KR"/>
-              </a:defRPr>
-            </a:pPr>
-            <a:r>
-              <a:t>증상 2: callback이 오지 않음</a:t>
-            </a:r>
-          </a:p>
-        </p:txBody>
-      </p:sp>
-      <p:sp>
-        <p:nvSpPr>
-          <p:cNvPr id="12" name="TextBox 11"/>
-          <p:cNvSpPr txBox="1"/>
-          <p:nvPr/>
-        </p:nvSpPr>
-        <p:spPr>
-          <a:xfrm>
-            <a:off x="3794760" y="3300984"/>
-            <a:ext cx="7543800" cy="621792"/>
-          </a:xfrm>
-          <a:prstGeom prst="rect">
-            <a:avLst/>
-          </a:prstGeom>
-          <a:noFill/>
-        </p:spPr>
-        <p:txBody>
-          <a:bodyPr wrap="square" lIns="73152" rIns="73152" tIns="36576" bIns="36576">
-            <a:spAutoFit/>
-          </a:bodyPr>
-          <a:lstStyle/>
-          <a:p>
-            <a:pPr algn="l">
-              <a:spcAft>
-                <a:spcPts val="0"/>
-              </a:spcAft>
-              <a:defRPr sz="1600" b="0">
+              <a:defRPr sz="1500" b="1">
                 <a:solidFill>
                   <a:srgbClr val="122C4E"/>
                 </a:solidFill>
@@ -12750,50 +12833,7 @@
               </a:defRPr>
             </a:pPr>
             <a:r>
-              <a:t>우선 확인: 토픽 이름과 message type이 양쪽에서 같은지 확인한다.</a:t>
-            </a:r>
-            <a:br/>
-            <a:r>
-              <a:t>수정 후: ros2 topic info /counter</a:t>
-            </a:r>
-          </a:p>
-        </p:txBody>
-      </p:sp>
-      <p:sp>
-        <p:nvSpPr>
-          <p:cNvPr id="13" name="TextBox 12"/>
-          <p:cNvSpPr txBox="1"/>
-          <p:nvPr/>
-        </p:nvSpPr>
-        <p:spPr>
-          <a:xfrm>
-            <a:off x="822960" y="5102352"/>
-            <a:ext cx="10607040" cy="402336"/>
-          </a:xfrm>
-          <a:prstGeom prst="rect">
-            <a:avLst/>
-          </a:prstGeom>
-          <a:noFill/>
-        </p:spPr>
-        <p:txBody>
-          <a:bodyPr wrap="square" lIns="73152" rIns="73152" tIns="36576" bIns="36576">
-            <a:spAutoFit/>
-          </a:bodyPr>
-          <a:lstStyle/>
-          <a:p>
-            <a:pPr algn="ctr">
-              <a:spcAft>
-                <a:spcPts val="0"/>
-              </a:spcAft>
-              <a:defRPr sz="1800" b="1">
-                <a:solidFill>
-                  <a:srgbClr val="DB7E22"/>
-                </a:solidFill>
-                <a:latin typeface="Noto Sans CJK KR"/>
-              </a:defRPr>
-            </a:pPr>
-            <a:r>
-              <a:t>공통 순서: ① 현재 폴더 ② source ③ 파일 경로 ④ 이름/타입/단위 ⑤ build·source 후 재실행</a:t>
+              <a:t>완료 조건: /counter와 /cmd_vel의 값·message type·연결 수를 terminal에서 확인한다.</a:t>
             </a:r>
           </a:p>
         </p:txBody>
@@ -12850,7 +12890,7 @@
               </a:defRPr>
             </a:pPr>
             <a:r>
-              <a:t>미니 실습: 값 하나를 바꾸고 결과를 비교한다</a:t>
+              <a:t>막히면: 증상 → 우선 확인 → 재검증</a:t>
             </a:r>
           </a:p>
         </p:txBody>
@@ -12889,7 +12929,7 @@
               </a:defRPr>
             </a:pPr>
             <a:r>
-              <a:t>정상 결과를 만든 뒤에는 한 번에 하나의 값만 바꿉니다.</a:t>
+              <a:t>오류 메시지를 숨기지 않고 같은 순서로 점검합니다.</a:t>
             </a:r>
           </a:p>
         </p:txBody>
@@ -13025,7 +13065,7 @@
               </a:defRPr>
             </a:pPr>
             <a:r>
-              <a:t>현재 단계 미니 실습    |    현재 폴더 ~/agv_ws    |    현재 터미널</a:t>
+              <a:t>현재 단계 오류 대응    |    현재 폴더 ~/agv_ws    |    현재 터미널</a:t>
             </a:r>
           </a:p>
         </p:txBody>
@@ -13038,18 +13078,18 @@
         </p:nvSpPr>
         <p:spPr>
           <a:xfrm>
-            <a:off x="749808" y="1874519"/>
-            <a:ext cx="10652760" cy="1993392"/>
+            <a:off x="694944" y="1755648"/>
+            <a:ext cx="10972800" cy="1115568"/>
           </a:xfrm>
           <a:prstGeom prst="roundRect">
             <a:avLst/>
           </a:prstGeom>
           <a:solidFill>
-            <a:srgbClr val="FFF8EB"/>
+            <a:srgbClr val="FFF7F4"/>
           </a:solidFill>
           <a:ln>
             <a:solidFill>
-              <a:srgbClr val="ECC680"/>
+              <a:srgbClr val="EDBEB4"/>
             </a:solidFill>
           </a:ln>
         </p:spPr>
@@ -13068,23 +13108,10 @@
           </a:fontRef>
         </p:style>
         <p:txBody>
-          <a:bodyPr rtlCol="0" anchor="ctr" wrap="square" lIns="73152" rIns="73152" tIns="36576" bIns="36576"/>
-          <a:lstStyle/>
-          <a:p>
-            <a:pPr algn="ctr">
-              <a:spcAft>
-                <a:spcPts val="0"/>
-              </a:spcAft>
-              <a:defRPr sz="2300" b="1">
-                <a:solidFill>
-                  <a:srgbClr val="122C4E"/>
-                </a:solidFill>
-                <a:latin typeface="Noto Sans CJK KR"/>
-              </a:defRPr>
-            </a:pPr>
-            <a:r>
-              <a:t>cmd_test_node의 linear.x와 angular.z를 각각 바꾸고 velocity_monitor 출력을 비교한다.</a:t>
-            </a:r>
+          <a:bodyPr rtlCol="0" anchor="ctr"/>
+          <a:lstStyle/>
+          <a:p>
+            <a:pPr algn="ctr"/>
           </a:p>
         </p:txBody>
       </p:sp>
@@ -13096,8 +13123,8 @@
         </p:nvSpPr>
         <p:spPr>
           <a:xfrm>
-            <a:off x="877824" y="4590288"/>
-            <a:ext cx="10241280" cy="594360"/>
+            <a:off x="896112" y="1901952"/>
+            <a:ext cx="2926080" cy="274320"/>
           </a:xfrm>
           <a:prstGeom prst="rect">
             <a:avLst/>
@@ -13110,11 +13137,220 @@
           </a:bodyPr>
           <a:lstStyle/>
           <a:p>
+            <a:pPr algn="l">
+              <a:spcAft>
+                <a:spcPts val="0"/>
+              </a:spcAft>
+              <a:defRPr sz="1800" b="1">
+                <a:solidFill>
+                  <a:srgbClr val="BE3B3B"/>
+                </a:solidFill>
+                <a:latin typeface="Noto Sans CJK KR"/>
+              </a:defRPr>
+            </a:pPr>
+            <a:r>
+              <a:t>증상 1: No executable found</a:t>
+            </a:r>
+          </a:p>
+        </p:txBody>
+      </p:sp>
+      <p:sp>
+        <p:nvSpPr>
+          <p:cNvPr id="9" name="TextBox 8"/>
+          <p:cNvSpPr txBox="1"/>
+          <p:nvPr/>
+        </p:nvSpPr>
+        <p:spPr>
+          <a:xfrm>
+            <a:off x="3794760" y="1883664"/>
+            <a:ext cx="7543800" cy="621792"/>
+          </a:xfrm>
+          <a:prstGeom prst="rect">
+            <a:avLst/>
+          </a:prstGeom>
+          <a:noFill/>
+        </p:spPr>
+        <p:txBody>
+          <a:bodyPr wrap="square" lIns="73152" rIns="73152" tIns="36576" bIns="36576">
+            <a:spAutoFit/>
+          </a:bodyPr>
+          <a:lstStyle/>
+          <a:p>
+            <a:pPr algn="l">
+              <a:spcAft>
+                <a:spcPts val="0"/>
+              </a:spcAft>
+              <a:defRPr sz="1600" b="0">
+                <a:solidFill>
+                  <a:srgbClr val="122C4E"/>
+                </a:solidFill>
+                <a:latin typeface="Noto Sans CJK KR"/>
+              </a:defRPr>
+            </a:pPr>
+            <a:r>
+              <a:t>우선 확인: setup.py entry_points·재빌드·source 순서로 확인한다.</a:t>
+            </a:r>
+            <a:br/>
+            <a:r>
+              <a:t>수정 후: ros2 topic info /counter</a:t>
+            </a:r>
+          </a:p>
+        </p:txBody>
+      </p:sp>
+      <p:sp>
+        <p:nvSpPr>
+          <p:cNvPr id="10" name="Rounded Rectangle 9"/>
+          <p:cNvSpPr/>
+          <p:nvPr/>
+        </p:nvSpPr>
+        <p:spPr>
+          <a:xfrm>
+            <a:off x="694944" y="3172968"/>
+            <a:ext cx="10972800" cy="1115568"/>
+          </a:xfrm>
+          <a:prstGeom prst="roundRect">
+            <a:avLst/>
+          </a:prstGeom>
+          <a:solidFill>
+            <a:srgbClr val="FFF7F4"/>
+          </a:solidFill>
+          <a:ln>
+            <a:solidFill>
+              <a:srgbClr val="EDBEB4"/>
+            </a:solidFill>
+          </a:ln>
+        </p:spPr>
+        <p:style>
+          <a:lnRef idx="1">
+            <a:schemeClr val="accent1"/>
+          </a:lnRef>
+          <a:fillRef idx="3">
+            <a:schemeClr val="accent1"/>
+          </a:fillRef>
+          <a:effectRef idx="2">
+            <a:schemeClr val="accent1"/>
+          </a:effectRef>
+          <a:fontRef idx="minor">
+            <a:schemeClr val="lt1"/>
+          </a:fontRef>
+        </p:style>
+        <p:txBody>
+          <a:bodyPr rtlCol="0" anchor="ctr"/>
+          <a:lstStyle/>
+          <a:p>
+            <a:pPr algn="ctr"/>
+          </a:p>
+        </p:txBody>
+      </p:sp>
+      <p:sp>
+        <p:nvSpPr>
+          <p:cNvPr id="11" name="TextBox 10"/>
+          <p:cNvSpPr txBox="1"/>
+          <p:nvPr/>
+        </p:nvSpPr>
+        <p:spPr>
+          <a:xfrm>
+            <a:off x="896112" y="3319272"/>
+            <a:ext cx="2926080" cy="274320"/>
+          </a:xfrm>
+          <a:prstGeom prst="rect">
+            <a:avLst/>
+          </a:prstGeom>
+          <a:noFill/>
+        </p:spPr>
+        <p:txBody>
+          <a:bodyPr wrap="square" lIns="73152" rIns="73152" tIns="36576" bIns="36576">
+            <a:spAutoFit/>
+          </a:bodyPr>
+          <a:lstStyle/>
+          <a:p>
+            <a:pPr algn="l">
+              <a:spcAft>
+                <a:spcPts val="0"/>
+              </a:spcAft>
+              <a:defRPr sz="1800" b="1">
+                <a:solidFill>
+                  <a:srgbClr val="BE3B3B"/>
+                </a:solidFill>
+                <a:latin typeface="Noto Sans CJK KR"/>
+              </a:defRPr>
+            </a:pPr>
+            <a:r>
+              <a:t>증상 2: callback이 오지 않음</a:t>
+            </a:r>
+          </a:p>
+        </p:txBody>
+      </p:sp>
+      <p:sp>
+        <p:nvSpPr>
+          <p:cNvPr id="12" name="TextBox 11"/>
+          <p:cNvSpPr txBox="1"/>
+          <p:nvPr/>
+        </p:nvSpPr>
+        <p:spPr>
+          <a:xfrm>
+            <a:off x="3794760" y="3300984"/>
+            <a:ext cx="7543800" cy="621792"/>
+          </a:xfrm>
+          <a:prstGeom prst="rect">
+            <a:avLst/>
+          </a:prstGeom>
+          <a:noFill/>
+        </p:spPr>
+        <p:txBody>
+          <a:bodyPr wrap="square" lIns="73152" rIns="73152" tIns="36576" bIns="36576">
+            <a:spAutoFit/>
+          </a:bodyPr>
+          <a:lstStyle/>
+          <a:p>
+            <a:pPr algn="l">
+              <a:spcAft>
+                <a:spcPts val="0"/>
+              </a:spcAft>
+              <a:defRPr sz="1600" b="0">
+                <a:solidFill>
+                  <a:srgbClr val="122C4E"/>
+                </a:solidFill>
+                <a:latin typeface="Noto Sans CJK KR"/>
+              </a:defRPr>
+            </a:pPr>
+            <a:r>
+              <a:t>우선 확인: 토픽 이름과 message type이 양쪽에서 같은지 확인한다.</a:t>
+            </a:r>
+            <a:br/>
+            <a:r>
+              <a:t>수정 후: ros2 topic info /counter</a:t>
+            </a:r>
+          </a:p>
+        </p:txBody>
+      </p:sp>
+      <p:sp>
+        <p:nvSpPr>
+          <p:cNvPr id="13" name="TextBox 12"/>
+          <p:cNvSpPr txBox="1"/>
+          <p:nvPr/>
+        </p:nvSpPr>
+        <p:spPr>
+          <a:xfrm>
+            <a:off x="822960" y="5102352"/>
+            <a:ext cx="10607040" cy="402336"/>
+          </a:xfrm>
+          <a:prstGeom prst="rect">
+            <a:avLst/>
+          </a:prstGeom>
+          <a:noFill/>
+        </p:spPr>
+        <p:txBody>
+          <a:bodyPr wrap="square" lIns="73152" rIns="73152" tIns="36576" bIns="36576">
+            <a:spAutoFit/>
+          </a:bodyPr>
+          <a:lstStyle/>
+          <a:p>
             <a:pPr algn="ctr">
               <a:spcAft>
                 <a:spcPts val="0"/>
               </a:spcAft>
-              <a:defRPr sz="1900" b="1">
+              <a:defRPr sz="1800" b="1">
                 <a:solidFill>
                   <a:srgbClr val="DB7E22"/>
                 </a:solidFill>
@@ -13122,7 +13358,7 @@
               </a:defRPr>
             </a:pPr>
             <a:r>
-              <a:t>기록할 것: 바꾼 값(단위) · 기대한 변화 · 실제 출력/화면 · 원래 값으로 되돌린 결과</a:t>
+              <a:t>공통 순서: ① 현재 폴더 ② source ③ 파일 경로 ④ 이름/타입/단위 ⑤ build·source 후 재실행</a:t>
             </a:r>
           </a:p>
         </p:txBody>
@@ -13179,7 +13415,7 @@
               </a:defRPr>
             </a:pPr>
             <a:r>
-              <a:t>체크포인트를 저장하고 다음 모듈로 넘긴다</a:t>
+              <a:t>미니 실습: 값 하나를 바꾸고 결과를 비교한다</a:t>
             </a:r>
           </a:p>
         </p:txBody>
@@ -13218,7 +13454,7 @@
               </a:defRPr>
             </a:pPr>
             <a:r>
-              <a:t>현재 Complete는 다음 Starter의 기준선입니다.</a:t>
+              <a:t>정상 결과를 만든 뒤에는 한 번에 하나의 값만 바꿉니다.</a:t>
             </a:r>
           </a:p>
         </p:txBody>
@@ -13354,7 +13590,7 @@
               </a:defRPr>
             </a:pPr>
             <a:r>
-              <a:t>현재 단계 체크포인트    |    현재 폴더 ~/agv_ws    |    현재 터미널</a:t>
+              <a:t>현재 단계 미니 실습    |    현재 폴더 ~/agv_ws    |    현재 터미널</a:t>
             </a:r>
           </a:p>
         </p:txBody>
@@ -13367,18 +13603,18 @@
         </p:nvSpPr>
         <p:spPr>
           <a:xfrm>
-            <a:off x="685800" y="1737360"/>
-            <a:ext cx="10972800" cy="3611880"/>
+            <a:off x="749808" y="1874519"/>
+            <a:ext cx="10652760" cy="1993392"/>
           </a:xfrm>
           <a:prstGeom prst="roundRect">
             <a:avLst/>
           </a:prstGeom>
           <a:solidFill>
-            <a:srgbClr val="F4F7FB"/>
+            <a:srgbClr val="FFF8EB"/>
           </a:solidFill>
           <a:ln>
             <a:solidFill>
-              <a:srgbClr val="D2DCE8"/>
+              <a:srgbClr val="ECC680"/>
             </a:solidFill>
           </a:ln>
         </p:spPr>
@@ -13397,10 +13633,23 @@
           </a:fontRef>
         </p:style>
         <p:txBody>
-          <a:bodyPr rtlCol="0" anchor="ctr"/>
-          <a:lstStyle/>
-          <a:p>
-            <a:pPr algn="ctr"/>
+          <a:bodyPr rtlCol="0" anchor="ctr" wrap="square" lIns="73152" rIns="73152" tIns="36576" bIns="36576"/>
+          <a:lstStyle/>
+          <a:p>
+            <a:pPr algn="ctr">
+              <a:spcAft>
+                <a:spcPts val="0"/>
+              </a:spcAft>
+              <a:defRPr sz="2300" b="1">
+                <a:solidFill>
+                  <a:srgbClr val="122C4E"/>
+                </a:solidFill>
+                <a:latin typeface="Noto Sans CJK KR"/>
+              </a:defRPr>
+            </a:pPr>
+            <a:r>
+              <a:t>cmd_test_node의 linear.x와 angular.z를 각각 바꾸고 velocity_monitor 출력을 비교한다.</a:t>
+            </a:r>
           </a:p>
         </p:txBody>
       </p:sp>
@@ -13412,111 +13661,8 @@
         </p:nvSpPr>
         <p:spPr>
           <a:xfrm>
-            <a:off x="896112" y="1993392"/>
-            <a:ext cx="10332720" cy="2971800"/>
-          </a:xfrm>
-          <a:prstGeom prst="rect">
-            <a:avLst/>
-          </a:prstGeom>
-          <a:noFill/>
-        </p:spPr>
-        <p:txBody>
-          <a:bodyPr wrap="square" lIns="109728" rIns="109728">
-            <a:spAutoFit/>
-          </a:bodyPr>
-          <a:lstStyle/>
-          <a:p>
-            <a:pPr>
-              <a:spcAft>
-                <a:spcPts val="800"/>
-              </a:spcAft>
-              <a:defRPr sz="1800">
-                <a:solidFill>
-                  <a:srgbClr val="122C4E"/>
-                </a:solidFill>
-                <a:latin typeface="Noto Sans CJK KR"/>
-              </a:defRPr>
-            </a:pPr>
-            <a:r>
-              <a:t>• □ 완료 화면: /counter와 /cmd_vel의 값·message type·연결 수를 terminal에서 확인한다.</a:t>
-            </a:r>
-          </a:p>
-          <a:p>
-            <a:pPr>
-              <a:spcAft>
-                <a:spcPts val="800"/>
-              </a:spcAft>
-              <a:defRPr sz="1800">
-                <a:solidFill>
-                  <a:srgbClr val="122C4E"/>
-                </a:solidFill>
-                <a:latin typeface="Noto Sans CJK KR"/>
-              </a:defRPr>
-            </a:pPr>
-            <a:r>
-              <a:t>• □ Complete 파일: blocks/A_ros2_basics/M03_pubsub/complete/</a:t>
-            </a:r>
-          </a:p>
-          <a:p>
-            <a:pPr>
-              <a:spcAft>
-                <a:spcPts val="800"/>
-              </a:spcAft>
-              <a:defRPr sz="1800">
-                <a:solidFill>
-                  <a:srgbClr val="122C4E"/>
-                </a:solidFill>
-                <a:latin typeface="Noto Sans CJK KR"/>
-              </a:defRPr>
-            </a:pPr>
-            <a:r>
-              <a:t>• □ 정상 로그·캡처: logs/validation.log, screenshots/validation_terminal.png</a:t>
-            </a:r>
-          </a:p>
-          <a:p>
-            <a:pPr>
-              <a:spcAft>
-                <a:spcPts val="800"/>
-              </a:spcAft>
-              <a:defRPr sz="1800">
-                <a:solidFill>
-                  <a:srgbClr val="122C4E"/>
-                </a:solidFill>
-                <a:latin typeface="Noto Sans CJK KR"/>
-              </a:defRPr>
-            </a:pPr>
-            <a:r>
-              <a:t>• □ 버전 식별: CHECKSUM_or_TAG.txt의 SHA-256 manifest</a:t>
-            </a:r>
-          </a:p>
-          <a:p>
-            <a:pPr>
-              <a:spcAft>
-                <a:spcPts val="800"/>
-              </a:spcAft>
-              <a:defRPr sz="1800">
-                <a:solidFill>
-                  <a:srgbClr val="122C4E"/>
-                </a:solidFill>
-                <a:latin typeface="Noto Sans CJK KR"/>
-              </a:defRPr>
-            </a:pPr>
-            <a:r>
-              <a:t>• □ 다음 시작 조건: M04 TF2 frame</a:t>
-            </a:r>
-          </a:p>
-        </p:txBody>
-      </p:sp>
-      <p:sp>
-        <p:nvSpPr>
-          <p:cNvPr id="9" name="TextBox 8"/>
-          <p:cNvSpPr txBox="1"/>
-          <p:nvPr/>
-        </p:nvSpPr>
-        <p:spPr>
-          <a:xfrm>
-            <a:off x="868680" y="5596128"/>
-            <a:ext cx="10515600" cy="338328"/>
+            <a:off x="877824" y="4590288"/>
+            <a:ext cx="10241280" cy="594360"/>
           </a:xfrm>
           <a:prstGeom prst="rect">
             <a:avLst/>
@@ -13533,15 +13679,15 @@
               <a:spcAft>
                 <a:spcPts val="0"/>
               </a:spcAft>
-              <a:defRPr sz="1700" b="1">
-                <a:solidFill>
-                  <a:srgbClr val="2A8B5A"/>
-                </a:solidFill>
-                <a:latin typeface="Noto Sans CJK KR"/>
-              </a:defRPr>
-            </a:pPr>
-            <a:r>
-              <a:t>다음 모듈을 시작하기 전, 이 슬라이드의 Complete와 다음 모듈의 Starter를 비교합니다.</a:t>
+              <a:defRPr sz="1900" b="1">
+                <a:solidFill>
+                  <a:srgbClr val="DB7E22"/>
+                </a:solidFill>
+                <a:latin typeface="Noto Sans CJK KR"/>
+              </a:defRPr>
+            </a:pPr>
+            <a:r>
+              <a:t>기록할 것: 바꾼 값(단위) · 기대한 변화 · 실제 출력/화면 · 원래 값으로 되돌린 결과</a:t>
             </a:r>
           </a:p>
         </p:txBody>
@@ -13598,6 +13744,425 @@
               </a:defRPr>
             </a:pPr>
             <a:r>
+              <a:t>체크포인트를 저장하고 다음 모듈로 넘긴다</a:t>
+            </a:r>
+          </a:p>
+        </p:txBody>
+      </p:sp>
+      <p:sp>
+        <p:nvSpPr>
+          <p:cNvPr id="3" name="TextBox 2"/>
+          <p:cNvSpPr txBox="1"/>
+          <p:nvPr/>
+        </p:nvSpPr>
+        <p:spPr>
+          <a:xfrm>
+            <a:off x="603504" y="859536"/>
+            <a:ext cx="10698480" cy="292608"/>
+          </a:xfrm>
+          <a:prstGeom prst="rect">
+            <a:avLst/>
+          </a:prstGeom>
+          <a:noFill/>
+        </p:spPr>
+        <p:txBody>
+          <a:bodyPr wrap="square" lIns="73152" rIns="73152" tIns="36576" bIns="36576">
+            <a:spAutoFit/>
+          </a:bodyPr>
+          <a:lstStyle/>
+          <a:p>
+            <a:pPr algn="l">
+              <a:spcAft>
+                <a:spcPts val="0"/>
+              </a:spcAft>
+              <a:defRPr sz="1700" b="0">
+                <a:solidFill>
+                  <a:srgbClr val="5C6672"/>
+                </a:solidFill>
+                <a:latin typeface="Noto Sans CJK KR"/>
+              </a:defRPr>
+            </a:pPr>
+            <a:r>
+              <a:t>현재 Complete는 다음 Starter의 기준선입니다.</a:t>
+            </a:r>
+          </a:p>
+        </p:txBody>
+      </p:sp>
+      <p:sp>
+        <p:nvSpPr>
+          <p:cNvPr id="4" name="TextBox 3"/>
+          <p:cNvSpPr txBox="1"/>
+          <p:nvPr/>
+        </p:nvSpPr>
+        <p:spPr>
+          <a:xfrm>
+            <a:off x="530352" y="6510528"/>
+            <a:ext cx="7772400" cy="201168"/>
+          </a:xfrm>
+          <a:prstGeom prst="rect">
+            <a:avLst/>
+          </a:prstGeom>
+          <a:noFill/>
+        </p:spPr>
+        <p:txBody>
+          <a:bodyPr wrap="square" lIns="73152" rIns="73152" tIns="36576" bIns="36576">
+            <a:spAutoFit/>
+          </a:bodyPr>
+          <a:lstStyle/>
+          <a:p>
+            <a:pPr algn="l">
+              <a:spcAft>
+                <a:spcPts val="0"/>
+              </a:spcAft>
+              <a:defRPr sz="1000" b="0">
+                <a:solidFill>
+                  <a:srgbClr val="5C6672"/>
+                </a:solidFill>
+                <a:latin typeface="Noto Sans CJK KR"/>
+              </a:defRPr>
+            </a:pPr>
+            <a:r>
+              <a:t>ROS 2 Jazzy · Gazebo Harmonic · M03 · 따라 하기형 AGV 실습</a:t>
+            </a:r>
+          </a:p>
+        </p:txBody>
+      </p:sp>
+      <p:sp>
+        <p:nvSpPr>
+          <p:cNvPr id="5" name="TextBox 4"/>
+          <p:cNvSpPr txBox="1"/>
+          <p:nvPr/>
+        </p:nvSpPr>
+        <p:spPr>
+          <a:xfrm>
+            <a:off x="9144000" y="6510528"/>
+            <a:ext cx="2468880" cy="201168"/>
+          </a:xfrm>
+          <a:prstGeom prst="rect">
+            <a:avLst/>
+          </a:prstGeom>
+          <a:noFill/>
+        </p:spPr>
+        <p:txBody>
+          <a:bodyPr wrap="square" lIns="73152" rIns="73152" tIns="36576" bIns="36576">
+            <a:spAutoFit/>
+          </a:bodyPr>
+          <a:lstStyle/>
+          <a:p>
+            <a:pPr algn="r">
+              <a:spcAft>
+                <a:spcPts val="0"/>
+              </a:spcAft>
+              <a:defRPr sz="1000" b="0">
+                <a:solidFill>
+                  <a:srgbClr val="5C6672"/>
+                </a:solidFill>
+                <a:latin typeface="Noto Sans CJK KR"/>
+              </a:defRPr>
+            </a:pPr>
+            <a:r>
+              <a:t>명령·파일 경로는 슬라이드에서 복사 가능</a:t>
+            </a:r>
+          </a:p>
+        </p:txBody>
+      </p:sp>
+      <p:sp>
+        <p:nvSpPr>
+          <p:cNvPr id="6" name="Rectangle 5"/>
+          <p:cNvSpPr/>
+          <p:nvPr/>
+        </p:nvSpPr>
+        <p:spPr>
+          <a:xfrm>
+            <a:off x="566928" y="1188720"/>
+            <a:ext cx="11064240" cy="347472"/>
+          </a:xfrm>
+          <a:prstGeom prst="rect">
+            <a:avLst/>
+          </a:prstGeom>
+          <a:solidFill>
+            <a:srgbClr val="F4F7FB"/>
+          </a:solidFill>
+          <a:ln>
+            <a:solidFill>
+              <a:srgbClr val="F4F7FB"/>
+            </a:solidFill>
+          </a:ln>
+        </p:spPr>
+        <p:style>
+          <a:lnRef idx="1">
+            <a:schemeClr val="accent1"/>
+          </a:lnRef>
+          <a:fillRef idx="3">
+            <a:schemeClr val="accent1"/>
+          </a:fillRef>
+          <a:effectRef idx="2">
+            <a:schemeClr val="accent1"/>
+          </a:effectRef>
+          <a:fontRef idx="minor">
+            <a:schemeClr val="lt1"/>
+          </a:fontRef>
+        </p:style>
+        <p:txBody>
+          <a:bodyPr rtlCol="0" anchor="ctr" wrap="square" lIns="73152" rIns="73152" tIns="36576" bIns="36576"/>
+          <a:lstStyle/>
+          <a:p>
+            <a:pPr algn="l">
+              <a:spcAft>
+                <a:spcPts val="0"/>
+              </a:spcAft>
+              <a:defRPr sz="1300" b="1">
+                <a:solidFill>
+                  <a:srgbClr val="122C4E"/>
+                </a:solidFill>
+                <a:latin typeface="Noto Sans CJK KR"/>
+              </a:defRPr>
+            </a:pPr>
+            <a:r>
+              <a:t>현재 단계 체크포인트    |    현재 폴더 ~/agv_ws    |    현재 터미널</a:t>
+            </a:r>
+          </a:p>
+        </p:txBody>
+      </p:sp>
+      <p:sp>
+        <p:nvSpPr>
+          <p:cNvPr id="7" name="Rounded Rectangle 6"/>
+          <p:cNvSpPr/>
+          <p:nvPr/>
+        </p:nvSpPr>
+        <p:spPr>
+          <a:xfrm>
+            <a:off x="685800" y="1737360"/>
+            <a:ext cx="10972800" cy="3611880"/>
+          </a:xfrm>
+          <a:prstGeom prst="roundRect">
+            <a:avLst/>
+          </a:prstGeom>
+          <a:solidFill>
+            <a:srgbClr val="F4F7FB"/>
+          </a:solidFill>
+          <a:ln>
+            <a:solidFill>
+              <a:srgbClr val="D2DCE8"/>
+            </a:solidFill>
+          </a:ln>
+        </p:spPr>
+        <p:style>
+          <a:lnRef idx="1">
+            <a:schemeClr val="accent1"/>
+          </a:lnRef>
+          <a:fillRef idx="3">
+            <a:schemeClr val="accent1"/>
+          </a:fillRef>
+          <a:effectRef idx="2">
+            <a:schemeClr val="accent1"/>
+          </a:effectRef>
+          <a:fontRef idx="minor">
+            <a:schemeClr val="lt1"/>
+          </a:fontRef>
+        </p:style>
+        <p:txBody>
+          <a:bodyPr rtlCol="0" anchor="ctr"/>
+          <a:lstStyle/>
+          <a:p>
+            <a:pPr algn="ctr"/>
+          </a:p>
+        </p:txBody>
+      </p:sp>
+      <p:sp>
+        <p:nvSpPr>
+          <p:cNvPr id="8" name="TextBox 7"/>
+          <p:cNvSpPr txBox="1"/>
+          <p:nvPr/>
+        </p:nvSpPr>
+        <p:spPr>
+          <a:xfrm>
+            <a:off x="896112" y="1993392"/>
+            <a:ext cx="10332720" cy="2971800"/>
+          </a:xfrm>
+          <a:prstGeom prst="rect">
+            <a:avLst/>
+          </a:prstGeom>
+          <a:noFill/>
+        </p:spPr>
+        <p:txBody>
+          <a:bodyPr wrap="square" lIns="109728" rIns="109728">
+            <a:spAutoFit/>
+          </a:bodyPr>
+          <a:lstStyle/>
+          <a:p>
+            <a:pPr>
+              <a:spcAft>
+                <a:spcPts val="800"/>
+              </a:spcAft>
+              <a:defRPr sz="1800">
+                <a:solidFill>
+                  <a:srgbClr val="122C4E"/>
+                </a:solidFill>
+                <a:latin typeface="Noto Sans CJK KR"/>
+              </a:defRPr>
+            </a:pPr>
+            <a:r>
+              <a:t>• □ 완료 화면: /counter와 /cmd_vel의 값·message type·연결 수를 terminal에서 확인한다.</a:t>
+            </a:r>
+          </a:p>
+          <a:p>
+            <a:pPr>
+              <a:spcAft>
+                <a:spcPts val="800"/>
+              </a:spcAft>
+              <a:defRPr sz="1800">
+                <a:solidFill>
+                  <a:srgbClr val="122C4E"/>
+                </a:solidFill>
+                <a:latin typeface="Noto Sans CJK KR"/>
+              </a:defRPr>
+            </a:pPr>
+            <a:r>
+              <a:t>• □ Complete 파일: blocks/A_ros2_basics/M03_pubsub/complete/</a:t>
+            </a:r>
+          </a:p>
+          <a:p>
+            <a:pPr>
+              <a:spcAft>
+                <a:spcPts val="800"/>
+              </a:spcAft>
+              <a:defRPr sz="1800">
+                <a:solidFill>
+                  <a:srgbClr val="122C4E"/>
+                </a:solidFill>
+                <a:latin typeface="Noto Sans CJK KR"/>
+              </a:defRPr>
+            </a:pPr>
+            <a:r>
+              <a:t>• □ 정상 로그·캡처: logs/validation.log, screenshots/validation_terminal.png</a:t>
+            </a:r>
+          </a:p>
+          <a:p>
+            <a:pPr>
+              <a:spcAft>
+                <a:spcPts val="800"/>
+              </a:spcAft>
+              <a:defRPr sz="1800">
+                <a:solidFill>
+                  <a:srgbClr val="122C4E"/>
+                </a:solidFill>
+                <a:latin typeface="Noto Sans CJK KR"/>
+              </a:defRPr>
+            </a:pPr>
+            <a:r>
+              <a:t>• □ 버전 식별: CHECKSUM_or_TAG.txt의 SHA-256 manifest</a:t>
+            </a:r>
+          </a:p>
+          <a:p>
+            <a:pPr>
+              <a:spcAft>
+                <a:spcPts val="800"/>
+              </a:spcAft>
+              <a:defRPr sz="1800">
+                <a:solidFill>
+                  <a:srgbClr val="122C4E"/>
+                </a:solidFill>
+                <a:latin typeface="Noto Sans CJK KR"/>
+              </a:defRPr>
+            </a:pPr>
+            <a:r>
+              <a:t>• □ 다음 시작 조건: M04 TF2 frame</a:t>
+            </a:r>
+          </a:p>
+        </p:txBody>
+      </p:sp>
+      <p:sp>
+        <p:nvSpPr>
+          <p:cNvPr id="9" name="TextBox 8"/>
+          <p:cNvSpPr txBox="1"/>
+          <p:nvPr/>
+        </p:nvSpPr>
+        <p:spPr>
+          <a:xfrm>
+            <a:off x="868680" y="5596128"/>
+            <a:ext cx="10515600" cy="338328"/>
+          </a:xfrm>
+          <a:prstGeom prst="rect">
+            <a:avLst/>
+          </a:prstGeom>
+          <a:noFill/>
+        </p:spPr>
+        <p:txBody>
+          <a:bodyPr wrap="square" lIns="73152" rIns="73152" tIns="36576" bIns="36576">
+            <a:spAutoFit/>
+          </a:bodyPr>
+          <a:lstStyle/>
+          <a:p>
+            <a:pPr algn="ctr">
+              <a:spcAft>
+                <a:spcPts val="0"/>
+              </a:spcAft>
+              <a:defRPr sz="1700" b="1">
+                <a:solidFill>
+                  <a:srgbClr val="2A8B5A"/>
+                </a:solidFill>
+                <a:latin typeface="Noto Sans CJK KR"/>
+              </a:defRPr>
+            </a:pPr>
+            <a:r>
+              <a:t>다음 모듈을 시작하기 전, 이 슬라이드의 Complete와 다음 모듈의 Starter를 비교합니다.</a:t>
+            </a:r>
+          </a:p>
+        </p:txBody>
+      </p:sp>
+    </p:spTree>
+  </p:cSld>
+  <p:clrMapOvr>
+    <a:masterClrMapping/>
+  </p:clrMapOvr>
+</p:sld>
+</file>
+
+<file path=ppt/slides/slide27.xml><?xml version="1.0" encoding="utf-8"?>
+<p:sld xmlns:a="http://schemas.openxmlformats.org/drawingml/2006/main" xmlns:p="http://schemas.openxmlformats.org/presentationml/2006/main" xmlns:r="http://schemas.openxmlformats.org/officeDocument/2006/relationships">
+  <p:cSld>
+    <p:spTree>
+      <p:nvGrpSpPr>
+        <p:cNvPr id="1" name=""/>
+        <p:cNvGrpSpPr/>
+        <p:nvPr/>
+      </p:nvGrpSpPr>
+      <p:grpSpPr/>
+      <p:sp>
+        <p:nvSpPr>
+          <p:cNvPr id="2" name="TextBox 1"/>
+          <p:cNvSpPr txBox="1"/>
+          <p:nvPr/>
+        </p:nvSpPr>
+        <p:spPr>
+          <a:xfrm>
+            <a:off x="566928" y="347472"/>
+            <a:ext cx="10881360" cy="438912"/>
+          </a:xfrm>
+          <a:prstGeom prst="rect">
+            <a:avLst/>
+          </a:prstGeom>
+          <a:noFill/>
+        </p:spPr>
+        <p:txBody>
+          <a:bodyPr wrap="square" lIns="73152" rIns="73152" tIns="36576" bIns="36576">
+            <a:spAutoFit/>
+          </a:bodyPr>
+          <a:lstStyle/>
+          <a:p>
+            <a:pPr algn="l">
+              <a:spcAft>
+                <a:spcPts val="0"/>
+              </a:spcAft>
+              <a:defRPr sz="3200" b="1">
+                <a:solidFill>
+                  <a:srgbClr val="122C4E"/>
+                </a:solidFill>
+                <a:latin typeface="Noto Sans CJK KR"/>
+              </a:defRPr>
+            </a:pPr>
+            <a:r>
               <a:t>공식 참고 자료</a:t>
             </a:r>
           </a:p>
@@ -13773,7 +14338,7 @@
         </p:nvSpPr>
         <p:spPr>
           <a:xfrm>
-            <a:off x="914400" y="1810512"/>
+            <a:off x="914400" y="1773936"/>
             <a:ext cx="3840480" cy="256032"/>
           </a:xfrm>
           <a:prstGeom prst="rect">
@@ -13812,8 +14377,8 @@
         </p:nvSpPr>
         <p:spPr>
           <a:xfrm>
-            <a:off x="914400" y="2121408"/>
-            <a:ext cx="9966960" cy="256032"/>
+            <a:off x="914400" y="2048255"/>
+            <a:ext cx="9966960" cy="475488"/>
           </a:xfrm>
           <a:prstGeom prst="rect">
             <a:avLst/>
@@ -13830,7 +14395,7 @@
               <a:spcAft>
                 <a:spcPts val="0"/>
               </a:spcAft>
-              <a:defRPr sz="1200" b="0">
+              <a:defRPr sz="1000" b="0">
                 <a:solidFill>
                   <a:srgbClr val="225B9B"/>
                 </a:solidFill>
@@ -13851,7 +14416,7 @@
         </p:nvSpPr>
         <p:spPr>
           <a:xfrm>
-            <a:off x="914400" y="2816352"/>
+            <a:off x="914400" y="2852928"/>
             <a:ext cx="3840480" cy="256032"/>
           </a:xfrm>
           <a:prstGeom prst="rect">
@@ -13891,7 +14456,7 @@
         <p:spPr>
           <a:xfrm>
             <a:off x="914400" y="3127248"/>
-            <a:ext cx="9966960" cy="256032"/>
+            <a:ext cx="9966960" cy="475488"/>
           </a:xfrm>
           <a:prstGeom prst="rect">
             <a:avLst/>
@@ -13908,7 +14473,7 @@
               <a:spcAft>
                 <a:spcPts val="0"/>
               </a:spcAft>
-              <a:defRPr sz="1200" b="0">
+              <a:defRPr sz="1000" b="0">
                 <a:solidFill>
                   <a:srgbClr val="225B9B"/>
                 </a:solidFill>
@@ -13929,7 +14494,7 @@
         </p:nvSpPr>
         <p:spPr>
           <a:xfrm>
-            <a:off x="914400" y="3822191"/>
+            <a:off x="914400" y="3931920"/>
             <a:ext cx="3840480" cy="256032"/>
           </a:xfrm>
           <a:prstGeom prst="rect">
@@ -13968,8 +14533,8 @@
         </p:nvSpPr>
         <p:spPr>
           <a:xfrm>
-            <a:off x="914400" y="4133087"/>
-            <a:ext cx="9966960" cy="256032"/>
+            <a:off x="914400" y="4206240"/>
+            <a:ext cx="9966960" cy="475488"/>
           </a:xfrm>
           <a:prstGeom prst="rect">
             <a:avLst/>
@@ -13986,7 +14551,7 @@
               <a:spcAft>
                 <a:spcPts val="0"/>
               </a:spcAft>
-              <a:defRPr sz="1200" b="0">
+              <a:defRPr sz="1000" b="0">
                 <a:solidFill>
                   <a:srgbClr val="225B9B"/>
                 </a:solidFill>
@@ -14007,7 +14572,7 @@
         </p:nvSpPr>
         <p:spPr>
           <a:xfrm>
-            <a:off x="914400" y="4828032"/>
+            <a:off x="914400" y="5010912"/>
             <a:ext cx="3840480" cy="256032"/>
           </a:xfrm>
           <a:prstGeom prst="rect">
@@ -14046,8 +14611,8 @@
         </p:nvSpPr>
         <p:spPr>
           <a:xfrm>
-            <a:off x="914400" y="5138928"/>
-            <a:ext cx="9966960" cy="256032"/>
+            <a:off x="914400" y="5285232"/>
+            <a:ext cx="9966960" cy="475488"/>
           </a:xfrm>
           <a:prstGeom prst="rect">
             <a:avLst/>
@@ -14064,7 +14629,7 @@
               <a:spcAft>
                 <a:spcPts val="0"/>
               </a:spcAft>
-              <a:defRPr sz="1200" b="0">
+              <a:defRPr sz="1000" b="0">
                 <a:solidFill>
                   <a:srgbClr val="225B9B"/>
                 </a:solidFill>
@@ -16737,8 +17302,8 @@
         </p:nvSpPr>
         <p:spPr>
           <a:xfrm>
-            <a:off x="658368" y="1682496"/>
-            <a:ext cx="10972800" cy="347472"/>
+            <a:off x="658368" y="1627632"/>
+            <a:ext cx="10972800" cy="256032"/>
           </a:xfrm>
           <a:prstGeom prst="rect">
             <a:avLst/>
@@ -16755,7 +17320,7 @@
               <a:spcAft>
                 <a:spcPts val="0"/>
               </a:spcAft>
-              <a:defRPr sz="1700" b="1">
+              <a:defRPr sz="1500" b="1">
                 <a:solidFill>
                   <a:srgbClr val="122C4E"/>
                 </a:solidFill>
@@ -16776,8 +17341,8 @@
         </p:nvSpPr>
         <p:spPr>
           <a:xfrm>
-            <a:off x="658368" y="2103120"/>
-            <a:ext cx="10972800" cy="493776"/>
+            <a:off x="658368" y="1956816"/>
+            <a:ext cx="10972800" cy="603504"/>
           </a:xfrm>
           <a:prstGeom prst="rect">
             <a:avLst/>
@@ -16821,7 +17386,11 @@
               </a:defRPr>
             </a:pPr>
             <a:r>
-              <a:t>파일 생성/열기: mkdir -p ~/agv_ws/src/agv_control/agv_control    &amp;&amp;    nano ~/agv_ws/src/agv_control/agv_control/counter_publisher.py</a:t>
+              <a:t>파일 생성: mkdir -p ~/agv_ws/src/agv_control/agv_control</a:t>
+            </a:r>
+            <a:br/>
+            <a:r>
+              <a:t>파일 열기: nano ~/agv_ws/src/agv_control/agv_control/counter_publisher.py</a:t>
             </a:r>
           </a:p>
         </p:txBody>
@@ -16834,8 +17403,8 @@
         </p:nvSpPr>
         <p:spPr>
           <a:xfrm>
-            <a:off x="658368" y="2761488"/>
-            <a:ext cx="10972800" cy="3383280"/>
+            <a:off x="658368" y="2706624"/>
+            <a:ext cx="10972800" cy="3364992"/>
           </a:xfrm>
           <a:prstGeom prst="rect">
             <a:avLst/>
@@ -16916,14 +17485,6 @@
               <a:t>        self.create_timer(1.0, self.publish_counter)</a:t>
             </a:r>
             <a:br/>
-            <a:br/>
-            <a:r>
-              <a:t>    def publish_counter(self):</a:t>
-            </a:r>
-            <a:br/>
-            <a:r>
-              <a:t>        message = Int32(data=self.value)</a:t>
-            </a:r>
           </a:p>
         </p:txBody>
       </p:sp>
@@ -16935,7 +17496,7 @@
         </p:nvSpPr>
         <p:spPr>
           <a:xfrm>
-            <a:off x="749808" y="6199632"/>
+            <a:off x="749808" y="6181344"/>
             <a:ext cx="10789920" cy="201168"/>
           </a:xfrm>
           <a:prstGeom prst="rect">

--- a/blocks/A_ros2_basics/M03_pubsub/M03_Publisher_Subscriber_직접_작성.pptx
+++ b/blocks/A_ros2_basics/M03_pubsub/M03_Publisher_Subscriber_직접_작성.pptx
@@ -618,12 +618,12 @@
           <a:lstStyle/>
           <a:p>
             <a:r>
-              <a:t>[설명] ~/agv_ws/src/agv_control/agv_control/counter_publisher.py의 전체 파일을 2/3 구간으로 작성한다.</a:t>
-            </a:r>
-          </a:p>
-          <a:p>
-            <a:r>
-              <a:t>[실행] nano ~/agv_ws/src/agv_control/agv_control/counter_publisher.py</a:t>
+              <a:t>[설명] ~/ros2_curri/agv_ws/src/agv_control/agv_control/counter_publisher.py의 전체 파일을 2/3 구간으로 작성한다.</a:t>
+            </a:r>
+          </a:p>
+          <a:p>
+            <a:r>
+              <a:t>[실행] nano ~/ros2_curri/agv_ws/src/agv_control/agv_control/counter_publisher.py</a:t>
             </a:r>
           </a:p>
           <a:p>
@@ -708,12 +708,12 @@
           <a:lstStyle/>
           <a:p>
             <a:r>
-              <a:t>[설명] ~/agv_ws/src/agv_control/agv_control/counter_publisher.py의 전체 파일을 3/3 구간으로 작성한다.</a:t>
-            </a:r>
-          </a:p>
-          <a:p>
-            <a:r>
-              <a:t>[실행] nano ~/agv_ws/src/agv_control/agv_control/counter_publisher.py</a:t>
+              <a:t>[설명] ~/ros2_curri/agv_ws/src/agv_control/agv_control/counter_publisher.py의 전체 파일을 3/3 구간으로 작성한다.</a:t>
+            </a:r>
+          </a:p>
+          <a:p>
+            <a:r>
+              <a:t>[실행] nano ~/ros2_curri/agv_ws/src/agv_control/agv_control/counter_publisher.py</a:t>
             </a:r>
           </a:p>
           <a:p>
@@ -798,12 +798,12 @@
           <a:lstStyle/>
           <a:p>
             <a:r>
-              <a:t>[설명] ~/agv_ws/src/agv_control/agv_control/counter_monitor.py의 전체 파일을 1/2 구간으로 작성한다.</a:t>
-            </a:r>
-          </a:p>
-          <a:p>
-            <a:r>
-              <a:t>[실행] nano ~/agv_ws/src/agv_control/agv_control/counter_monitor.py</a:t>
+              <a:t>[설명] ~/ros2_curri/agv_ws/src/agv_control/agv_control/counter_monitor.py의 전체 파일을 1/2 구간으로 작성한다.</a:t>
+            </a:r>
+          </a:p>
+          <a:p>
+            <a:r>
+              <a:t>[실행] nano ~/ros2_curri/agv_ws/src/agv_control/agv_control/counter_monitor.py</a:t>
             </a:r>
           </a:p>
           <a:p>
@@ -888,12 +888,12 @@
           <a:lstStyle/>
           <a:p>
             <a:r>
-              <a:t>[설명] ~/agv_ws/src/agv_control/agv_control/counter_monitor.py의 전체 파일을 2/2 구간으로 작성한다.</a:t>
-            </a:r>
-          </a:p>
-          <a:p>
-            <a:r>
-              <a:t>[실행] nano ~/agv_ws/src/agv_control/agv_control/counter_monitor.py</a:t>
+              <a:t>[설명] ~/ros2_curri/agv_ws/src/agv_control/agv_control/counter_monitor.py의 전체 파일을 2/2 구간으로 작성한다.</a:t>
+            </a:r>
+          </a:p>
+          <a:p>
+            <a:r>
+              <a:t>[실행] nano ~/ros2_curri/agv_ws/src/agv_control/agv_control/counter_monitor.py</a:t>
             </a:r>
           </a:p>
           <a:p>
@@ -978,12 +978,12 @@
           <a:lstStyle/>
           <a:p>
             <a:r>
-              <a:t>[설명] ~/agv_ws/src/agv_control/agv_control/cmd_test_node.py의 전체 파일을 1/3 구간으로 작성한다.</a:t>
-            </a:r>
-          </a:p>
-          <a:p>
-            <a:r>
-              <a:t>[실행] nano ~/agv_ws/src/agv_control/agv_control/cmd_test_node.py</a:t>
+              <a:t>[설명] ~/ros2_curri/agv_ws/src/agv_control/agv_control/cmd_test_node.py의 전체 파일을 1/3 구간으로 작성한다.</a:t>
+            </a:r>
+          </a:p>
+          <a:p>
+            <a:r>
+              <a:t>[실행] nano ~/ros2_curri/agv_ws/src/agv_control/agv_control/cmd_test_node.py</a:t>
             </a:r>
           </a:p>
           <a:p>
@@ -1068,12 +1068,12 @@
           <a:lstStyle/>
           <a:p>
             <a:r>
-              <a:t>[설명] ~/agv_ws/src/agv_control/agv_control/cmd_test_node.py의 전체 파일을 2/3 구간으로 작성한다.</a:t>
-            </a:r>
-          </a:p>
-          <a:p>
-            <a:r>
-              <a:t>[실행] nano ~/agv_ws/src/agv_control/agv_control/cmd_test_node.py</a:t>
+              <a:t>[설명] ~/ros2_curri/agv_ws/src/agv_control/agv_control/cmd_test_node.py의 전체 파일을 2/3 구간으로 작성한다.</a:t>
+            </a:r>
+          </a:p>
+          <a:p>
+            <a:r>
+              <a:t>[실행] nano ~/ros2_curri/agv_ws/src/agv_control/agv_control/cmd_test_node.py</a:t>
             </a:r>
           </a:p>
           <a:p>
@@ -1158,12 +1158,12 @@
           <a:lstStyle/>
           <a:p>
             <a:r>
-              <a:t>[설명] ~/agv_ws/src/agv_control/agv_control/cmd_test_node.py의 전체 파일을 3/3 구간으로 작성한다.</a:t>
-            </a:r>
-          </a:p>
-          <a:p>
-            <a:r>
-              <a:t>[실행] nano ~/agv_ws/src/agv_control/agv_control/cmd_test_node.py</a:t>
+              <a:t>[설명] ~/ros2_curri/agv_ws/src/agv_control/agv_control/cmd_test_node.py의 전체 파일을 3/3 구간으로 작성한다.</a:t>
+            </a:r>
+          </a:p>
+          <a:p>
+            <a:r>
+              <a:t>[실행] nano ~/ros2_curri/agv_ws/src/agv_control/agv_control/cmd_test_node.py</a:t>
             </a:r>
           </a:p>
           <a:p>
@@ -1248,12 +1248,12 @@
           <a:lstStyle/>
           <a:p>
             <a:r>
-              <a:t>[설명] ~/agv_ws/src/agv_control/agv_control/velocity_monitor.py의 전체 파일을 1/3 구간으로 작성한다.</a:t>
-            </a:r>
-          </a:p>
-          <a:p>
-            <a:r>
-              <a:t>[실행] nano ~/agv_ws/src/agv_control/agv_control/velocity_monitor.py</a:t>
+              <a:t>[설명] ~/ros2_curri/agv_ws/src/agv_control/agv_control/velocity_monitor.py의 전체 파일을 1/3 구간으로 작성한다.</a:t>
+            </a:r>
+          </a:p>
+          <a:p>
+            <a:r>
+              <a:t>[실행] nano ~/ros2_curri/agv_ws/src/agv_control/agv_control/velocity_monitor.py</a:t>
             </a:r>
           </a:p>
           <a:p>
@@ -1338,12 +1338,12 @@
           <a:lstStyle/>
           <a:p>
             <a:r>
-              <a:t>[설명] ~/agv_ws/src/agv_control/agv_control/velocity_monitor.py의 전체 파일을 2/3 구간으로 작성한다.</a:t>
-            </a:r>
-          </a:p>
-          <a:p>
-            <a:r>
-              <a:t>[실행] nano ~/agv_ws/src/agv_control/agv_control/velocity_monitor.py</a:t>
+              <a:t>[설명] ~/ros2_curri/agv_ws/src/agv_control/agv_control/velocity_monitor.py의 전체 파일을 2/3 구간으로 작성한다.</a:t>
+            </a:r>
+          </a:p>
+          <a:p>
+            <a:r>
+              <a:t>[실행] nano ~/ros2_curri/agv_ws/src/agv_control/agv_control/velocity_monitor.py</a:t>
             </a:r>
           </a:p>
           <a:p>
@@ -1428,12 +1428,12 @@
           <a:lstStyle/>
           <a:p>
             <a:r>
-              <a:t>[설명] ~/agv_ws/src/agv_control/agv_control/velocity_monitor.py의 전체 파일을 3/3 구간으로 작성한다.</a:t>
-            </a:r>
-          </a:p>
-          <a:p>
-            <a:r>
-              <a:t>[실행] nano ~/agv_ws/src/agv_control/agv_control/velocity_monitor.py</a:t>
+              <a:t>[설명] ~/ros2_curri/agv_ws/src/agv_control/agv_control/velocity_monitor.py의 전체 파일을 3/3 구간으로 작성한다.</a:t>
+            </a:r>
+          </a:p>
+          <a:p>
+            <a:r>
+              <a:t>[실행] nano ~/ros2_curri/agv_ws/src/agv_control/agv_control/velocity_monitor.py</a:t>
             </a:r>
           </a:p>
           <a:p>
@@ -1608,12 +1608,12 @@
           <a:lstStyle/>
           <a:p>
             <a:r>
-              <a:t>[설명] ~/agv_ws/src/agv_control/setup.py의 전체 파일을 1/1 구간으로 작성한다.</a:t>
-            </a:r>
-          </a:p>
-          <a:p>
-            <a:r>
-              <a:t>[실행] nano ~/agv_ws/src/agv_control/setup.py</a:t>
+              <a:t>[설명] ~/ros2_curri/agv_ws/src/agv_control/setup.py의 전체 파일을 1/1 구간으로 작성한다.</a:t>
+            </a:r>
+          </a:p>
+          <a:p>
+            <a:r>
+              <a:t>[실행] nano ~/ros2_curri/agv_ws/src/agv_control/setup.py</a:t>
             </a:r>
           </a:p>
           <a:p>
@@ -1703,7 +1703,7 @@
           </a:p>
           <a:p>
             <a:r>
-              <a:t>[실행] cd ~/agv_ws &amp;&amp; source install/setup.bash</a:t>
+              <a:t>[실행] cd ~/ros2_curri/agv_ws &amp;&amp; source install/setup.bash</a:t>
             </a:r>
           </a:p>
           <a:p>
@@ -2353,7 +2353,7 @@
           </a:p>
           <a:p>
             <a:r>
-              <a:t>[실행] pwd; source /opt/ros/jazzy/setup.bash; source ~/agv_ws/install/setup.bash</a:t>
+              <a:t>[실행] pwd; source /opt/ros/jazzy/setup.bash; source ~/ros2_curri/agv_ws/install/setup.bash</a:t>
             </a:r>
           </a:p>
           <a:p>
@@ -2713,7 +2713,7 @@
           </a:p>
           <a:p>
             <a:r>
-              <a:t>[실행] cd ~/agv_ws</a:t>
+              <a:t>[실행] cd ~/ros2_curri/agv_ws</a:t>
             </a:r>
           </a:p>
           <a:p>
@@ -2913,12 +2913,12 @@
           <a:lstStyle/>
           <a:p>
             <a:r>
-              <a:t>[설명] ~/agv_ws/src/agv_control/agv_control/counter_publisher.py의 전체 파일을 1/3 구간으로 작성한다.</a:t>
-            </a:r>
-          </a:p>
-          <a:p>
-            <a:r>
-              <a:t>[실행] nano ~/agv_ws/src/agv_control/agv_control/counter_publisher.py</a:t>
+              <a:t>[설명] ~/ros2_curri/agv_ws/src/agv_control/agv_control/counter_publisher.py의 전체 파일을 1/3 구간으로 작성한다.</a:t>
+            </a:r>
+          </a:p>
+          <a:p>
+            <a:r>
+              <a:t>[실행] nano ~/ros2_curri/agv_ws/src/agv_control/agv_control/counter_publisher.py</a:t>
             </a:r>
           </a:p>
           <a:p>
@@ -6345,7 +6345,7 @@
               </a:defRPr>
             </a:pPr>
             <a:r>
-              <a:t>~/agv_ws/src/agv_control/agv_control/counter_publisher.py</a:t>
+              <a:t>~/ros2_curri/agv_ws/src/agv_control/agv_control/counter_publisher.py</a:t>
             </a:r>
           </a:p>
         </p:txBody>
@@ -6481,7 +6481,7 @@
               </a:defRPr>
             </a:pPr>
             <a:r>
-              <a:t>현재 단계 4/6    |    현재 폴더 ~/agv_ws    |    현재 터미널</a:t>
+              <a:t>현재 단계 4/6    |    현재 폴더 ~/ros2_curri/agv_ws    |    현재 터미널</a:t>
             </a:r>
           </a:p>
         </p:txBody>
@@ -6578,11 +6578,11 @@
               </a:defRPr>
             </a:pPr>
             <a:r>
-              <a:t>파일 생성: mkdir -p ~/agv_ws/src/agv_control/agv_control</a:t>
+              <a:t>파일 생성: mkdir -p ~/ros2_curri/agv_ws/src/agv_control/agv_control</a:t>
             </a:r>
             <a:br/>
             <a:r>
-              <a:t>파일 열기: nano ~/agv_ws/src/agv_control/agv_control/counter_publisher.py</a:t>
+              <a:t>파일 열기: nano ~/ros2_curri/agv_ws/src/agv_control/agv_control/counter_publisher.py</a:t>
             </a:r>
           </a:p>
         </p:txBody>
@@ -6816,7 +6816,7 @@
               </a:defRPr>
             </a:pPr>
             <a:r>
-              <a:t>~/agv_ws/src/agv_control/agv_control/counter_publisher.py</a:t>
+              <a:t>~/ros2_curri/agv_ws/src/agv_control/agv_control/counter_publisher.py</a:t>
             </a:r>
           </a:p>
         </p:txBody>
@@ -6952,7 +6952,7 @@
               </a:defRPr>
             </a:pPr>
             <a:r>
-              <a:t>현재 단계 5/6    |    현재 폴더 ~/agv_ws    |    현재 터미널</a:t>
+              <a:t>현재 단계 5/6    |    현재 폴더 ~/ros2_curri/agv_ws    |    현재 터미널</a:t>
             </a:r>
           </a:p>
         </p:txBody>
@@ -7049,11 +7049,11 @@
               </a:defRPr>
             </a:pPr>
             <a:r>
-              <a:t>파일 생성: mkdir -p ~/agv_ws/src/agv_control/agv_control</a:t>
+              <a:t>파일 생성: mkdir -p ~/ros2_curri/agv_ws/src/agv_control/agv_control</a:t>
             </a:r>
             <a:br/>
             <a:r>
-              <a:t>파일 열기: nano ~/agv_ws/src/agv_control/agv_control/counter_publisher.py</a:t>
+              <a:t>파일 열기: nano ~/ros2_curri/agv_ws/src/agv_control/agv_control/counter_publisher.py</a:t>
             </a:r>
           </a:p>
         </p:txBody>
@@ -7262,7 +7262,7 @@
               </a:defRPr>
             </a:pPr>
             <a:r>
-              <a:t>~/agv_ws/src/agv_control/agv_control/counter_monitor.py</a:t>
+              <a:t>~/ros2_curri/agv_ws/src/agv_control/agv_control/counter_monitor.py</a:t>
             </a:r>
           </a:p>
         </p:txBody>
@@ -7398,7 +7398,7 @@
               </a:defRPr>
             </a:pPr>
             <a:r>
-              <a:t>현재 단계 6/8    |    현재 폴더 ~/agv_ws    |    현재 터미널</a:t>
+              <a:t>현재 단계 6/8    |    현재 폴더 ~/ros2_curri/agv_ws    |    현재 터미널</a:t>
             </a:r>
           </a:p>
         </p:txBody>
@@ -7495,11 +7495,11 @@
               </a:defRPr>
             </a:pPr>
             <a:r>
-              <a:t>파일 생성: mkdir -p ~/agv_ws/src/agv_control/agv_control</a:t>
+              <a:t>파일 생성: mkdir -p ~/ros2_curri/agv_ws/src/agv_control/agv_control</a:t>
             </a:r>
             <a:br/>
             <a:r>
-              <a:t>파일 열기: nano ~/agv_ws/src/agv_control/agv_control/counter_monitor.py</a:t>
+              <a:t>파일 열기: nano ~/ros2_curri/agv_ws/src/agv_control/agv_control/counter_monitor.py</a:t>
             </a:r>
           </a:p>
         </p:txBody>
@@ -7727,7 +7727,7 @@
               </a:defRPr>
             </a:pPr>
             <a:r>
-              <a:t>~/agv_ws/src/agv_control/agv_control/counter_monitor.py</a:t>
+              <a:t>~/ros2_curri/agv_ws/src/agv_control/agv_control/counter_monitor.py</a:t>
             </a:r>
           </a:p>
         </p:txBody>
@@ -7863,7 +7863,7 @@
               </a:defRPr>
             </a:pPr>
             <a:r>
-              <a:t>현재 단계 7/8    |    현재 폴더 ~/agv_ws    |    현재 터미널</a:t>
+              <a:t>현재 단계 7/8    |    현재 폴더 ~/ros2_curri/agv_ws    |    현재 터미널</a:t>
             </a:r>
           </a:p>
         </p:txBody>
@@ -7960,11 +7960,11 @@
               </a:defRPr>
             </a:pPr>
             <a:r>
-              <a:t>파일 생성: mkdir -p ~/agv_ws/src/agv_control/agv_control</a:t>
+              <a:t>파일 생성: mkdir -p ~/ros2_curri/agv_ws/src/agv_control/agv_control</a:t>
             </a:r>
             <a:br/>
             <a:r>
-              <a:t>파일 열기: nano ~/agv_ws/src/agv_control/agv_control/counter_monitor.py</a:t>
+              <a:t>파일 열기: nano ~/ros2_curri/agv_ws/src/agv_control/agv_control/counter_monitor.py</a:t>
             </a:r>
           </a:p>
         </p:txBody>
@@ -8198,7 +8198,7 @@
               </a:defRPr>
             </a:pPr>
             <a:r>
-              <a:t>~/agv_ws/src/agv_control/agv_control/cmd_test_node.py</a:t>
+              <a:t>~/ros2_curri/agv_ws/src/agv_control/agv_control/cmd_test_node.py</a:t>
             </a:r>
           </a:p>
         </p:txBody>
@@ -8334,7 +8334,7 @@
               </a:defRPr>
             </a:pPr>
             <a:r>
-              <a:t>현재 단계 8/11    |    현재 폴더 ~/agv_ws    |    현재 터미널</a:t>
+              <a:t>현재 단계 8/11    |    현재 폴더 ~/ros2_curri/agv_ws    |    현재 터미널</a:t>
             </a:r>
           </a:p>
         </p:txBody>
@@ -8431,11 +8431,11 @@
               </a:defRPr>
             </a:pPr>
             <a:r>
-              <a:t>파일 생성: mkdir -p ~/agv_ws/src/agv_control/agv_control</a:t>
+              <a:t>파일 생성: mkdir -p ~/ros2_curri/agv_ws/src/agv_control/agv_control</a:t>
             </a:r>
             <a:br/>
             <a:r>
-              <a:t>파일 열기: nano ~/agv_ws/src/agv_control/agv_control/cmd_test_node.py</a:t>
+              <a:t>파일 열기: nano ~/ros2_curri/agv_ws/src/agv_control/agv_control/cmd_test_node.py</a:t>
             </a:r>
           </a:p>
         </p:txBody>
@@ -8666,7 +8666,7 @@
               </a:defRPr>
             </a:pPr>
             <a:r>
-              <a:t>~/agv_ws/src/agv_control/agv_control/cmd_test_node.py</a:t>
+              <a:t>~/ros2_curri/agv_ws/src/agv_control/agv_control/cmd_test_node.py</a:t>
             </a:r>
           </a:p>
         </p:txBody>
@@ -8802,7 +8802,7 @@
               </a:defRPr>
             </a:pPr>
             <a:r>
-              <a:t>현재 단계 9/11    |    현재 폴더 ~/agv_ws    |    현재 터미널</a:t>
+              <a:t>현재 단계 9/11    |    현재 폴더 ~/ros2_curri/agv_ws    |    현재 터미널</a:t>
             </a:r>
           </a:p>
         </p:txBody>
@@ -8899,11 +8899,11 @@
               </a:defRPr>
             </a:pPr>
             <a:r>
-              <a:t>파일 생성: mkdir -p ~/agv_ws/src/agv_control/agv_control</a:t>
+              <a:t>파일 생성: mkdir -p ~/ros2_curri/agv_ws/src/agv_control/agv_control</a:t>
             </a:r>
             <a:br/>
             <a:r>
-              <a:t>파일 열기: nano ~/agv_ws/src/agv_control/agv_control/cmd_test_node.py</a:t>
+              <a:t>파일 열기: nano ~/ros2_curri/agv_ws/src/agv_control/agv_control/cmd_test_node.py</a:t>
             </a:r>
           </a:p>
         </p:txBody>
@@ -9137,7 +9137,7 @@
               </a:defRPr>
             </a:pPr>
             <a:r>
-              <a:t>~/agv_ws/src/agv_control/agv_control/cmd_test_node.py</a:t>
+              <a:t>~/ros2_curri/agv_ws/src/agv_control/agv_control/cmd_test_node.py</a:t>
             </a:r>
           </a:p>
         </p:txBody>
@@ -9273,7 +9273,7 @@
               </a:defRPr>
             </a:pPr>
             <a:r>
-              <a:t>현재 단계 10/11    |    현재 폴더 ~/agv_ws    |    현재 터미널</a:t>
+              <a:t>현재 단계 10/11    |    현재 폴더 ~/ros2_curri/agv_ws    |    현재 터미널</a:t>
             </a:r>
           </a:p>
         </p:txBody>
@@ -9370,11 +9370,11 @@
               </a:defRPr>
             </a:pPr>
             <a:r>
-              <a:t>파일 생성: mkdir -p ~/agv_ws/src/agv_control/agv_control</a:t>
+              <a:t>파일 생성: mkdir -p ~/ros2_curri/agv_ws/src/agv_control/agv_control</a:t>
             </a:r>
             <a:br/>
             <a:r>
-              <a:t>파일 열기: nano ~/agv_ws/src/agv_control/agv_control/cmd_test_node.py</a:t>
+              <a:t>파일 열기: nano ~/ros2_curri/agv_ws/src/agv_control/agv_control/cmd_test_node.py</a:t>
             </a:r>
           </a:p>
         </p:txBody>
@@ -9608,7 +9608,7 @@
               </a:defRPr>
             </a:pPr>
             <a:r>
-              <a:t>~/agv_ws/src/agv_control/agv_control/velocity_monitor.py</a:t>
+              <a:t>~/ros2_curri/agv_ws/src/agv_control/agv_control/velocity_monitor.py</a:t>
             </a:r>
           </a:p>
         </p:txBody>
@@ -9744,7 +9744,7 @@
               </a:defRPr>
             </a:pPr>
             <a:r>
-              <a:t>현재 단계 11/14    |    현재 폴더 ~/agv_ws    |    현재 터미널</a:t>
+              <a:t>현재 단계 11/14    |    현재 폴더 ~/ros2_curri/agv_ws    |    현재 터미널</a:t>
             </a:r>
           </a:p>
         </p:txBody>
@@ -9841,11 +9841,11 @@
               </a:defRPr>
             </a:pPr>
             <a:r>
-              <a:t>파일 생성: mkdir -p ~/agv_ws/src/agv_control/agv_control</a:t>
+              <a:t>파일 생성: mkdir -p ~/ros2_curri/agv_ws/src/agv_control/agv_control</a:t>
             </a:r>
             <a:br/>
             <a:r>
-              <a:t>파일 열기: nano ~/agv_ws/src/agv_control/agv_control/velocity_monitor.py</a:t>
+              <a:t>파일 열기: nano ~/ros2_curri/agv_ws/src/agv_control/agv_control/velocity_monitor.py</a:t>
             </a:r>
           </a:p>
         </p:txBody>
@@ -10073,7 +10073,7 @@
               </a:defRPr>
             </a:pPr>
             <a:r>
-              <a:t>~/agv_ws/src/agv_control/agv_control/velocity_monitor.py</a:t>
+              <a:t>~/ros2_curri/agv_ws/src/agv_control/agv_control/velocity_monitor.py</a:t>
             </a:r>
           </a:p>
         </p:txBody>
@@ -10209,7 +10209,7 @@
               </a:defRPr>
             </a:pPr>
             <a:r>
-              <a:t>현재 단계 12/14    |    현재 폴더 ~/agv_ws    |    현재 터미널</a:t>
+              <a:t>현재 단계 12/14    |    현재 폴더 ~/ros2_curri/agv_ws    |    현재 터미널</a:t>
             </a:r>
           </a:p>
         </p:txBody>
@@ -10306,11 +10306,11 @@
               </a:defRPr>
             </a:pPr>
             <a:r>
-              <a:t>파일 생성: mkdir -p ~/agv_ws/src/agv_control/agv_control</a:t>
+              <a:t>파일 생성: mkdir -p ~/ros2_curri/agv_ws/src/agv_control/agv_control</a:t>
             </a:r>
             <a:br/>
             <a:r>
-              <a:t>파일 열기: nano ~/agv_ws/src/agv_control/agv_control/velocity_monitor.py</a:t>
+              <a:t>파일 열기: nano ~/ros2_curri/agv_ws/src/agv_control/agv_control/velocity_monitor.py</a:t>
             </a:r>
           </a:p>
         </p:txBody>
@@ -10544,7 +10544,7 @@
               </a:defRPr>
             </a:pPr>
             <a:r>
-              <a:t>~/agv_ws/src/agv_control/agv_control/velocity_monitor.py</a:t>
+              <a:t>~/ros2_curri/agv_ws/src/agv_control/agv_control/velocity_monitor.py</a:t>
             </a:r>
           </a:p>
         </p:txBody>
@@ -10680,7 +10680,7 @@
               </a:defRPr>
             </a:pPr>
             <a:r>
-              <a:t>현재 단계 13/14    |    현재 폴더 ~/agv_ws    |    현재 터미널</a:t>
+              <a:t>현재 단계 13/14    |    현재 폴더 ~/ros2_curri/agv_ws    |    현재 터미널</a:t>
             </a:r>
           </a:p>
         </p:txBody>
@@ -10777,11 +10777,11 @@
               </a:defRPr>
             </a:pPr>
             <a:r>
-              <a:t>파일 생성: mkdir -p ~/agv_ws/src/agv_control/agv_control</a:t>
+              <a:t>파일 생성: mkdir -p ~/ros2_curri/agv_ws/src/agv_control/agv_control</a:t>
             </a:r>
             <a:br/>
             <a:r>
-              <a:t>파일 열기: nano ~/agv_ws/src/agv_control/agv_control/velocity_monitor.py</a:t>
+              <a:t>파일 열기: nano ~/ros2_curri/agv_ws/src/agv_control/agv_control/velocity_monitor.py</a:t>
             </a:r>
           </a:p>
         </p:txBody>
@@ -11435,7 +11435,7 @@
               </a:defRPr>
             </a:pPr>
             <a:r>
-              <a:t>~/agv_ws/src/agv_control/setup.py</a:t>
+              <a:t>~/ros2_curri/agv_ws/src/agv_control/setup.py</a:t>
             </a:r>
           </a:p>
         </p:txBody>
@@ -11571,7 +11571,7 @@
               </a:defRPr>
             </a:pPr>
             <a:r>
-              <a:t>현재 단계 14/15    |    현재 폴더 ~/agv_ws    |    현재 터미널</a:t>
+              <a:t>현재 단계 14/15    |    현재 폴더 ~/ros2_curri/agv_ws    |    현재 터미널</a:t>
             </a:r>
           </a:p>
         </p:txBody>
@@ -11668,11 +11668,11 @@
               </a:defRPr>
             </a:pPr>
             <a:r>
-              <a:t>파일 생성: mkdir -p ~/agv_ws/src/agv_control</a:t>
+              <a:t>파일 생성: mkdir -p ~/ros2_curri/agv_ws/src/agv_control</a:t>
             </a:r>
             <a:br/>
             <a:r>
-              <a:t>파일 열기: nano ~/agv_ws/src/agv_control/setup.py</a:t>
+              <a:t>파일 열기: nano ~/ros2_curri/agv_ws/src/agv_control/setup.py</a:t>
             </a:r>
           </a:p>
         </p:txBody>
@@ -12045,7 +12045,7 @@
               </a:defRPr>
             </a:pPr>
             <a:r>
-              <a:t>현재 단계 실행    |    현재 폴더 ~/agv_ws    |    현재 터미널</a:t>
+              <a:t>현재 단계 실행    |    현재 폴더 ~/ros2_curri/agv_ws    |    현재 터미널</a:t>
             </a:r>
           </a:p>
         </p:txBody>
@@ -12103,7 +12103,7 @@
               </a:defRPr>
             </a:pPr>
             <a:r>
-              <a:t>cd ~/agv_ws &amp;&amp; source install/setup.bash</a:t>
+              <a:t>cd ~/ros2_curri/agv_ws &amp;&amp; source install/setup.bash</a:t>
             </a:r>
             <a:br/>
             <a:r>
@@ -12658,7 +12658,7 @@
               </a:defRPr>
             </a:pPr>
             <a:r>
-              <a:t>현재 단계 검증    |    현재 폴더 ~/agv_ws    |    현재 터미널</a:t>
+              <a:t>현재 단계 검증    |    현재 폴더 ~/ros2_curri/agv_ws    |    현재 터미널</a:t>
             </a:r>
           </a:p>
         </p:txBody>
@@ -13065,7 +13065,7 @@
               </a:defRPr>
             </a:pPr>
             <a:r>
-              <a:t>현재 단계 오류 대응    |    현재 폴더 ~/agv_ws    |    현재 터미널</a:t>
+              <a:t>현재 단계 오류 대응    |    현재 폴더 ~/ros2_curri/agv_ws    |    현재 터미널</a:t>
             </a:r>
           </a:p>
         </p:txBody>
@@ -13590,7 +13590,7 @@
               </a:defRPr>
             </a:pPr>
             <a:r>
-              <a:t>현재 단계 미니 실습    |    현재 폴더 ~/agv_ws    |    현재 터미널</a:t>
+              <a:t>현재 단계 미니 실습    |    현재 폴더 ~/ros2_curri/agv_ws    |    현재 터미널</a:t>
             </a:r>
           </a:p>
         </p:txBody>
@@ -13919,7 +13919,7 @@
               </a:defRPr>
             </a:pPr>
             <a:r>
-              <a:t>현재 단계 체크포인트    |    현재 폴더 ~/agv_ws    |    현재 터미널</a:t>
+              <a:t>현재 단계 체크포인트    |    현재 폴더 ~/ros2_curri/agv_ws    |    현재 터미널</a:t>
             </a:r>
           </a:p>
         </p:txBody>
@@ -14869,7 +14869,7 @@
               </a:defRPr>
             </a:pPr>
             <a:r>
-              <a:t>현재 단계 시작    |    현재 폴더 ~/agv_ws    |    현재 터미널</a:t>
+              <a:t>현재 단계 시작    |    현재 폴더 ~/ros2_curri/agv_ws    |    현재 터미널</a:t>
             </a:r>
           </a:p>
         </p:txBody>
@@ -14985,7 +14985,7 @@
               </a:defRPr>
             </a:pPr>
             <a:r>
-              <a:t>• 현재 폴더: ~/agv_ws</a:t>
+              <a:t>• 현재 폴더: ~/ros2_curri/agv_ws</a:t>
             </a:r>
           </a:p>
           <a:p>
@@ -15056,7 +15056,7 @@
               </a:defRPr>
             </a:pPr>
             <a:r>
-              <a:t>확인: pwd가 ~/agv_ws이고, 이전 모듈의 완료 조건을 한 문장으로 설명할 수 있으면 시작합니다.</a:t>
+              <a:t>확인: pwd가 ~/ros2_curri/agv_ws이고, 이전 모듈의 완료 조건을 한 문장으로 설명할 수 있으면 시작합니다.</a:t>
             </a:r>
           </a:p>
         </p:txBody>
@@ -16086,7 +16086,7 @@
               </a:defRPr>
             </a:pPr>
             <a:r>
-              <a:t>~/agv_ws/src/</a:t>
+              <a:t>~/ros2_curri/agv_ws/src/</a:t>
             </a:r>
             <a:br/>
             <a:r>
@@ -16377,7 +16377,7 @@
               </a:defRPr>
             </a:pPr>
             <a:r>
-              <a:t>현재 단계 1/2    |    현재 폴더 ~/agv_ws    |    현재 터미널</a:t>
+              <a:t>현재 단계 1/2    |    현재 폴더 ~/ros2_curri/agv_ws    |    현재 터미널</a:t>
             </a:r>
           </a:p>
         </p:txBody>
@@ -16513,7 +16513,7 @@
               </a:defRPr>
             </a:pPr>
             <a:r>
-              <a:t>cd ~/agv_ws</a:t>
+              <a:t>cd ~/ros2_curri/agv_ws</a:t>
             </a:r>
             <a:br/>
             <a:r>
@@ -16831,7 +16831,7 @@
               </a:defRPr>
             </a:pPr>
             <a:r>
-              <a:t>현재 단계 2/2    |    현재 폴더 ~/agv_ws    |    현재 터미널</a:t>
+              <a:t>현재 단계 2/2    |    현재 폴더 ~/ros2_curri/agv_ws    |    현재 터미널</a:t>
             </a:r>
           </a:p>
         </p:txBody>
@@ -17153,7 +17153,7 @@
               </a:defRPr>
             </a:pPr>
             <a:r>
-              <a:t>~/agv_ws/src/agv_control/agv_control/counter_publisher.py</a:t>
+              <a:t>~/ros2_curri/agv_ws/src/agv_control/agv_control/counter_publisher.py</a:t>
             </a:r>
           </a:p>
         </p:txBody>
@@ -17289,7 +17289,7 @@
               </a:defRPr>
             </a:pPr>
             <a:r>
-              <a:t>현재 단계 3/6    |    현재 폴더 ~/agv_ws    |    현재 터미널</a:t>
+              <a:t>현재 단계 3/6    |    현재 폴더 ~/ros2_curri/agv_ws    |    현재 터미널</a:t>
             </a:r>
           </a:p>
         </p:txBody>
@@ -17386,11 +17386,11 @@
               </a:defRPr>
             </a:pPr>
             <a:r>
-              <a:t>파일 생성: mkdir -p ~/agv_ws/src/agv_control/agv_control</a:t>
+              <a:t>파일 생성: mkdir -p ~/ros2_curri/agv_ws/src/agv_control/agv_control</a:t>
             </a:r>
             <a:br/>
             <a:r>
-              <a:t>파일 열기: nano ~/agv_ws/src/agv_control/agv_control/counter_publisher.py</a:t>
+              <a:t>파일 열기: nano ~/ros2_curri/agv_ws/src/agv_control/agv_control/counter_publisher.py</a:t>
             </a:r>
           </a:p>
         </p:txBody>

--- a/blocks/A_ros2_basics/M03_pubsub/M03_Publisher_Subscriber_직접_작성.pptx
+++ b/blocks/A_ros2_basics/M03_pubsub/M03_Publisher_Subscriber_직접_작성.pptx
@@ -32,6 +32,9 @@
     <p:sldId id="280" r:id="rId32"/>
     <p:sldId id="281" r:id="rId33"/>
     <p:sldId id="282" r:id="rId34"/>
+    <p:sldId id="283" r:id="rId35"/>
+    <p:sldId id="284" r:id="rId36"/>
+    <p:sldId id="285" r:id="rId37"/>
   </p:sldIdLst>
   <p:sldSz cx="12191999" cy="6858000" type="screen4x3"/>
   <p:notesSz cx="6858000" cy="9144000"/>
@@ -618,17 +621,27 @@
           <a:lstStyle/>
           <a:p>
             <a:r>
-              <a:t>[설명] ~/ros2_curri/agv_ws/src/agv_control/agv_control/counter_publisher.py의 전체 파일을 2/3 구간으로 작성한다.</a:t>
-            </a:r>
-          </a:p>
-          <a:p>
-            <a:r>
-              <a:t>[실행] nano ~/ros2_curri/agv_ws/src/agv_control/agv_control/counter_publisher.py</a:t>
-            </a:r>
-          </a:p>
-          <a:p>
-            <a:r>
-              <a:t>[확인] 코드를 저장하고 다음 코드 슬라이드 또는 build 단계로 이동한다.</a:t>
+              <a:t>[설명] ros2 run은 setup.py에 등록된 실행 이름을 사용한다.</a:t>
+            </a:r>
+          </a:p>
+          <a:p>
+            <a:r>
+              <a:t>[실행] cd ~/ros2_curri/agv_ws</a:t>
+            </a:r>
+          </a:p>
+          <a:p>
+            <a:r>
+              <a:t>colcon build --symlink-install --packages-select agv_control</a:t>
+            </a:r>
+          </a:p>
+          <a:p>
+            <a:r>
+              <a:t>source install/setup.bash</a:t>
+            </a:r>
+          </a:p>
+          <a:p>
+            <a:r>
+              <a:t>[확인] 명령 출력에서 슬라이드의 확인 항목을 찾는다.</a:t>
             </a:r>
           </a:p>
           <a:p>
@@ -638,7 +651,7 @@
           </a:p>
           <a:p>
             <a:r>
-              <a:t>[오류] 들여쓰기·XML 태그·따옴표가 슬라이드와 정확히 같은지 확인한다.</a:t>
+              <a:t>[오류] 오류가 나면 현재 폴더, source, 파일 경로를 먼저 확인한다.</a:t>
             </a:r>
           </a:p>
         </p:txBody>
@@ -708,17 +721,32 @@
           <a:lstStyle/>
           <a:p>
             <a:r>
-              <a:t>[설명] ~/ros2_curri/agv_ws/src/agv_control/agv_control/counter_publisher.py의 전체 파일을 3/3 구간으로 작성한다.</a:t>
-            </a:r>
-          </a:p>
-          <a:p>
-            <a:r>
-              <a:t>[실행] nano ~/ros2_curri/agv_ws/src/agv_control/agv_control/counter_publisher.py</a:t>
-            </a:r>
-          </a:p>
-          <a:p>
-            <a:r>
-              <a:t>[확인] 코드를 저장하고 다음 코드 슬라이드 또는 build 단계로 이동한다.</a:t>
+              <a:t>[설명] publisher 출력과 monitor 수신을 분리해 확인한다.</a:t>
+            </a:r>
+          </a:p>
+          <a:p>
+            <a:r>
+              <a:t>[실행] # 터미널 1</a:t>
+            </a:r>
+          </a:p>
+          <a:p>
+            <a:r>
+              <a:t>ros2 run agv_control counter_publisher</a:t>
+            </a:r>
+          </a:p>
+          <a:p>
+            <a:r>
+              <a:t># 터미널 2</a:t>
+            </a:r>
+          </a:p>
+          <a:p>
+            <a:r>
+              <a:t>ros2 run agv_control counter_monitor</a:t>
+            </a:r>
+          </a:p>
+          <a:p>
+            <a:r>
+              <a:t>[확인] 명령 출력에서 슬라이드의 확인 항목을 찾는다.</a:t>
             </a:r>
           </a:p>
           <a:p>
@@ -728,7 +756,7 @@
           </a:p>
           <a:p>
             <a:r>
-              <a:t>[오류] 들여쓰기·XML 태그·따옴표가 슬라이드와 정확히 같은지 확인한다.</a:t>
+              <a:t>[오류] 오류가 나면 현재 폴더, source, 파일 경로를 먼저 확인한다.</a:t>
             </a:r>
           </a:p>
         </p:txBody>
@@ -798,12 +826,12 @@
           <a:lstStyle/>
           <a:p>
             <a:r>
-              <a:t>[설명] ~/ros2_curri/agv_ws/src/agv_control/agv_control/counter_monitor.py의 전체 파일을 1/2 구간으로 작성한다.</a:t>
-            </a:r>
-          </a:p>
-          <a:p>
-            <a:r>
-              <a:t>[실행] nano ~/ros2_curri/agv_ws/src/agv_control/agv_control/counter_monitor.py</a:t>
+              <a:t>[설명] ~/ros2_curri/agv_ws/src/agv_control/agv_control/counter_publisher.py의 전체 파일을 1/3 구간으로 작성한다.</a:t>
+            </a:r>
+          </a:p>
+          <a:p>
+            <a:r>
+              <a:t>[실행] nano ~/ros2_curri/agv_ws/src/agv_control/agv_control/counter_publisher.py</a:t>
             </a:r>
           </a:p>
           <a:p>
@@ -888,12 +916,12 @@
           <a:lstStyle/>
           <a:p>
             <a:r>
-              <a:t>[설명] ~/ros2_curri/agv_ws/src/agv_control/agv_control/counter_monitor.py의 전체 파일을 2/2 구간으로 작성한다.</a:t>
-            </a:r>
-          </a:p>
-          <a:p>
-            <a:r>
-              <a:t>[실행] nano ~/ros2_curri/agv_ws/src/agv_control/agv_control/counter_monitor.py</a:t>
+              <a:t>[설명] ~/ros2_curri/agv_ws/src/agv_control/agv_control/counter_publisher.py의 전체 파일을 2/3 구간으로 작성한다.</a:t>
+            </a:r>
+          </a:p>
+          <a:p>
+            <a:r>
+              <a:t>[실행] nano ~/ros2_curri/agv_ws/src/agv_control/agv_control/counter_publisher.py</a:t>
             </a:r>
           </a:p>
           <a:p>
@@ -978,12 +1006,12 @@
           <a:lstStyle/>
           <a:p>
             <a:r>
-              <a:t>[설명] ~/ros2_curri/agv_ws/src/agv_control/agv_control/cmd_test_node.py의 전체 파일을 1/3 구간으로 작성한다.</a:t>
-            </a:r>
-          </a:p>
-          <a:p>
-            <a:r>
-              <a:t>[실행] nano ~/ros2_curri/agv_ws/src/agv_control/agv_control/cmd_test_node.py</a:t>
+              <a:t>[설명] ~/ros2_curri/agv_ws/src/agv_control/agv_control/counter_publisher.py의 전체 파일을 3/3 구간으로 작성한다.</a:t>
+            </a:r>
+          </a:p>
+          <a:p>
+            <a:r>
+              <a:t>[실행] nano ~/ros2_curri/agv_ws/src/agv_control/agv_control/counter_publisher.py</a:t>
             </a:r>
           </a:p>
           <a:p>
@@ -1068,12 +1096,12 @@
           <a:lstStyle/>
           <a:p>
             <a:r>
-              <a:t>[설명] ~/ros2_curri/agv_ws/src/agv_control/agv_control/cmd_test_node.py의 전체 파일을 2/3 구간으로 작성한다.</a:t>
-            </a:r>
-          </a:p>
-          <a:p>
-            <a:r>
-              <a:t>[실행] nano ~/ros2_curri/agv_ws/src/agv_control/agv_control/cmd_test_node.py</a:t>
+              <a:t>[설명] ~/ros2_curri/agv_ws/src/agv_control/agv_control/counter_monitor.py의 전체 파일을 1/2 구간으로 작성한다.</a:t>
+            </a:r>
+          </a:p>
+          <a:p>
+            <a:r>
+              <a:t>[실행] nano ~/ros2_curri/agv_ws/src/agv_control/agv_control/counter_monitor.py</a:t>
             </a:r>
           </a:p>
           <a:p>
@@ -1158,12 +1186,12 @@
           <a:lstStyle/>
           <a:p>
             <a:r>
-              <a:t>[설명] ~/ros2_curri/agv_ws/src/agv_control/agv_control/cmd_test_node.py의 전체 파일을 3/3 구간으로 작성한다.</a:t>
-            </a:r>
-          </a:p>
-          <a:p>
-            <a:r>
-              <a:t>[실행] nano ~/ros2_curri/agv_ws/src/agv_control/agv_control/cmd_test_node.py</a:t>
+              <a:t>[설명] ~/ros2_curri/agv_ws/src/agv_control/agv_control/counter_monitor.py의 전체 파일을 2/2 구간으로 작성한다.</a:t>
+            </a:r>
+          </a:p>
+          <a:p>
+            <a:r>
+              <a:t>[실행] nano ~/ros2_curri/agv_ws/src/agv_control/agv_control/counter_monitor.py</a:t>
             </a:r>
           </a:p>
           <a:p>
@@ -1248,12 +1276,12 @@
           <a:lstStyle/>
           <a:p>
             <a:r>
-              <a:t>[설명] ~/ros2_curri/agv_ws/src/agv_control/agv_control/velocity_monitor.py의 전체 파일을 1/3 구간으로 작성한다.</a:t>
-            </a:r>
-          </a:p>
-          <a:p>
-            <a:r>
-              <a:t>[실행] nano ~/ros2_curri/agv_ws/src/agv_control/agv_control/velocity_monitor.py</a:t>
+              <a:t>[설명] ~/ros2_curri/agv_ws/src/agv_control/agv_control/cmd_test_node.py의 전체 파일을 1/3 구간으로 작성한다.</a:t>
+            </a:r>
+          </a:p>
+          <a:p>
+            <a:r>
+              <a:t>[실행] nano ~/ros2_curri/agv_ws/src/agv_control/agv_control/cmd_test_node.py</a:t>
             </a:r>
           </a:p>
           <a:p>
@@ -1338,12 +1366,12 @@
           <a:lstStyle/>
           <a:p>
             <a:r>
-              <a:t>[설명] ~/ros2_curri/agv_ws/src/agv_control/agv_control/velocity_monitor.py의 전체 파일을 2/3 구간으로 작성한다.</a:t>
-            </a:r>
-          </a:p>
-          <a:p>
-            <a:r>
-              <a:t>[실행] nano ~/ros2_curri/agv_ws/src/agv_control/agv_control/velocity_monitor.py</a:t>
+              <a:t>[설명] ~/ros2_curri/agv_ws/src/agv_control/agv_control/cmd_test_node.py의 전체 파일을 2/3 구간으로 작성한다.</a:t>
+            </a:r>
+          </a:p>
+          <a:p>
+            <a:r>
+              <a:t>[실행] nano ~/ros2_curri/agv_ws/src/agv_control/agv_control/cmd_test_node.py</a:t>
             </a:r>
           </a:p>
           <a:p>
@@ -1428,12 +1456,12 @@
           <a:lstStyle/>
           <a:p>
             <a:r>
-              <a:t>[설명] ~/ros2_curri/agv_ws/src/agv_control/agv_control/velocity_monitor.py의 전체 파일을 3/3 구간으로 작성한다.</a:t>
-            </a:r>
-          </a:p>
-          <a:p>
-            <a:r>
-              <a:t>[실행] nano ~/ros2_curri/agv_ws/src/agv_control/agv_control/velocity_monitor.py</a:t>
+              <a:t>[설명] ~/ros2_curri/agv_ws/src/agv_control/agv_control/cmd_test_node.py의 전체 파일을 3/3 구간으로 작성한다.</a:t>
+            </a:r>
+          </a:p>
+          <a:p>
+            <a:r>
+              <a:t>[실행] nano ~/ros2_curri/agv_ws/src/agv_control/agv_control/cmd_test_node.py</a:t>
             </a:r>
           </a:p>
           <a:p>
@@ -1608,12 +1636,12 @@
           <a:lstStyle/>
           <a:p>
             <a:r>
-              <a:t>[설명] ~/ros2_curri/agv_ws/src/agv_control/setup.py의 전체 파일을 1/1 구간으로 작성한다.</a:t>
-            </a:r>
-          </a:p>
-          <a:p>
-            <a:r>
-              <a:t>[실행] nano ~/ros2_curri/agv_ws/src/agv_control/setup.py</a:t>
+              <a:t>[설명] ~/ros2_curri/agv_ws/src/agv_control/agv_control/velocity_monitor.py의 전체 파일을 1/3 구간으로 작성한다.</a:t>
+            </a:r>
+          </a:p>
+          <a:p>
+            <a:r>
+              <a:t>[실행] nano ~/ros2_curri/agv_ws/src/agv_control/agv_control/velocity_monitor.py</a:t>
             </a:r>
           </a:p>
           <a:p>
@@ -1698,27 +1726,17 @@
           <a:lstStyle/>
           <a:p>
             <a:r>
-              <a:t>[설명] build/source/run을 생략 없이 실행한다.</a:t>
-            </a:r>
-          </a:p>
-          <a:p>
-            <a:r>
-              <a:t>[실행] cd ~/ros2_curri/agv_ws &amp;&amp; source install/setup.bash</a:t>
-            </a:r>
-          </a:p>
-          <a:p>
-            <a:r>
-              <a:t>ros2 run agv_control counter_publisher</a:t>
-            </a:r>
-          </a:p>
-          <a:p>
-            <a:r>
-              <a:t># 새 터미널: ros2 run agv_control counter_monitor</a:t>
-            </a:r>
-          </a:p>
-          <a:p>
-            <a:r>
-              <a:t>[확인] /counter와 /cmd_vel의 값·message type·연결 수를 terminal에서 확인한다.</a:t>
+              <a:t>[설명] ~/ros2_curri/agv_ws/src/agv_control/agv_control/velocity_monitor.py의 전체 파일을 2/3 구간으로 작성한다.</a:t>
+            </a:r>
+          </a:p>
+          <a:p>
+            <a:r>
+              <a:t>[실행] nano ~/ros2_curri/agv_ws/src/agv_control/agv_control/velocity_monitor.py</a:t>
+            </a:r>
+          </a:p>
+          <a:p>
+            <a:r>
+              <a:t>[확인] 코드를 저장하고 다음 코드 슬라이드 또는 build 단계로 이동한다.</a:t>
             </a:r>
           </a:p>
           <a:p>
@@ -1728,7 +1746,7 @@
           </a:p>
           <a:p>
             <a:r>
-              <a:t>[오류] 오류가 나면 현재 폴더, source, 파일 경로를 먼저 확인한다.</a:t>
+              <a:t>[오류] 들여쓰기·XML 태그·따옴표가 슬라이드와 정확히 같은지 확인한다.</a:t>
             </a:r>
           </a:p>
         </p:txBody>
@@ -1798,17 +1816,17 @@
           <a:lstStyle/>
           <a:p>
             <a:r>
-              <a:t>[설명] 실제 Ubuntu/ROS 2 환경에서 생성한 검증 화면이다.</a:t>
-            </a:r>
-          </a:p>
-          <a:p>
-            <a:r>
-              <a:t>[실행] 슬라이드의 명령 또는 파일 작성 단계를 진행한다.</a:t>
-            </a:r>
-          </a:p>
-          <a:p>
-            <a:r>
-              <a:t>[확인] 캡처의 명령과 다음 슬라이드의 검증 명령을 비교한다.</a:t>
+              <a:t>[설명] ~/ros2_curri/agv_ws/src/agv_control/agv_control/velocity_monitor.py의 전체 파일을 3/3 구간으로 작성한다.</a:t>
+            </a:r>
+          </a:p>
+          <a:p>
+            <a:r>
+              <a:t>[실행] nano ~/ros2_curri/agv_ws/src/agv_control/agv_control/velocity_monitor.py</a:t>
+            </a:r>
+          </a:p>
+          <a:p>
+            <a:r>
+              <a:t>[확인] 코드를 저장하고 다음 코드 슬라이드 또는 build 단계로 이동한다.</a:t>
             </a:r>
           </a:p>
           <a:p>
@@ -1818,7 +1836,7 @@
           </a:p>
           <a:p>
             <a:r>
-              <a:t>[오류] 오류가 나면 현재 폴더, source, 파일 경로를 먼저 확인한다.</a:t>
+              <a:t>[오류] 들여쓰기·XML 태그·따옴표가 슬라이드와 정확히 같은지 확인한다.</a:t>
             </a:r>
           </a:p>
         </p:txBody>
@@ -1888,27 +1906,17 @@
           <a:lstStyle/>
           <a:p>
             <a:r>
-              <a:t>[설명] 검증 명령은 GUI 결과와 별도로 실행해 재현 가능한 완료 기준을 만든다.</a:t>
-            </a:r>
-          </a:p>
-          <a:p>
-            <a:r>
-              <a:t>[실행] ros2 topic info /counter</a:t>
-            </a:r>
-          </a:p>
-          <a:p>
-            <a:r>
-              <a:t>ros2 topic echo /counter --once</a:t>
-            </a:r>
-          </a:p>
-          <a:p>
-            <a:r>
-              <a:t>ros2 interface show geometry_msgs/msg/Twist</a:t>
-            </a:r>
-          </a:p>
-          <a:p>
-            <a:r>
-              <a:t>[확인] /counter와 /cmd_vel의 값·message type·연결 수를 terminal에서 확인한다.</a:t>
+              <a:t>[설명] ~/ros2_curri/agv_ws/src/agv_control/setup.py의 전체 파일을 1/1 구간으로 작성한다.</a:t>
+            </a:r>
+          </a:p>
+          <a:p>
+            <a:r>
+              <a:t>[실행] nano ~/ros2_curri/agv_ws/src/agv_control/setup.py</a:t>
+            </a:r>
+          </a:p>
+          <a:p>
+            <a:r>
+              <a:t>[확인] 코드를 저장하고 다음 코드 슬라이드 또는 build 단계로 이동한다.</a:t>
             </a:r>
           </a:p>
           <a:p>
@@ -1918,7 +1926,7 @@
           </a:p>
           <a:p>
             <a:r>
-              <a:t>[오류] 오류가 나면 현재 폴더, source, 파일 경로를 먼저 확인한다.</a:t>
+              <a:t>[오류] 들여쓰기·XML 태그·따옴표가 슬라이드와 정확히 같은지 확인한다.</a:t>
             </a:r>
           </a:p>
         </p:txBody>
@@ -1988,17 +1996,27 @@
           <a:lstStyle/>
           <a:p>
             <a:r>
-              <a:t>[설명] 오류를 대신 해결하지 말고 증상부터 우선 확인 순서대로 교육생이 실행하게 한다.</a:t>
-            </a:r>
-          </a:p>
-          <a:p>
-            <a:r>
-              <a:t>[실행] 슬라이드의 명령 또는 파일 작성 단계를 진행한다.</a:t>
-            </a:r>
-          </a:p>
-          <a:p>
-            <a:r>
-              <a:t>[확인] 수정 뒤 첫 검증 명령을 다시 실행한다.</a:t>
+              <a:t>[설명] build/source/run을 생략 없이 실행한다.</a:t>
+            </a:r>
+          </a:p>
+          <a:p>
+            <a:r>
+              <a:t>[실행] cd ~/ros2_curri/agv_ws &amp;&amp; source install/setup.bash</a:t>
+            </a:r>
+          </a:p>
+          <a:p>
+            <a:r>
+              <a:t>ros2 run agv_control counter_publisher</a:t>
+            </a:r>
+          </a:p>
+          <a:p>
+            <a:r>
+              <a:t># 새 터미널: ros2 run agv_control counter_monitor</a:t>
+            </a:r>
+          </a:p>
+          <a:p>
+            <a:r>
+              <a:t>[확인] /counter와 /cmd_vel의 값·message type·연결 수를 terminal에서 확인한다.</a:t>
             </a:r>
           </a:p>
           <a:p>
@@ -2008,7 +2026,7 @@
           </a:p>
           <a:p>
             <a:r>
-              <a:t>[오류] 슬라이드의 두 대표 오류를 먼저 사용한다.</a:t>
+              <a:t>[오류] 오류가 나면 현재 폴더, source, 파일 경로를 먼저 확인한다.</a:t>
             </a:r>
           </a:p>
         </p:txBody>
@@ -2078,7 +2096,7 @@
           <a:lstStyle/>
           <a:p>
             <a:r>
-              <a:t>[설명] 교육생이 직접 한 값만 바꿔 원인과 결과를 연결하게 한다.</a:t>
+              <a:t>[설명] 실제 Ubuntu/ROS 2 환경에서 생성한 검증 화면이다.</a:t>
             </a:r>
           </a:p>
           <a:p>
@@ -2088,7 +2106,7 @@
           </a:p>
           <a:p>
             <a:r>
-              <a:t>[확인] 원래 값과 변경 값을 모두 기록한다.</a:t>
+              <a:t>[확인] ① 명령/설정  ② 정상 출력 또는 화면  ③ 다음 검증 명령으로 재확인</a:t>
             </a:r>
           </a:p>
           <a:p>
@@ -2168,17 +2186,27 @@
           <a:lstStyle/>
           <a:p>
             <a:r>
-              <a:t>[설명] 교육생이 Complete·캡처·로그를 저장했는지 확인하고 다음 모듈의 시작 상태를 읽는다.</a:t>
-            </a:r>
-          </a:p>
-          <a:p>
-            <a:r>
-              <a:t>[실행] 슬라이드의 명령 또는 파일 작성 단계를 진행한다.</a:t>
-            </a:r>
-          </a:p>
-          <a:p>
-            <a:r>
-              <a:t>[확인] M04 TF2 frame 시작 조건을 말할 수 있다.</a:t>
+              <a:t>[설명] 검증 명령은 GUI 결과와 별도로 실행해 재현 가능한 완료 기준을 만든다.</a:t>
+            </a:r>
+          </a:p>
+          <a:p>
+            <a:r>
+              <a:t>[실행] ros2 topic info /counter</a:t>
+            </a:r>
+          </a:p>
+          <a:p>
+            <a:r>
+              <a:t>ros2 topic echo /counter --once</a:t>
+            </a:r>
+          </a:p>
+          <a:p>
+            <a:r>
+              <a:t>ros2 interface show geometry_msgs/msg/Twist</a:t>
+            </a:r>
+          </a:p>
+          <a:p>
+            <a:r>
+              <a:t>[확인] /counter와 /cmd_vel의 값·message type·연결 수를 terminal에서 확인한다.</a:t>
             </a:r>
           </a:p>
           <a:p>
@@ -2258,7 +2286,7 @@
           <a:lstStyle/>
           <a:p>
             <a:r>
-              <a:t>[설명] 공식 문서는 버전 차이와 확장 학습을 확인할 때 사용한다.</a:t>
+              <a:t>[설명] 오류를 대신 해결하지 말고 증상부터 우선 확인 순서대로 교육생이 실행하게 한다.</a:t>
             </a:r>
           </a:p>
           <a:p>
@@ -2268,7 +2296,187 @@
           </a:p>
           <a:p>
             <a:r>
-              <a:t>[확인] 학습자는 본문만으로 현재 모듈을 완료한 상태여야 한다.</a:t>
+              <a:t>[확인] 수정 뒤 첫 검증 명령을 다시 실행한다.</a:t>
+            </a:r>
+          </a:p>
+          <a:p>
+            <a:r>
+              <a:t>[멈춤] 교육생이 현재 체크포인트를 통과할 때까지 기다린다.</a:t>
+            </a:r>
+          </a:p>
+          <a:p>
+            <a:r>
+              <a:t>[오류] 슬라이드의 두 대표 오류를 먼저 사용한다.</a:t>
+            </a:r>
+          </a:p>
+        </p:txBody>
+      </p:sp>
+      <p:sp>
+        <p:nvSpPr>
+          <p:cNvPr id="4" name="Slide Number Placeholder 3"/>
+          <p:cNvSpPr>
+            <a:spLocks noGrp="1"/>
+          </p:cNvSpPr>
+          <p:nvPr>
+            <p:ph type="sldNum" idx="5" sz="quarter"/>
+          </p:nvPr>
+        </p:nvSpPr>
+        <p:spPr/>
+      </p:sp>
+    </p:spTree>
+  </p:cSld>
+  <p:clrMapOvr>
+    <a:masterClrMapping/>
+  </p:clrMapOvr>
+</p:notes>
+</file>
+
+<file path=ppt/notesSlides/notesSlide28.xml><?xml version="1.0" encoding="utf-8"?>
+<p:notes xmlns:a="http://schemas.openxmlformats.org/drawingml/2006/main" xmlns:p="http://schemas.openxmlformats.org/presentationml/2006/main" xmlns:r="http://schemas.openxmlformats.org/officeDocument/2006/relationships">
+  <p:cSld>
+    <p:spTree>
+      <p:nvGrpSpPr>
+        <p:cNvPr id="1" name=""/>
+        <p:cNvGrpSpPr/>
+        <p:nvPr/>
+      </p:nvGrpSpPr>
+      <p:grpSpPr>
+        <a:xfrm>
+          <a:off x="0" y="0"/>
+          <a:ext cx="0" cy="0"/>
+          <a:chOff x="0" y="0"/>
+          <a:chExt cx="0" cy="0"/>
+        </a:xfrm>
+      </p:grpSpPr>
+      <p:sp>
+        <p:nvSpPr>
+          <p:cNvPr id="2" name="Slide Image Placeholder 1"/>
+          <p:cNvSpPr>
+            <a:spLocks noGrp="1"/>
+          </p:cNvSpPr>
+          <p:nvPr>
+            <p:ph type="sldImg" idx="2"/>
+          </p:nvPr>
+        </p:nvSpPr>
+        <p:spPr/>
+      </p:sp>
+      <p:sp>
+        <p:nvSpPr>
+          <p:cNvPr id="3" name="Notes Placeholder 2"/>
+          <p:cNvSpPr>
+            <a:spLocks noGrp="1"/>
+          </p:cNvSpPr>
+          <p:nvPr>
+            <p:ph type="body" idx="3" sz="quarter"/>
+          </p:nvPr>
+        </p:nvSpPr>
+        <p:spPr/>
+        <p:txBody>
+          <a:bodyPr/>
+          <a:lstStyle/>
+          <a:p>
+            <a:r>
+              <a:t>[설명] 교육생이 직접 한 값만 바꿔 원인과 결과를 연결하게 한다.</a:t>
+            </a:r>
+          </a:p>
+          <a:p>
+            <a:r>
+              <a:t>[실행] 슬라이드의 명령 또는 파일 작성 단계를 진행한다.</a:t>
+            </a:r>
+          </a:p>
+          <a:p>
+            <a:r>
+              <a:t>[확인] 원래 값과 변경 값을 모두 기록한다.</a:t>
+            </a:r>
+          </a:p>
+          <a:p>
+            <a:r>
+              <a:t>[멈춤] 교육생이 현재 체크포인트를 통과할 때까지 기다린다.</a:t>
+            </a:r>
+          </a:p>
+          <a:p>
+            <a:r>
+              <a:t>[오류] 오류가 나면 현재 폴더, source, 파일 경로를 먼저 확인한다.</a:t>
+            </a:r>
+          </a:p>
+        </p:txBody>
+      </p:sp>
+      <p:sp>
+        <p:nvSpPr>
+          <p:cNvPr id="4" name="Slide Number Placeholder 3"/>
+          <p:cNvSpPr>
+            <a:spLocks noGrp="1"/>
+          </p:cNvSpPr>
+          <p:nvPr>
+            <p:ph type="sldNum" idx="5" sz="quarter"/>
+          </p:nvPr>
+        </p:nvSpPr>
+        <p:spPr/>
+      </p:sp>
+    </p:spTree>
+  </p:cSld>
+  <p:clrMapOvr>
+    <a:masterClrMapping/>
+  </p:clrMapOvr>
+</p:notes>
+</file>
+
+<file path=ppt/notesSlides/notesSlide29.xml><?xml version="1.0" encoding="utf-8"?>
+<p:notes xmlns:a="http://schemas.openxmlformats.org/drawingml/2006/main" xmlns:p="http://schemas.openxmlformats.org/presentationml/2006/main" xmlns:r="http://schemas.openxmlformats.org/officeDocument/2006/relationships">
+  <p:cSld>
+    <p:spTree>
+      <p:nvGrpSpPr>
+        <p:cNvPr id="1" name=""/>
+        <p:cNvGrpSpPr/>
+        <p:nvPr/>
+      </p:nvGrpSpPr>
+      <p:grpSpPr>
+        <a:xfrm>
+          <a:off x="0" y="0"/>
+          <a:ext cx="0" cy="0"/>
+          <a:chOff x="0" y="0"/>
+          <a:chExt cx="0" cy="0"/>
+        </a:xfrm>
+      </p:grpSpPr>
+      <p:sp>
+        <p:nvSpPr>
+          <p:cNvPr id="2" name="Slide Image Placeholder 1"/>
+          <p:cNvSpPr>
+            <a:spLocks noGrp="1"/>
+          </p:cNvSpPr>
+          <p:nvPr>
+            <p:ph type="sldImg" idx="2"/>
+          </p:nvPr>
+        </p:nvSpPr>
+        <p:spPr/>
+      </p:sp>
+      <p:sp>
+        <p:nvSpPr>
+          <p:cNvPr id="3" name="Notes Placeholder 2"/>
+          <p:cNvSpPr>
+            <a:spLocks noGrp="1"/>
+          </p:cNvSpPr>
+          <p:nvPr>
+            <p:ph type="body" idx="3" sz="quarter"/>
+          </p:nvPr>
+        </p:nvSpPr>
+        <p:spPr/>
+        <p:txBody>
+          <a:bodyPr/>
+          <a:lstStyle/>
+          <a:p>
+            <a:r>
+              <a:t>[설명] 교육생이 Complete·캡처·로그를 저장했는지 확인하고 다음 모듈의 시작 상태를 읽는다.</a:t>
+            </a:r>
+          </a:p>
+          <a:p>
+            <a:r>
+              <a:t>[실행] 슬라이드의 명령 또는 파일 작성 단계를 진행한다.</a:t>
+            </a:r>
+          </a:p>
+          <a:p>
+            <a:r>
+              <a:t>[확인] M04 TF2 frame 시작 조건을 말할 수 있다.</a:t>
             </a:r>
           </a:p>
           <a:p>
@@ -2393,6 +2601,96 @@
 </p:notes>
 </file>
 
+<file path=ppt/notesSlides/notesSlide30.xml><?xml version="1.0" encoding="utf-8"?>
+<p:notes xmlns:a="http://schemas.openxmlformats.org/drawingml/2006/main" xmlns:p="http://schemas.openxmlformats.org/presentationml/2006/main" xmlns:r="http://schemas.openxmlformats.org/officeDocument/2006/relationships">
+  <p:cSld>
+    <p:spTree>
+      <p:nvGrpSpPr>
+        <p:cNvPr id="1" name=""/>
+        <p:cNvGrpSpPr/>
+        <p:nvPr/>
+      </p:nvGrpSpPr>
+      <p:grpSpPr>
+        <a:xfrm>
+          <a:off x="0" y="0"/>
+          <a:ext cx="0" cy="0"/>
+          <a:chOff x="0" y="0"/>
+          <a:chExt cx="0" cy="0"/>
+        </a:xfrm>
+      </p:grpSpPr>
+      <p:sp>
+        <p:nvSpPr>
+          <p:cNvPr id="2" name="Slide Image Placeholder 1"/>
+          <p:cNvSpPr>
+            <a:spLocks noGrp="1"/>
+          </p:cNvSpPr>
+          <p:nvPr>
+            <p:ph type="sldImg" idx="2"/>
+          </p:nvPr>
+        </p:nvSpPr>
+        <p:spPr/>
+      </p:sp>
+      <p:sp>
+        <p:nvSpPr>
+          <p:cNvPr id="3" name="Notes Placeholder 2"/>
+          <p:cNvSpPr>
+            <a:spLocks noGrp="1"/>
+          </p:cNvSpPr>
+          <p:nvPr>
+            <p:ph type="body" idx="3" sz="quarter"/>
+          </p:nvPr>
+        </p:nvSpPr>
+        <p:spPr/>
+        <p:txBody>
+          <a:bodyPr/>
+          <a:lstStyle/>
+          <a:p>
+            <a:r>
+              <a:t>[설명] 공식 문서는 버전 차이와 확장 학습을 확인할 때 사용한다.</a:t>
+            </a:r>
+          </a:p>
+          <a:p>
+            <a:r>
+              <a:t>[실행] 슬라이드의 명령 또는 파일 작성 단계를 진행한다.</a:t>
+            </a:r>
+          </a:p>
+          <a:p>
+            <a:r>
+              <a:t>[확인] 학습자는 본문만으로 현재 모듈을 완료한 상태여야 한다.</a:t>
+            </a:r>
+          </a:p>
+          <a:p>
+            <a:r>
+              <a:t>[멈춤] 교육생이 현재 체크포인트를 통과할 때까지 기다린다.</a:t>
+            </a:r>
+          </a:p>
+          <a:p>
+            <a:r>
+              <a:t>[오류] 오류가 나면 현재 폴더, source, 파일 경로를 먼저 확인한다.</a:t>
+            </a:r>
+          </a:p>
+        </p:txBody>
+      </p:sp>
+      <p:sp>
+        <p:nvSpPr>
+          <p:cNvPr id="4" name="Slide Number Placeholder 3"/>
+          <p:cNvSpPr>
+            <a:spLocks noGrp="1"/>
+          </p:cNvSpPr>
+          <p:nvPr>
+            <p:ph type="sldNum" idx="5" sz="quarter"/>
+          </p:nvPr>
+        </p:nvSpPr>
+        <p:spPr/>
+      </p:sp>
+    </p:spTree>
+  </p:cSld>
+  <p:clrMapOvr>
+    <a:masterClrMapping/>
+  </p:clrMapOvr>
+</p:notes>
+</file>
+
 <file path=ppt/notesSlides/notesSlide4.xml><?xml version="1.0" encoding="utf-8"?>
 <p:notes xmlns:a="http://schemas.openxmlformats.org/drawingml/2006/main" xmlns:p="http://schemas.openxmlformats.org/presentationml/2006/main" xmlns:r="http://schemas.openxmlformats.org/officeDocument/2006/relationships">
   <p:cSld>
@@ -2708,27 +3006,17 @@
           <a:lstStyle/>
           <a:p>
             <a:r>
-              <a:t>[설명] ros2 run은 setup.py에 등록된 실행 이름을 사용한다.</a:t>
-            </a:r>
-          </a:p>
-          <a:p>
-            <a:r>
-              <a:t>[실행] cd ~/ros2_curri/agv_ws</a:t>
-            </a:r>
-          </a:p>
-          <a:p>
-            <a:r>
-              <a:t>colcon build --symlink-install --packages-select agv_control</a:t>
-            </a:r>
-          </a:p>
-          <a:p>
-            <a:r>
-              <a:t>source install/setup.bash</a:t>
-            </a:r>
-          </a:p>
-          <a:p>
-            <a:r>
-              <a:t>[확인] 명령 출력에서 슬라이드의 확인 항목을 찾는다.</a:t>
+              <a:t>[설명] 파일을 코드 문법보다 먼저 역할·사용법·확인 화면으로 설명한다.</a:t>
+            </a:r>
+          </a:p>
+          <a:p>
+            <a:r>
+              <a:t>[실행] 슬라이드의 명령 또는 파일 작성 단계를 진행한다.</a:t>
+            </a:r>
+          </a:p>
+          <a:p>
+            <a:r>
+              <a:t>[확인] 교육생이 각 파일의 산출물과 확인 위치를 말할 수 있다.</a:t>
             </a:r>
           </a:p>
           <a:p>
@@ -2808,32 +3096,17 @@
           <a:lstStyle/>
           <a:p>
             <a:r>
-              <a:t>[설명] publisher 출력과 monitor 수신을 분리해 확인한다.</a:t>
-            </a:r>
-          </a:p>
-          <a:p>
-            <a:r>
-              <a:t>[실행] # 터미널 1</a:t>
-            </a:r>
-          </a:p>
-          <a:p>
-            <a:r>
-              <a:t>ros2 run agv_control counter_publisher</a:t>
-            </a:r>
-          </a:p>
-          <a:p>
-            <a:r>
-              <a:t># 터미널 2</a:t>
-            </a:r>
-          </a:p>
-          <a:p>
-            <a:r>
-              <a:t>ros2 run agv_control counter_monitor</a:t>
-            </a:r>
-          </a:p>
-          <a:p>
-            <a:r>
-              <a:t>[확인] 명령 출력에서 슬라이드의 확인 항목을 찾는다.</a:t>
+              <a:t>[설명] 파일을 코드 문법보다 먼저 역할·사용법·확인 화면으로 설명한다.</a:t>
+            </a:r>
+          </a:p>
+          <a:p>
+            <a:r>
+              <a:t>[실행] 슬라이드의 명령 또는 파일 작성 단계를 진행한다.</a:t>
+            </a:r>
+          </a:p>
+          <a:p>
+            <a:r>
+              <a:t>[확인] 교육생이 각 파일의 산출물과 확인 위치를 말할 수 있다.</a:t>
             </a:r>
           </a:p>
           <a:p>
@@ -2913,17 +3186,17 @@
           <a:lstStyle/>
           <a:p>
             <a:r>
-              <a:t>[설명] ~/ros2_curri/agv_ws/src/agv_control/agv_control/counter_publisher.py의 전체 파일을 1/3 구간으로 작성한다.</a:t>
-            </a:r>
-          </a:p>
-          <a:p>
-            <a:r>
-              <a:t>[실행] nano ~/ros2_curri/agv_ws/src/agv_control/agv_control/counter_publisher.py</a:t>
-            </a:r>
-          </a:p>
-          <a:p>
-            <a:r>
-              <a:t>[확인] 코드를 저장하고 다음 코드 슬라이드 또는 build 단계로 이동한다.</a:t>
+              <a:t>[설명] 파일을 코드 문법보다 먼저 역할·사용법·확인 화면으로 설명한다.</a:t>
+            </a:r>
+          </a:p>
+          <a:p>
+            <a:r>
+              <a:t>[실행] 슬라이드의 명령 또는 파일 작성 단계를 진행한다.</a:t>
+            </a:r>
+          </a:p>
+          <a:p>
+            <a:r>
+              <a:t>[확인] 교육생이 각 파일의 산출물과 확인 위치를 말할 수 있다.</a:t>
             </a:r>
           </a:p>
           <a:p>
@@ -2933,7 +3206,7 @@
           </a:p>
           <a:p>
             <a:r>
-              <a:t>[오류] 들여쓰기·XML 태그·따옴표가 슬라이드와 정확히 같은지 확인한다.</a:t>
+              <a:t>[오류] 오류가 나면 현재 폴더, source, 파일 경로를 먼저 확인한다.</a:t>
             </a:r>
           </a:p>
         </p:txBody>
@@ -6306,7 +6579,7 @@
               </a:defRPr>
             </a:pPr>
             <a:r>
-              <a:t>파일을 계속 작성하고 저장한다 (2/3)</a:t>
+              <a:t>console_scripts를 등록한다</a:t>
             </a:r>
           </a:p>
         </p:txBody>
@@ -6345,7 +6618,7 @@
               </a:defRPr>
             </a:pPr>
             <a:r>
-              <a:t>~/ros2_curri/agv_ws/src/agv_control/agv_control/counter_publisher.py</a:t>
+              <a:t>한 장에는 한 행동만 수행합니다.</a:t>
             </a:r>
           </a:p>
         </p:txBody>
@@ -6481,7 +6754,7 @@
               </a:defRPr>
             </a:pPr>
             <a:r>
-              <a:t>현재 단계 4/6    |    현재 폴더 ~/ros2_curri/agv_ws    |    현재 터미널</a:t>
+              <a:t>현재 단계 1/2    |    현재 폴더 ~/ros2_curri/agv_ws    |    현재 터미널</a:t>
             </a:r>
           </a:p>
         </p:txBody>
@@ -6494,25 +6767,64 @@
         </p:nvSpPr>
         <p:spPr>
           <a:xfrm>
-            <a:off x="658368" y="1627632"/>
-            <a:ext cx="10972800" cy="256032"/>
-          </a:xfrm>
-          <a:prstGeom prst="rect">
-            <a:avLst/>
-          </a:prstGeom>
-          <a:noFill/>
-        </p:spPr>
-        <p:txBody>
-          <a:bodyPr wrap="square" lIns="73152" rIns="73152" tIns="36576" bIns="36576">
-            <a:spAutoFit/>
-          </a:bodyPr>
-          <a:lstStyle/>
-          <a:p>
-            <a:pPr algn="l">
-              <a:spcAft>
-                <a:spcPts val="0"/>
-              </a:spcAft>
-              <a:defRPr sz="1500" b="1">
+            <a:off x="676656" y="1764792"/>
+            <a:ext cx="1828800" cy="347472"/>
+          </a:xfrm>
+          <a:prstGeom prst="rect">
+            <a:avLst/>
+          </a:prstGeom>
+          <a:noFill/>
+        </p:spPr>
+        <p:txBody>
+          <a:bodyPr wrap="square" lIns="73152" rIns="73152" tIns="36576" bIns="36576">
+            <a:spAutoFit/>
+          </a:bodyPr>
+          <a:lstStyle/>
+          <a:p>
+            <a:pPr algn="l">
+              <a:spcAft>
+                <a:spcPts val="0"/>
+              </a:spcAft>
+              <a:defRPr sz="1800" b="1">
+                <a:solidFill>
+                  <a:srgbClr val="225B9B"/>
+                </a:solidFill>
+                <a:latin typeface="Noto Sans CJK KR"/>
+              </a:defRPr>
+            </a:pPr>
+            <a:r>
+              <a:t>왜 하는가</a:t>
+            </a:r>
+          </a:p>
+        </p:txBody>
+      </p:sp>
+      <p:sp>
+        <p:nvSpPr>
+          <p:cNvPr id="8" name="TextBox 7"/>
+          <p:cNvSpPr txBox="1"/>
+          <p:nvPr/>
+        </p:nvSpPr>
+        <p:spPr>
+          <a:xfrm>
+            <a:off x="676656" y="2103120"/>
+            <a:ext cx="10789920" cy="512064"/>
+          </a:xfrm>
+          <a:prstGeom prst="rect">
+            <a:avLst/>
+          </a:prstGeom>
+          <a:noFill/>
+        </p:spPr>
+        <p:txBody>
+          <a:bodyPr wrap="square" lIns="73152" rIns="73152" tIns="36576" bIns="36576">
+            <a:spAutoFit/>
+          </a:bodyPr>
+          <a:lstStyle/>
+          <a:p>
+            <a:pPr algn="l">
+              <a:spcAft>
+                <a:spcPts val="0"/>
+              </a:spcAft>
+              <a:defRPr sz="2000" b="0">
                 <a:solidFill>
                   <a:srgbClr val="122C4E"/>
                 </a:solidFill>
@@ -6520,85 +6832,23 @@
               </a:defRPr>
             </a:pPr>
             <a:r>
-              <a:t>이번 단계: 파일의 전체 내용을 중간 생략 없이 작성합니다. 아래 줄 범위를 끝까지 입력하세요.</a:t>
-            </a:r>
-          </a:p>
-        </p:txBody>
-      </p:sp>
-      <p:sp>
-        <p:nvSpPr>
-          <p:cNvPr id="8" name="Rectangle 7"/>
+              <a:t>ros2 run은 setup.py에 등록된 실행 이름을 사용한다.</a:t>
+            </a:r>
+          </a:p>
+        </p:txBody>
+      </p:sp>
+      <p:sp>
+        <p:nvSpPr>
+          <p:cNvPr id="9" name="Rounded Rectangle 8"/>
           <p:cNvSpPr/>
           <p:nvPr/>
         </p:nvSpPr>
         <p:spPr>
           <a:xfrm>
-            <a:off x="658368" y="1956816"/>
-            <a:ext cx="10972800" cy="603504"/>
-          </a:xfrm>
-          <a:prstGeom prst="rect">
-            <a:avLst/>
-          </a:prstGeom>
-          <a:solidFill>
-            <a:srgbClr val="F4F7FB"/>
-          </a:solidFill>
-          <a:ln>
-            <a:solidFill>
-              <a:srgbClr val="F4F7FB"/>
-            </a:solidFill>
-          </a:ln>
-        </p:spPr>
-        <p:style>
-          <a:lnRef idx="1">
-            <a:schemeClr val="accent1"/>
-          </a:lnRef>
-          <a:fillRef idx="3">
-            <a:schemeClr val="accent1"/>
-          </a:fillRef>
-          <a:effectRef idx="2">
-            <a:schemeClr val="accent1"/>
-          </a:effectRef>
-          <a:fontRef idx="minor">
-            <a:schemeClr val="lt1"/>
-          </a:fontRef>
-        </p:style>
-        <p:txBody>
-          <a:bodyPr rtlCol="0" anchor="ctr" wrap="square" lIns="73152" rIns="73152" tIns="36576" bIns="36576"/>
-          <a:lstStyle/>
-          <a:p>
-            <a:pPr algn="l">
-              <a:spcAft>
-                <a:spcPts val="0"/>
-              </a:spcAft>
-              <a:defRPr sz="1400" b="0">
-                <a:solidFill>
-                  <a:srgbClr val="122C4E"/>
-                </a:solidFill>
-                <a:latin typeface="DejaVu Sans Mono"/>
-              </a:defRPr>
-            </a:pPr>
-            <a:r>
-              <a:t>파일 생성: mkdir -p ~/ros2_curri/agv_ws/src/agv_control/agv_control</a:t>
-            </a:r>
-            <a:br/>
-            <a:r>
-              <a:t>파일 열기: nano ~/ros2_curri/agv_ws/src/agv_control/agv_control/counter_publisher.py</a:t>
-            </a:r>
-          </a:p>
-        </p:txBody>
-      </p:sp>
-      <p:sp>
-        <p:nvSpPr>
-          <p:cNvPr id="9" name="Rectangle 8"/>
-          <p:cNvSpPr/>
-          <p:nvPr/>
-        </p:nvSpPr>
-        <p:spPr>
-          <a:xfrm>
-            <a:off x="658368" y="2706624"/>
-            <a:ext cx="10972800" cy="3364992"/>
-          </a:xfrm>
-          <a:prstGeom prst="rect">
+            <a:off x="676656" y="2871216"/>
+            <a:ext cx="10835640" cy="2331720"/>
+          </a:xfrm>
+          <a:prstGeom prst="roundRect">
             <a:avLst/>
           </a:prstGeom>
           <a:solidFill>
@@ -6625,14 +6875,14 @@
           </a:fontRef>
         </p:style>
         <p:txBody>
-          <a:bodyPr rtlCol="0" anchor="ctr" wrap="square" lIns="164592" rIns="164592" tIns="109728" bIns="36576"/>
-          <a:lstStyle/>
-          <a:p>
-            <a:pPr algn="l">
-              <a:spcAft>
-                <a:spcPts val="0"/>
-              </a:spcAft>
-              <a:defRPr sz="1400" b="0">
+          <a:bodyPr rtlCol="0" anchor="ctr" wrap="square" lIns="73152" rIns="73152" tIns="36576" bIns="36576"/>
+          <a:lstStyle/>
+          <a:p>
+            <a:pPr algn="l">
+              <a:spcAft>
+                <a:spcPts val="0"/>
+              </a:spcAft>
+              <a:defRPr sz="1600" b="0">
                 <a:solidFill>
                   <a:srgbClr val="FFFFFF"/>
                 </a:solidFill>
@@ -6640,48 +6890,15 @@
               </a:defRPr>
             </a:pPr>
             <a:r>
-              <a:t>    def publish_counter(self):</a:t>
+              <a:t>cd ~/ros2_curri/agv_ws</a:t>
             </a:r>
             <a:br/>
             <a:r>
-              <a:t>        message = Int32(data=self.value)</a:t>
+              <a:t>colcon build --symlink-install --packages-select agv_control</a:t>
             </a:r>
             <a:br/>
             <a:r>
-              <a:t>        self.publisher.publish(message)</a:t>
-            </a:r>
-            <a:br/>
-            <a:r>
-              <a:t>        self.get_logger().info(f'/counter: {message.data}')</a:t>
-            </a:r>
-            <a:br/>
-            <a:r>
-              <a:t>        self.value += 1</a:t>
-            </a:r>
-            <a:br/>
-            <a:br/>
-            <a:r>
-              <a:t>def main():</a:t>
-            </a:r>
-            <a:br/>
-            <a:r>
-              <a:t>    rclpy.init()</a:t>
-            </a:r>
-            <a:br/>
-            <a:r>
-              <a:t>    node = CounterPublisher()</a:t>
-            </a:r>
-            <a:br/>
-            <a:r>
-              <a:t>    try:</a:t>
-            </a:r>
-            <a:br/>
-            <a:r>
-              <a:t>        rclpy.spin(node)</a:t>
-            </a:r>
-            <a:br/>
-            <a:r>
-              <a:t>    except KeyboardInterrupt:</a:t>
+              <a:t>source install/setup.bash</a:t>
             </a:r>
           </a:p>
         </p:txBody>
@@ -6694,33 +6911,72 @@
         </p:nvSpPr>
         <p:spPr>
           <a:xfrm>
-            <a:off x="749808" y="6181344"/>
-            <a:ext cx="10789920" cy="201168"/>
-          </a:xfrm>
-          <a:prstGeom prst="rect">
-            <a:avLst/>
-          </a:prstGeom>
-          <a:noFill/>
-        </p:spPr>
-        <p:txBody>
-          <a:bodyPr wrap="square" lIns="73152" rIns="73152" tIns="36576" bIns="36576">
-            <a:spAutoFit/>
-          </a:bodyPr>
-          <a:lstStyle/>
-          <a:p>
-            <a:pPr algn="l">
-              <a:spcAft>
-                <a:spcPts val="0"/>
-              </a:spcAft>
-              <a:defRPr sz="1000" b="0">
-                <a:solidFill>
-                  <a:srgbClr val="5C6672"/>
-                </a:solidFill>
-                <a:latin typeface="Noto Sans CJK KR"/>
-              </a:defRPr>
-            </a:pPr>
-            <a:r>
-              <a:t>파일 전체 2/3 · 이 슬라이드 다음에 같은 파일의 나머지 줄이 이어집니다.</a:t>
+            <a:off x="768096" y="5468112"/>
+            <a:ext cx="1143000" cy="256032"/>
+          </a:xfrm>
+          <a:prstGeom prst="rect">
+            <a:avLst/>
+          </a:prstGeom>
+          <a:noFill/>
+        </p:spPr>
+        <p:txBody>
+          <a:bodyPr wrap="square" lIns="73152" rIns="73152" tIns="36576" bIns="36576">
+            <a:spAutoFit/>
+          </a:bodyPr>
+          <a:lstStyle/>
+          <a:p>
+            <a:pPr algn="l">
+              <a:spcAft>
+                <a:spcPts val="0"/>
+              </a:spcAft>
+              <a:defRPr sz="1800" b="1">
+                <a:solidFill>
+                  <a:srgbClr val="2A8B5A"/>
+                </a:solidFill>
+                <a:latin typeface="Noto Sans CJK KR"/>
+              </a:defRPr>
+            </a:pPr>
+            <a:r>
+              <a:t>확인</a:t>
+            </a:r>
+          </a:p>
+        </p:txBody>
+      </p:sp>
+      <p:sp>
+        <p:nvSpPr>
+          <p:cNvPr id="11" name="TextBox 10"/>
+          <p:cNvSpPr txBox="1"/>
+          <p:nvPr/>
+        </p:nvSpPr>
+        <p:spPr>
+          <a:xfrm>
+            <a:off x="768096" y="5742432"/>
+            <a:ext cx="10561320" cy="347472"/>
+          </a:xfrm>
+          <a:prstGeom prst="rect">
+            <a:avLst/>
+          </a:prstGeom>
+          <a:noFill/>
+        </p:spPr>
+        <p:txBody>
+          <a:bodyPr wrap="square" lIns="73152" rIns="73152" tIns="36576" bIns="36576">
+            <a:spAutoFit/>
+          </a:bodyPr>
+          <a:lstStyle/>
+          <a:p>
+            <a:pPr algn="l">
+              <a:spcAft>
+                <a:spcPts val="0"/>
+              </a:spcAft>
+              <a:defRPr sz="1800" b="0">
+                <a:solidFill>
+                  <a:srgbClr val="122C4E"/>
+                </a:solidFill>
+                <a:latin typeface="Noto Sans CJK KR"/>
+              </a:defRPr>
+            </a:pPr>
+            <a:r>
+              <a:t>명령의 출력에서 topic·frame·파일 이름 또는 성공 메시지를 찾으면 이 단계가 완료됩니다.</a:t>
             </a:r>
           </a:p>
         </p:txBody>
@@ -6777,7 +7033,7 @@
               </a:defRPr>
             </a:pPr>
             <a:r>
-              <a:t>파일을 계속 작성하고 저장한다 (3/3)</a:t>
+              <a:t>counter 두 노드를 실행한다</a:t>
             </a:r>
           </a:p>
         </p:txBody>
@@ -6816,7 +7072,7 @@
               </a:defRPr>
             </a:pPr>
             <a:r>
-              <a:t>~/ros2_curri/agv_ws/src/agv_control/agv_control/counter_publisher.py</a:t>
+              <a:t>한 장에는 한 행동만 수행합니다.</a:t>
             </a:r>
           </a:p>
         </p:txBody>
@@ -6952,7 +7208,7 @@
               </a:defRPr>
             </a:pPr>
             <a:r>
-              <a:t>현재 단계 5/6    |    현재 폴더 ~/ros2_curri/agv_ws    |    현재 터미널</a:t>
+              <a:t>현재 단계 2/2    |    현재 폴더 ~/ros2_curri/agv_ws    |    현재 터미널</a:t>
             </a:r>
           </a:p>
         </p:txBody>
@@ -6965,25 +7221,64 @@
         </p:nvSpPr>
         <p:spPr>
           <a:xfrm>
-            <a:off x="658368" y="1627632"/>
-            <a:ext cx="10972800" cy="256032"/>
-          </a:xfrm>
-          <a:prstGeom prst="rect">
-            <a:avLst/>
-          </a:prstGeom>
-          <a:noFill/>
-        </p:spPr>
-        <p:txBody>
-          <a:bodyPr wrap="square" lIns="73152" rIns="73152" tIns="36576" bIns="36576">
-            <a:spAutoFit/>
-          </a:bodyPr>
-          <a:lstStyle/>
-          <a:p>
-            <a:pPr algn="l">
-              <a:spcAft>
-                <a:spcPts val="0"/>
-              </a:spcAft>
-              <a:defRPr sz="1500" b="1">
+            <a:off x="676656" y="1764792"/>
+            <a:ext cx="1828800" cy="347472"/>
+          </a:xfrm>
+          <a:prstGeom prst="rect">
+            <a:avLst/>
+          </a:prstGeom>
+          <a:noFill/>
+        </p:spPr>
+        <p:txBody>
+          <a:bodyPr wrap="square" lIns="73152" rIns="73152" tIns="36576" bIns="36576">
+            <a:spAutoFit/>
+          </a:bodyPr>
+          <a:lstStyle/>
+          <a:p>
+            <a:pPr algn="l">
+              <a:spcAft>
+                <a:spcPts val="0"/>
+              </a:spcAft>
+              <a:defRPr sz="1800" b="1">
+                <a:solidFill>
+                  <a:srgbClr val="225B9B"/>
+                </a:solidFill>
+                <a:latin typeface="Noto Sans CJK KR"/>
+              </a:defRPr>
+            </a:pPr>
+            <a:r>
+              <a:t>왜 하는가</a:t>
+            </a:r>
+          </a:p>
+        </p:txBody>
+      </p:sp>
+      <p:sp>
+        <p:nvSpPr>
+          <p:cNvPr id="8" name="TextBox 7"/>
+          <p:cNvSpPr txBox="1"/>
+          <p:nvPr/>
+        </p:nvSpPr>
+        <p:spPr>
+          <a:xfrm>
+            <a:off x="676656" y="2103120"/>
+            <a:ext cx="10789920" cy="512064"/>
+          </a:xfrm>
+          <a:prstGeom prst="rect">
+            <a:avLst/>
+          </a:prstGeom>
+          <a:noFill/>
+        </p:spPr>
+        <p:txBody>
+          <a:bodyPr wrap="square" lIns="73152" rIns="73152" tIns="36576" bIns="36576">
+            <a:spAutoFit/>
+          </a:bodyPr>
+          <a:lstStyle/>
+          <a:p>
+            <a:pPr algn="l">
+              <a:spcAft>
+                <a:spcPts val="0"/>
+              </a:spcAft>
+              <a:defRPr sz="2000" b="0">
                 <a:solidFill>
                   <a:srgbClr val="122C4E"/>
                 </a:solidFill>
@@ -6991,85 +7286,23 @@
               </a:defRPr>
             </a:pPr>
             <a:r>
-              <a:t>이번 단계: 파일의 전체 내용을 중간 생략 없이 작성합니다. 아래 줄 범위를 끝까지 입력하세요.</a:t>
-            </a:r>
-          </a:p>
-        </p:txBody>
-      </p:sp>
-      <p:sp>
-        <p:nvSpPr>
-          <p:cNvPr id="8" name="Rectangle 7"/>
+              <a:t>publisher 출력과 monitor 수신을 분리해 확인한다.</a:t>
+            </a:r>
+          </a:p>
+        </p:txBody>
+      </p:sp>
+      <p:sp>
+        <p:nvSpPr>
+          <p:cNvPr id="9" name="Rounded Rectangle 8"/>
           <p:cNvSpPr/>
           <p:nvPr/>
         </p:nvSpPr>
         <p:spPr>
           <a:xfrm>
-            <a:off x="658368" y="1956816"/>
-            <a:ext cx="10972800" cy="603504"/>
-          </a:xfrm>
-          <a:prstGeom prst="rect">
-            <a:avLst/>
-          </a:prstGeom>
-          <a:solidFill>
-            <a:srgbClr val="F4F7FB"/>
-          </a:solidFill>
-          <a:ln>
-            <a:solidFill>
-              <a:srgbClr val="F4F7FB"/>
-            </a:solidFill>
-          </a:ln>
-        </p:spPr>
-        <p:style>
-          <a:lnRef idx="1">
-            <a:schemeClr val="accent1"/>
-          </a:lnRef>
-          <a:fillRef idx="3">
-            <a:schemeClr val="accent1"/>
-          </a:fillRef>
-          <a:effectRef idx="2">
-            <a:schemeClr val="accent1"/>
-          </a:effectRef>
-          <a:fontRef idx="minor">
-            <a:schemeClr val="lt1"/>
-          </a:fontRef>
-        </p:style>
-        <p:txBody>
-          <a:bodyPr rtlCol="0" anchor="ctr" wrap="square" lIns="73152" rIns="73152" tIns="36576" bIns="36576"/>
-          <a:lstStyle/>
-          <a:p>
-            <a:pPr algn="l">
-              <a:spcAft>
-                <a:spcPts val="0"/>
-              </a:spcAft>
-              <a:defRPr sz="1400" b="0">
-                <a:solidFill>
-                  <a:srgbClr val="122C4E"/>
-                </a:solidFill>
-                <a:latin typeface="DejaVu Sans Mono"/>
-              </a:defRPr>
-            </a:pPr>
-            <a:r>
-              <a:t>파일 생성: mkdir -p ~/ros2_curri/agv_ws/src/agv_control/agv_control</a:t>
-            </a:r>
-            <a:br/>
-            <a:r>
-              <a:t>파일 열기: nano ~/ros2_curri/agv_ws/src/agv_control/agv_control/counter_publisher.py</a:t>
-            </a:r>
-          </a:p>
-        </p:txBody>
-      </p:sp>
-      <p:sp>
-        <p:nvSpPr>
-          <p:cNvPr id="9" name="Rectangle 8"/>
-          <p:cNvSpPr/>
-          <p:nvPr/>
-        </p:nvSpPr>
-        <p:spPr>
-          <a:xfrm>
-            <a:off x="658368" y="2706624"/>
-            <a:ext cx="10972800" cy="3364992"/>
-          </a:xfrm>
-          <a:prstGeom prst="rect">
+            <a:off x="676656" y="2871216"/>
+            <a:ext cx="10835640" cy="2331720"/>
+          </a:xfrm>
+          <a:prstGeom prst="roundRect">
             <a:avLst/>
           </a:prstGeom>
           <a:solidFill>
@@ -7096,14 +7329,14 @@
           </a:fontRef>
         </p:style>
         <p:txBody>
-          <a:bodyPr rtlCol="0" anchor="ctr" wrap="square" lIns="164592" rIns="164592" tIns="109728" bIns="36576"/>
-          <a:lstStyle/>
-          <a:p>
-            <a:pPr algn="l">
-              <a:spcAft>
-                <a:spcPts val="0"/>
-              </a:spcAft>
-              <a:defRPr sz="1400" b="0">
+          <a:bodyPr rtlCol="0" anchor="ctr" wrap="square" lIns="73152" rIns="73152" tIns="36576" bIns="36576"/>
+          <a:lstStyle/>
+          <a:p>
+            <a:pPr algn="l">
+              <a:spcAft>
+                <a:spcPts val="0"/>
+              </a:spcAft>
+              <a:defRPr sz="1600" b="0">
                 <a:solidFill>
                   <a:srgbClr val="FFFFFF"/>
                 </a:solidFill>
@@ -7111,23 +7344,19 @@
               </a:defRPr>
             </a:pPr>
             <a:r>
-              <a:t>        pass</a:t>
+              <a:t># 터미널 1</a:t>
             </a:r>
             <a:br/>
             <a:r>
-              <a:t>    finally:</a:t>
+              <a:t>ros2 run agv_control counter_publisher</a:t>
             </a:r>
             <a:br/>
             <a:r>
-              <a:t>        node.destroy_node()</a:t>
+              <a:t># 터미널 2</a:t>
             </a:r>
             <a:br/>
             <a:r>
-              <a:t>        if rclpy.ok():</a:t>
-            </a:r>
-            <a:br/>
-            <a:r>
-              <a:t>            rclpy.shutdown()</a:t>
+              <a:t>ros2 run agv_control counter_monitor</a:t>
             </a:r>
           </a:p>
         </p:txBody>
@@ -7140,33 +7369,72 @@
         </p:nvSpPr>
         <p:spPr>
           <a:xfrm>
-            <a:off x="749808" y="6181344"/>
-            <a:ext cx="10789920" cy="201168"/>
-          </a:xfrm>
-          <a:prstGeom prst="rect">
-            <a:avLst/>
-          </a:prstGeom>
-          <a:noFill/>
-        </p:spPr>
-        <p:txBody>
-          <a:bodyPr wrap="square" lIns="73152" rIns="73152" tIns="36576" bIns="36576">
-            <a:spAutoFit/>
-          </a:bodyPr>
-          <a:lstStyle/>
-          <a:p>
-            <a:pPr algn="l">
-              <a:spcAft>
-                <a:spcPts val="0"/>
-              </a:spcAft>
-              <a:defRPr sz="1000" b="0">
-                <a:solidFill>
-                  <a:srgbClr val="5C6672"/>
-                </a:solidFill>
-                <a:latin typeface="Noto Sans CJK KR"/>
-              </a:defRPr>
-            </a:pPr>
-            <a:r>
-              <a:t>파일 전체 3/3 · 이 슬라이드 다음에 같은 파일의 나머지 줄이 이어집니다.</a:t>
+            <a:off x="768096" y="5468112"/>
+            <a:ext cx="1143000" cy="256032"/>
+          </a:xfrm>
+          <a:prstGeom prst="rect">
+            <a:avLst/>
+          </a:prstGeom>
+          <a:noFill/>
+        </p:spPr>
+        <p:txBody>
+          <a:bodyPr wrap="square" lIns="73152" rIns="73152" tIns="36576" bIns="36576">
+            <a:spAutoFit/>
+          </a:bodyPr>
+          <a:lstStyle/>
+          <a:p>
+            <a:pPr algn="l">
+              <a:spcAft>
+                <a:spcPts val="0"/>
+              </a:spcAft>
+              <a:defRPr sz="1800" b="1">
+                <a:solidFill>
+                  <a:srgbClr val="2A8B5A"/>
+                </a:solidFill>
+                <a:latin typeface="Noto Sans CJK KR"/>
+              </a:defRPr>
+            </a:pPr>
+            <a:r>
+              <a:t>확인</a:t>
+            </a:r>
+          </a:p>
+        </p:txBody>
+      </p:sp>
+      <p:sp>
+        <p:nvSpPr>
+          <p:cNvPr id="11" name="TextBox 10"/>
+          <p:cNvSpPr txBox="1"/>
+          <p:nvPr/>
+        </p:nvSpPr>
+        <p:spPr>
+          <a:xfrm>
+            <a:off x="768096" y="5742432"/>
+            <a:ext cx="10561320" cy="347472"/>
+          </a:xfrm>
+          <a:prstGeom prst="rect">
+            <a:avLst/>
+          </a:prstGeom>
+          <a:noFill/>
+        </p:spPr>
+        <p:txBody>
+          <a:bodyPr wrap="square" lIns="73152" rIns="73152" tIns="36576" bIns="36576">
+            <a:spAutoFit/>
+          </a:bodyPr>
+          <a:lstStyle/>
+          <a:p>
+            <a:pPr algn="l">
+              <a:spcAft>
+                <a:spcPts val="0"/>
+              </a:spcAft>
+              <a:defRPr sz="1800" b="0">
+                <a:solidFill>
+                  <a:srgbClr val="122C4E"/>
+                </a:solidFill>
+                <a:latin typeface="Noto Sans CJK KR"/>
+              </a:defRPr>
+            </a:pPr>
+            <a:r>
+              <a:t>명령의 출력에서 topic·frame·파일 이름 또는 성공 메시지를 찾으면 이 단계가 완료됩니다.</a:t>
             </a:r>
           </a:p>
         </p:txBody>
@@ -7223,7 +7491,7 @@
               </a:defRPr>
             </a:pPr>
             <a:r>
-              <a:t>파일을 새로 만들고 저장한다 (1/2)</a:t>
+              <a:t>파일을 새로 만들고 저장한다 (1/3)</a:t>
             </a:r>
           </a:p>
         </p:txBody>
@@ -7262,7 +7530,7 @@
               </a:defRPr>
             </a:pPr>
             <a:r>
-              <a:t>~/ros2_curri/agv_ws/src/agv_control/agv_control/counter_monitor.py</a:t>
+              <a:t>~/ros2_curri/agv_ws/src/agv_control/agv_control/counter_publisher.py</a:t>
             </a:r>
           </a:p>
         </p:txBody>
@@ -7398,7 +7666,7 @@
               </a:defRPr>
             </a:pPr>
             <a:r>
-              <a:t>현재 단계 6/8    |    현재 폴더 ~/ros2_curri/agv_ws    |    현재 터미널</a:t>
+              <a:t>현재 단계 3/6    |    현재 폴더 ~/ros2_curri/agv_ws    |    현재 터미널</a:t>
             </a:r>
           </a:p>
         </p:txBody>
@@ -7499,7 +7767,7 @@
             </a:r>
             <a:br/>
             <a:r>
-              <a:t>파일 열기: nano ~/ros2_curri/agv_ws/src/agv_control/agv_control/counter_monitor.py</a:t>
+              <a:t>파일 열기: nano ~/ros2_curri/agv_ws/src/agv_control/agv_control/counter_publisher.py</a:t>
             </a:r>
           </a:p>
         </p:txBody>
@@ -7570,7 +7838,7 @@
             <a:br/>
             <a:br/>
             <a:r>
-              <a:t>class CounterMonitor(Node):</a:t>
+              <a:t>class CounterPublisher(Node):</a:t>
             </a:r>
             <a:br/>
             <a:br/>
@@ -7579,21 +7847,21 @@
             </a:r>
             <a:br/>
             <a:r>
-              <a:t>        super().__init__('counter_monitor')</a:t>
+              <a:t>        super().__init__('counter_publisher')</a:t>
             </a:r>
             <a:br/>
             <a:r>
-              <a:t>        self.create_subscription(Int32, '/counter', self.callback, 10)</a:t>
+              <a:t>        self.publisher = self.create_publisher(Int32, '/counter', 10)</a:t>
             </a:r>
             <a:br/>
+            <a:r>
+              <a:t>        self.value = 0</a:t>
+            </a:r>
             <a:br/>
             <a:r>
-              <a:t>    def callback(self, message):</a:t>
+              <a:t>        self.create_timer(1.0, self.publish_counter)</a:t>
             </a:r>
             <a:br/>
-            <a:r>
-              <a:t>        self.get_logger().info(f'received /counter: {message.data}')</a:t>
-            </a:r>
           </a:p>
         </p:txBody>
       </p:sp>
@@ -7631,7 +7899,7 @@
               </a:defRPr>
             </a:pPr>
             <a:r>
-              <a:t>파일 전체 1/2 · 이 슬라이드 다음에 같은 파일의 나머지 줄이 이어집니다.</a:t>
+              <a:t>파일 전체 1/3 · 이 슬라이드 다음에 같은 파일의 나머지 줄이 이어집니다.</a:t>
             </a:r>
           </a:p>
         </p:txBody>
@@ -7688,7 +7956,7 @@
               </a:defRPr>
             </a:pPr>
             <a:r>
-              <a:t>파일을 계속 작성하고 저장한다 (2/2)</a:t>
+              <a:t>파일을 계속 작성하고 저장한다 (2/3)</a:t>
             </a:r>
           </a:p>
         </p:txBody>
@@ -7727,7 +7995,7 @@
               </a:defRPr>
             </a:pPr>
             <a:r>
-              <a:t>~/ros2_curri/agv_ws/src/agv_control/agv_control/counter_monitor.py</a:t>
+              <a:t>~/ros2_curri/agv_ws/src/agv_control/agv_control/counter_publisher.py</a:t>
             </a:r>
           </a:p>
         </p:txBody>
@@ -7863,7 +8131,7 @@
               </a:defRPr>
             </a:pPr>
             <a:r>
-              <a:t>현재 단계 7/8    |    현재 폴더 ~/ros2_curri/agv_ws    |    현재 터미널</a:t>
+              <a:t>현재 단계 4/6    |    현재 폴더 ~/ros2_curri/agv_ws    |    현재 터미널</a:t>
             </a:r>
           </a:p>
         </p:txBody>
@@ -7964,7 +8232,7 @@
             </a:r>
             <a:br/>
             <a:r>
-              <a:t>파일 열기: nano ~/ros2_curri/agv_ws/src/agv_control/agv_control/counter_monitor.py</a:t>
+              <a:t>파일 열기: nano ~/ros2_curri/agv_ws/src/agv_control/agv_control/counter_publisher.py</a:t>
             </a:r>
           </a:p>
         </p:txBody>
@@ -8021,8 +8289,28 @@
                 <a:latin typeface="DejaVu Sans Mono"/>
               </a:defRPr>
             </a:pPr>
+            <a:r>
+              <a:t>    def publish_counter(self):</a:t>
+            </a:r>
             <a:br/>
             <a:r>
+              <a:t>        message = Int32(data=self.value)</a:t>
+            </a:r>
+            <a:br/>
+            <a:r>
+              <a:t>        self.publisher.publish(message)</a:t>
+            </a:r>
+            <a:br/>
+            <a:r>
+              <a:t>        self.get_logger().info(f'/counter: {message.data}')</a:t>
+            </a:r>
+            <a:br/>
+            <a:r>
+              <a:t>        self.value += 1</a:t>
+            </a:r>
+            <a:br/>
+            <a:br/>
+            <a:r>
               <a:t>def main():</a:t>
             </a:r>
             <a:br/>
@@ -8031,7 +8319,7 @@
             </a:r>
             <a:br/>
             <a:r>
-              <a:t>    node = CounterMonitor()</a:t>
+              <a:t>    node = CounterPublisher()</a:t>
             </a:r>
             <a:br/>
             <a:r>
@@ -8044,26 +8332,6 @@
             <a:br/>
             <a:r>
               <a:t>    except KeyboardInterrupt:</a:t>
-            </a:r>
-            <a:br/>
-            <a:r>
-              <a:t>        pass</a:t>
-            </a:r>
-            <a:br/>
-            <a:r>
-              <a:t>    finally:</a:t>
-            </a:r>
-            <a:br/>
-            <a:r>
-              <a:t>        node.destroy_node()</a:t>
-            </a:r>
-            <a:br/>
-            <a:r>
-              <a:t>        if rclpy.ok():</a:t>
-            </a:r>
-            <a:br/>
-            <a:r>
-              <a:t>            rclpy.shutdown()</a:t>
             </a:r>
           </a:p>
         </p:txBody>
@@ -8102,7 +8370,7 @@
               </a:defRPr>
             </a:pPr>
             <a:r>
-              <a:t>파일 전체 2/2 · 이 슬라이드 다음에 같은 파일의 나머지 줄이 이어집니다.</a:t>
+              <a:t>파일 전체 2/3 · 이 슬라이드 다음에 같은 파일의 나머지 줄이 이어집니다.</a:t>
             </a:r>
           </a:p>
         </p:txBody>
@@ -8159,7 +8427,7 @@
               </a:defRPr>
             </a:pPr>
             <a:r>
-              <a:t>파일을 새로 만들고 저장한다 (1/3)</a:t>
+              <a:t>파일을 계속 작성하고 저장한다 (3/3)</a:t>
             </a:r>
           </a:p>
         </p:txBody>
@@ -8198,7 +8466,7 @@
               </a:defRPr>
             </a:pPr>
             <a:r>
-              <a:t>~/ros2_curri/agv_ws/src/agv_control/agv_control/cmd_test_node.py</a:t>
+              <a:t>~/ros2_curri/agv_ws/src/agv_control/agv_control/counter_publisher.py</a:t>
             </a:r>
           </a:p>
         </p:txBody>
@@ -8334,7 +8602,7 @@
               </a:defRPr>
             </a:pPr>
             <a:r>
-              <a:t>현재 단계 8/11    |    현재 폴더 ~/ros2_curri/agv_ws    |    현재 터미널</a:t>
+              <a:t>현재 단계 5/6    |    현재 폴더 ~/ros2_curri/agv_ws    |    현재 터미널</a:t>
             </a:r>
           </a:p>
         </p:txBody>
@@ -8435,7 +8703,7 @@
             </a:r>
             <a:br/>
             <a:r>
-              <a:t>파일 열기: nano ~/ros2_curri/agv_ws/src/agv_control/agv_control/cmd_test_node.py</a:t>
+              <a:t>파일 열기: nano ~/ros2_curri/agv_ws/src/agv_control/agv_control/counter_publisher.py</a:t>
             </a:r>
           </a:p>
         </p:txBody>
@@ -8493,45 +8761,23 @@
               </a:defRPr>
             </a:pPr>
             <a:r>
-              <a:t>import rclpy</a:t>
+              <a:t>        pass</a:t>
             </a:r>
             <a:br/>
             <a:r>
-              <a:t>from rclpy.node import Node</a:t>
+              <a:t>    finally:</a:t>
             </a:r>
             <a:br/>
             <a:r>
-              <a:t>from geometry_msgs.msg import Twist</a:t>
+              <a:t>        node.destroy_node()</a:t>
             </a:r>
             <a:br/>
+            <a:r>
+              <a:t>        if rclpy.ok():</a:t>
+            </a:r>
             <a:br/>
             <a:r>
-              <a:t>class CmdTestNode(Node):</a:t>
-            </a:r>
-            <a:br/>
-            <a:br/>
-            <a:r>
-              <a:t>    def __init__(self):</a:t>
-            </a:r>
-            <a:br/>
-            <a:r>
-              <a:t>        super().__init__('cmd_test_node')</a:t>
-            </a:r>
-            <a:br/>
-            <a:r>
-              <a:t>        self.declare_parameter('linear_speed', 0.15)</a:t>
-            </a:r>
-            <a:br/>
-            <a:r>
-              <a:t>        self.declare_parameter('angular_speed', 0.0)</a:t>
-            </a:r>
-            <a:br/>
-            <a:r>
-              <a:t>        self.publisher = self.create_publisher(Twist, '/cmd_vel', 10)</a:t>
-            </a:r>
-            <a:br/>
-            <a:r>
-              <a:t>        self.remaining = 30</a:t>
+              <a:t>            rclpy.shutdown()</a:t>
             </a:r>
           </a:p>
         </p:txBody>
@@ -8570,7 +8816,7 @@
               </a:defRPr>
             </a:pPr>
             <a:r>
-              <a:t>파일 전체 1/3 · 이 슬라이드 다음에 같은 파일의 나머지 줄이 이어집니다.</a:t>
+              <a:t>파일 전체 3/3 · 이 슬라이드 다음에 같은 파일의 나머지 줄이 이어집니다.</a:t>
             </a:r>
           </a:p>
         </p:txBody>
@@ -8627,7 +8873,7 @@
               </a:defRPr>
             </a:pPr>
             <a:r>
-              <a:t>파일을 계속 작성하고 저장한다 (2/3)</a:t>
+              <a:t>파일을 새로 만들고 저장한다 (1/2)</a:t>
             </a:r>
           </a:p>
         </p:txBody>
@@ -8666,7 +8912,7 @@
               </a:defRPr>
             </a:pPr>
             <a:r>
-              <a:t>~/ros2_curri/agv_ws/src/agv_control/agv_control/cmd_test_node.py</a:t>
+              <a:t>~/ros2_curri/agv_ws/src/agv_control/agv_control/counter_monitor.py</a:t>
             </a:r>
           </a:p>
         </p:txBody>
@@ -8802,7 +9048,7 @@
               </a:defRPr>
             </a:pPr>
             <a:r>
-              <a:t>현재 단계 9/11    |    현재 폴더 ~/ros2_curri/agv_ws    |    현재 터미널</a:t>
+              <a:t>현재 단계 6/8    |    현재 폴더 ~/ros2_curri/agv_ws    |    현재 터미널</a:t>
             </a:r>
           </a:p>
         </p:txBody>
@@ -8903,7 +9149,7 @@
             </a:r>
             <a:br/>
             <a:r>
-              <a:t>파일 열기: nano ~/ros2_curri/agv_ws/src/agv_control/agv_control/cmd_test_node.py</a:t>
+              <a:t>파일 열기: nano ~/ros2_curri/agv_ws/src/agv_control/agv_control/counter_monitor.py</a:t>
             </a:r>
           </a:p>
         </p:txBody>
@@ -8961,48 +9207,42 @@
               </a:defRPr>
             </a:pPr>
             <a:r>
-              <a:t>        self.create_timer(0.1, self.publish_once)</a:t>
+              <a:t>import rclpy</a:t>
+            </a:r>
+            <a:br/>
+            <a:r>
+              <a:t>from rclpy.node import Node</a:t>
+            </a:r>
+            <a:br/>
+            <a:r>
+              <a:t>from std_msgs.msg import Int32</a:t>
             </a:r>
             <a:br/>
             <a:br/>
             <a:r>
-              <a:t>    def publish_once(self):</a:t>
+              <a:t>class CounterMonitor(Node):</a:t>
             </a:r>
             <a:br/>
-            <a:r>
-              <a:t>        command = Twist()</a:t>
-            </a:r>
             <a:br/>
             <a:r>
-              <a:t>        if self.remaining &gt; 0:</a:t>
+              <a:t>    def __init__(self):</a:t>
             </a:r>
             <a:br/>
             <a:r>
-              <a:t>            command.linear.x = self.get_parameter('linear_speed').value</a:t>
+              <a:t>        super().__init__('counter_monitor')</a:t>
             </a:r>
             <a:br/>
             <a:r>
-              <a:t>            command.angular.z = self.get_parameter('angular_speed').value</a:t>
+              <a:t>        self.create_subscription(Int32, '/counter', self.callback, 10)</a:t>
             </a:r>
             <a:br/>
-            <a:r>
-              <a:t>            self.remaining -= 1</a:t>
-            </a:r>
             <a:br/>
             <a:r>
-              <a:t>        self.publisher.publish(command)</a:t>
+              <a:t>    def callback(self, message):</a:t>
             </a:r>
             <a:br/>
             <a:r>
-              <a:t>        if self.remaining == 0:</a:t>
-            </a:r>
-            <a:br/>
-            <a:r>
-              <a:t>            self.get_logger().info('test command finished; publishing zero Twist')</a:t>
-            </a:r>
-            <a:br/>
-            <a:r>
-              <a:t>            self.remaining = -1</a:t>
+              <a:t>        self.get_logger().info(f'received /counter: {message.data}')</a:t>
             </a:r>
           </a:p>
         </p:txBody>
@@ -9041,7 +9281,7 @@
               </a:defRPr>
             </a:pPr>
             <a:r>
-              <a:t>파일 전체 2/3 · 이 슬라이드 다음에 같은 파일의 나머지 줄이 이어집니다.</a:t>
+              <a:t>파일 전체 1/2 · 이 슬라이드 다음에 같은 파일의 나머지 줄이 이어집니다.</a:t>
             </a:r>
           </a:p>
         </p:txBody>
@@ -9098,7 +9338,7 @@
               </a:defRPr>
             </a:pPr>
             <a:r>
-              <a:t>파일을 계속 작성하고 저장한다 (3/3)</a:t>
+              <a:t>파일을 계속 작성하고 저장한다 (2/2)</a:t>
             </a:r>
           </a:p>
         </p:txBody>
@@ -9137,7 +9377,7 @@
               </a:defRPr>
             </a:pPr>
             <a:r>
-              <a:t>~/ros2_curri/agv_ws/src/agv_control/agv_control/cmd_test_node.py</a:t>
+              <a:t>~/ros2_curri/agv_ws/src/agv_control/agv_control/counter_monitor.py</a:t>
             </a:r>
           </a:p>
         </p:txBody>
@@ -9273,7 +9513,7 @@
               </a:defRPr>
             </a:pPr>
             <a:r>
-              <a:t>현재 단계 10/11    |    현재 폴더 ~/ros2_curri/agv_ws    |    현재 터미널</a:t>
+              <a:t>현재 단계 7/8    |    현재 폴더 ~/ros2_curri/agv_ws    |    현재 터미널</a:t>
             </a:r>
           </a:p>
         </p:txBody>
@@ -9374,7 +9614,7 @@
             </a:r>
             <a:br/>
             <a:r>
-              <a:t>파일 열기: nano ~/ros2_curri/agv_ws/src/agv_control/agv_control/cmd_test_node.py</a:t>
+              <a:t>파일 열기: nano ~/ros2_curri/agv_ws/src/agv_control/agv_control/counter_monitor.py</a:t>
             </a:r>
           </a:p>
         </p:txBody>
@@ -9441,7 +9681,7 @@
             </a:r>
             <a:br/>
             <a:r>
-              <a:t>    node = CmdTestNode()</a:t>
+              <a:t>    node = CounterMonitor()</a:t>
             </a:r>
             <a:br/>
             <a:r>
@@ -9512,7 +9752,7 @@
               </a:defRPr>
             </a:pPr>
             <a:r>
-              <a:t>파일 전체 3/3 · 이 슬라이드 다음에 같은 파일의 나머지 줄이 이어집니다.</a:t>
+              <a:t>파일 전체 2/2 · 이 슬라이드 다음에 같은 파일의 나머지 줄이 이어집니다.</a:t>
             </a:r>
           </a:p>
         </p:txBody>
@@ -9608,7 +9848,7 @@
               </a:defRPr>
             </a:pPr>
             <a:r>
-              <a:t>~/ros2_curri/agv_ws/src/agv_control/agv_control/velocity_monitor.py</a:t>
+              <a:t>~/ros2_curri/agv_ws/src/agv_control/agv_control/cmd_test_node.py</a:t>
             </a:r>
           </a:p>
         </p:txBody>
@@ -9744,7 +9984,7 @@
               </a:defRPr>
             </a:pPr>
             <a:r>
-              <a:t>현재 단계 11/14    |    현재 폴더 ~/ros2_curri/agv_ws    |    현재 터미널</a:t>
+              <a:t>현재 단계 8/11    |    현재 폴더 ~/ros2_curri/agv_ws    |    현재 터미널</a:t>
             </a:r>
           </a:p>
         </p:txBody>
@@ -9845,7 +10085,7 @@
             </a:r>
             <a:br/>
             <a:r>
-              <a:t>파일 열기: nano ~/ros2_curri/agv_ws/src/agv_control/agv_control/velocity_monitor.py</a:t>
+              <a:t>파일 열기: nano ~/ros2_curri/agv_ws/src/agv_control/agv_control/cmd_test_node.py</a:t>
             </a:r>
           </a:p>
         </p:txBody>
@@ -9916,7 +10156,7 @@
             <a:br/>
             <a:br/>
             <a:r>
-              <a:t>class VelocityMonitor(Node):</a:t>
+              <a:t>class CmdTestNode(Node):</a:t>
             </a:r>
             <a:br/>
             <a:br/>
@@ -9925,20 +10165,23 @@
             </a:r>
             <a:br/>
             <a:r>
-              <a:t>        super().__init__('velocity_monitor')</a:t>
+              <a:t>        super().__init__('cmd_test_node')</a:t>
             </a:r>
             <a:br/>
             <a:r>
-              <a:t>        self.create_subscription(Twist, '/cmd_vel', self.callback, 10)</a:t>
+              <a:t>        self.declare_parameter('linear_speed', 0.15)</a:t>
             </a:r>
             <a:br/>
+            <a:r>
+              <a:t>        self.declare_parameter('angular_speed', 0.0)</a:t>
+            </a:r>
             <a:br/>
             <a:r>
-              <a:t>    def callback(self, message):</a:t>
+              <a:t>        self.publisher = self.create_publisher(Twist, '/cmd_vel', 10)</a:t>
             </a:r>
             <a:br/>
             <a:r>
-              <a:t>        self.get_logger().info('cmd_vel linear.x=%.3f angular.z=%.3f' % (message.linear.x,</a:t>
+              <a:t>        self.remaining = 30</a:t>
             </a:r>
           </a:p>
         </p:txBody>
@@ -10073,7 +10316,7 @@
               </a:defRPr>
             </a:pPr>
             <a:r>
-              <a:t>~/ros2_curri/agv_ws/src/agv_control/agv_control/velocity_monitor.py</a:t>
+              <a:t>~/ros2_curri/agv_ws/src/agv_control/agv_control/cmd_test_node.py</a:t>
             </a:r>
           </a:p>
         </p:txBody>
@@ -10209,7 +10452,7 @@
               </a:defRPr>
             </a:pPr>
             <a:r>
-              <a:t>현재 단계 12/14    |    현재 폴더 ~/ros2_curri/agv_ws    |    현재 터미널</a:t>
+              <a:t>현재 단계 9/11    |    현재 폴더 ~/ros2_curri/agv_ws    |    현재 터미널</a:t>
             </a:r>
           </a:p>
         </p:txBody>
@@ -10310,7 +10553,7 @@
             </a:r>
             <a:br/>
             <a:r>
-              <a:t>파일 열기: nano ~/ros2_curri/agv_ws/src/agv_control/agv_control/velocity_monitor.py</a:t>
+              <a:t>파일 열기: nano ~/ros2_curri/agv_ws/src/agv_control/agv_control/cmd_test_node.py</a:t>
             </a:r>
           </a:p>
         </p:txBody>
@@ -10368,48 +10611,48 @@
               </a:defRPr>
             </a:pPr>
             <a:r>
-              <a:t>             message.angular.z))</a:t>
+              <a:t>        self.create_timer(0.1, self.publish_once)</a:t>
             </a:r>
             <a:br/>
             <a:br/>
             <a:r>
-              <a:t>def main():</a:t>
+              <a:t>    def publish_once(self):</a:t>
             </a:r>
             <a:br/>
             <a:r>
-              <a:t>    rclpy.init()</a:t>
+              <a:t>        command = Twist()</a:t>
             </a:r>
             <a:br/>
             <a:r>
-              <a:t>    node = VelocityMonitor()</a:t>
+              <a:t>        if self.remaining &gt; 0:</a:t>
             </a:r>
             <a:br/>
             <a:r>
-              <a:t>    try:</a:t>
+              <a:t>            command.linear.x = self.get_parameter('linear_speed').value</a:t>
             </a:r>
             <a:br/>
             <a:r>
-              <a:t>        rclpy.spin(node)</a:t>
+              <a:t>            command.angular.z = self.get_parameter('angular_speed').value</a:t>
             </a:r>
             <a:br/>
             <a:r>
-              <a:t>    except KeyboardInterrupt:</a:t>
+              <a:t>            self.remaining -= 1</a:t>
             </a:r>
             <a:br/>
             <a:r>
-              <a:t>        pass</a:t>
+              <a:t>        self.publisher.publish(command)</a:t>
             </a:r>
             <a:br/>
             <a:r>
-              <a:t>    finally:</a:t>
+              <a:t>        if self.remaining == 0:</a:t>
             </a:r>
             <a:br/>
             <a:r>
-              <a:t>        node.destroy_node()</a:t>
+              <a:t>            self.get_logger().info('test command finished; publishing zero Twist')</a:t>
             </a:r>
             <a:br/>
             <a:r>
-              <a:t>        if rclpy.ok():</a:t>
+              <a:t>            self.remaining = -1</a:t>
             </a:r>
           </a:p>
         </p:txBody>
@@ -10544,7 +10787,7 @@
               </a:defRPr>
             </a:pPr>
             <a:r>
-              <a:t>~/ros2_curri/agv_ws/src/agv_control/agv_control/velocity_monitor.py</a:t>
+              <a:t>~/ros2_curri/agv_ws/src/agv_control/agv_control/cmd_test_node.py</a:t>
             </a:r>
           </a:p>
         </p:txBody>
@@ -10680,7 +10923,7 @@
               </a:defRPr>
             </a:pPr>
             <a:r>
-              <a:t>현재 단계 13/14    |    현재 폴더 ~/ros2_curri/agv_ws    |    현재 터미널</a:t>
+              <a:t>현재 단계 10/11    |    현재 폴더 ~/ros2_curri/agv_ws    |    현재 터미널</a:t>
             </a:r>
           </a:p>
         </p:txBody>
@@ -10781,7 +11024,7 @@
             </a:r>
             <a:br/>
             <a:r>
-              <a:t>파일 열기: nano ~/ros2_curri/agv_ws/src/agv_control/agv_control/velocity_monitor.py</a:t>
+              <a:t>파일 열기: nano ~/ros2_curri/agv_ws/src/agv_control/agv_control/cmd_test_node.py</a:t>
             </a:r>
           </a:p>
         </p:txBody>
@@ -10838,6 +11081,47 @@
                 <a:latin typeface="DejaVu Sans Mono"/>
               </a:defRPr>
             </a:pPr>
+            <a:br/>
+            <a:r>
+              <a:t>def main():</a:t>
+            </a:r>
+            <a:br/>
+            <a:r>
+              <a:t>    rclpy.init()</a:t>
+            </a:r>
+            <a:br/>
+            <a:r>
+              <a:t>    node = CmdTestNode()</a:t>
+            </a:r>
+            <a:br/>
+            <a:r>
+              <a:t>    try:</a:t>
+            </a:r>
+            <a:br/>
+            <a:r>
+              <a:t>        rclpy.spin(node)</a:t>
+            </a:r>
+            <a:br/>
+            <a:r>
+              <a:t>    except KeyboardInterrupt:</a:t>
+            </a:r>
+            <a:br/>
+            <a:r>
+              <a:t>        pass</a:t>
+            </a:r>
+            <a:br/>
+            <a:r>
+              <a:t>    finally:</a:t>
+            </a:r>
+            <a:br/>
+            <a:r>
+              <a:t>        node.destroy_node()</a:t>
+            </a:r>
+            <a:br/>
+            <a:r>
+              <a:t>        if rclpy.ok():</a:t>
+            </a:r>
+            <a:br/>
             <a:r>
               <a:t>            rclpy.shutdown()</a:t>
             </a:r>
@@ -11396,7 +11680,7 @@
               </a:defRPr>
             </a:pPr>
             <a:r>
-              <a:t>파일을 새로 만들고 저장한다 (1/1)</a:t>
+              <a:t>파일을 새로 만들고 저장한다 (1/3)</a:t>
             </a:r>
           </a:p>
         </p:txBody>
@@ -11435,7 +11719,7 @@
               </a:defRPr>
             </a:pPr>
             <a:r>
-              <a:t>~/ros2_curri/agv_ws/src/agv_control/setup.py</a:t>
+              <a:t>~/ros2_curri/agv_ws/src/agv_control/agv_control/velocity_monitor.py</a:t>
             </a:r>
           </a:p>
         </p:txBody>
@@ -11571,7 +11855,7 @@
               </a:defRPr>
             </a:pPr>
             <a:r>
-              <a:t>현재 단계 14/15    |    현재 폴더 ~/ros2_curri/agv_ws    |    현재 터미널</a:t>
+              <a:t>현재 단계 11/14    |    현재 폴더 ~/ros2_curri/agv_ws    |    현재 터미널</a:t>
             </a:r>
           </a:p>
         </p:txBody>
@@ -11668,11 +11952,11 @@
               </a:defRPr>
             </a:pPr>
             <a:r>
-              <a:t>파일 생성: mkdir -p ~/ros2_curri/agv_ws/src/agv_control</a:t>
+              <a:t>파일 생성: mkdir -p ~/ros2_curri/agv_ws/src/agv_control/agv_control</a:t>
             </a:r>
             <a:br/>
             <a:r>
-              <a:t>파일 열기: nano ~/ros2_curri/agv_ws/src/agv_control/setup.py</a:t>
+              <a:t>파일 열기: nano ~/ros2_curri/agv_ws/src/agv_control/agv_control/velocity_monitor.py</a:t>
             </a:r>
           </a:p>
         </p:txBody>
@@ -11730,51 +12014,42 @@
               </a:defRPr>
             </a:pPr>
             <a:r>
-              <a:t>from setuptools import find_packages, setup</a:t>
+              <a:t>import rclpy</a:t>
             </a:r>
             <a:br/>
             <a:r>
-              <a:t>package_name = 'agv_control'</a:t>
+              <a:t>from rclpy.node import Node</a:t>
             </a:r>
             <a:br/>
             <a:r>
-              <a:t>setup(name=package_name, version='0.1.0', packages=find_packages(exclude=['test']),</a:t>
+              <a:t>from geometry_msgs.msg import Twist</a:t>
             </a:r>
             <a:br/>
-            <a:r>
-              <a:t>    data_files=[('share/ament_index/resource_index/packages',</a:t>
-            </a:r>
             <a:br/>
             <a:r>
-              <a:t>    ['resource/' + package_name]), ('share/' + package_name, ['package.xml']),</a:t>
+              <a:t>class VelocityMonitor(Node):</a:t>
             </a:r>
             <a:br/>
-            <a:r>
-              <a:t>    ('share/' + package_name + '/config', ['config/controllers.yaml'])],</a:t>
-            </a:r>
             <a:br/>
             <a:r>
-              <a:t>    install_requires=['setuptools'], zip_safe=True, maintainer='AGV student',</a:t>
+              <a:t>    def __init__(self):</a:t>
             </a:r>
             <a:br/>
             <a:r>
-              <a:t>    maintainer_email='student@example.com', license='Apache-2.0',</a:t>
+              <a:t>        super().__init__('velocity_monitor')</a:t>
             </a:r>
             <a:br/>
             <a:r>
-              <a:t>    entry_points={'console_scripts': ['counter_publisher = agv_control.counter_publisher:main',</a:t>
+              <a:t>        self.create_subscription(Twist, '/cmd_vel', self.callback, 10)</a:t>
             </a:r>
             <a:br/>
-            <a:r>
-              <a:t>     'counter_monitor = agv_control.counter_monitor:main', 'cmd_test_node = agv_control.cmd_test_node:main',</a:t>
-            </a:r>
             <a:br/>
             <a:r>
-              <a:t>     'velocity_monitor = agv_control.velocity_monitor:main', 'safety_controller = agv_control.safety_controller:main',</a:t>
+              <a:t>    def callback(self, message):</a:t>
             </a:r>
             <a:br/>
             <a:r>
-              <a:t>     'pid_controller = agv_control.pid_controller:main']})</a:t>
+              <a:t>        self.get_logger().info('cmd_vel linear.x=%.3f angular.z=%.3f' % (message.linear.x,</a:t>
             </a:r>
           </a:p>
         </p:txBody>
@@ -11813,7 +12088,7 @@
               </a:defRPr>
             </a:pPr>
             <a:r>
-              <a:t>파일 전체 1/1 · 이 슬라이드 다음에 같은 파일의 나머지 줄이 이어집니다.</a:t>
+              <a:t>파일 전체 1/3 · 이 슬라이드 다음에 같은 파일의 나머지 줄이 이어집니다.</a:t>
             </a:r>
           </a:p>
         </p:txBody>
@@ -11870,7 +12145,7 @@
               </a:defRPr>
             </a:pPr>
             <a:r>
-              <a:t>build → source → run 순서로 실행한다</a:t>
+              <a:t>파일을 계속 작성하고 저장한다 (2/3)</a:t>
             </a:r>
           </a:p>
         </p:txBody>
@@ -11909,7 +12184,7 @@
               </a:defRPr>
             </a:pPr>
             <a:r>
-              <a:t>새 파일 또는 수정 파일은 build와 source 뒤에만 실행 이름·설정에 반영됩니다.</a:t>
+              <a:t>~/ros2_curri/agv_ws/src/agv_control/agv_control/velocity_monitor.py</a:t>
             </a:r>
           </a:p>
         </p:txBody>
@@ -12045,23 +12320,124 @@
               </a:defRPr>
             </a:pPr>
             <a:r>
-              <a:t>현재 단계 실행    |    현재 폴더 ~/ros2_curri/agv_ws    |    현재 터미널</a:t>
-            </a:r>
-          </a:p>
-        </p:txBody>
-      </p:sp>
-      <p:sp>
-        <p:nvSpPr>
-          <p:cNvPr id="7" name="Rounded Rectangle 6"/>
+              <a:t>현재 단계 12/14    |    현재 폴더 ~/ros2_curri/agv_ws    |    현재 터미널</a:t>
+            </a:r>
+          </a:p>
+        </p:txBody>
+      </p:sp>
+      <p:sp>
+        <p:nvSpPr>
+          <p:cNvPr id="7" name="TextBox 6"/>
+          <p:cNvSpPr txBox="1"/>
+          <p:nvPr/>
+        </p:nvSpPr>
+        <p:spPr>
+          <a:xfrm>
+            <a:off x="658368" y="1627632"/>
+            <a:ext cx="10972800" cy="256032"/>
+          </a:xfrm>
+          <a:prstGeom prst="rect">
+            <a:avLst/>
+          </a:prstGeom>
+          <a:noFill/>
+        </p:spPr>
+        <p:txBody>
+          <a:bodyPr wrap="square" lIns="73152" rIns="73152" tIns="36576" bIns="36576">
+            <a:spAutoFit/>
+          </a:bodyPr>
+          <a:lstStyle/>
+          <a:p>
+            <a:pPr algn="l">
+              <a:spcAft>
+                <a:spcPts val="0"/>
+              </a:spcAft>
+              <a:defRPr sz="1500" b="1">
+                <a:solidFill>
+                  <a:srgbClr val="122C4E"/>
+                </a:solidFill>
+                <a:latin typeface="Noto Sans CJK KR"/>
+              </a:defRPr>
+            </a:pPr>
+            <a:r>
+              <a:t>이번 단계: 파일의 전체 내용을 중간 생략 없이 작성합니다. 아래 줄 범위를 끝까지 입력하세요.</a:t>
+            </a:r>
+          </a:p>
+        </p:txBody>
+      </p:sp>
+      <p:sp>
+        <p:nvSpPr>
+          <p:cNvPr id="8" name="Rectangle 7"/>
           <p:cNvSpPr/>
           <p:nvPr/>
         </p:nvSpPr>
         <p:spPr>
           <a:xfrm>
-            <a:off x="658368" y="1700784"/>
-            <a:ext cx="10972800" cy="3182112"/>
-          </a:xfrm>
-          <a:prstGeom prst="roundRect">
+            <a:off x="658368" y="1956816"/>
+            <a:ext cx="10972800" cy="603504"/>
+          </a:xfrm>
+          <a:prstGeom prst="rect">
+            <a:avLst/>
+          </a:prstGeom>
+          <a:solidFill>
+            <a:srgbClr val="F4F7FB"/>
+          </a:solidFill>
+          <a:ln>
+            <a:solidFill>
+              <a:srgbClr val="F4F7FB"/>
+            </a:solidFill>
+          </a:ln>
+        </p:spPr>
+        <p:style>
+          <a:lnRef idx="1">
+            <a:schemeClr val="accent1"/>
+          </a:lnRef>
+          <a:fillRef idx="3">
+            <a:schemeClr val="accent1"/>
+          </a:fillRef>
+          <a:effectRef idx="2">
+            <a:schemeClr val="accent1"/>
+          </a:effectRef>
+          <a:fontRef idx="minor">
+            <a:schemeClr val="lt1"/>
+          </a:fontRef>
+        </p:style>
+        <p:txBody>
+          <a:bodyPr rtlCol="0" anchor="ctr" wrap="square" lIns="73152" rIns="73152" tIns="36576" bIns="36576"/>
+          <a:lstStyle/>
+          <a:p>
+            <a:pPr algn="l">
+              <a:spcAft>
+                <a:spcPts val="0"/>
+              </a:spcAft>
+              <a:defRPr sz="1400" b="0">
+                <a:solidFill>
+                  <a:srgbClr val="122C4E"/>
+                </a:solidFill>
+                <a:latin typeface="DejaVu Sans Mono"/>
+              </a:defRPr>
+            </a:pPr>
+            <a:r>
+              <a:t>파일 생성: mkdir -p ~/ros2_curri/agv_ws/src/agv_control/agv_control</a:t>
+            </a:r>
+            <a:br/>
+            <a:r>
+              <a:t>파일 열기: nano ~/ros2_curri/agv_ws/src/agv_control/agv_control/velocity_monitor.py</a:t>
+            </a:r>
+          </a:p>
+        </p:txBody>
+      </p:sp>
+      <p:sp>
+        <p:nvSpPr>
+          <p:cNvPr id="9" name="Rectangle 8"/>
+          <p:cNvSpPr/>
+          <p:nvPr/>
+        </p:nvSpPr>
+        <p:spPr>
+          <a:xfrm>
+            <a:off x="658368" y="2706624"/>
+            <a:ext cx="10972800" cy="3364992"/>
+          </a:xfrm>
+          <a:prstGeom prst="rect">
             <a:avLst/>
           </a:prstGeom>
           <a:solidFill>
@@ -12088,14 +12464,14 @@
           </a:fontRef>
         </p:style>
         <p:txBody>
-          <a:bodyPr rtlCol="0" anchor="ctr" wrap="square" lIns="73152" rIns="73152" tIns="36576" bIns="36576"/>
-          <a:lstStyle/>
-          <a:p>
-            <a:pPr algn="l">
-              <a:spcAft>
-                <a:spcPts val="0"/>
-              </a:spcAft>
-              <a:defRPr sz="1600" b="0">
+          <a:bodyPr rtlCol="0" anchor="ctr" wrap="square" lIns="164592" rIns="164592" tIns="109728" bIns="36576"/>
+          <a:lstStyle/>
+          <a:p>
+            <a:pPr algn="l">
+              <a:spcAft>
+                <a:spcPts val="0"/>
+              </a:spcAft>
+              <a:defRPr sz="1400" b="0">
                 <a:solidFill>
                   <a:srgbClr val="FFFFFF"/>
                 </a:solidFill>
@@ -12103,93 +12479,87 @@
               </a:defRPr>
             </a:pPr>
             <a:r>
-              <a:t>cd ~/ros2_curri/agv_ws &amp;&amp; source install/setup.bash</a:t>
+              <a:t>             message.angular.z))</a:t>
             </a:r>
             <a:br/>
-            <a:r>
-              <a:t>ros2 run agv_control counter_publisher</a:t>
-            </a:r>
             <a:br/>
             <a:r>
-              <a:t># 새 터미널: ros2 run agv_control counter_monitor</a:t>
-            </a:r>
-          </a:p>
-        </p:txBody>
-      </p:sp>
-      <p:sp>
-        <p:nvSpPr>
-          <p:cNvPr id="8" name="TextBox 7"/>
-          <p:cNvSpPr txBox="1"/>
-          <p:nvPr/>
-        </p:nvSpPr>
-        <p:spPr>
-          <a:xfrm>
-            <a:off x="786384" y="5239512"/>
-            <a:ext cx="1261872" cy="237744"/>
-          </a:xfrm>
-          <a:prstGeom prst="rect">
-            <a:avLst/>
-          </a:prstGeom>
-          <a:noFill/>
-        </p:spPr>
-        <p:txBody>
-          <a:bodyPr wrap="square" lIns="73152" rIns="73152" tIns="36576" bIns="36576">
-            <a:spAutoFit/>
-          </a:bodyPr>
-          <a:lstStyle/>
-          <a:p>
-            <a:pPr algn="l">
-              <a:spcAft>
-                <a:spcPts val="0"/>
-              </a:spcAft>
-              <a:defRPr sz="1800" b="1">
-                <a:solidFill>
-                  <a:srgbClr val="2A8B5A"/>
-                </a:solidFill>
-                <a:latin typeface="Noto Sans CJK KR"/>
-              </a:defRPr>
-            </a:pPr>
-            <a:r>
-              <a:t>확인 기준</a:t>
-            </a:r>
-          </a:p>
-        </p:txBody>
-      </p:sp>
-      <p:sp>
-        <p:nvSpPr>
-          <p:cNvPr id="9" name="TextBox 8"/>
-          <p:cNvSpPr txBox="1"/>
-          <p:nvPr/>
-        </p:nvSpPr>
-        <p:spPr>
-          <a:xfrm>
-            <a:off x="786384" y="5532120"/>
-            <a:ext cx="10469880" cy="420624"/>
-          </a:xfrm>
-          <a:prstGeom prst="rect">
-            <a:avLst/>
-          </a:prstGeom>
-          <a:noFill/>
-        </p:spPr>
-        <p:txBody>
-          <a:bodyPr wrap="square" lIns="73152" rIns="73152" tIns="36576" bIns="36576">
-            <a:spAutoFit/>
-          </a:bodyPr>
-          <a:lstStyle/>
-          <a:p>
-            <a:pPr algn="l">
-              <a:spcAft>
-                <a:spcPts val="0"/>
-              </a:spcAft>
-              <a:defRPr sz="1800" b="0">
-                <a:solidFill>
-                  <a:srgbClr val="122C4E"/>
-                </a:solidFill>
-                <a:latin typeface="Noto Sans CJK KR"/>
-              </a:defRPr>
-            </a:pPr>
-            <a:r>
-              <a:t>/counter와 /cmd_vel의 값·message type·연결 수를 terminal에서 확인한다.</a:t>
+              <a:t>def main():</a:t>
+            </a:r>
+            <a:br/>
+            <a:r>
+              <a:t>    rclpy.init()</a:t>
+            </a:r>
+            <a:br/>
+            <a:r>
+              <a:t>    node = VelocityMonitor()</a:t>
+            </a:r>
+            <a:br/>
+            <a:r>
+              <a:t>    try:</a:t>
+            </a:r>
+            <a:br/>
+            <a:r>
+              <a:t>        rclpy.spin(node)</a:t>
+            </a:r>
+            <a:br/>
+            <a:r>
+              <a:t>    except KeyboardInterrupt:</a:t>
+            </a:r>
+            <a:br/>
+            <a:r>
+              <a:t>        pass</a:t>
+            </a:r>
+            <a:br/>
+            <a:r>
+              <a:t>    finally:</a:t>
+            </a:r>
+            <a:br/>
+            <a:r>
+              <a:t>        node.destroy_node()</a:t>
+            </a:r>
+            <a:br/>
+            <a:r>
+              <a:t>        if rclpy.ok():</a:t>
+            </a:r>
+          </a:p>
+        </p:txBody>
+      </p:sp>
+      <p:sp>
+        <p:nvSpPr>
+          <p:cNvPr id="10" name="TextBox 9"/>
+          <p:cNvSpPr txBox="1"/>
+          <p:nvPr/>
+        </p:nvSpPr>
+        <p:spPr>
+          <a:xfrm>
+            <a:off x="749808" y="6181344"/>
+            <a:ext cx="10789920" cy="201168"/>
+          </a:xfrm>
+          <a:prstGeom prst="rect">
+            <a:avLst/>
+          </a:prstGeom>
+          <a:noFill/>
+        </p:spPr>
+        <p:txBody>
+          <a:bodyPr wrap="square" lIns="73152" rIns="73152" tIns="36576" bIns="36576">
+            <a:spAutoFit/>
+          </a:bodyPr>
+          <a:lstStyle/>
+          <a:p>
+            <a:pPr algn="l">
+              <a:spcAft>
+                <a:spcPts val="0"/>
+              </a:spcAft>
+              <a:defRPr sz="1000" b="0">
+                <a:solidFill>
+                  <a:srgbClr val="5C6672"/>
+                </a:solidFill>
+                <a:latin typeface="Noto Sans CJK KR"/>
+              </a:defRPr>
+            </a:pPr>
+            <a:r>
+              <a:t>파일 전체 2/3 · 이 슬라이드 다음에 같은 파일의 나머지 줄이 이어집니다.</a:t>
             </a:r>
           </a:p>
         </p:txBody>
@@ -12246,7 +12616,7 @@
               </a:defRPr>
             </a:pPr>
             <a:r>
-              <a:t>정상 결과: 실제 환경에서 확인한 출력</a:t>
+              <a:t>파일을 계속 작성하고 저장한다 (3/3)</a:t>
             </a:r>
           </a:p>
         </p:txBody>
@@ -12285,7 +12655,7 @@
               </a:defRPr>
             </a:pPr>
             <a:r>
-              <a:t>실제 ROS 2 환경의 파일·패키지·구성 검증 로그</a:t>
+              <a:t>~/ros2_curri/agv_ws/src/agv_control/agv_control/velocity_monitor.py</a:t>
             </a:r>
           </a:p>
         </p:txBody>
@@ -12368,30 +12738,64 @@
           </a:p>
         </p:txBody>
       </p:sp>
-      <p:pic>
-        <p:nvPicPr>
-          <p:cNvPr id="6" name="Picture 5" descr="validation_terminal.png"/>
-          <p:cNvPicPr>
-            <a:picLocks noChangeAspect="1"/>
-          </p:cNvPicPr>
-          <p:nvPr/>
-        </p:nvPicPr>
-        <p:blipFill>
-          <a:blip r:embed="rId2"/>
-          <a:stretch>
-            <a:fillRect/>
-          </a:stretch>
-        </p:blipFill>
-        <p:spPr>
-          <a:xfrm>
-            <a:off x="790956" y="1453970"/>
-            <a:ext cx="10607040" cy="4599282"/>
-          </a:xfrm>
-          <a:prstGeom prst="rect">
-            <a:avLst/>
-          </a:prstGeom>
-        </p:spPr>
-      </p:pic>
+      <p:sp>
+        <p:nvSpPr>
+          <p:cNvPr id="6" name="Rectangle 5"/>
+          <p:cNvSpPr/>
+          <p:nvPr/>
+        </p:nvSpPr>
+        <p:spPr>
+          <a:xfrm>
+            <a:off x="566928" y="1188720"/>
+            <a:ext cx="11064240" cy="347472"/>
+          </a:xfrm>
+          <a:prstGeom prst="rect">
+            <a:avLst/>
+          </a:prstGeom>
+          <a:solidFill>
+            <a:srgbClr val="F4F7FB"/>
+          </a:solidFill>
+          <a:ln>
+            <a:solidFill>
+              <a:srgbClr val="F4F7FB"/>
+            </a:solidFill>
+          </a:ln>
+        </p:spPr>
+        <p:style>
+          <a:lnRef idx="1">
+            <a:schemeClr val="accent1"/>
+          </a:lnRef>
+          <a:fillRef idx="3">
+            <a:schemeClr val="accent1"/>
+          </a:fillRef>
+          <a:effectRef idx="2">
+            <a:schemeClr val="accent1"/>
+          </a:effectRef>
+          <a:fontRef idx="minor">
+            <a:schemeClr val="lt1"/>
+          </a:fontRef>
+        </p:style>
+        <p:txBody>
+          <a:bodyPr rtlCol="0" anchor="ctr" wrap="square" lIns="73152" rIns="73152" tIns="36576" bIns="36576"/>
+          <a:lstStyle/>
+          <a:p>
+            <a:pPr algn="l">
+              <a:spcAft>
+                <a:spcPts val="0"/>
+              </a:spcAft>
+              <a:defRPr sz="1300" b="1">
+                <a:solidFill>
+                  <a:srgbClr val="122C4E"/>
+                </a:solidFill>
+                <a:latin typeface="Noto Sans CJK KR"/>
+              </a:defRPr>
+            </a:pPr>
+            <a:r>
+              <a:t>현재 단계 13/14    |    현재 폴더 ~/ros2_curri/agv_ws    |    현재 터미널</a:t>
+            </a:r>
+          </a:p>
+        </p:txBody>
+      </p:sp>
       <p:sp>
         <p:nvSpPr>
           <p:cNvPr id="7" name="TextBox 6"/>
@@ -12400,33 +12804,192 @@
         </p:nvSpPr>
         <p:spPr>
           <a:xfrm>
-            <a:off x="777240" y="6217920"/>
-            <a:ext cx="10607040" cy="182880"/>
-          </a:xfrm>
-          <a:prstGeom prst="rect">
-            <a:avLst/>
-          </a:prstGeom>
-          <a:noFill/>
-        </p:spPr>
-        <p:txBody>
-          <a:bodyPr wrap="square" lIns="73152" rIns="73152" tIns="36576" bIns="36576">
-            <a:spAutoFit/>
-          </a:bodyPr>
-          <a:lstStyle/>
-          <a:p>
-            <a:pPr algn="ctr">
-              <a:spcAft>
-                <a:spcPts val="0"/>
-              </a:spcAft>
-              <a:defRPr sz="1100" b="1">
-                <a:solidFill>
-                  <a:srgbClr val="2A8B5A"/>
-                </a:solidFill>
-                <a:latin typeface="Noto Sans CJK KR"/>
-              </a:defRPr>
-            </a:pPr>
-            <a:r>
-              <a:t>① 명령/설정  ② 정상 출력 또는 화면  ③ 다음 검증 명령으로 재확인</a:t>
+            <a:off x="658368" y="1627632"/>
+            <a:ext cx="10972800" cy="256032"/>
+          </a:xfrm>
+          <a:prstGeom prst="rect">
+            <a:avLst/>
+          </a:prstGeom>
+          <a:noFill/>
+        </p:spPr>
+        <p:txBody>
+          <a:bodyPr wrap="square" lIns="73152" rIns="73152" tIns="36576" bIns="36576">
+            <a:spAutoFit/>
+          </a:bodyPr>
+          <a:lstStyle/>
+          <a:p>
+            <a:pPr algn="l">
+              <a:spcAft>
+                <a:spcPts val="0"/>
+              </a:spcAft>
+              <a:defRPr sz="1500" b="1">
+                <a:solidFill>
+                  <a:srgbClr val="122C4E"/>
+                </a:solidFill>
+                <a:latin typeface="Noto Sans CJK KR"/>
+              </a:defRPr>
+            </a:pPr>
+            <a:r>
+              <a:t>이번 단계: 파일의 전체 내용을 중간 생략 없이 작성합니다. 아래 줄 범위를 끝까지 입력하세요.</a:t>
+            </a:r>
+          </a:p>
+        </p:txBody>
+      </p:sp>
+      <p:sp>
+        <p:nvSpPr>
+          <p:cNvPr id="8" name="Rectangle 7"/>
+          <p:cNvSpPr/>
+          <p:nvPr/>
+        </p:nvSpPr>
+        <p:spPr>
+          <a:xfrm>
+            <a:off x="658368" y="1956816"/>
+            <a:ext cx="10972800" cy="603504"/>
+          </a:xfrm>
+          <a:prstGeom prst="rect">
+            <a:avLst/>
+          </a:prstGeom>
+          <a:solidFill>
+            <a:srgbClr val="F4F7FB"/>
+          </a:solidFill>
+          <a:ln>
+            <a:solidFill>
+              <a:srgbClr val="F4F7FB"/>
+            </a:solidFill>
+          </a:ln>
+        </p:spPr>
+        <p:style>
+          <a:lnRef idx="1">
+            <a:schemeClr val="accent1"/>
+          </a:lnRef>
+          <a:fillRef idx="3">
+            <a:schemeClr val="accent1"/>
+          </a:fillRef>
+          <a:effectRef idx="2">
+            <a:schemeClr val="accent1"/>
+          </a:effectRef>
+          <a:fontRef idx="minor">
+            <a:schemeClr val="lt1"/>
+          </a:fontRef>
+        </p:style>
+        <p:txBody>
+          <a:bodyPr rtlCol="0" anchor="ctr" wrap="square" lIns="73152" rIns="73152" tIns="36576" bIns="36576"/>
+          <a:lstStyle/>
+          <a:p>
+            <a:pPr algn="l">
+              <a:spcAft>
+                <a:spcPts val="0"/>
+              </a:spcAft>
+              <a:defRPr sz="1400" b="0">
+                <a:solidFill>
+                  <a:srgbClr val="122C4E"/>
+                </a:solidFill>
+                <a:latin typeface="DejaVu Sans Mono"/>
+              </a:defRPr>
+            </a:pPr>
+            <a:r>
+              <a:t>파일 생성: mkdir -p ~/ros2_curri/agv_ws/src/agv_control/agv_control</a:t>
+            </a:r>
+            <a:br/>
+            <a:r>
+              <a:t>파일 열기: nano ~/ros2_curri/agv_ws/src/agv_control/agv_control/velocity_monitor.py</a:t>
+            </a:r>
+          </a:p>
+        </p:txBody>
+      </p:sp>
+      <p:sp>
+        <p:nvSpPr>
+          <p:cNvPr id="9" name="Rectangle 8"/>
+          <p:cNvSpPr/>
+          <p:nvPr/>
+        </p:nvSpPr>
+        <p:spPr>
+          <a:xfrm>
+            <a:off x="658368" y="2706624"/>
+            <a:ext cx="10972800" cy="3364992"/>
+          </a:xfrm>
+          <a:prstGeom prst="rect">
+            <a:avLst/>
+          </a:prstGeom>
+          <a:solidFill>
+            <a:srgbClr val="1D232D"/>
+          </a:solidFill>
+          <a:ln>
+            <a:solidFill>
+              <a:srgbClr val="1D232D"/>
+            </a:solidFill>
+          </a:ln>
+        </p:spPr>
+        <p:style>
+          <a:lnRef idx="1">
+            <a:schemeClr val="accent1"/>
+          </a:lnRef>
+          <a:fillRef idx="3">
+            <a:schemeClr val="accent1"/>
+          </a:fillRef>
+          <a:effectRef idx="2">
+            <a:schemeClr val="accent1"/>
+          </a:effectRef>
+          <a:fontRef idx="minor">
+            <a:schemeClr val="lt1"/>
+          </a:fontRef>
+        </p:style>
+        <p:txBody>
+          <a:bodyPr rtlCol="0" anchor="ctr" wrap="square" lIns="164592" rIns="164592" tIns="109728" bIns="36576"/>
+          <a:lstStyle/>
+          <a:p>
+            <a:pPr algn="l">
+              <a:spcAft>
+                <a:spcPts val="0"/>
+              </a:spcAft>
+              <a:defRPr sz="1400" b="0">
+                <a:solidFill>
+                  <a:srgbClr val="FFFFFF"/>
+                </a:solidFill>
+                <a:latin typeface="DejaVu Sans Mono"/>
+              </a:defRPr>
+            </a:pPr>
+            <a:r>
+              <a:t>            rclpy.shutdown()</a:t>
+            </a:r>
+          </a:p>
+        </p:txBody>
+      </p:sp>
+      <p:sp>
+        <p:nvSpPr>
+          <p:cNvPr id="10" name="TextBox 9"/>
+          <p:cNvSpPr txBox="1"/>
+          <p:nvPr/>
+        </p:nvSpPr>
+        <p:spPr>
+          <a:xfrm>
+            <a:off x="749808" y="6181344"/>
+            <a:ext cx="10789920" cy="201168"/>
+          </a:xfrm>
+          <a:prstGeom prst="rect">
+            <a:avLst/>
+          </a:prstGeom>
+          <a:noFill/>
+        </p:spPr>
+        <p:txBody>
+          <a:bodyPr wrap="square" lIns="73152" rIns="73152" tIns="36576" bIns="36576">
+            <a:spAutoFit/>
+          </a:bodyPr>
+          <a:lstStyle/>
+          <a:p>
+            <a:pPr algn="l">
+              <a:spcAft>
+                <a:spcPts val="0"/>
+              </a:spcAft>
+              <a:defRPr sz="1000" b="0">
+                <a:solidFill>
+                  <a:srgbClr val="5C6672"/>
+                </a:solidFill>
+                <a:latin typeface="Noto Sans CJK KR"/>
+              </a:defRPr>
+            </a:pPr>
+            <a:r>
+              <a:t>파일 전체 3/3 · 이 슬라이드 다음에 같은 파일의 나머지 줄이 이어집니다.</a:t>
             </a:r>
           </a:p>
         </p:txBody>
@@ -12483,7 +13046,7 @@
               </a:defRPr>
             </a:pPr>
             <a:r>
-              <a:t>객관적 검증 명령으로 완료를 확인한다</a:t>
+              <a:t>파일을 새로 만들고 저장한다 (1/1)</a:t>
             </a:r>
           </a:p>
         </p:txBody>
@@ -12522,7 +13085,7 @@
               </a:defRPr>
             </a:pPr>
             <a:r>
-              <a:t>화면만 보지 말고 topic·frame·파일·parameter를 다시 확인합니다.</a:t>
+              <a:t>~/ros2_curri/agv_ws/src/agv_control/setup.py</a:t>
             </a:r>
           </a:p>
         </p:txBody>
@@ -12658,23 +13221,124 @@
               </a:defRPr>
             </a:pPr>
             <a:r>
-              <a:t>현재 단계 검증    |    현재 폴더 ~/ros2_curri/agv_ws    |    현재 터미널</a:t>
-            </a:r>
-          </a:p>
-        </p:txBody>
-      </p:sp>
-      <p:sp>
-        <p:nvSpPr>
-          <p:cNvPr id="7" name="Rounded Rectangle 6"/>
+              <a:t>현재 단계 14/15    |    현재 폴더 ~/ros2_curri/agv_ws    |    현재 터미널</a:t>
+            </a:r>
+          </a:p>
+        </p:txBody>
+      </p:sp>
+      <p:sp>
+        <p:nvSpPr>
+          <p:cNvPr id="7" name="TextBox 6"/>
+          <p:cNvSpPr txBox="1"/>
+          <p:nvPr/>
+        </p:nvSpPr>
+        <p:spPr>
+          <a:xfrm>
+            <a:off x="658368" y="1627632"/>
+            <a:ext cx="10972800" cy="256032"/>
+          </a:xfrm>
+          <a:prstGeom prst="rect">
+            <a:avLst/>
+          </a:prstGeom>
+          <a:noFill/>
+        </p:spPr>
+        <p:txBody>
+          <a:bodyPr wrap="square" lIns="73152" rIns="73152" tIns="36576" bIns="36576">
+            <a:spAutoFit/>
+          </a:bodyPr>
+          <a:lstStyle/>
+          <a:p>
+            <a:pPr algn="l">
+              <a:spcAft>
+                <a:spcPts val="0"/>
+              </a:spcAft>
+              <a:defRPr sz="1500" b="1">
+                <a:solidFill>
+                  <a:srgbClr val="122C4E"/>
+                </a:solidFill>
+                <a:latin typeface="Noto Sans CJK KR"/>
+              </a:defRPr>
+            </a:pPr>
+            <a:r>
+              <a:t>이번 단계: 파일의 전체 내용을 중간 생략 없이 작성합니다. 아래 줄 범위를 끝까지 입력하세요.</a:t>
+            </a:r>
+          </a:p>
+        </p:txBody>
+      </p:sp>
+      <p:sp>
+        <p:nvSpPr>
+          <p:cNvPr id="8" name="Rectangle 7"/>
           <p:cNvSpPr/>
           <p:nvPr/>
         </p:nvSpPr>
         <p:spPr>
           <a:xfrm>
-            <a:off x="658368" y="1755648"/>
-            <a:ext cx="10972800" cy="2148840"/>
-          </a:xfrm>
-          <a:prstGeom prst="roundRect">
+            <a:off x="658368" y="1956816"/>
+            <a:ext cx="10972800" cy="603504"/>
+          </a:xfrm>
+          <a:prstGeom prst="rect">
+            <a:avLst/>
+          </a:prstGeom>
+          <a:solidFill>
+            <a:srgbClr val="F4F7FB"/>
+          </a:solidFill>
+          <a:ln>
+            <a:solidFill>
+              <a:srgbClr val="F4F7FB"/>
+            </a:solidFill>
+          </a:ln>
+        </p:spPr>
+        <p:style>
+          <a:lnRef idx="1">
+            <a:schemeClr val="accent1"/>
+          </a:lnRef>
+          <a:fillRef idx="3">
+            <a:schemeClr val="accent1"/>
+          </a:fillRef>
+          <a:effectRef idx="2">
+            <a:schemeClr val="accent1"/>
+          </a:effectRef>
+          <a:fontRef idx="minor">
+            <a:schemeClr val="lt1"/>
+          </a:fontRef>
+        </p:style>
+        <p:txBody>
+          <a:bodyPr rtlCol="0" anchor="ctr" wrap="square" lIns="73152" rIns="73152" tIns="36576" bIns="36576"/>
+          <a:lstStyle/>
+          <a:p>
+            <a:pPr algn="l">
+              <a:spcAft>
+                <a:spcPts val="0"/>
+              </a:spcAft>
+              <a:defRPr sz="1400" b="0">
+                <a:solidFill>
+                  <a:srgbClr val="122C4E"/>
+                </a:solidFill>
+                <a:latin typeface="DejaVu Sans Mono"/>
+              </a:defRPr>
+            </a:pPr>
+            <a:r>
+              <a:t>파일 생성: mkdir -p ~/ros2_curri/agv_ws/src/agv_control</a:t>
+            </a:r>
+            <a:br/>
+            <a:r>
+              <a:t>파일 열기: nano ~/ros2_curri/agv_ws/src/agv_control/setup.py</a:t>
+            </a:r>
+          </a:p>
+        </p:txBody>
+      </p:sp>
+      <p:sp>
+        <p:nvSpPr>
+          <p:cNvPr id="9" name="Rectangle 8"/>
+          <p:cNvSpPr/>
+          <p:nvPr/>
+        </p:nvSpPr>
+        <p:spPr>
+          <a:xfrm>
+            <a:off x="658368" y="2706624"/>
+            <a:ext cx="10972800" cy="3364992"/>
+          </a:xfrm>
+          <a:prstGeom prst="rect">
             <a:avLst/>
           </a:prstGeom>
           <a:solidFill>
@@ -12701,14 +13365,14 @@
           </a:fontRef>
         </p:style>
         <p:txBody>
-          <a:bodyPr rtlCol="0" anchor="ctr" wrap="square" lIns="73152" rIns="73152" tIns="36576" bIns="36576"/>
-          <a:lstStyle/>
-          <a:p>
-            <a:pPr algn="l">
-              <a:spcAft>
-                <a:spcPts val="0"/>
-              </a:spcAft>
-              <a:defRPr sz="1600" b="0">
+          <a:bodyPr rtlCol="0" anchor="ctr" wrap="square" lIns="164592" rIns="164592" tIns="109728" bIns="36576"/>
+          <a:lstStyle/>
+          <a:p>
+            <a:pPr algn="l">
+              <a:spcAft>
+                <a:spcPts val="0"/>
+              </a:spcAft>
+              <a:defRPr sz="1400" b="0">
                 <a:solidFill>
                   <a:srgbClr val="FFFFFF"/>
                 </a:solidFill>
@@ -12716,124 +13380,90 @@
               </a:defRPr>
             </a:pPr>
             <a:r>
-              <a:t>ros2 topic info /counter</a:t>
+              <a:t>from setuptools import find_packages, setup</a:t>
             </a:r>
             <a:br/>
             <a:r>
-              <a:t>ros2 topic echo /counter --once</a:t>
+              <a:t>package_name = 'agv_control'</a:t>
             </a:r>
             <a:br/>
             <a:r>
-              <a:t>ros2 interface show geometry_msgs/msg/Twist</a:t>
-            </a:r>
-          </a:p>
-        </p:txBody>
-      </p:sp>
-      <p:sp>
-        <p:nvSpPr>
-          <p:cNvPr id="8" name="Rounded Rectangle 7"/>
-          <p:cNvSpPr/>
-          <p:nvPr/>
-        </p:nvSpPr>
-        <p:spPr>
-          <a:xfrm>
-            <a:off x="658368" y="4206240"/>
-            <a:ext cx="10972800" cy="1554480"/>
-          </a:xfrm>
-          <a:prstGeom prst="roundRect">
-            <a:avLst/>
-          </a:prstGeom>
-          <a:solidFill>
-            <a:srgbClr val="F4F7FB"/>
-          </a:solidFill>
-          <a:ln>
-            <a:solidFill>
-              <a:srgbClr val="D1DFD5"/>
-            </a:solidFill>
-          </a:ln>
-        </p:spPr>
-        <p:style>
-          <a:lnRef idx="1">
-            <a:schemeClr val="accent1"/>
-          </a:lnRef>
-          <a:fillRef idx="3">
-            <a:schemeClr val="accent1"/>
-          </a:fillRef>
-          <a:effectRef idx="2">
-            <a:schemeClr val="accent1"/>
-          </a:effectRef>
-          <a:fontRef idx="minor">
-            <a:schemeClr val="lt1"/>
-          </a:fontRef>
-        </p:style>
-        <p:txBody>
-          <a:bodyPr rtlCol="0" anchor="ctr" wrap="square" lIns="73152" rIns="73152" tIns="36576" bIns="36576"/>
-          <a:lstStyle/>
-          <a:p>
-            <a:pPr algn="l">
-              <a:spcAft>
-                <a:spcPts val="0"/>
-              </a:spcAft>
-              <a:defRPr sz="1800" b="1">
-                <a:solidFill>
-                  <a:srgbClr val="2A8B5A"/>
-                </a:solidFill>
-                <a:latin typeface="Noto Sans CJK KR"/>
-              </a:defRPr>
-            </a:pPr>
-            <a:r>
-              <a:t>완료 체크</a:t>
+              <a:t>setup(name=package_name, version='0.1.0', packages=find_packages(exclude=['test']),</a:t>
             </a:r>
             <a:br/>
             <a:r>
-              <a:t>□ 명령이 오류 없이 실행된다.</a:t>
+              <a:t>    data_files=[('share/ament_index/resource_index/packages',</a:t>
             </a:r>
             <a:br/>
             <a:r>
-              <a:t>□ 기대한 파일·topic·frame·parameter 이름이 보인다.</a:t>
+              <a:t>    ['resource/' + package_name]), ('share/' + package_name, ['package.xml']),</a:t>
             </a:r>
             <a:br/>
             <a:r>
-              <a:t>□ 값의 단위와 방향을 한 문장으로 설명할 수 있다.</a:t>
-            </a:r>
-          </a:p>
-        </p:txBody>
-      </p:sp>
-      <p:sp>
-        <p:nvSpPr>
-          <p:cNvPr id="9" name="TextBox 8"/>
-          <p:cNvSpPr txBox="1"/>
-          <p:nvPr/>
-        </p:nvSpPr>
-        <p:spPr>
-          <a:xfrm>
-            <a:off x="731520" y="5989320"/>
-            <a:ext cx="10789920" cy="237744"/>
-          </a:xfrm>
-          <a:prstGeom prst="rect">
-            <a:avLst/>
-          </a:prstGeom>
-          <a:noFill/>
-        </p:spPr>
-        <p:txBody>
-          <a:bodyPr wrap="square" lIns="73152" rIns="73152" tIns="36576" bIns="36576">
-            <a:spAutoFit/>
-          </a:bodyPr>
-          <a:lstStyle/>
-          <a:p>
-            <a:pPr algn="l">
-              <a:spcAft>
-                <a:spcPts val="0"/>
-              </a:spcAft>
-              <a:defRPr sz="1500" b="1">
-                <a:solidFill>
-                  <a:srgbClr val="122C4E"/>
-                </a:solidFill>
-                <a:latin typeface="Noto Sans CJK KR"/>
-              </a:defRPr>
-            </a:pPr>
-            <a:r>
-              <a:t>완료 조건: /counter와 /cmd_vel의 값·message type·연결 수를 terminal에서 확인한다.</a:t>
+              <a:t>    ('share/' + package_name + '/config', ['config/controllers.yaml'])],</a:t>
+            </a:r>
+            <a:br/>
+            <a:r>
+              <a:t>    install_requires=['setuptools'], zip_safe=True, maintainer='AGV student',</a:t>
+            </a:r>
+            <a:br/>
+            <a:r>
+              <a:t>    maintainer_email='student@example.com', license='Apache-2.0',</a:t>
+            </a:r>
+            <a:br/>
+            <a:r>
+              <a:t>    entry_points={'console_scripts': ['counter_publisher = agv_control.counter_publisher:main',</a:t>
+            </a:r>
+            <a:br/>
+            <a:r>
+              <a:t>     'counter_monitor = agv_control.counter_monitor:main', 'cmd_test_node = agv_control.cmd_test_node:main',</a:t>
+            </a:r>
+            <a:br/>
+            <a:r>
+              <a:t>     'velocity_monitor = agv_control.velocity_monitor:main', 'safety_controller = agv_control.safety_controller:main',</a:t>
+            </a:r>
+            <a:br/>
+            <a:r>
+              <a:t>     'pid_controller = agv_control.pid_controller:main']})</a:t>
+            </a:r>
+          </a:p>
+        </p:txBody>
+      </p:sp>
+      <p:sp>
+        <p:nvSpPr>
+          <p:cNvPr id="10" name="TextBox 9"/>
+          <p:cNvSpPr txBox="1"/>
+          <p:nvPr/>
+        </p:nvSpPr>
+        <p:spPr>
+          <a:xfrm>
+            <a:off x="749808" y="6181344"/>
+            <a:ext cx="10789920" cy="201168"/>
+          </a:xfrm>
+          <a:prstGeom prst="rect">
+            <a:avLst/>
+          </a:prstGeom>
+          <a:noFill/>
+        </p:spPr>
+        <p:txBody>
+          <a:bodyPr wrap="square" lIns="73152" rIns="73152" tIns="36576" bIns="36576">
+            <a:spAutoFit/>
+          </a:bodyPr>
+          <a:lstStyle/>
+          <a:p>
+            <a:pPr algn="l">
+              <a:spcAft>
+                <a:spcPts val="0"/>
+              </a:spcAft>
+              <a:defRPr sz="1000" b="0">
+                <a:solidFill>
+                  <a:srgbClr val="5C6672"/>
+                </a:solidFill>
+                <a:latin typeface="Noto Sans CJK KR"/>
+              </a:defRPr>
+            </a:pPr>
+            <a:r>
+              <a:t>파일 전체 1/1 · 이 슬라이드 다음에 같은 파일의 나머지 줄이 이어집니다.</a:t>
             </a:r>
           </a:p>
         </p:txBody>
@@ -12890,7 +13520,7 @@
               </a:defRPr>
             </a:pPr>
             <a:r>
-              <a:t>막히면: 증상 → 우선 확인 → 재검증</a:t>
+              <a:t>build → source → run 순서로 실행한다</a:t>
             </a:r>
           </a:p>
         </p:txBody>
@@ -12929,7 +13559,7 @@
               </a:defRPr>
             </a:pPr>
             <a:r>
-              <a:t>오류 메시지를 숨기지 않고 같은 순서로 점검합니다.</a:t>
+              <a:t>새 파일 또는 수정 파일은 build와 source 뒤에만 실행 이름·설정에 반영됩니다.</a:t>
             </a:r>
           </a:p>
         </p:txBody>
@@ -13065,7 +13695,7 @@
               </a:defRPr>
             </a:pPr>
             <a:r>
-              <a:t>현재 단계 오류 대응    |    현재 폴더 ~/ros2_curri/agv_ws    |    현재 터미널</a:t>
+              <a:t>현재 단계 실행    |    현재 폴더 ~/ros2_curri/agv_ws    |    현재 터미널</a:t>
             </a:r>
           </a:p>
         </p:txBody>
@@ -13078,18 +13708,18 @@
         </p:nvSpPr>
         <p:spPr>
           <a:xfrm>
-            <a:off x="694944" y="1755648"/>
-            <a:ext cx="10972800" cy="1115568"/>
+            <a:off x="658368" y="1700784"/>
+            <a:ext cx="10972800" cy="3182112"/>
           </a:xfrm>
           <a:prstGeom prst="roundRect">
             <a:avLst/>
           </a:prstGeom>
           <a:solidFill>
-            <a:srgbClr val="FFF7F4"/>
+            <a:srgbClr val="1D232D"/>
           </a:solidFill>
           <a:ln>
             <a:solidFill>
-              <a:srgbClr val="EDBEB4"/>
+              <a:srgbClr val="1D232D"/>
             </a:solidFill>
           </a:ln>
         </p:spPr>
@@ -13108,10 +13738,31 @@
           </a:fontRef>
         </p:style>
         <p:txBody>
-          <a:bodyPr rtlCol="0" anchor="ctr"/>
-          <a:lstStyle/>
-          <a:p>
-            <a:pPr algn="ctr"/>
+          <a:bodyPr rtlCol="0" anchor="ctr" wrap="square" lIns="73152" rIns="73152" tIns="36576" bIns="36576"/>
+          <a:lstStyle/>
+          <a:p>
+            <a:pPr algn="l">
+              <a:spcAft>
+                <a:spcPts val="0"/>
+              </a:spcAft>
+              <a:defRPr sz="1600" b="0">
+                <a:solidFill>
+                  <a:srgbClr val="FFFFFF"/>
+                </a:solidFill>
+                <a:latin typeface="DejaVu Sans Mono"/>
+              </a:defRPr>
+            </a:pPr>
+            <a:r>
+              <a:t>cd ~/ros2_curri/agv_ws &amp;&amp; source install/setup.bash</a:t>
+            </a:r>
+            <a:br/>
+            <a:r>
+              <a:t>ros2 run agv_control counter_publisher</a:t>
+            </a:r>
+            <a:br/>
+            <a:r>
+              <a:t># 새 터미널: ros2 run agv_control counter_monitor</a:t>
+            </a:r>
           </a:p>
         </p:txBody>
       </p:sp>
@@ -13123,8 +13774,8 @@
         </p:nvSpPr>
         <p:spPr>
           <a:xfrm>
-            <a:off x="896112" y="1901952"/>
-            <a:ext cx="2926080" cy="274320"/>
+            <a:off x="786384" y="5239512"/>
+            <a:ext cx="1261872" cy="237744"/>
           </a:xfrm>
           <a:prstGeom prst="rect">
             <a:avLst/>
@@ -13143,13 +13794,13 @@
               </a:spcAft>
               <a:defRPr sz="1800" b="1">
                 <a:solidFill>
-                  <a:srgbClr val="BE3B3B"/>
-                </a:solidFill>
-                <a:latin typeface="Noto Sans CJK KR"/>
-              </a:defRPr>
-            </a:pPr>
-            <a:r>
-              <a:t>증상 1: No executable found</a:t>
+                  <a:srgbClr val="2A8B5A"/>
+                </a:solidFill>
+                <a:latin typeface="Noto Sans CJK KR"/>
+              </a:defRPr>
+            </a:pPr>
+            <a:r>
+              <a:t>확인 기준</a:t>
             </a:r>
           </a:p>
         </p:txBody>
@@ -13162,25 +13813,25 @@
         </p:nvSpPr>
         <p:spPr>
           <a:xfrm>
-            <a:off x="3794760" y="1883664"/>
-            <a:ext cx="7543800" cy="621792"/>
-          </a:xfrm>
-          <a:prstGeom prst="rect">
-            <a:avLst/>
-          </a:prstGeom>
-          <a:noFill/>
-        </p:spPr>
-        <p:txBody>
-          <a:bodyPr wrap="square" lIns="73152" rIns="73152" tIns="36576" bIns="36576">
-            <a:spAutoFit/>
-          </a:bodyPr>
-          <a:lstStyle/>
-          <a:p>
-            <a:pPr algn="l">
-              <a:spcAft>
-                <a:spcPts val="0"/>
-              </a:spcAft>
-              <a:defRPr sz="1600" b="0">
+            <a:off x="786384" y="5532120"/>
+            <a:ext cx="10469880" cy="420624"/>
+          </a:xfrm>
+          <a:prstGeom prst="rect">
+            <a:avLst/>
+          </a:prstGeom>
+          <a:noFill/>
+        </p:spPr>
+        <p:txBody>
+          <a:bodyPr wrap="square" lIns="73152" rIns="73152" tIns="36576" bIns="36576">
+            <a:spAutoFit/>
+          </a:bodyPr>
+          <a:lstStyle/>
+          <a:p>
+            <a:pPr algn="l">
+              <a:spcAft>
+                <a:spcPts val="0"/>
+              </a:spcAft>
+              <a:defRPr sz="1800" b="0">
                 <a:solidFill>
                   <a:srgbClr val="122C4E"/>
                 </a:solidFill>
@@ -13188,177 +13839,7 @@
               </a:defRPr>
             </a:pPr>
             <a:r>
-              <a:t>우선 확인: setup.py entry_points·재빌드·source 순서로 확인한다.</a:t>
-            </a:r>
-            <a:br/>
-            <a:r>
-              <a:t>수정 후: ros2 topic info /counter</a:t>
-            </a:r>
-          </a:p>
-        </p:txBody>
-      </p:sp>
-      <p:sp>
-        <p:nvSpPr>
-          <p:cNvPr id="10" name="Rounded Rectangle 9"/>
-          <p:cNvSpPr/>
-          <p:nvPr/>
-        </p:nvSpPr>
-        <p:spPr>
-          <a:xfrm>
-            <a:off x="694944" y="3172968"/>
-            <a:ext cx="10972800" cy="1115568"/>
-          </a:xfrm>
-          <a:prstGeom prst="roundRect">
-            <a:avLst/>
-          </a:prstGeom>
-          <a:solidFill>
-            <a:srgbClr val="FFF7F4"/>
-          </a:solidFill>
-          <a:ln>
-            <a:solidFill>
-              <a:srgbClr val="EDBEB4"/>
-            </a:solidFill>
-          </a:ln>
-        </p:spPr>
-        <p:style>
-          <a:lnRef idx="1">
-            <a:schemeClr val="accent1"/>
-          </a:lnRef>
-          <a:fillRef idx="3">
-            <a:schemeClr val="accent1"/>
-          </a:fillRef>
-          <a:effectRef idx="2">
-            <a:schemeClr val="accent1"/>
-          </a:effectRef>
-          <a:fontRef idx="minor">
-            <a:schemeClr val="lt1"/>
-          </a:fontRef>
-        </p:style>
-        <p:txBody>
-          <a:bodyPr rtlCol="0" anchor="ctr"/>
-          <a:lstStyle/>
-          <a:p>
-            <a:pPr algn="ctr"/>
-          </a:p>
-        </p:txBody>
-      </p:sp>
-      <p:sp>
-        <p:nvSpPr>
-          <p:cNvPr id="11" name="TextBox 10"/>
-          <p:cNvSpPr txBox="1"/>
-          <p:nvPr/>
-        </p:nvSpPr>
-        <p:spPr>
-          <a:xfrm>
-            <a:off x="896112" y="3319272"/>
-            <a:ext cx="2926080" cy="274320"/>
-          </a:xfrm>
-          <a:prstGeom prst="rect">
-            <a:avLst/>
-          </a:prstGeom>
-          <a:noFill/>
-        </p:spPr>
-        <p:txBody>
-          <a:bodyPr wrap="square" lIns="73152" rIns="73152" tIns="36576" bIns="36576">
-            <a:spAutoFit/>
-          </a:bodyPr>
-          <a:lstStyle/>
-          <a:p>
-            <a:pPr algn="l">
-              <a:spcAft>
-                <a:spcPts val="0"/>
-              </a:spcAft>
-              <a:defRPr sz="1800" b="1">
-                <a:solidFill>
-                  <a:srgbClr val="BE3B3B"/>
-                </a:solidFill>
-                <a:latin typeface="Noto Sans CJK KR"/>
-              </a:defRPr>
-            </a:pPr>
-            <a:r>
-              <a:t>증상 2: callback이 오지 않음</a:t>
-            </a:r>
-          </a:p>
-        </p:txBody>
-      </p:sp>
-      <p:sp>
-        <p:nvSpPr>
-          <p:cNvPr id="12" name="TextBox 11"/>
-          <p:cNvSpPr txBox="1"/>
-          <p:nvPr/>
-        </p:nvSpPr>
-        <p:spPr>
-          <a:xfrm>
-            <a:off x="3794760" y="3300984"/>
-            <a:ext cx="7543800" cy="621792"/>
-          </a:xfrm>
-          <a:prstGeom prst="rect">
-            <a:avLst/>
-          </a:prstGeom>
-          <a:noFill/>
-        </p:spPr>
-        <p:txBody>
-          <a:bodyPr wrap="square" lIns="73152" rIns="73152" tIns="36576" bIns="36576">
-            <a:spAutoFit/>
-          </a:bodyPr>
-          <a:lstStyle/>
-          <a:p>
-            <a:pPr algn="l">
-              <a:spcAft>
-                <a:spcPts val="0"/>
-              </a:spcAft>
-              <a:defRPr sz="1600" b="0">
-                <a:solidFill>
-                  <a:srgbClr val="122C4E"/>
-                </a:solidFill>
-                <a:latin typeface="Noto Sans CJK KR"/>
-              </a:defRPr>
-            </a:pPr>
-            <a:r>
-              <a:t>우선 확인: 토픽 이름과 message type이 양쪽에서 같은지 확인한다.</a:t>
-            </a:r>
-            <a:br/>
-            <a:r>
-              <a:t>수정 후: ros2 topic info /counter</a:t>
-            </a:r>
-          </a:p>
-        </p:txBody>
-      </p:sp>
-      <p:sp>
-        <p:nvSpPr>
-          <p:cNvPr id="13" name="TextBox 12"/>
-          <p:cNvSpPr txBox="1"/>
-          <p:nvPr/>
-        </p:nvSpPr>
-        <p:spPr>
-          <a:xfrm>
-            <a:off x="822960" y="5102352"/>
-            <a:ext cx="10607040" cy="402336"/>
-          </a:xfrm>
-          <a:prstGeom prst="rect">
-            <a:avLst/>
-          </a:prstGeom>
-          <a:noFill/>
-        </p:spPr>
-        <p:txBody>
-          <a:bodyPr wrap="square" lIns="73152" rIns="73152" tIns="36576" bIns="36576">
-            <a:spAutoFit/>
-          </a:bodyPr>
-          <a:lstStyle/>
-          <a:p>
-            <a:pPr algn="ctr">
-              <a:spcAft>
-                <a:spcPts val="0"/>
-              </a:spcAft>
-              <a:defRPr sz="1800" b="1">
-                <a:solidFill>
-                  <a:srgbClr val="DB7E22"/>
-                </a:solidFill>
-                <a:latin typeface="Noto Sans CJK KR"/>
-              </a:defRPr>
-            </a:pPr>
-            <a:r>
-              <a:t>공통 순서: ① 현재 폴더 ② source ③ 파일 경로 ④ 이름/타입/단위 ⑤ build·source 후 재실행</a:t>
+              <a:t>/counter와 /cmd_vel의 값·message type·연결 수를 terminal에서 확인한다.</a:t>
             </a:r>
           </a:p>
         </p:txBody>
@@ -13415,7 +13896,7 @@
               </a:defRPr>
             </a:pPr>
             <a:r>
-              <a:t>미니 실습: 값 하나를 바꾸고 결과를 비교한다</a:t>
+              <a:t>정상 결과: 실제 환경에서 확인한 출력</a:t>
             </a:r>
           </a:p>
         </p:txBody>
@@ -13454,7 +13935,7 @@
               </a:defRPr>
             </a:pPr>
             <a:r>
-              <a:t>정상 결과를 만든 뒤에는 한 번에 하나의 값만 바꿉니다.</a:t>
+              <a:t>실제 ROS 2 환경의 파일·패키지·구성 검증 로그</a:t>
             </a:r>
           </a:p>
         </p:txBody>
@@ -13537,157 +14018,65 @@
           </a:p>
         </p:txBody>
       </p:sp>
-      <p:sp>
-        <p:nvSpPr>
-          <p:cNvPr id="6" name="Rectangle 5"/>
-          <p:cNvSpPr/>
-          <p:nvPr/>
-        </p:nvSpPr>
-        <p:spPr>
-          <a:xfrm>
-            <a:off x="566928" y="1188720"/>
-            <a:ext cx="11064240" cy="347472"/>
-          </a:xfrm>
-          <a:prstGeom prst="rect">
-            <a:avLst/>
-          </a:prstGeom>
-          <a:solidFill>
-            <a:srgbClr val="F4F7FB"/>
-          </a:solidFill>
-          <a:ln>
-            <a:solidFill>
-              <a:srgbClr val="F4F7FB"/>
-            </a:solidFill>
-          </a:ln>
-        </p:spPr>
-        <p:style>
-          <a:lnRef idx="1">
-            <a:schemeClr val="accent1"/>
-          </a:lnRef>
-          <a:fillRef idx="3">
-            <a:schemeClr val="accent1"/>
-          </a:fillRef>
-          <a:effectRef idx="2">
-            <a:schemeClr val="accent1"/>
-          </a:effectRef>
-          <a:fontRef idx="minor">
-            <a:schemeClr val="lt1"/>
-          </a:fontRef>
-        </p:style>
-        <p:txBody>
-          <a:bodyPr rtlCol="0" anchor="ctr" wrap="square" lIns="73152" rIns="73152" tIns="36576" bIns="36576"/>
-          <a:lstStyle/>
-          <a:p>
-            <a:pPr algn="l">
-              <a:spcAft>
-                <a:spcPts val="0"/>
-              </a:spcAft>
-              <a:defRPr sz="1300" b="1">
-                <a:solidFill>
-                  <a:srgbClr val="122C4E"/>
-                </a:solidFill>
-                <a:latin typeface="Noto Sans CJK KR"/>
-              </a:defRPr>
-            </a:pPr>
-            <a:r>
-              <a:t>현재 단계 미니 실습    |    현재 폴더 ~/ros2_curri/agv_ws    |    현재 터미널</a:t>
-            </a:r>
-          </a:p>
-        </p:txBody>
-      </p:sp>
-      <p:sp>
-        <p:nvSpPr>
-          <p:cNvPr id="7" name="Rounded Rectangle 6"/>
-          <p:cNvSpPr/>
-          <p:nvPr/>
-        </p:nvSpPr>
-        <p:spPr>
-          <a:xfrm>
-            <a:off x="749808" y="1874519"/>
-            <a:ext cx="10652760" cy="1993392"/>
-          </a:xfrm>
-          <a:prstGeom prst="roundRect">
-            <a:avLst/>
-          </a:prstGeom>
-          <a:solidFill>
-            <a:srgbClr val="FFF8EB"/>
-          </a:solidFill>
-          <a:ln>
-            <a:solidFill>
-              <a:srgbClr val="ECC680"/>
-            </a:solidFill>
-          </a:ln>
-        </p:spPr>
-        <p:style>
-          <a:lnRef idx="1">
-            <a:schemeClr val="accent1"/>
-          </a:lnRef>
-          <a:fillRef idx="3">
-            <a:schemeClr val="accent1"/>
-          </a:fillRef>
-          <a:effectRef idx="2">
-            <a:schemeClr val="accent1"/>
-          </a:effectRef>
-          <a:fontRef idx="minor">
-            <a:schemeClr val="lt1"/>
-          </a:fontRef>
-        </p:style>
-        <p:txBody>
-          <a:bodyPr rtlCol="0" anchor="ctr" wrap="square" lIns="73152" rIns="73152" tIns="36576" bIns="36576"/>
+      <p:pic>
+        <p:nvPicPr>
+          <p:cNvPr id="6" name="Picture 5" descr="validation_terminal.png"/>
+          <p:cNvPicPr>
+            <a:picLocks noChangeAspect="1"/>
+          </p:cNvPicPr>
+          <p:nvPr/>
+        </p:nvPicPr>
+        <p:blipFill>
+          <a:blip r:embed="rId2"/>
+          <a:stretch>
+            <a:fillRect/>
+          </a:stretch>
+        </p:blipFill>
+        <p:spPr>
+          <a:xfrm>
+            <a:off x="790956" y="1453970"/>
+            <a:ext cx="10607040" cy="4599282"/>
+          </a:xfrm>
+          <a:prstGeom prst="rect">
+            <a:avLst/>
+          </a:prstGeom>
+        </p:spPr>
+      </p:pic>
+      <p:sp>
+        <p:nvSpPr>
+          <p:cNvPr id="7" name="TextBox 6"/>
+          <p:cNvSpPr txBox="1"/>
+          <p:nvPr/>
+        </p:nvSpPr>
+        <p:spPr>
+          <a:xfrm>
+            <a:off x="777240" y="6144768"/>
+            <a:ext cx="10607040" cy="310896"/>
+          </a:xfrm>
+          <a:prstGeom prst="rect">
+            <a:avLst/>
+          </a:prstGeom>
+          <a:noFill/>
+        </p:spPr>
+        <p:txBody>
+          <a:bodyPr wrap="square" lIns="73152" rIns="73152" tIns="36576" bIns="36576">
+            <a:spAutoFit/>
+          </a:bodyPr>
           <a:lstStyle/>
           <a:p>
             <a:pPr algn="ctr">
               <a:spcAft>
                 <a:spcPts val="0"/>
               </a:spcAft>
-              <a:defRPr sz="2300" b="1">
-                <a:solidFill>
-                  <a:srgbClr val="122C4E"/>
-                </a:solidFill>
-                <a:latin typeface="Noto Sans CJK KR"/>
-              </a:defRPr>
-            </a:pPr>
-            <a:r>
-              <a:t>cmd_test_node의 linear.x와 angular.z를 각각 바꾸고 velocity_monitor 출력을 비교한다.</a:t>
-            </a:r>
-          </a:p>
-        </p:txBody>
-      </p:sp>
-      <p:sp>
-        <p:nvSpPr>
-          <p:cNvPr id="8" name="TextBox 7"/>
-          <p:cNvSpPr txBox="1"/>
-          <p:nvPr/>
-        </p:nvSpPr>
-        <p:spPr>
-          <a:xfrm>
-            <a:off x="877824" y="4590288"/>
-            <a:ext cx="10241280" cy="594360"/>
-          </a:xfrm>
-          <a:prstGeom prst="rect">
-            <a:avLst/>
-          </a:prstGeom>
-          <a:noFill/>
-        </p:spPr>
-        <p:txBody>
-          <a:bodyPr wrap="square" lIns="73152" rIns="73152" tIns="36576" bIns="36576">
-            <a:spAutoFit/>
-          </a:bodyPr>
-          <a:lstStyle/>
-          <a:p>
-            <a:pPr algn="ctr">
-              <a:spcAft>
-                <a:spcPts val="0"/>
-              </a:spcAft>
-              <a:defRPr sz="1900" b="1">
-                <a:solidFill>
-                  <a:srgbClr val="DB7E22"/>
-                </a:solidFill>
-                <a:latin typeface="Noto Sans CJK KR"/>
-              </a:defRPr>
-            </a:pPr>
-            <a:r>
-              <a:t>기록할 것: 바꾼 값(단위) · 기대한 변화 · 실제 출력/화면 · 원래 값으로 되돌린 결과</a:t>
+              <a:defRPr sz="1100" b="1">
+                <a:solidFill>
+                  <a:srgbClr val="2A8B5A"/>
+                </a:solidFill>
+                <a:latin typeface="Noto Sans CJK KR"/>
+              </a:defRPr>
+            </a:pPr>
+            <a:r>
+              <a:t>화면에서 확인: ① 명령/설정  ② 정상 출력 또는 화면  ③ 다음 검증 명령으로 재확인</a:t>
             </a:r>
           </a:p>
         </p:txBody>
@@ -13744,7 +14133,7 @@
               </a:defRPr>
             </a:pPr>
             <a:r>
-              <a:t>체크포인트를 저장하고 다음 모듈로 넘긴다</a:t>
+              <a:t>객관적 검증 명령으로 완료를 확인한다</a:t>
             </a:r>
           </a:p>
         </p:txBody>
@@ -13783,7 +14172,7 @@
               </a:defRPr>
             </a:pPr>
             <a:r>
-              <a:t>현재 Complete는 다음 Starter의 기준선입니다.</a:t>
+              <a:t>화면만 보지 말고 topic·frame·파일·parameter를 다시 확인합니다.</a:t>
             </a:r>
           </a:p>
         </p:txBody>
@@ -13919,7 +14308,7 @@
               </a:defRPr>
             </a:pPr>
             <a:r>
-              <a:t>현재 단계 체크포인트    |    현재 폴더 ~/ros2_curri/agv_ws    |    현재 터미널</a:t>
+              <a:t>현재 단계 검증    |    현재 폴더 ~/ros2_curri/agv_ws    |    현재 터미널</a:t>
             </a:r>
           </a:p>
         </p:txBody>
@@ -13932,8 +14321,74 @@
         </p:nvSpPr>
         <p:spPr>
           <a:xfrm>
-            <a:off x="685800" y="1737360"/>
-            <a:ext cx="10972800" cy="3611880"/>
+            <a:off x="658368" y="1755648"/>
+            <a:ext cx="10972800" cy="2148840"/>
+          </a:xfrm>
+          <a:prstGeom prst="roundRect">
+            <a:avLst/>
+          </a:prstGeom>
+          <a:solidFill>
+            <a:srgbClr val="1D232D"/>
+          </a:solidFill>
+          <a:ln>
+            <a:solidFill>
+              <a:srgbClr val="1D232D"/>
+            </a:solidFill>
+          </a:ln>
+        </p:spPr>
+        <p:style>
+          <a:lnRef idx="1">
+            <a:schemeClr val="accent1"/>
+          </a:lnRef>
+          <a:fillRef idx="3">
+            <a:schemeClr val="accent1"/>
+          </a:fillRef>
+          <a:effectRef idx="2">
+            <a:schemeClr val="accent1"/>
+          </a:effectRef>
+          <a:fontRef idx="minor">
+            <a:schemeClr val="lt1"/>
+          </a:fontRef>
+        </p:style>
+        <p:txBody>
+          <a:bodyPr rtlCol="0" anchor="ctr" wrap="square" lIns="73152" rIns="73152" tIns="36576" bIns="36576"/>
+          <a:lstStyle/>
+          <a:p>
+            <a:pPr algn="l">
+              <a:spcAft>
+                <a:spcPts val="0"/>
+              </a:spcAft>
+              <a:defRPr sz="1600" b="0">
+                <a:solidFill>
+                  <a:srgbClr val="FFFFFF"/>
+                </a:solidFill>
+                <a:latin typeface="DejaVu Sans Mono"/>
+              </a:defRPr>
+            </a:pPr>
+            <a:r>
+              <a:t>ros2 topic info /counter</a:t>
+            </a:r>
+            <a:br/>
+            <a:r>
+              <a:t>ros2 topic echo /counter --once</a:t>
+            </a:r>
+            <a:br/>
+            <a:r>
+              <a:t>ros2 interface show geometry_msgs/msg/Twist</a:t>
+            </a:r>
+          </a:p>
+        </p:txBody>
+      </p:sp>
+      <p:sp>
+        <p:nvSpPr>
+          <p:cNvPr id="8" name="Rounded Rectangle 7"/>
+          <p:cNvSpPr/>
+          <p:nvPr/>
+        </p:nvSpPr>
+        <p:spPr>
+          <a:xfrm>
+            <a:off x="658368" y="4206240"/>
+            <a:ext cx="10972800" cy="1554480"/>
           </a:xfrm>
           <a:prstGeom prst="roundRect">
             <a:avLst/>
@@ -13943,7 +14398,7 @@
           </a:solidFill>
           <a:ln>
             <a:solidFill>
-              <a:srgbClr val="D2DCE8"/>
+              <a:srgbClr val="D1DFD5"/>
             </a:solidFill>
           </a:ln>
         </p:spPr>
@@ -13962,40 +14417,65 @@
           </a:fontRef>
         </p:style>
         <p:txBody>
-          <a:bodyPr rtlCol="0" anchor="ctr"/>
-          <a:lstStyle/>
-          <a:p>
-            <a:pPr algn="ctr"/>
-          </a:p>
-        </p:txBody>
-      </p:sp>
-      <p:sp>
-        <p:nvSpPr>
-          <p:cNvPr id="8" name="TextBox 7"/>
-          <p:cNvSpPr txBox="1"/>
-          <p:nvPr/>
-        </p:nvSpPr>
-        <p:spPr>
-          <a:xfrm>
-            <a:off x="896112" y="1993392"/>
-            <a:ext cx="10332720" cy="2971800"/>
-          </a:xfrm>
-          <a:prstGeom prst="rect">
-            <a:avLst/>
-          </a:prstGeom>
-          <a:noFill/>
-        </p:spPr>
-        <p:txBody>
-          <a:bodyPr wrap="square" lIns="109728" rIns="109728">
-            <a:spAutoFit/>
-          </a:bodyPr>
-          <a:lstStyle/>
-          <a:p>
-            <a:pPr>
-              <a:spcAft>
-                <a:spcPts val="800"/>
-              </a:spcAft>
-              <a:defRPr sz="1800">
+          <a:bodyPr rtlCol="0" anchor="ctr" wrap="square" lIns="73152" rIns="73152" tIns="36576" bIns="36576"/>
+          <a:lstStyle/>
+          <a:p>
+            <a:pPr algn="l">
+              <a:spcAft>
+                <a:spcPts val="0"/>
+              </a:spcAft>
+              <a:defRPr sz="1800" b="1">
+                <a:solidFill>
+                  <a:srgbClr val="2A8B5A"/>
+                </a:solidFill>
+                <a:latin typeface="Noto Sans CJK KR"/>
+              </a:defRPr>
+            </a:pPr>
+            <a:r>
+              <a:t>완료 체크</a:t>
+            </a:r>
+            <a:br/>
+            <a:r>
+              <a:t>□ 명령이 오류 없이 실행된다.</a:t>
+            </a:r>
+            <a:br/>
+            <a:r>
+              <a:t>□ 기대한 파일·topic·frame·parameter 이름이 보인다.</a:t>
+            </a:r>
+            <a:br/>
+            <a:r>
+              <a:t>□ 값의 단위와 방향을 한 문장으로 설명할 수 있다.</a:t>
+            </a:r>
+          </a:p>
+        </p:txBody>
+      </p:sp>
+      <p:sp>
+        <p:nvSpPr>
+          <p:cNvPr id="9" name="TextBox 8"/>
+          <p:cNvSpPr txBox="1"/>
+          <p:nvPr/>
+        </p:nvSpPr>
+        <p:spPr>
+          <a:xfrm>
+            <a:off x="731520" y="5989320"/>
+            <a:ext cx="10789920" cy="237744"/>
+          </a:xfrm>
+          <a:prstGeom prst="rect">
+            <a:avLst/>
+          </a:prstGeom>
+          <a:noFill/>
+        </p:spPr>
+        <p:txBody>
+          <a:bodyPr wrap="square" lIns="73152" rIns="73152" tIns="36576" bIns="36576">
+            <a:spAutoFit/>
+          </a:bodyPr>
+          <a:lstStyle/>
+          <a:p>
+            <a:pPr algn="l">
+              <a:spcAft>
+                <a:spcPts val="0"/>
+              </a:spcAft>
+              <a:defRPr sz="1500" b="1">
                 <a:solidFill>
                   <a:srgbClr val="122C4E"/>
                 </a:solidFill>
@@ -14003,110 +14483,7 @@
               </a:defRPr>
             </a:pPr>
             <a:r>
-              <a:t>• □ 완료 화면: /counter와 /cmd_vel의 값·message type·연결 수를 terminal에서 확인한다.</a:t>
-            </a:r>
-          </a:p>
-          <a:p>
-            <a:pPr>
-              <a:spcAft>
-                <a:spcPts val="800"/>
-              </a:spcAft>
-              <a:defRPr sz="1800">
-                <a:solidFill>
-                  <a:srgbClr val="122C4E"/>
-                </a:solidFill>
-                <a:latin typeface="Noto Sans CJK KR"/>
-              </a:defRPr>
-            </a:pPr>
-            <a:r>
-              <a:t>• □ Complete 파일: blocks/A_ros2_basics/M03_pubsub/complete/</a:t>
-            </a:r>
-          </a:p>
-          <a:p>
-            <a:pPr>
-              <a:spcAft>
-                <a:spcPts val="800"/>
-              </a:spcAft>
-              <a:defRPr sz="1800">
-                <a:solidFill>
-                  <a:srgbClr val="122C4E"/>
-                </a:solidFill>
-                <a:latin typeface="Noto Sans CJK KR"/>
-              </a:defRPr>
-            </a:pPr>
-            <a:r>
-              <a:t>• □ 정상 로그·캡처: logs/validation.log, screenshots/validation_terminal.png</a:t>
-            </a:r>
-          </a:p>
-          <a:p>
-            <a:pPr>
-              <a:spcAft>
-                <a:spcPts val="800"/>
-              </a:spcAft>
-              <a:defRPr sz="1800">
-                <a:solidFill>
-                  <a:srgbClr val="122C4E"/>
-                </a:solidFill>
-                <a:latin typeface="Noto Sans CJK KR"/>
-              </a:defRPr>
-            </a:pPr>
-            <a:r>
-              <a:t>• □ 버전 식별: CHECKSUM_or_TAG.txt의 SHA-256 manifest</a:t>
-            </a:r>
-          </a:p>
-          <a:p>
-            <a:pPr>
-              <a:spcAft>
-                <a:spcPts val="800"/>
-              </a:spcAft>
-              <a:defRPr sz="1800">
-                <a:solidFill>
-                  <a:srgbClr val="122C4E"/>
-                </a:solidFill>
-                <a:latin typeface="Noto Sans CJK KR"/>
-              </a:defRPr>
-            </a:pPr>
-            <a:r>
-              <a:t>• □ 다음 시작 조건: M04 TF2 frame</a:t>
-            </a:r>
-          </a:p>
-        </p:txBody>
-      </p:sp>
-      <p:sp>
-        <p:nvSpPr>
-          <p:cNvPr id="9" name="TextBox 8"/>
-          <p:cNvSpPr txBox="1"/>
-          <p:nvPr/>
-        </p:nvSpPr>
-        <p:spPr>
-          <a:xfrm>
-            <a:off x="868680" y="5596128"/>
-            <a:ext cx="10515600" cy="338328"/>
-          </a:xfrm>
-          <a:prstGeom prst="rect">
-            <a:avLst/>
-          </a:prstGeom>
-          <a:noFill/>
-        </p:spPr>
-        <p:txBody>
-          <a:bodyPr wrap="square" lIns="73152" rIns="73152" tIns="36576" bIns="36576">
-            <a:spAutoFit/>
-          </a:bodyPr>
-          <a:lstStyle/>
-          <a:p>
-            <a:pPr algn="ctr">
-              <a:spcAft>
-                <a:spcPts val="0"/>
-              </a:spcAft>
-              <a:defRPr sz="1700" b="1">
-                <a:solidFill>
-                  <a:srgbClr val="2A8B5A"/>
-                </a:solidFill>
-                <a:latin typeface="Noto Sans CJK KR"/>
-              </a:defRPr>
-            </a:pPr>
-            <a:r>
-              <a:t>다음 모듈을 시작하기 전, 이 슬라이드의 Complete와 다음 모듈의 Starter를 비교합니다.</a:t>
+              <a:t>완료 조건: /counter와 /cmd_vel의 값·message type·연결 수를 terminal에서 확인한다.</a:t>
             </a:r>
           </a:p>
         </p:txBody>
@@ -14163,7 +14540,7 @@
               </a:defRPr>
             </a:pPr>
             <a:r>
-              <a:t>공식 참고 자료</a:t>
+              <a:t>막히면: 증상 → 우선 확인 → 재검증</a:t>
             </a:r>
           </a:p>
         </p:txBody>
@@ -14202,7 +14579,7 @@
               </a:defRPr>
             </a:pPr>
             <a:r>
-              <a:t>본문 단계는 링크를 열지 않아도 완료할 수 있으며, 링크는 개념을 더 확인할 때만 사용합니다.</a:t>
+              <a:t>오류 메시지를 숨기지 않고 같은 순서로 점검합니다.</a:t>
             </a:r>
           </a:p>
         </p:txBody>
@@ -14287,16 +14664,16 @@
       </p:sp>
       <p:sp>
         <p:nvSpPr>
-          <p:cNvPr id="6" name="Rounded Rectangle 5"/>
+          <p:cNvPr id="6" name="Rectangle 5"/>
           <p:cNvSpPr/>
           <p:nvPr/>
         </p:nvSpPr>
         <p:spPr>
           <a:xfrm>
-            <a:off x="658368" y="1554480"/>
-            <a:ext cx="10972800" cy="4526280"/>
-          </a:xfrm>
-          <a:prstGeom prst="roundRect">
+            <a:off x="566928" y="1188720"/>
+            <a:ext cx="11064240" cy="347472"/>
+          </a:xfrm>
+          <a:prstGeom prst="rect">
             <a:avLst/>
           </a:prstGeom>
           <a:solidFill>
@@ -14304,7 +14681,7 @@
           </a:solidFill>
           <a:ln>
             <a:solidFill>
-              <a:srgbClr val="D7DFE9"/>
+              <a:srgbClr val="F4F7FB"/>
             </a:solidFill>
           </a:ln>
         </p:spPr>
@@ -14323,6 +14700,64 @@
           </a:fontRef>
         </p:style>
         <p:txBody>
+          <a:bodyPr rtlCol="0" anchor="ctr" wrap="square" lIns="73152" rIns="73152" tIns="36576" bIns="36576"/>
+          <a:lstStyle/>
+          <a:p>
+            <a:pPr algn="l">
+              <a:spcAft>
+                <a:spcPts val="0"/>
+              </a:spcAft>
+              <a:defRPr sz="1300" b="1">
+                <a:solidFill>
+                  <a:srgbClr val="122C4E"/>
+                </a:solidFill>
+                <a:latin typeface="Noto Sans CJK KR"/>
+              </a:defRPr>
+            </a:pPr>
+            <a:r>
+              <a:t>현재 단계 오류 대응    |    현재 폴더 ~/ros2_curri/agv_ws    |    현재 터미널</a:t>
+            </a:r>
+          </a:p>
+        </p:txBody>
+      </p:sp>
+      <p:sp>
+        <p:nvSpPr>
+          <p:cNvPr id="7" name="Rounded Rectangle 6"/>
+          <p:cNvSpPr/>
+          <p:nvPr/>
+        </p:nvSpPr>
+        <p:spPr>
+          <a:xfrm>
+            <a:off x="694944" y="1755648"/>
+            <a:ext cx="10972800" cy="1115568"/>
+          </a:xfrm>
+          <a:prstGeom prst="roundRect">
+            <a:avLst/>
+          </a:prstGeom>
+          <a:solidFill>
+            <a:srgbClr val="FFF7F4"/>
+          </a:solidFill>
+          <a:ln>
+            <a:solidFill>
+              <a:srgbClr val="EDBEB4"/>
+            </a:solidFill>
+          </a:ln>
+        </p:spPr>
+        <p:style>
+          <a:lnRef idx="1">
+            <a:schemeClr val="accent1"/>
+          </a:lnRef>
+          <a:fillRef idx="3">
+            <a:schemeClr val="accent1"/>
+          </a:fillRef>
+          <a:effectRef idx="2">
+            <a:schemeClr val="accent1"/>
+          </a:effectRef>
+          <a:fontRef idx="minor">
+            <a:schemeClr val="lt1"/>
+          </a:fontRef>
+        </p:style>
+        <p:txBody>
           <a:bodyPr rtlCol="0" anchor="ctr"/>
           <a:lstStyle/>
           <a:p>
@@ -14332,312 +14767,996 @@
       </p:sp>
       <p:sp>
         <p:nvSpPr>
-          <p:cNvPr id="7" name="TextBox 6"/>
-          <p:cNvSpPr txBox="1"/>
-          <p:nvPr/>
-        </p:nvSpPr>
-        <p:spPr>
-          <a:xfrm>
-            <a:off x="914400" y="1773936"/>
-            <a:ext cx="3840480" cy="256032"/>
-          </a:xfrm>
-          <a:prstGeom prst="rect">
-            <a:avLst/>
-          </a:prstGeom>
-          <a:noFill/>
-        </p:spPr>
-        <p:txBody>
-          <a:bodyPr wrap="square" lIns="73152" rIns="73152" tIns="36576" bIns="36576">
-            <a:spAutoFit/>
-          </a:bodyPr>
-          <a:lstStyle/>
-          <a:p>
-            <a:pPr algn="l">
+          <p:cNvPr id="8" name="TextBox 7"/>
+          <p:cNvSpPr txBox="1"/>
+          <p:nvPr/>
+        </p:nvSpPr>
+        <p:spPr>
+          <a:xfrm>
+            <a:off x="896112" y="1901952"/>
+            <a:ext cx="2926080" cy="274320"/>
+          </a:xfrm>
+          <a:prstGeom prst="rect">
+            <a:avLst/>
+          </a:prstGeom>
+          <a:noFill/>
+        </p:spPr>
+        <p:txBody>
+          <a:bodyPr wrap="square" lIns="73152" rIns="73152" tIns="36576" bIns="36576">
+            <a:spAutoFit/>
+          </a:bodyPr>
+          <a:lstStyle/>
+          <a:p>
+            <a:pPr algn="l">
+              <a:spcAft>
+                <a:spcPts val="0"/>
+              </a:spcAft>
+              <a:defRPr sz="1800" b="1">
+                <a:solidFill>
+                  <a:srgbClr val="BE3B3B"/>
+                </a:solidFill>
+                <a:latin typeface="Noto Sans CJK KR"/>
+              </a:defRPr>
+            </a:pPr>
+            <a:r>
+              <a:t>증상 1: No executable found</a:t>
+            </a:r>
+          </a:p>
+        </p:txBody>
+      </p:sp>
+      <p:sp>
+        <p:nvSpPr>
+          <p:cNvPr id="9" name="TextBox 8"/>
+          <p:cNvSpPr txBox="1"/>
+          <p:nvPr/>
+        </p:nvSpPr>
+        <p:spPr>
+          <a:xfrm>
+            <a:off x="3794760" y="1883664"/>
+            <a:ext cx="7543800" cy="621792"/>
+          </a:xfrm>
+          <a:prstGeom prst="rect">
+            <a:avLst/>
+          </a:prstGeom>
+          <a:noFill/>
+        </p:spPr>
+        <p:txBody>
+          <a:bodyPr wrap="square" lIns="73152" rIns="73152" tIns="36576" bIns="36576">
+            <a:spAutoFit/>
+          </a:bodyPr>
+          <a:lstStyle/>
+          <a:p>
+            <a:pPr algn="l">
+              <a:spcAft>
+                <a:spcPts val="0"/>
+              </a:spcAft>
+              <a:defRPr sz="1600" b="0">
+                <a:solidFill>
+                  <a:srgbClr val="122C4E"/>
+                </a:solidFill>
+                <a:latin typeface="Noto Sans CJK KR"/>
+              </a:defRPr>
+            </a:pPr>
+            <a:r>
+              <a:t>우선 확인: setup.py entry_points·재빌드·source 순서로 확인한다.</a:t>
+            </a:r>
+            <a:br/>
+            <a:r>
+              <a:t>수정 후: ros2 topic info /counter</a:t>
+            </a:r>
+          </a:p>
+        </p:txBody>
+      </p:sp>
+      <p:sp>
+        <p:nvSpPr>
+          <p:cNvPr id="10" name="Rounded Rectangle 9"/>
+          <p:cNvSpPr/>
+          <p:nvPr/>
+        </p:nvSpPr>
+        <p:spPr>
+          <a:xfrm>
+            <a:off x="694944" y="3172968"/>
+            <a:ext cx="10972800" cy="1115568"/>
+          </a:xfrm>
+          <a:prstGeom prst="roundRect">
+            <a:avLst/>
+          </a:prstGeom>
+          <a:solidFill>
+            <a:srgbClr val="FFF7F4"/>
+          </a:solidFill>
+          <a:ln>
+            <a:solidFill>
+              <a:srgbClr val="EDBEB4"/>
+            </a:solidFill>
+          </a:ln>
+        </p:spPr>
+        <p:style>
+          <a:lnRef idx="1">
+            <a:schemeClr val="accent1"/>
+          </a:lnRef>
+          <a:fillRef idx="3">
+            <a:schemeClr val="accent1"/>
+          </a:fillRef>
+          <a:effectRef idx="2">
+            <a:schemeClr val="accent1"/>
+          </a:effectRef>
+          <a:fontRef idx="minor">
+            <a:schemeClr val="lt1"/>
+          </a:fontRef>
+        </p:style>
+        <p:txBody>
+          <a:bodyPr rtlCol="0" anchor="ctr"/>
+          <a:lstStyle/>
+          <a:p>
+            <a:pPr algn="ctr"/>
+          </a:p>
+        </p:txBody>
+      </p:sp>
+      <p:sp>
+        <p:nvSpPr>
+          <p:cNvPr id="11" name="TextBox 10"/>
+          <p:cNvSpPr txBox="1"/>
+          <p:nvPr/>
+        </p:nvSpPr>
+        <p:spPr>
+          <a:xfrm>
+            <a:off x="896112" y="3319272"/>
+            <a:ext cx="2926080" cy="274320"/>
+          </a:xfrm>
+          <a:prstGeom prst="rect">
+            <a:avLst/>
+          </a:prstGeom>
+          <a:noFill/>
+        </p:spPr>
+        <p:txBody>
+          <a:bodyPr wrap="square" lIns="73152" rIns="73152" tIns="36576" bIns="36576">
+            <a:spAutoFit/>
+          </a:bodyPr>
+          <a:lstStyle/>
+          <a:p>
+            <a:pPr algn="l">
+              <a:spcAft>
+                <a:spcPts val="0"/>
+              </a:spcAft>
+              <a:defRPr sz="1800" b="1">
+                <a:solidFill>
+                  <a:srgbClr val="BE3B3B"/>
+                </a:solidFill>
+                <a:latin typeface="Noto Sans CJK KR"/>
+              </a:defRPr>
+            </a:pPr>
+            <a:r>
+              <a:t>증상 2: callback이 오지 않음</a:t>
+            </a:r>
+          </a:p>
+        </p:txBody>
+      </p:sp>
+      <p:sp>
+        <p:nvSpPr>
+          <p:cNvPr id="12" name="TextBox 11"/>
+          <p:cNvSpPr txBox="1"/>
+          <p:nvPr/>
+        </p:nvSpPr>
+        <p:spPr>
+          <a:xfrm>
+            <a:off x="3794760" y="3300984"/>
+            <a:ext cx="7543800" cy="621792"/>
+          </a:xfrm>
+          <a:prstGeom prst="rect">
+            <a:avLst/>
+          </a:prstGeom>
+          <a:noFill/>
+        </p:spPr>
+        <p:txBody>
+          <a:bodyPr wrap="square" lIns="73152" rIns="73152" tIns="36576" bIns="36576">
+            <a:spAutoFit/>
+          </a:bodyPr>
+          <a:lstStyle/>
+          <a:p>
+            <a:pPr algn="l">
+              <a:spcAft>
+                <a:spcPts val="0"/>
+              </a:spcAft>
+              <a:defRPr sz="1600" b="0">
+                <a:solidFill>
+                  <a:srgbClr val="122C4E"/>
+                </a:solidFill>
+                <a:latin typeface="Noto Sans CJK KR"/>
+              </a:defRPr>
+            </a:pPr>
+            <a:r>
+              <a:t>우선 확인: 토픽 이름과 message type이 양쪽에서 같은지 확인한다.</a:t>
+            </a:r>
+            <a:br/>
+            <a:r>
+              <a:t>수정 후: ros2 topic info /counter</a:t>
+            </a:r>
+          </a:p>
+        </p:txBody>
+      </p:sp>
+      <p:sp>
+        <p:nvSpPr>
+          <p:cNvPr id="13" name="TextBox 12"/>
+          <p:cNvSpPr txBox="1"/>
+          <p:nvPr/>
+        </p:nvSpPr>
+        <p:spPr>
+          <a:xfrm>
+            <a:off x="822960" y="5102352"/>
+            <a:ext cx="10607040" cy="402336"/>
+          </a:xfrm>
+          <a:prstGeom prst="rect">
+            <a:avLst/>
+          </a:prstGeom>
+          <a:noFill/>
+        </p:spPr>
+        <p:txBody>
+          <a:bodyPr wrap="square" lIns="73152" rIns="73152" tIns="36576" bIns="36576">
+            <a:spAutoFit/>
+          </a:bodyPr>
+          <a:lstStyle/>
+          <a:p>
+            <a:pPr algn="ctr">
+              <a:spcAft>
+                <a:spcPts val="0"/>
+              </a:spcAft>
+              <a:defRPr sz="1800" b="1">
+                <a:solidFill>
+                  <a:srgbClr val="DB7E22"/>
+                </a:solidFill>
+                <a:latin typeface="Noto Sans CJK KR"/>
+              </a:defRPr>
+            </a:pPr>
+            <a:r>
+              <a:t>공통 순서: ① 현재 폴더 ② source ③ 파일 경로 ④ 이름/타입/단위 ⑤ build·source 후 재실행</a:t>
+            </a:r>
+          </a:p>
+        </p:txBody>
+      </p:sp>
+    </p:spTree>
+  </p:cSld>
+  <p:clrMapOvr>
+    <a:masterClrMapping/>
+  </p:clrMapOvr>
+</p:sld>
+</file>
+
+<file path=ppt/slides/slide28.xml><?xml version="1.0" encoding="utf-8"?>
+<p:sld xmlns:a="http://schemas.openxmlformats.org/drawingml/2006/main" xmlns:p="http://schemas.openxmlformats.org/presentationml/2006/main" xmlns:r="http://schemas.openxmlformats.org/officeDocument/2006/relationships">
+  <p:cSld>
+    <p:spTree>
+      <p:nvGrpSpPr>
+        <p:cNvPr id="1" name=""/>
+        <p:cNvGrpSpPr/>
+        <p:nvPr/>
+      </p:nvGrpSpPr>
+      <p:grpSpPr/>
+      <p:sp>
+        <p:nvSpPr>
+          <p:cNvPr id="2" name="TextBox 1"/>
+          <p:cNvSpPr txBox="1"/>
+          <p:nvPr/>
+        </p:nvSpPr>
+        <p:spPr>
+          <a:xfrm>
+            <a:off x="566928" y="347472"/>
+            <a:ext cx="10881360" cy="438912"/>
+          </a:xfrm>
+          <a:prstGeom prst="rect">
+            <a:avLst/>
+          </a:prstGeom>
+          <a:noFill/>
+        </p:spPr>
+        <p:txBody>
+          <a:bodyPr wrap="square" lIns="73152" rIns="73152" tIns="36576" bIns="36576">
+            <a:spAutoFit/>
+          </a:bodyPr>
+          <a:lstStyle/>
+          <a:p>
+            <a:pPr algn="l">
+              <a:spcAft>
+                <a:spcPts val="0"/>
+              </a:spcAft>
+              <a:defRPr sz="3200" b="1">
+                <a:solidFill>
+                  <a:srgbClr val="122C4E"/>
+                </a:solidFill>
+                <a:latin typeface="Noto Sans CJK KR"/>
+              </a:defRPr>
+            </a:pPr>
+            <a:r>
+              <a:t>미니 실습: 값 하나를 바꾸고 결과를 비교한다</a:t>
+            </a:r>
+          </a:p>
+        </p:txBody>
+      </p:sp>
+      <p:sp>
+        <p:nvSpPr>
+          <p:cNvPr id="3" name="TextBox 2"/>
+          <p:cNvSpPr txBox="1"/>
+          <p:nvPr/>
+        </p:nvSpPr>
+        <p:spPr>
+          <a:xfrm>
+            <a:off x="603504" y="859536"/>
+            <a:ext cx="10698480" cy="292608"/>
+          </a:xfrm>
+          <a:prstGeom prst="rect">
+            <a:avLst/>
+          </a:prstGeom>
+          <a:noFill/>
+        </p:spPr>
+        <p:txBody>
+          <a:bodyPr wrap="square" lIns="73152" rIns="73152" tIns="36576" bIns="36576">
+            <a:spAutoFit/>
+          </a:bodyPr>
+          <a:lstStyle/>
+          <a:p>
+            <a:pPr algn="l">
+              <a:spcAft>
+                <a:spcPts val="0"/>
+              </a:spcAft>
+              <a:defRPr sz="1700" b="0">
+                <a:solidFill>
+                  <a:srgbClr val="5C6672"/>
+                </a:solidFill>
+                <a:latin typeface="Noto Sans CJK KR"/>
+              </a:defRPr>
+            </a:pPr>
+            <a:r>
+              <a:t>정상 결과를 만든 뒤에는 한 번에 하나의 값만 바꿉니다.</a:t>
+            </a:r>
+          </a:p>
+        </p:txBody>
+      </p:sp>
+      <p:sp>
+        <p:nvSpPr>
+          <p:cNvPr id="4" name="TextBox 3"/>
+          <p:cNvSpPr txBox="1"/>
+          <p:nvPr/>
+        </p:nvSpPr>
+        <p:spPr>
+          <a:xfrm>
+            <a:off x="530352" y="6510528"/>
+            <a:ext cx="7772400" cy="201168"/>
+          </a:xfrm>
+          <a:prstGeom prst="rect">
+            <a:avLst/>
+          </a:prstGeom>
+          <a:noFill/>
+        </p:spPr>
+        <p:txBody>
+          <a:bodyPr wrap="square" lIns="73152" rIns="73152" tIns="36576" bIns="36576">
+            <a:spAutoFit/>
+          </a:bodyPr>
+          <a:lstStyle/>
+          <a:p>
+            <a:pPr algn="l">
+              <a:spcAft>
+                <a:spcPts val="0"/>
+              </a:spcAft>
+              <a:defRPr sz="1000" b="0">
+                <a:solidFill>
+                  <a:srgbClr val="5C6672"/>
+                </a:solidFill>
+                <a:latin typeface="Noto Sans CJK KR"/>
+              </a:defRPr>
+            </a:pPr>
+            <a:r>
+              <a:t>ROS 2 Jazzy · Gazebo Harmonic · M03 · 따라 하기형 AGV 실습</a:t>
+            </a:r>
+          </a:p>
+        </p:txBody>
+      </p:sp>
+      <p:sp>
+        <p:nvSpPr>
+          <p:cNvPr id="5" name="TextBox 4"/>
+          <p:cNvSpPr txBox="1"/>
+          <p:nvPr/>
+        </p:nvSpPr>
+        <p:spPr>
+          <a:xfrm>
+            <a:off x="9144000" y="6510528"/>
+            <a:ext cx="2468880" cy="201168"/>
+          </a:xfrm>
+          <a:prstGeom prst="rect">
+            <a:avLst/>
+          </a:prstGeom>
+          <a:noFill/>
+        </p:spPr>
+        <p:txBody>
+          <a:bodyPr wrap="square" lIns="73152" rIns="73152" tIns="36576" bIns="36576">
+            <a:spAutoFit/>
+          </a:bodyPr>
+          <a:lstStyle/>
+          <a:p>
+            <a:pPr algn="r">
+              <a:spcAft>
+                <a:spcPts val="0"/>
+              </a:spcAft>
+              <a:defRPr sz="1000" b="0">
+                <a:solidFill>
+                  <a:srgbClr val="5C6672"/>
+                </a:solidFill>
+                <a:latin typeface="Noto Sans CJK KR"/>
+              </a:defRPr>
+            </a:pPr>
+            <a:r>
+              <a:t>명령·파일 경로는 슬라이드에서 복사 가능</a:t>
+            </a:r>
+          </a:p>
+        </p:txBody>
+      </p:sp>
+      <p:sp>
+        <p:nvSpPr>
+          <p:cNvPr id="6" name="Rectangle 5"/>
+          <p:cNvSpPr/>
+          <p:nvPr/>
+        </p:nvSpPr>
+        <p:spPr>
+          <a:xfrm>
+            <a:off x="566928" y="1188720"/>
+            <a:ext cx="11064240" cy="347472"/>
+          </a:xfrm>
+          <a:prstGeom prst="rect">
+            <a:avLst/>
+          </a:prstGeom>
+          <a:solidFill>
+            <a:srgbClr val="F4F7FB"/>
+          </a:solidFill>
+          <a:ln>
+            <a:solidFill>
+              <a:srgbClr val="F4F7FB"/>
+            </a:solidFill>
+          </a:ln>
+        </p:spPr>
+        <p:style>
+          <a:lnRef idx="1">
+            <a:schemeClr val="accent1"/>
+          </a:lnRef>
+          <a:fillRef idx="3">
+            <a:schemeClr val="accent1"/>
+          </a:fillRef>
+          <a:effectRef idx="2">
+            <a:schemeClr val="accent1"/>
+          </a:effectRef>
+          <a:fontRef idx="minor">
+            <a:schemeClr val="lt1"/>
+          </a:fontRef>
+        </p:style>
+        <p:txBody>
+          <a:bodyPr rtlCol="0" anchor="ctr" wrap="square" lIns="73152" rIns="73152" tIns="36576" bIns="36576"/>
+          <a:lstStyle/>
+          <a:p>
+            <a:pPr algn="l">
+              <a:spcAft>
+                <a:spcPts val="0"/>
+              </a:spcAft>
+              <a:defRPr sz="1300" b="1">
+                <a:solidFill>
+                  <a:srgbClr val="122C4E"/>
+                </a:solidFill>
+                <a:latin typeface="Noto Sans CJK KR"/>
+              </a:defRPr>
+            </a:pPr>
+            <a:r>
+              <a:t>현재 단계 미니 실습    |    현재 폴더 ~/ros2_curri/agv_ws    |    현재 터미널</a:t>
+            </a:r>
+          </a:p>
+        </p:txBody>
+      </p:sp>
+      <p:sp>
+        <p:nvSpPr>
+          <p:cNvPr id="7" name="Rounded Rectangle 6"/>
+          <p:cNvSpPr/>
+          <p:nvPr/>
+        </p:nvSpPr>
+        <p:spPr>
+          <a:xfrm>
+            <a:off x="749808" y="1874519"/>
+            <a:ext cx="10652760" cy="1993392"/>
+          </a:xfrm>
+          <a:prstGeom prst="roundRect">
+            <a:avLst/>
+          </a:prstGeom>
+          <a:solidFill>
+            <a:srgbClr val="FFF8EB"/>
+          </a:solidFill>
+          <a:ln>
+            <a:solidFill>
+              <a:srgbClr val="ECC680"/>
+            </a:solidFill>
+          </a:ln>
+        </p:spPr>
+        <p:style>
+          <a:lnRef idx="1">
+            <a:schemeClr val="accent1"/>
+          </a:lnRef>
+          <a:fillRef idx="3">
+            <a:schemeClr val="accent1"/>
+          </a:fillRef>
+          <a:effectRef idx="2">
+            <a:schemeClr val="accent1"/>
+          </a:effectRef>
+          <a:fontRef idx="minor">
+            <a:schemeClr val="lt1"/>
+          </a:fontRef>
+        </p:style>
+        <p:txBody>
+          <a:bodyPr rtlCol="0" anchor="ctr" wrap="square" lIns="73152" rIns="73152" tIns="36576" bIns="36576"/>
+          <a:lstStyle/>
+          <a:p>
+            <a:pPr algn="ctr">
+              <a:spcAft>
+                <a:spcPts val="0"/>
+              </a:spcAft>
+              <a:defRPr sz="2300" b="1">
+                <a:solidFill>
+                  <a:srgbClr val="122C4E"/>
+                </a:solidFill>
+                <a:latin typeface="Noto Sans CJK KR"/>
+              </a:defRPr>
+            </a:pPr>
+            <a:r>
+              <a:t>cmd_test_node의 linear.x와 angular.z를 각각 바꾸고 velocity_monitor 출력을 비교한다.</a:t>
+            </a:r>
+          </a:p>
+        </p:txBody>
+      </p:sp>
+      <p:sp>
+        <p:nvSpPr>
+          <p:cNvPr id="8" name="TextBox 7"/>
+          <p:cNvSpPr txBox="1"/>
+          <p:nvPr/>
+        </p:nvSpPr>
+        <p:spPr>
+          <a:xfrm>
+            <a:off x="877824" y="4590288"/>
+            <a:ext cx="10241280" cy="594360"/>
+          </a:xfrm>
+          <a:prstGeom prst="rect">
+            <a:avLst/>
+          </a:prstGeom>
+          <a:noFill/>
+        </p:spPr>
+        <p:txBody>
+          <a:bodyPr wrap="square" lIns="73152" rIns="73152" tIns="36576" bIns="36576">
+            <a:spAutoFit/>
+          </a:bodyPr>
+          <a:lstStyle/>
+          <a:p>
+            <a:pPr algn="ctr">
+              <a:spcAft>
+                <a:spcPts val="0"/>
+              </a:spcAft>
+              <a:defRPr sz="1900" b="1">
+                <a:solidFill>
+                  <a:srgbClr val="DB7E22"/>
+                </a:solidFill>
+                <a:latin typeface="Noto Sans CJK KR"/>
+              </a:defRPr>
+            </a:pPr>
+            <a:r>
+              <a:t>기록할 것: 바꾼 값(단위) · 기대한 변화 · 실제 출력/화면 · 원래 값으로 되돌린 결과</a:t>
+            </a:r>
+          </a:p>
+        </p:txBody>
+      </p:sp>
+    </p:spTree>
+  </p:cSld>
+  <p:clrMapOvr>
+    <a:masterClrMapping/>
+  </p:clrMapOvr>
+</p:sld>
+</file>
+
+<file path=ppt/slides/slide29.xml><?xml version="1.0" encoding="utf-8"?>
+<p:sld xmlns:a="http://schemas.openxmlformats.org/drawingml/2006/main" xmlns:p="http://schemas.openxmlformats.org/presentationml/2006/main" xmlns:r="http://schemas.openxmlformats.org/officeDocument/2006/relationships">
+  <p:cSld>
+    <p:spTree>
+      <p:nvGrpSpPr>
+        <p:cNvPr id="1" name=""/>
+        <p:cNvGrpSpPr/>
+        <p:nvPr/>
+      </p:nvGrpSpPr>
+      <p:grpSpPr/>
+      <p:sp>
+        <p:nvSpPr>
+          <p:cNvPr id="2" name="TextBox 1"/>
+          <p:cNvSpPr txBox="1"/>
+          <p:nvPr/>
+        </p:nvSpPr>
+        <p:spPr>
+          <a:xfrm>
+            <a:off x="566928" y="347472"/>
+            <a:ext cx="10881360" cy="438912"/>
+          </a:xfrm>
+          <a:prstGeom prst="rect">
+            <a:avLst/>
+          </a:prstGeom>
+          <a:noFill/>
+        </p:spPr>
+        <p:txBody>
+          <a:bodyPr wrap="square" lIns="73152" rIns="73152" tIns="36576" bIns="36576">
+            <a:spAutoFit/>
+          </a:bodyPr>
+          <a:lstStyle/>
+          <a:p>
+            <a:pPr algn="l">
+              <a:spcAft>
+                <a:spcPts val="0"/>
+              </a:spcAft>
+              <a:defRPr sz="3200" b="1">
+                <a:solidFill>
+                  <a:srgbClr val="122C4E"/>
+                </a:solidFill>
+                <a:latin typeface="Noto Sans CJK KR"/>
+              </a:defRPr>
+            </a:pPr>
+            <a:r>
+              <a:t>체크포인트를 저장하고 다음 모듈로 넘긴다</a:t>
+            </a:r>
+          </a:p>
+        </p:txBody>
+      </p:sp>
+      <p:sp>
+        <p:nvSpPr>
+          <p:cNvPr id="3" name="TextBox 2"/>
+          <p:cNvSpPr txBox="1"/>
+          <p:nvPr/>
+        </p:nvSpPr>
+        <p:spPr>
+          <a:xfrm>
+            <a:off x="603504" y="859536"/>
+            <a:ext cx="10698480" cy="292608"/>
+          </a:xfrm>
+          <a:prstGeom prst="rect">
+            <a:avLst/>
+          </a:prstGeom>
+          <a:noFill/>
+        </p:spPr>
+        <p:txBody>
+          <a:bodyPr wrap="square" lIns="73152" rIns="73152" tIns="36576" bIns="36576">
+            <a:spAutoFit/>
+          </a:bodyPr>
+          <a:lstStyle/>
+          <a:p>
+            <a:pPr algn="l">
+              <a:spcAft>
+                <a:spcPts val="0"/>
+              </a:spcAft>
+              <a:defRPr sz="1700" b="0">
+                <a:solidFill>
+                  <a:srgbClr val="5C6672"/>
+                </a:solidFill>
+                <a:latin typeface="Noto Sans CJK KR"/>
+              </a:defRPr>
+            </a:pPr>
+            <a:r>
+              <a:t>현재 Complete는 다음 Starter의 기준선입니다.</a:t>
+            </a:r>
+          </a:p>
+        </p:txBody>
+      </p:sp>
+      <p:sp>
+        <p:nvSpPr>
+          <p:cNvPr id="4" name="TextBox 3"/>
+          <p:cNvSpPr txBox="1"/>
+          <p:nvPr/>
+        </p:nvSpPr>
+        <p:spPr>
+          <a:xfrm>
+            <a:off x="530352" y="6510528"/>
+            <a:ext cx="7772400" cy="201168"/>
+          </a:xfrm>
+          <a:prstGeom prst="rect">
+            <a:avLst/>
+          </a:prstGeom>
+          <a:noFill/>
+        </p:spPr>
+        <p:txBody>
+          <a:bodyPr wrap="square" lIns="73152" rIns="73152" tIns="36576" bIns="36576">
+            <a:spAutoFit/>
+          </a:bodyPr>
+          <a:lstStyle/>
+          <a:p>
+            <a:pPr algn="l">
+              <a:spcAft>
+                <a:spcPts val="0"/>
+              </a:spcAft>
+              <a:defRPr sz="1000" b="0">
+                <a:solidFill>
+                  <a:srgbClr val="5C6672"/>
+                </a:solidFill>
+                <a:latin typeface="Noto Sans CJK KR"/>
+              </a:defRPr>
+            </a:pPr>
+            <a:r>
+              <a:t>ROS 2 Jazzy · Gazebo Harmonic · M03 · 따라 하기형 AGV 실습</a:t>
+            </a:r>
+          </a:p>
+        </p:txBody>
+      </p:sp>
+      <p:sp>
+        <p:nvSpPr>
+          <p:cNvPr id="5" name="TextBox 4"/>
+          <p:cNvSpPr txBox="1"/>
+          <p:nvPr/>
+        </p:nvSpPr>
+        <p:spPr>
+          <a:xfrm>
+            <a:off x="9144000" y="6510528"/>
+            <a:ext cx="2468880" cy="201168"/>
+          </a:xfrm>
+          <a:prstGeom prst="rect">
+            <a:avLst/>
+          </a:prstGeom>
+          <a:noFill/>
+        </p:spPr>
+        <p:txBody>
+          <a:bodyPr wrap="square" lIns="73152" rIns="73152" tIns="36576" bIns="36576">
+            <a:spAutoFit/>
+          </a:bodyPr>
+          <a:lstStyle/>
+          <a:p>
+            <a:pPr algn="r">
+              <a:spcAft>
+                <a:spcPts val="0"/>
+              </a:spcAft>
+              <a:defRPr sz="1000" b="0">
+                <a:solidFill>
+                  <a:srgbClr val="5C6672"/>
+                </a:solidFill>
+                <a:latin typeface="Noto Sans CJK KR"/>
+              </a:defRPr>
+            </a:pPr>
+            <a:r>
+              <a:t>명령·파일 경로는 슬라이드에서 복사 가능</a:t>
+            </a:r>
+          </a:p>
+        </p:txBody>
+      </p:sp>
+      <p:sp>
+        <p:nvSpPr>
+          <p:cNvPr id="6" name="Rectangle 5"/>
+          <p:cNvSpPr/>
+          <p:nvPr/>
+        </p:nvSpPr>
+        <p:spPr>
+          <a:xfrm>
+            <a:off x="566928" y="1188720"/>
+            <a:ext cx="11064240" cy="347472"/>
+          </a:xfrm>
+          <a:prstGeom prst="rect">
+            <a:avLst/>
+          </a:prstGeom>
+          <a:solidFill>
+            <a:srgbClr val="F4F7FB"/>
+          </a:solidFill>
+          <a:ln>
+            <a:solidFill>
+              <a:srgbClr val="F4F7FB"/>
+            </a:solidFill>
+          </a:ln>
+        </p:spPr>
+        <p:style>
+          <a:lnRef idx="1">
+            <a:schemeClr val="accent1"/>
+          </a:lnRef>
+          <a:fillRef idx="3">
+            <a:schemeClr val="accent1"/>
+          </a:fillRef>
+          <a:effectRef idx="2">
+            <a:schemeClr val="accent1"/>
+          </a:effectRef>
+          <a:fontRef idx="minor">
+            <a:schemeClr val="lt1"/>
+          </a:fontRef>
+        </p:style>
+        <p:txBody>
+          <a:bodyPr rtlCol="0" anchor="ctr" wrap="square" lIns="73152" rIns="73152" tIns="36576" bIns="36576"/>
+          <a:lstStyle/>
+          <a:p>
+            <a:pPr algn="l">
+              <a:spcAft>
+                <a:spcPts val="0"/>
+              </a:spcAft>
+              <a:defRPr sz="1300" b="1">
+                <a:solidFill>
+                  <a:srgbClr val="122C4E"/>
+                </a:solidFill>
+                <a:latin typeface="Noto Sans CJK KR"/>
+              </a:defRPr>
+            </a:pPr>
+            <a:r>
+              <a:t>현재 단계 체크포인트    |    현재 폴더 ~/ros2_curri/agv_ws    |    현재 터미널</a:t>
+            </a:r>
+          </a:p>
+        </p:txBody>
+      </p:sp>
+      <p:sp>
+        <p:nvSpPr>
+          <p:cNvPr id="7" name="Rounded Rectangle 6"/>
+          <p:cNvSpPr/>
+          <p:nvPr/>
+        </p:nvSpPr>
+        <p:spPr>
+          <a:xfrm>
+            <a:off x="685800" y="1737360"/>
+            <a:ext cx="10972800" cy="3611880"/>
+          </a:xfrm>
+          <a:prstGeom prst="roundRect">
+            <a:avLst/>
+          </a:prstGeom>
+          <a:solidFill>
+            <a:srgbClr val="F4F7FB"/>
+          </a:solidFill>
+          <a:ln>
+            <a:solidFill>
+              <a:srgbClr val="D2DCE8"/>
+            </a:solidFill>
+          </a:ln>
+        </p:spPr>
+        <p:style>
+          <a:lnRef idx="1">
+            <a:schemeClr val="accent1"/>
+          </a:lnRef>
+          <a:fillRef idx="3">
+            <a:schemeClr val="accent1"/>
+          </a:fillRef>
+          <a:effectRef idx="2">
+            <a:schemeClr val="accent1"/>
+          </a:effectRef>
+          <a:fontRef idx="minor">
+            <a:schemeClr val="lt1"/>
+          </a:fontRef>
+        </p:style>
+        <p:txBody>
+          <a:bodyPr rtlCol="0" anchor="ctr"/>
+          <a:lstStyle/>
+          <a:p>
+            <a:pPr algn="ctr"/>
+          </a:p>
+        </p:txBody>
+      </p:sp>
+      <p:sp>
+        <p:nvSpPr>
+          <p:cNvPr id="8" name="TextBox 7"/>
+          <p:cNvSpPr txBox="1"/>
+          <p:nvPr/>
+        </p:nvSpPr>
+        <p:spPr>
+          <a:xfrm>
+            <a:off x="896112" y="1993392"/>
+            <a:ext cx="10332720" cy="2971800"/>
+          </a:xfrm>
+          <a:prstGeom prst="rect">
+            <a:avLst/>
+          </a:prstGeom>
+          <a:noFill/>
+        </p:spPr>
+        <p:txBody>
+          <a:bodyPr wrap="square" lIns="109728" rIns="109728">
+            <a:spAutoFit/>
+          </a:bodyPr>
+          <a:lstStyle/>
+          <a:p>
+            <a:pPr>
+              <a:spcAft>
+                <a:spcPts val="800"/>
+              </a:spcAft>
+              <a:defRPr sz="1800">
+                <a:solidFill>
+                  <a:srgbClr val="122C4E"/>
+                </a:solidFill>
+                <a:latin typeface="Noto Sans CJK KR"/>
+              </a:defRPr>
+            </a:pPr>
+            <a:r>
+              <a:t>• □ 완료 화면: /counter와 /cmd_vel의 값·message type·연결 수를 terminal에서 확인한다.</a:t>
+            </a:r>
+          </a:p>
+          <a:p>
+            <a:pPr>
+              <a:spcAft>
+                <a:spcPts val="800"/>
+              </a:spcAft>
+              <a:defRPr sz="1800">
+                <a:solidFill>
+                  <a:srgbClr val="122C4E"/>
+                </a:solidFill>
+                <a:latin typeface="Noto Sans CJK KR"/>
+              </a:defRPr>
+            </a:pPr>
+            <a:r>
+              <a:t>• □ Complete 파일: blocks/A_ros2_basics/M03_pubsub/complete/</a:t>
+            </a:r>
+          </a:p>
+          <a:p>
+            <a:pPr>
+              <a:spcAft>
+                <a:spcPts val="800"/>
+              </a:spcAft>
+              <a:defRPr sz="1800">
+                <a:solidFill>
+                  <a:srgbClr val="122C4E"/>
+                </a:solidFill>
+                <a:latin typeface="Noto Sans CJK KR"/>
+              </a:defRPr>
+            </a:pPr>
+            <a:r>
+              <a:t>• □ 정상 로그·캡처: logs/validation.log, screenshots/validation_terminal.png</a:t>
+            </a:r>
+          </a:p>
+          <a:p>
+            <a:pPr>
+              <a:spcAft>
+                <a:spcPts val="800"/>
+              </a:spcAft>
+              <a:defRPr sz="1800">
+                <a:solidFill>
+                  <a:srgbClr val="122C4E"/>
+                </a:solidFill>
+                <a:latin typeface="Noto Sans CJK KR"/>
+              </a:defRPr>
+            </a:pPr>
+            <a:r>
+              <a:t>• □ 버전 식별: CHECKSUM_or_TAG.txt의 SHA-256 manifest</a:t>
+            </a:r>
+          </a:p>
+          <a:p>
+            <a:pPr>
+              <a:spcAft>
+                <a:spcPts val="800"/>
+              </a:spcAft>
+              <a:defRPr sz="1800">
+                <a:solidFill>
+                  <a:srgbClr val="122C4E"/>
+                </a:solidFill>
+                <a:latin typeface="Noto Sans CJK KR"/>
+              </a:defRPr>
+            </a:pPr>
+            <a:r>
+              <a:t>• □ 다음 시작 조건: M04 TF2 frame</a:t>
+            </a:r>
+          </a:p>
+        </p:txBody>
+      </p:sp>
+      <p:sp>
+        <p:nvSpPr>
+          <p:cNvPr id="9" name="TextBox 8"/>
+          <p:cNvSpPr txBox="1"/>
+          <p:nvPr/>
+        </p:nvSpPr>
+        <p:spPr>
+          <a:xfrm>
+            <a:off x="868680" y="5596128"/>
+            <a:ext cx="10515600" cy="338328"/>
+          </a:xfrm>
+          <a:prstGeom prst="rect">
+            <a:avLst/>
+          </a:prstGeom>
+          <a:noFill/>
+        </p:spPr>
+        <p:txBody>
+          <a:bodyPr wrap="square" lIns="73152" rIns="73152" tIns="36576" bIns="36576">
+            <a:spAutoFit/>
+          </a:bodyPr>
+          <a:lstStyle/>
+          <a:p>
+            <a:pPr algn="ctr">
               <a:spcAft>
                 <a:spcPts val="0"/>
               </a:spcAft>
               <a:defRPr sz="1700" b="1">
                 <a:solidFill>
-                  <a:srgbClr val="122C4E"/>
-                </a:solidFill>
-                <a:latin typeface="Noto Sans CJK KR"/>
-              </a:defRPr>
-            </a:pPr>
-            <a:r>
-              <a:t>ROS 2 Jazzy — Gazebo Simulation</a:t>
-            </a:r>
-          </a:p>
-        </p:txBody>
-      </p:sp>
-      <p:sp>
-        <p:nvSpPr>
-          <p:cNvPr id="8" name="TextBox 7"/>
-          <p:cNvSpPr txBox="1"/>
-          <p:nvPr/>
-        </p:nvSpPr>
-        <p:spPr>
-          <a:xfrm>
-            <a:off x="914400" y="2048255"/>
-            <a:ext cx="9966960" cy="475488"/>
-          </a:xfrm>
-          <a:prstGeom prst="rect">
-            <a:avLst/>
-          </a:prstGeom>
-          <a:noFill/>
-        </p:spPr>
-        <p:txBody>
-          <a:bodyPr wrap="square" lIns="73152" rIns="73152" tIns="36576" bIns="36576">
-            <a:spAutoFit/>
-          </a:bodyPr>
-          <a:lstStyle/>
-          <a:p>
-            <a:pPr algn="l">
-              <a:spcAft>
-                <a:spcPts val="0"/>
-              </a:spcAft>
-              <a:defRPr sz="1000" b="0">
-                <a:solidFill>
-                  <a:srgbClr val="225B9B"/>
-                </a:solidFill>
-                <a:latin typeface="DejaVu Sans Mono"/>
-              </a:defRPr>
-            </a:pPr>
-            <a:r>
-              <a:t>https://docs.ros.org/en/jazzy/Tutorials/Advanced/Simulators/Gazebo/Simulation-Gazebo.html</a:t>
-            </a:r>
-          </a:p>
-        </p:txBody>
-      </p:sp>
-      <p:sp>
-        <p:nvSpPr>
-          <p:cNvPr id="9" name="TextBox 8"/>
-          <p:cNvSpPr txBox="1"/>
-          <p:nvPr/>
-        </p:nvSpPr>
-        <p:spPr>
-          <a:xfrm>
-            <a:off x="914400" y="2852928"/>
-            <a:ext cx="3840480" cy="256032"/>
-          </a:xfrm>
-          <a:prstGeom prst="rect">
-            <a:avLst/>
-          </a:prstGeom>
-          <a:noFill/>
-        </p:spPr>
-        <p:txBody>
-          <a:bodyPr wrap="square" lIns="73152" rIns="73152" tIns="36576" bIns="36576">
-            <a:spAutoFit/>
-          </a:bodyPr>
-          <a:lstStyle/>
-          <a:p>
-            <a:pPr algn="l">
-              <a:spcAft>
-                <a:spcPts val="0"/>
-              </a:spcAft>
-              <a:defRPr sz="1700" b="1">
-                <a:solidFill>
-                  <a:srgbClr val="122C4E"/>
-                </a:solidFill>
-                <a:latin typeface="Noto Sans CJK KR"/>
-              </a:defRPr>
-            </a:pPr>
-            <a:r>
-              <a:t>ROS 2 Jazzy — URDF / robot_state_publisher</a:t>
-            </a:r>
-          </a:p>
-        </p:txBody>
-      </p:sp>
-      <p:sp>
-        <p:nvSpPr>
-          <p:cNvPr id="10" name="TextBox 9"/>
-          <p:cNvSpPr txBox="1"/>
-          <p:nvPr/>
-        </p:nvSpPr>
-        <p:spPr>
-          <a:xfrm>
-            <a:off x="914400" y="3127248"/>
-            <a:ext cx="9966960" cy="475488"/>
-          </a:xfrm>
-          <a:prstGeom prst="rect">
-            <a:avLst/>
-          </a:prstGeom>
-          <a:noFill/>
-        </p:spPr>
-        <p:txBody>
-          <a:bodyPr wrap="square" lIns="73152" rIns="73152" tIns="36576" bIns="36576">
-            <a:spAutoFit/>
-          </a:bodyPr>
-          <a:lstStyle/>
-          <a:p>
-            <a:pPr algn="l">
-              <a:spcAft>
-                <a:spcPts val="0"/>
-              </a:spcAft>
-              <a:defRPr sz="1000" b="0">
-                <a:solidFill>
-                  <a:srgbClr val="225B9B"/>
-                </a:solidFill>
-                <a:latin typeface="DejaVu Sans Mono"/>
-              </a:defRPr>
-            </a:pPr>
-            <a:r>
-              <a:t>https://docs.ros.org/en/jazzy/Tutorials/Intermediate/URDF/Using-URDF-with-Robot-State-Publisher-py.html</a:t>
-            </a:r>
-          </a:p>
-        </p:txBody>
-      </p:sp>
-      <p:sp>
-        <p:nvSpPr>
-          <p:cNvPr id="11" name="TextBox 10"/>
-          <p:cNvSpPr txBox="1"/>
-          <p:nvPr/>
-        </p:nvSpPr>
-        <p:spPr>
-          <a:xfrm>
-            <a:off x="914400" y="3931920"/>
-            <a:ext cx="3840480" cy="256032"/>
-          </a:xfrm>
-          <a:prstGeom prst="rect">
-            <a:avLst/>
-          </a:prstGeom>
-          <a:noFill/>
-        </p:spPr>
-        <p:txBody>
-          <a:bodyPr wrap="square" lIns="73152" rIns="73152" tIns="36576" bIns="36576">
-            <a:spAutoFit/>
-          </a:bodyPr>
-          <a:lstStyle/>
-          <a:p>
-            <a:pPr algn="l">
-              <a:spcAft>
-                <a:spcPts val="0"/>
-              </a:spcAft>
-              <a:defRPr sz="1700" b="1">
-                <a:solidFill>
-                  <a:srgbClr val="122C4E"/>
-                </a:solidFill>
-                <a:latin typeface="Noto Sans CJK KR"/>
-              </a:defRPr>
-            </a:pPr>
-            <a:r>
-              <a:t>Gazebo — ROS 2 Integration / ros_gz_bridge</a:t>
-            </a:r>
-          </a:p>
-        </p:txBody>
-      </p:sp>
-      <p:sp>
-        <p:nvSpPr>
-          <p:cNvPr id="12" name="TextBox 11"/>
-          <p:cNvSpPr txBox="1"/>
-          <p:nvPr/>
-        </p:nvSpPr>
-        <p:spPr>
-          <a:xfrm>
-            <a:off x="914400" y="4206240"/>
-            <a:ext cx="9966960" cy="475488"/>
-          </a:xfrm>
-          <a:prstGeom prst="rect">
-            <a:avLst/>
-          </a:prstGeom>
-          <a:noFill/>
-        </p:spPr>
-        <p:txBody>
-          <a:bodyPr wrap="square" lIns="73152" rIns="73152" tIns="36576" bIns="36576">
-            <a:spAutoFit/>
-          </a:bodyPr>
-          <a:lstStyle/>
-          <a:p>
-            <a:pPr algn="l">
-              <a:spcAft>
-                <a:spcPts val="0"/>
-              </a:spcAft>
-              <a:defRPr sz="1000" b="0">
-                <a:solidFill>
-                  <a:srgbClr val="225B9B"/>
-                </a:solidFill>
-                <a:latin typeface="DejaVu Sans Mono"/>
-              </a:defRPr>
-            </a:pPr>
-            <a:r>
-              <a:t>https://gazebosim.org/docs/latest/ros2_integration/</a:t>
-            </a:r>
-          </a:p>
-        </p:txBody>
-      </p:sp>
-      <p:sp>
-        <p:nvSpPr>
-          <p:cNvPr id="13" name="TextBox 12"/>
-          <p:cNvSpPr txBox="1"/>
-          <p:nvPr/>
-        </p:nvSpPr>
-        <p:spPr>
-          <a:xfrm>
-            <a:off x="914400" y="5010912"/>
-            <a:ext cx="3840480" cy="256032"/>
-          </a:xfrm>
-          <a:prstGeom prst="rect">
-            <a:avLst/>
-          </a:prstGeom>
-          <a:noFill/>
-        </p:spPr>
-        <p:txBody>
-          <a:bodyPr wrap="square" lIns="73152" rIns="73152" tIns="36576" bIns="36576">
-            <a:spAutoFit/>
-          </a:bodyPr>
-          <a:lstStyle/>
-          <a:p>
-            <a:pPr algn="l">
-              <a:spcAft>
-                <a:spcPts val="0"/>
-              </a:spcAft>
-              <a:defRPr sz="1700" b="1">
-                <a:solidFill>
-                  <a:srgbClr val="122C4E"/>
-                </a:solidFill>
-                <a:latin typeface="Noto Sans CJK KR"/>
-              </a:defRPr>
-            </a:pPr>
-            <a:r>
-              <a:t>ROS 2 Jazzy — rosbag2 Recording and Playback</a:t>
-            </a:r>
-          </a:p>
-        </p:txBody>
-      </p:sp>
-      <p:sp>
-        <p:nvSpPr>
-          <p:cNvPr id="14" name="TextBox 13"/>
-          <p:cNvSpPr txBox="1"/>
-          <p:nvPr/>
-        </p:nvSpPr>
-        <p:spPr>
-          <a:xfrm>
-            <a:off x="914400" y="5285232"/>
-            <a:ext cx="9966960" cy="475488"/>
-          </a:xfrm>
-          <a:prstGeom prst="rect">
-            <a:avLst/>
-          </a:prstGeom>
-          <a:noFill/>
-        </p:spPr>
-        <p:txBody>
-          <a:bodyPr wrap="square" lIns="73152" rIns="73152" tIns="36576" bIns="36576">
-            <a:spAutoFit/>
-          </a:bodyPr>
-          <a:lstStyle/>
-          <a:p>
-            <a:pPr algn="l">
-              <a:spcAft>
-                <a:spcPts val="0"/>
-              </a:spcAft>
-              <a:defRPr sz="1000" b="0">
-                <a:solidFill>
-                  <a:srgbClr val="225B9B"/>
-                </a:solidFill>
-                <a:latin typeface="DejaVu Sans Mono"/>
-              </a:defRPr>
-            </a:pPr>
-            <a:r>
-              <a:t>https://docs.ros.org/en/jazzy/Tutorials/Beginner-CLI-Tools/Recording-And-Playing-Back-Data/Recording-And-Playing-Back-Data.html</a:t>
+                  <a:srgbClr val="2A8B5A"/>
+                </a:solidFill>
+                <a:latin typeface="Noto Sans CJK KR"/>
+              </a:defRPr>
+            </a:pPr>
+            <a:r>
+              <a:t>다음 모듈을 시작하기 전, 이 슬라이드의 Complete와 다음 모듈의 Starter를 비교합니다.</a:t>
             </a:r>
           </a:p>
         </p:txBody>
@@ -15069,6 +16188,537 @@
 </p:sld>
 </file>
 
+<file path=ppt/slides/slide30.xml><?xml version="1.0" encoding="utf-8"?>
+<p:sld xmlns:a="http://schemas.openxmlformats.org/drawingml/2006/main" xmlns:p="http://schemas.openxmlformats.org/presentationml/2006/main" xmlns:r="http://schemas.openxmlformats.org/officeDocument/2006/relationships">
+  <p:cSld>
+    <p:spTree>
+      <p:nvGrpSpPr>
+        <p:cNvPr id="1" name=""/>
+        <p:cNvGrpSpPr/>
+        <p:nvPr/>
+      </p:nvGrpSpPr>
+      <p:grpSpPr/>
+      <p:sp>
+        <p:nvSpPr>
+          <p:cNvPr id="2" name="TextBox 1"/>
+          <p:cNvSpPr txBox="1"/>
+          <p:nvPr/>
+        </p:nvSpPr>
+        <p:spPr>
+          <a:xfrm>
+            <a:off x="566928" y="347472"/>
+            <a:ext cx="10881360" cy="438912"/>
+          </a:xfrm>
+          <a:prstGeom prst="rect">
+            <a:avLst/>
+          </a:prstGeom>
+          <a:noFill/>
+        </p:spPr>
+        <p:txBody>
+          <a:bodyPr wrap="square" lIns="73152" rIns="73152" tIns="36576" bIns="36576">
+            <a:spAutoFit/>
+          </a:bodyPr>
+          <a:lstStyle/>
+          <a:p>
+            <a:pPr algn="l">
+              <a:spcAft>
+                <a:spcPts val="0"/>
+              </a:spcAft>
+              <a:defRPr sz="3200" b="1">
+                <a:solidFill>
+                  <a:srgbClr val="122C4E"/>
+                </a:solidFill>
+                <a:latin typeface="Noto Sans CJK KR"/>
+              </a:defRPr>
+            </a:pPr>
+            <a:r>
+              <a:t>공식 참고 자료</a:t>
+            </a:r>
+          </a:p>
+        </p:txBody>
+      </p:sp>
+      <p:sp>
+        <p:nvSpPr>
+          <p:cNvPr id="3" name="TextBox 2"/>
+          <p:cNvSpPr txBox="1"/>
+          <p:nvPr/>
+        </p:nvSpPr>
+        <p:spPr>
+          <a:xfrm>
+            <a:off x="603504" y="859536"/>
+            <a:ext cx="10698480" cy="292608"/>
+          </a:xfrm>
+          <a:prstGeom prst="rect">
+            <a:avLst/>
+          </a:prstGeom>
+          <a:noFill/>
+        </p:spPr>
+        <p:txBody>
+          <a:bodyPr wrap="square" lIns="73152" rIns="73152" tIns="36576" bIns="36576">
+            <a:spAutoFit/>
+          </a:bodyPr>
+          <a:lstStyle/>
+          <a:p>
+            <a:pPr algn="l">
+              <a:spcAft>
+                <a:spcPts val="0"/>
+              </a:spcAft>
+              <a:defRPr sz="1700" b="0">
+                <a:solidFill>
+                  <a:srgbClr val="5C6672"/>
+                </a:solidFill>
+                <a:latin typeface="Noto Sans CJK KR"/>
+              </a:defRPr>
+            </a:pPr>
+            <a:r>
+              <a:t>본문 단계는 링크를 열지 않아도 완료할 수 있으며, 링크는 개념을 더 확인할 때만 사용합니다.</a:t>
+            </a:r>
+          </a:p>
+        </p:txBody>
+      </p:sp>
+      <p:sp>
+        <p:nvSpPr>
+          <p:cNvPr id="4" name="TextBox 3"/>
+          <p:cNvSpPr txBox="1"/>
+          <p:nvPr/>
+        </p:nvSpPr>
+        <p:spPr>
+          <a:xfrm>
+            <a:off x="530352" y="6510528"/>
+            <a:ext cx="7772400" cy="201168"/>
+          </a:xfrm>
+          <a:prstGeom prst="rect">
+            <a:avLst/>
+          </a:prstGeom>
+          <a:noFill/>
+        </p:spPr>
+        <p:txBody>
+          <a:bodyPr wrap="square" lIns="73152" rIns="73152" tIns="36576" bIns="36576">
+            <a:spAutoFit/>
+          </a:bodyPr>
+          <a:lstStyle/>
+          <a:p>
+            <a:pPr algn="l">
+              <a:spcAft>
+                <a:spcPts val="0"/>
+              </a:spcAft>
+              <a:defRPr sz="1000" b="0">
+                <a:solidFill>
+                  <a:srgbClr val="5C6672"/>
+                </a:solidFill>
+                <a:latin typeface="Noto Sans CJK KR"/>
+              </a:defRPr>
+            </a:pPr>
+            <a:r>
+              <a:t>ROS 2 Jazzy · Gazebo Harmonic · M03 · 따라 하기형 AGV 실습</a:t>
+            </a:r>
+          </a:p>
+        </p:txBody>
+      </p:sp>
+      <p:sp>
+        <p:nvSpPr>
+          <p:cNvPr id="5" name="TextBox 4"/>
+          <p:cNvSpPr txBox="1"/>
+          <p:nvPr/>
+        </p:nvSpPr>
+        <p:spPr>
+          <a:xfrm>
+            <a:off x="9144000" y="6510528"/>
+            <a:ext cx="2468880" cy="201168"/>
+          </a:xfrm>
+          <a:prstGeom prst="rect">
+            <a:avLst/>
+          </a:prstGeom>
+          <a:noFill/>
+        </p:spPr>
+        <p:txBody>
+          <a:bodyPr wrap="square" lIns="73152" rIns="73152" tIns="36576" bIns="36576">
+            <a:spAutoFit/>
+          </a:bodyPr>
+          <a:lstStyle/>
+          <a:p>
+            <a:pPr algn="r">
+              <a:spcAft>
+                <a:spcPts val="0"/>
+              </a:spcAft>
+              <a:defRPr sz="1000" b="0">
+                <a:solidFill>
+                  <a:srgbClr val="5C6672"/>
+                </a:solidFill>
+                <a:latin typeface="Noto Sans CJK KR"/>
+              </a:defRPr>
+            </a:pPr>
+            <a:r>
+              <a:t>명령·파일 경로는 슬라이드에서 복사 가능</a:t>
+            </a:r>
+          </a:p>
+        </p:txBody>
+      </p:sp>
+      <p:sp>
+        <p:nvSpPr>
+          <p:cNvPr id="6" name="Rounded Rectangle 5"/>
+          <p:cNvSpPr/>
+          <p:nvPr/>
+        </p:nvSpPr>
+        <p:spPr>
+          <a:xfrm>
+            <a:off x="658368" y="1554480"/>
+            <a:ext cx="10972800" cy="4526280"/>
+          </a:xfrm>
+          <a:prstGeom prst="roundRect">
+            <a:avLst/>
+          </a:prstGeom>
+          <a:solidFill>
+            <a:srgbClr val="F4F7FB"/>
+          </a:solidFill>
+          <a:ln>
+            <a:solidFill>
+              <a:srgbClr val="D7DFE9"/>
+            </a:solidFill>
+          </a:ln>
+        </p:spPr>
+        <p:style>
+          <a:lnRef idx="1">
+            <a:schemeClr val="accent1"/>
+          </a:lnRef>
+          <a:fillRef idx="3">
+            <a:schemeClr val="accent1"/>
+          </a:fillRef>
+          <a:effectRef idx="2">
+            <a:schemeClr val="accent1"/>
+          </a:effectRef>
+          <a:fontRef idx="minor">
+            <a:schemeClr val="lt1"/>
+          </a:fontRef>
+        </p:style>
+        <p:txBody>
+          <a:bodyPr rtlCol="0" anchor="ctr"/>
+          <a:lstStyle/>
+          <a:p>
+            <a:pPr algn="ctr"/>
+          </a:p>
+        </p:txBody>
+      </p:sp>
+      <p:sp>
+        <p:nvSpPr>
+          <p:cNvPr id="7" name="TextBox 6"/>
+          <p:cNvSpPr txBox="1"/>
+          <p:nvPr/>
+        </p:nvSpPr>
+        <p:spPr>
+          <a:xfrm>
+            <a:off x="914400" y="1773936"/>
+            <a:ext cx="3840480" cy="256032"/>
+          </a:xfrm>
+          <a:prstGeom prst="rect">
+            <a:avLst/>
+          </a:prstGeom>
+          <a:noFill/>
+        </p:spPr>
+        <p:txBody>
+          <a:bodyPr wrap="square" lIns="73152" rIns="73152" tIns="36576" bIns="36576">
+            <a:spAutoFit/>
+          </a:bodyPr>
+          <a:lstStyle/>
+          <a:p>
+            <a:pPr algn="l">
+              <a:spcAft>
+                <a:spcPts val="0"/>
+              </a:spcAft>
+              <a:defRPr sz="1700" b="1">
+                <a:solidFill>
+                  <a:srgbClr val="122C4E"/>
+                </a:solidFill>
+                <a:latin typeface="Noto Sans CJK KR"/>
+              </a:defRPr>
+            </a:pPr>
+            <a:r>
+              <a:t>ROS 2 Jazzy — Gazebo Simulation</a:t>
+            </a:r>
+          </a:p>
+        </p:txBody>
+      </p:sp>
+      <p:sp>
+        <p:nvSpPr>
+          <p:cNvPr id="8" name="TextBox 7"/>
+          <p:cNvSpPr txBox="1"/>
+          <p:nvPr/>
+        </p:nvSpPr>
+        <p:spPr>
+          <a:xfrm>
+            <a:off x="914400" y="2048255"/>
+            <a:ext cx="9966960" cy="475488"/>
+          </a:xfrm>
+          <a:prstGeom prst="rect">
+            <a:avLst/>
+          </a:prstGeom>
+          <a:noFill/>
+        </p:spPr>
+        <p:txBody>
+          <a:bodyPr wrap="square" lIns="73152" rIns="73152" tIns="36576" bIns="36576">
+            <a:spAutoFit/>
+          </a:bodyPr>
+          <a:lstStyle/>
+          <a:p>
+            <a:pPr algn="l">
+              <a:spcAft>
+                <a:spcPts val="0"/>
+              </a:spcAft>
+              <a:defRPr sz="1000" b="0">
+                <a:solidFill>
+                  <a:srgbClr val="225B9B"/>
+                </a:solidFill>
+                <a:latin typeface="DejaVu Sans Mono"/>
+              </a:defRPr>
+            </a:pPr>
+            <a:r>
+              <a:t>https://docs.ros.org/en/jazzy/Tutorials/Advanced/Simulators/Gazebo/Simulation-Gazebo.html</a:t>
+            </a:r>
+          </a:p>
+        </p:txBody>
+      </p:sp>
+      <p:sp>
+        <p:nvSpPr>
+          <p:cNvPr id="9" name="TextBox 8"/>
+          <p:cNvSpPr txBox="1"/>
+          <p:nvPr/>
+        </p:nvSpPr>
+        <p:spPr>
+          <a:xfrm>
+            <a:off x="914400" y="2852928"/>
+            <a:ext cx="3840480" cy="256032"/>
+          </a:xfrm>
+          <a:prstGeom prst="rect">
+            <a:avLst/>
+          </a:prstGeom>
+          <a:noFill/>
+        </p:spPr>
+        <p:txBody>
+          <a:bodyPr wrap="square" lIns="73152" rIns="73152" tIns="36576" bIns="36576">
+            <a:spAutoFit/>
+          </a:bodyPr>
+          <a:lstStyle/>
+          <a:p>
+            <a:pPr algn="l">
+              <a:spcAft>
+                <a:spcPts val="0"/>
+              </a:spcAft>
+              <a:defRPr sz="1700" b="1">
+                <a:solidFill>
+                  <a:srgbClr val="122C4E"/>
+                </a:solidFill>
+                <a:latin typeface="Noto Sans CJK KR"/>
+              </a:defRPr>
+            </a:pPr>
+            <a:r>
+              <a:t>ROS 2 Jazzy — URDF / robot_state_publisher</a:t>
+            </a:r>
+          </a:p>
+        </p:txBody>
+      </p:sp>
+      <p:sp>
+        <p:nvSpPr>
+          <p:cNvPr id="10" name="TextBox 9"/>
+          <p:cNvSpPr txBox="1"/>
+          <p:nvPr/>
+        </p:nvSpPr>
+        <p:spPr>
+          <a:xfrm>
+            <a:off x="914400" y="3127248"/>
+            <a:ext cx="9966960" cy="475488"/>
+          </a:xfrm>
+          <a:prstGeom prst="rect">
+            <a:avLst/>
+          </a:prstGeom>
+          <a:noFill/>
+        </p:spPr>
+        <p:txBody>
+          <a:bodyPr wrap="square" lIns="73152" rIns="73152" tIns="36576" bIns="36576">
+            <a:spAutoFit/>
+          </a:bodyPr>
+          <a:lstStyle/>
+          <a:p>
+            <a:pPr algn="l">
+              <a:spcAft>
+                <a:spcPts val="0"/>
+              </a:spcAft>
+              <a:defRPr sz="1000" b="0">
+                <a:solidFill>
+                  <a:srgbClr val="225B9B"/>
+                </a:solidFill>
+                <a:latin typeface="DejaVu Sans Mono"/>
+              </a:defRPr>
+            </a:pPr>
+            <a:r>
+              <a:t>https://docs.ros.org/en/jazzy/Tutorials/Intermediate/URDF/Using-URDF-with-Robot-State-Publisher-py.html</a:t>
+            </a:r>
+          </a:p>
+        </p:txBody>
+      </p:sp>
+      <p:sp>
+        <p:nvSpPr>
+          <p:cNvPr id="11" name="TextBox 10"/>
+          <p:cNvSpPr txBox="1"/>
+          <p:nvPr/>
+        </p:nvSpPr>
+        <p:spPr>
+          <a:xfrm>
+            <a:off x="914400" y="3931920"/>
+            <a:ext cx="3840480" cy="256032"/>
+          </a:xfrm>
+          <a:prstGeom prst="rect">
+            <a:avLst/>
+          </a:prstGeom>
+          <a:noFill/>
+        </p:spPr>
+        <p:txBody>
+          <a:bodyPr wrap="square" lIns="73152" rIns="73152" tIns="36576" bIns="36576">
+            <a:spAutoFit/>
+          </a:bodyPr>
+          <a:lstStyle/>
+          <a:p>
+            <a:pPr algn="l">
+              <a:spcAft>
+                <a:spcPts val="0"/>
+              </a:spcAft>
+              <a:defRPr sz="1700" b="1">
+                <a:solidFill>
+                  <a:srgbClr val="122C4E"/>
+                </a:solidFill>
+                <a:latin typeface="Noto Sans CJK KR"/>
+              </a:defRPr>
+            </a:pPr>
+            <a:r>
+              <a:t>Gazebo — ROS 2 Integration / ros_gz_bridge</a:t>
+            </a:r>
+          </a:p>
+        </p:txBody>
+      </p:sp>
+      <p:sp>
+        <p:nvSpPr>
+          <p:cNvPr id="12" name="TextBox 11"/>
+          <p:cNvSpPr txBox="1"/>
+          <p:nvPr/>
+        </p:nvSpPr>
+        <p:spPr>
+          <a:xfrm>
+            <a:off x="914400" y="4206240"/>
+            <a:ext cx="9966960" cy="475488"/>
+          </a:xfrm>
+          <a:prstGeom prst="rect">
+            <a:avLst/>
+          </a:prstGeom>
+          <a:noFill/>
+        </p:spPr>
+        <p:txBody>
+          <a:bodyPr wrap="square" lIns="73152" rIns="73152" tIns="36576" bIns="36576">
+            <a:spAutoFit/>
+          </a:bodyPr>
+          <a:lstStyle/>
+          <a:p>
+            <a:pPr algn="l">
+              <a:spcAft>
+                <a:spcPts val="0"/>
+              </a:spcAft>
+              <a:defRPr sz="1000" b="0">
+                <a:solidFill>
+                  <a:srgbClr val="225B9B"/>
+                </a:solidFill>
+                <a:latin typeface="DejaVu Sans Mono"/>
+              </a:defRPr>
+            </a:pPr>
+            <a:r>
+              <a:t>https://gazebosim.org/docs/latest/ros2_integration/</a:t>
+            </a:r>
+          </a:p>
+        </p:txBody>
+      </p:sp>
+      <p:sp>
+        <p:nvSpPr>
+          <p:cNvPr id="13" name="TextBox 12"/>
+          <p:cNvSpPr txBox="1"/>
+          <p:nvPr/>
+        </p:nvSpPr>
+        <p:spPr>
+          <a:xfrm>
+            <a:off x="914400" y="5010912"/>
+            <a:ext cx="3840480" cy="256032"/>
+          </a:xfrm>
+          <a:prstGeom prst="rect">
+            <a:avLst/>
+          </a:prstGeom>
+          <a:noFill/>
+        </p:spPr>
+        <p:txBody>
+          <a:bodyPr wrap="square" lIns="73152" rIns="73152" tIns="36576" bIns="36576">
+            <a:spAutoFit/>
+          </a:bodyPr>
+          <a:lstStyle/>
+          <a:p>
+            <a:pPr algn="l">
+              <a:spcAft>
+                <a:spcPts val="0"/>
+              </a:spcAft>
+              <a:defRPr sz="1700" b="1">
+                <a:solidFill>
+                  <a:srgbClr val="122C4E"/>
+                </a:solidFill>
+                <a:latin typeface="Noto Sans CJK KR"/>
+              </a:defRPr>
+            </a:pPr>
+            <a:r>
+              <a:t>ROS 2 Jazzy — rosbag2 Recording and Playback</a:t>
+            </a:r>
+          </a:p>
+        </p:txBody>
+      </p:sp>
+      <p:sp>
+        <p:nvSpPr>
+          <p:cNvPr id="14" name="TextBox 13"/>
+          <p:cNvSpPr txBox="1"/>
+          <p:nvPr/>
+        </p:nvSpPr>
+        <p:spPr>
+          <a:xfrm>
+            <a:off x="914400" y="5285232"/>
+            <a:ext cx="9966960" cy="475488"/>
+          </a:xfrm>
+          <a:prstGeom prst="rect">
+            <a:avLst/>
+          </a:prstGeom>
+          <a:noFill/>
+        </p:spPr>
+        <p:txBody>
+          <a:bodyPr wrap="square" lIns="73152" rIns="73152" tIns="36576" bIns="36576">
+            <a:spAutoFit/>
+          </a:bodyPr>
+          <a:lstStyle/>
+          <a:p>
+            <a:pPr algn="l">
+              <a:spcAft>
+                <a:spcPts val="0"/>
+              </a:spcAft>
+              <a:defRPr sz="1000" b="0">
+                <a:solidFill>
+                  <a:srgbClr val="225B9B"/>
+                </a:solidFill>
+                <a:latin typeface="DejaVu Sans Mono"/>
+              </a:defRPr>
+            </a:pPr>
+            <a:r>
+              <a:t>https://docs.ros.org/en/jazzy/Tutorials/Beginner-CLI-Tools/Recording-And-Playing-Back-Data/Recording-And-Playing-Back-Data.html</a:t>
+            </a:r>
+          </a:p>
+        </p:txBody>
+      </p:sp>
+    </p:spTree>
+  </p:cSld>
+  <p:clrMapOvr>
+    <a:masterClrMapping/>
+  </p:clrMapOvr>
+</p:sld>
+</file>
+
 <file path=ppt/slides/slide4.xml><?xml version="1.0" encoding="utf-8"?>
 <p:sld xmlns:a="http://schemas.openxmlformats.org/drawingml/2006/main" xmlns:p="http://schemas.openxmlformats.org/presentationml/2006/main" xmlns:r="http://schemas.openxmlformats.org/officeDocument/2006/relationships">
   <p:cSld>
@@ -16202,7 +17852,7 @@
               </a:defRPr>
             </a:pPr>
             <a:r>
-              <a:t>console_scripts를 등록한다</a:t>
+              <a:t>코드/설정이 실제로 만드는 것 (1/3)</a:t>
             </a:r>
           </a:p>
         </p:txBody>
@@ -16241,7 +17891,7 @@
               </a:defRPr>
             </a:pPr>
             <a:r>
-              <a:t>한 장에는 한 행동만 수행합니다.</a:t>
+              <a:t>파일을 입력하기 전에 ‘무엇을 만들고 어디서 볼지’를 먼저 연결합니다.</a:t>
             </a:r>
           </a:p>
         </p:txBody>
@@ -16377,109 +18027,31 @@
               </a:defRPr>
             </a:pPr>
             <a:r>
-              <a:t>현재 단계 1/2    |    현재 폴더 ~/ros2_curri/agv_ws    |    현재 터미널</a:t>
-            </a:r>
-          </a:p>
-        </p:txBody>
-      </p:sp>
-      <p:sp>
-        <p:nvSpPr>
-          <p:cNvPr id="7" name="TextBox 6"/>
-          <p:cNvSpPr txBox="1"/>
-          <p:nvPr/>
-        </p:nvSpPr>
-        <p:spPr>
-          <a:xfrm>
-            <a:off x="676656" y="1764792"/>
-            <a:ext cx="1828800" cy="347472"/>
-          </a:xfrm>
-          <a:prstGeom prst="rect">
-            <a:avLst/>
-          </a:prstGeom>
-          <a:noFill/>
-        </p:spPr>
-        <p:txBody>
-          <a:bodyPr wrap="square" lIns="73152" rIns="73152" tIns="36576" bIns="36576">
-            <a:spAutoFit/>
-          </a:bodyPr>
-          <a:lstStyle/>
-          <a:p>
-            <a:pPr algn="l">
-              <a:spcAft>
-                <a:spcPts val="0"/>
-              </a:spcAft>
-              <a:defRPr sz="1800" b="1">
-                <a:solidFill>
-                  <a:srgbClr val="225B9B"/>
-                </a:solidFill>
-                <a:latin typeface="Noto Sans CJK KR"/>
-              </a:defRPr>
-            </a:pPr>
-            <a:r>
-              <a:t>왜 하는가</a:t>
-            </a:r>
-          </a:p>
-        </p:txBody>
-      </p:sp>
-      <p:sp>
-        <p:nvSpPr>
-          <p:cNvPr id="8" name="TextBox 7"/>
-          <p:cNvSpPr txBox="1"/>
-          <p:nvPr/>
-        </p:nvSpPr>
-        <p:spPr>
-          <a:xfrm>
-            <a:off x="676656" y="2103120"/>
-            <a:ext cx="10789920" cy="512064"/>
-          </a:xfrm>
-          <a:prstGeom prst="rect">
-            <a:avLst/>
-          </a:prstGeom>
-          <a:noFill/>
-        </p:spPr>
-        <p:txBody>
-          <a:bodyPr wrap="square" lIns="73152" rIns="73152" tIns="36576" bIns="36576">
-            <a:spAutoFit/>
-          </a:bodyPr>
-          <a:lstStyle/>
-          <a:p>
-            <a:pPr algn="l">
-              <a:spcAft>
-                <a:spcPts val="0"/>
-              </a:spcAft>
-              <a:defRPr sz="2000" b="0">
-                <a:solidFill>
-                  <a:srgbClr val="122C4E"/>
-                </a:solidFill>
-                <a:latin typeface="Noto Sans CJK KR"/>
-              </a:defRPr>
-            </a:pPr>
-            <a:r>
-              <a:t>ros2 run은 setup.py에 등록된 실행 이름을 사용한다.</a:t>
-            </a:r>
-          </a:p>
-        </p:txBody>
-      </p:sp>
-      <p:sp>
-        <p:nvSpPr>
-          <p:cNvPr id="9" name="Rounded Rectangle 8"/>
+              <a:t>현재 단계 파일 역할    |    현재 폴더 ~/ros2_curri/agv_ws    |    현재 터미널</a:t>
+            </a:r>
+          </a:p>
+        </p:txBody>
+      </p:sp>
+      <p:sp>
+        <p:nvSpPr>
+          <p:cNvPr id="7" name="Rounded Rectangle 6"/>
           <p:cNvSpPr/>
           <p:nvPr/>
         </p:nvSpPr>
         <p:spPr>
           <a:xfrm>
-            <a:off x="676656" y="2871216"/>
-            <a:ext cx="10835640" cy="2331720"/>
+            <a:off x="640080" y="1627632"/>
+            <a:ext cx="10972800" cy="2048256"/>
           </a:xfrm>
           <a:prstGeom prst="roundRect">
             <a:avLst/>
           </a:prstGeom>
           <a:solidFill>
-            <a:srgbClr val="1D232D"/>
+            <a:srgbClr val="F4F7FB"/>
           </a:solidFill>
           <a:ln>
             <a:solidFill>
-              <a:srgbClr val="1D232D"/>
+              <a:srgbClr val="CCDBEB"/>
             </a:solidFill>
           </a:ln>
         </p:spPr>
@@ -16498,108 +18070,608 @@
           </a:fontRef>
         </p:style>
         <p:txBody>
-          <a:bodyPr rtlCol="0" anchor="ctr" wrap="square" lIns="73152" rIns="73152" tIns="36576" bIns="36576"/>
-          <a:lstStyle/>
-          <a:p>
-            <a:pPr algn="l">
-              <a:spcAft>
-                <a:spcPts val="0"/>
-              </a:spcAft>
-              <a:defRPr sz="1600" b="0">
-                <a:solidFill>
-                  <a:srgbClr val="FFFFFF"/>
+          <a:bodyPr rtlCol="0" anchor="ctr"/>
+          <a:lstStyle/>
+          <a:p>
+            <a:pPr algn="ctr"/>
+          </a:p>
+        </p:txBody>
+      </p:sp>
+      <p:sp>
+        <p:nvSpPr>
+          <p:cNvPr id="8" name="TextBox 7"/>
+          <p:cNvSpPr txBox="1"/>
+          <p:nvPr/>
+        </p:nvSpPr>
+        <p:spPr>
+          <a:xfrm>
+            <a:off x="850392" y="1764792"/>
+            <a:ext cx="10424160" cy="256032"/>
+          </a:xfrm>
+          <a:prstGeom prst="rect">
+            <a:avLst/>
+          </a:prstGeom>
+          <a:noFill/>
+        </p:spPr>
+        <p:txBody>
+          <a:bodyPr wrap="square" lIns="73152" rIns="73152" tIns="36576" bIns="36576">
+            <a:spAutoFit/>
+          </a:bodyPr>
+          <a:lstStyle/>
+          <a:p>
+            <a:pPr algn="l">
+              <a:spcAft>
+                <a:spcPts val="0"/>
+              </a:spcAft>
+              <a:defRPr sz="1300" b="1">
+                <a:solidFill>
+                  <a:srgbClr val="225B9B"/>
                 </a:solidFill>
                 <a:latin typeface="DejaVu Sans Mono"/>
               </a:defRPr>
             </a:pPr>
             <a:r>
-              <a:t>cd ~/ros2_curri/agv_ws</a:t>
+              <a:t>~/ros2_curri/agv_ws/src/agv_control/agv_control/counter_publisher.py</a:t>
+            </a:r>
+          </a:p>
+        </p:txBody>
+      </p:sp>
+      <p:sp>
+        <p:nvSpPr>
+          <p:cNvPr id="9" name="TextBox 8"/>
+          <p:cNvSpPr txBox="1"/>
+          <p:nvPr/>
+        </p:nvSpPr>
+        <p:spPr>
+          <a:xfrm>
+            <a:off x="868680" y="2130552"/>
+            <a:ext cx="1234440" cy="228600"/>
+          </a:xfrm>
+          <a:prstGeom prst="rect">
+            <a:avLst/>
+          </a:prstGeom>
+          <a:noFill/>
+        </p:spPr>
+        <p:txBody>
+          <a:bodyPr wrap="square" lIns="73152" rIns="73152" tIns="36576" bIns="36576">
+            <a:spAutoFit/>
+          </a:bodyPr>
+          <a:lstStyle/>
+          <a:p>
+            <a:pPr algn="l">
+              <a:spcAft>
+                <a:spcPts val="0"/>
+              </a:spcAft>
+              <a:defRPr sz="1500" b="1">
+                <a:solidFill>
+                  <a:srgbClr val="2A8B5A"/>
+                </a:solidFill>
+                <a:latin typeface="Noto Sans CJK KR"/>
+              </a:defRPr>
+            </a:pPr>
+            <a:r>
+              <a:t>만드는 것</a:t>
+            </a:r>
+          </a:p>
+        </p:txBody>
+      </p:sp>
+      <p:sp>
+        <p:nvSpPr>
+          <p:cNvPr id="10" name="TextBox 9"/>
+          <p:cNvSpPr txBox="1"/>
+          <p:nvPr/>
+        </p:nvSpPr>
+        <p:spPr>
+          <a:xfrm>
+            <a:off x="1975104" y="2112264"/>
+            <a:ext cx="9189720" cy="274320"/>
+          </a:xfrm>
+          <a:prstGeom prst="rect">
+            <a:avLst/>
+          </a:prstGeom>
+          <a:noFill/>
+        </p:spPr>
+        <p:txBody>
+          <a:bodyPr wrap="square" lIns="73152" rIns="73152" tIns="36576" bIns="36576">
+            <a:spAutoFit/>
+          </a:bodyPr>
+          <a:lstStyle/>
+          <a:p>
+            <a:pPr algn="l">
+              <a:spcAft>
+                <a:spcPts val="0"/>
+              </a:spcAft>
+              <a:defRPr sz="1500" b="0">
+                <a:solidFill>
+                  <a:srgbClr val="122C4E"/>
+                </a:solidFill>
+                <a:latin typeface="Noto Sans CJK KR"/>
+              </a:defRPr>
+            </a:pPr>
+            <a:r>
+              <a:t>ROS 2 node 또는 실행 보조 로직</a:t>
+            </a:r>
+          </a:p>
+        </p:txBody>
+      </p:sp>
+      <p:sp>
+        <p:nvSpPr>
+          <p:cNvPr id="11" name="TextBox 10"/>
+          <p:cNvSpPr txBox="1"/>
+          <p:nvPr/>
+        </p:nvSpPr>
+        <p:spPr>
+          <a:xfrm>
+            <a:off x="868680" y="2505456"/>
+            <a:ext cx="1234440" cy="228600"/>
+          </a:xfrm>
+          <a:prstGeom prst="rect">
+            <a:avLst/>
+          </a:prstGeom>
+          <a:noFill/>
+        </p:spPr>
+        <p:txBody>
+          <a:bodyPr wrap="square" lIns="73152" rIns="73152" tIns="36576" bIns="36576">
+            <a:spAutoFit/>
+          </a:bodyPr>
+          <a:lstStyle/>
+          <a:p>
+            <a:pPr algn="l">
+              <a:spcAft>
+                <a:spcPts val="0"/>
+              </a:spcAft>
+              <a:defRPr sz="1500" b="1">
+                <a:solidFill>
+                  <a:srgbClr val="DB7E22"/>
+                </a:solidFill>
+                <a:latin typeface="Noto Sans CJK KR"/>
+              </a:defRPr>
+            </a:pPr>
+            <a:r>
+              <a:t>코드 읽기</a:t>
+            </a:r>
+          </a:p>
+        </p:txBody>
+      </p:sp>
+      <p:sp>
+        <p:nvSpPr>
+          <p:cNvPr id="12" name="TextBox 11"/>
+          <p:cNvSpPr txBox="1"/>
+          <p:nvPr/>
+        </p:nvSpPr>
+        <p:spPr>
+          <a:xfrm>
+            <a:off x="1975104" y="2487168"/>
+            <a:ext cx="9189720" cy="301752"/>
+          </a:xfrm>
+          <a:prstGeom prst="rect">
+            <a:avLst/>
+          </a:prstGeom>
+          <a:noFill/>
+        </p:spPr>
+        <p:txBody>
+          <a:bodyPr wrap="square" lIns="73152" rIns="73152" tIns="36576" bIns="36576">
+            <a:spAutoFit/>
+          </a:bodyPr>
+          <a:lstStyle/>
+          <a:p>
+            <a:pPr algn="l">
+              <a:spcAft>
+                <a:spcPts val="0"/>
+              </a:spcAft>
+              <a:defRPr sz="1400" b="0">
+                <a:solidFill>
+                  <a:srgbClr val="122C4E"/>
+                </a:solidFill>
+                <a:latin typeface="Noto Sans CJK KR"/>
+              </a:defRPr>
+            </a:pPr>
+            <a:r>
+              <a:t>import → Node 생성 → publisher/subscription → callback/main 순서로 읽는다.</a:t>
+            </a:r>
+          </a:p>
+        </p:txBody>
+      </p:sp>
+      <p:sp>
+        <p:nvSpPr>
+          <p:cNvPr id="13" name="TextBox 12"/>
+          <p:cNvSpPr txBox="1"/>
+          <p:nvPr/>
+        </p:nvSpPr>
+        <p:spPr>
+          <a:xfrm>
+            <a:off x="868680" y="2889504"/>
+            <a:ext cx="1234440" cy="228600"/>
+          </a:xfrm>
+          <a:prstGeom prst="rect">
+            <a:avLst/>
+          </a:prstGeom>
+          <a:noFill/>
+        </p:spPr>
+        <p:txBody>
+          <a:bodyPr wrap="square" lIns="73152" rIns="73152" tIns="36576" bIns="36576">
+            <a:spAutoFit/>
+          </a:bodyPr>
+          <a:lstStyle/>
+          <a:p>
+            <a:pPr algn="l">
+              <a:spcAft>
+                <a:spcPts val="0"/>
+              </a:spcAft>
+              <a:defRPr sz="1500" b="1">
+                <a:solidFill>
+                  <a:srgbClr val="225B9B"/>
+                </a:solidFill>
+                <a:latin typeface="Noto Sans CJK KR"/>
+              </a:defRPr>
+            </a:pPr>
+            <a:r>
+              <a:t>사용/확인</a:t>
+            </a:r>
+          </a:p>
+        </p:txBody>
+      </p:sp>
+      <p:sp>
+        <p:nvSpPr>
+          <p:cNvPr id="14" name="TextBox 13"/>
+          <p:cNvSpPr txBox="1"/>
+          <p:nvPr/>
+        </p:nvSpPr>
+        <p:spPr>
+          <a:xfrm>
+            <a:off x="1975104" y="2871216"/>
+            <a:ext cx="9189720" cy="512064"/>
+          </a:xfrm>
+          <a:prstGeom prst="rect">
+            <a:avLst/>
+          </a:prstGeom>
+          <a:noFill/>
+        </p:spPr>
+        <p:txBody>
+          <a:bodyPr wrap="square" lIns="73152" rIns="73152" tIns="36576" bIns="36576">
+            <a:spAutoFit/>
+          </a:bodyPr>
+          <a:lstStyle/>
+          <a:p>
+            <a:pPr algn="l">
+              <a:spcAft>
+                <a:spcPts val="0"/>
+              </a:spcAft>
+              <a:defRPr sz="1300" b="0">
+                <a:solidFill>
+                  <a:srgbClr val="122C4E"/>
+                </a:solidFill>
+                <a:latin typeface="Noto Sans CJK KR"/>
+              </a:defRPr>
+            </a:pPr>
+            <a:r>
+              <a:t>사용: package를 build·source한 뒤 ros2 run 또는 launch에서 실행한다.</a:t>
             </a:r>
             <a:br/>
             <a:r>
-              <a:t>colcon build --symlink-install --packages-select agv_control</a:t>
+              <a:t>화면/출력: terminal의 node/topic/log 출력</a:t>
+            </a:r>
+          </a:p>
+        </p:txBody>
+      </p:sp>
+      <p:sp>
+        <p:nvSpPr>
+          <p:cNvPr id="15" name="Rounded Rectangle 14"/>
+          <p:cNvSpPr/>
+          <p:nvPr/>
+        </p:nvSpPr>
+        <p:spPr>
+          <a:xfrm>
+            <a:off x="640080" y="3941063"/>
+            <a:ext cx="10972800" cy="2048256"/>
+          </a:xfrm>
+          <a:prstGeom prst="roundRect">
+            <a:avLst/>
+          </a:prstGeom>
+          <a:solidFill>
+            <a:srgbClr val="F4F7FB"/>
+          </a:solidFill>
+          <a:ln>
+            <a:solidFill>
+              <a:srgbClr val="CCDBEB"/>
+            </a:solidFill>
+          </a:ln>
+        </p:spPr>
+        <p:style>
+          <a:lnRef idx="1">
+            <a:schemeClr val="accent1"/>
+          </a:lnRef>
+          <a:fillRef idx="3">
+            <a:schemeClr val="accent1"/>
+          </a:fillRef>
+          <a:effectRef idx="2">
+            <a:schemeClr val="accent1"/>
+          </a:effectRef>
+          <a:fontRef idx="minor">
+            <a:schemeClr val="lt1"/>
+          </a:fontRef>
+        </p:style>
+        <p:txBody>
+          <a:bodyPr rtlCol="0" anchor="ctr"/>
+          <a:lstStyle/>
+          <a:p>
+            <a:pPr algn="ctr"/>
+          </a:p>
+        </p:txBody>
+      </p:sp>
+      <p:sp>
+        <p:nvSpPr>
+          <p:cNvPr id="16" name="TextBox 15"/>
+          <p:cNvSpPr txBox="1"/>
+          <p:nvPr/>
+        </p:nvSpPr>
+        <p:spPr>
+          <a:xfrm>
+            <a:off x="850392" y="4078224"/>
+            <a:ext cx="10424160" cy="256032"/>
+          </a:xfrm>
+          <a:prstGeom prst="rect">
+            <a:avLst/>
+          </a:prstGeom>
+          <a:noFill/>
+        </p:spPr>
+        <p:txBody>
+          <a:bodyPr wrap="square" lIns="73152" rIns="73152" tIns="36576" bIns="36576">
+            <a:spAutoFit/>
+          </a:bodyPr>
+          <a:lstStyle/>
+          <a:p>
+            <a:pPr algn="l">
+              <a:spcAft>
+                <a:spcPts val="0"/>
+              </a:spcAft>
+              <a:defRPr sz="1300" b="1">
+                <a:solidFill>
+                  <a:srgbClr val="225B9B"/>
+                </a:solidFill>
+                <a:latin typeface="DejaVu Sans Mono"/>
+              </a:defRPr>
+            </a:pPr>
+            <a:r>
+              <a:t>~/ros2_curri/agv_ws/src/agv_control/agv_control/counter_monitor.py</a:t>
+            </a:r>
+          </a:p>
+        </p:txBody>
+      </p:sp>
+      <p:sp>
+        <p:nvSpPr>
+          <p:cNvPr id="17" name="TextBox 16"/>
+          <p:cNvSpPr txBox="1"/>
+          <p:nvPr/>
+        </p:nvSpPr>
+        <p:spPr>
+          <a:xfrm>
+            <a:off x="868680" y="4443983"/>
+            <a:ext cx="1234440" cy="228600"/>
+          </a:xfrm>
+          <a:prstGeom prst="rect">
+            <a:avLst/>
+          </a:prstGeom>
+          <a:noFill/>
+        </p:spPr>
+        <p:txBody>
+          <a:bodyPr wrap="square" lIns="73152" rIns="73152" tIns="36576" bIns="36576">
+            <a:spAutoFit/>
+          </a:bodyPr>
+          <a:lstStyle/>
+          <a:p>
+            <a:pPr algn="l">
+              <a:spcAft>
+                <a:spcPts val="0"/>
+              </a:spcAft>
+              <a:defRPr sz="1500" b="1">
+                <a:solidFill>
+                  <a:srgbClr val="2A8B5A"/>
+                </a:solidFill>
+                <a:latin typeface="Noto Sans CJK KR"/>
+              </a:defRPr>
+            </a:pPr>
+            <a:r>
+              <a:t>만드는 것</a:t>
+            </a:r>
+          </a:p>
+        </p:txBody>
+      </p:sp>
+      <p:sp>
+        <p:nvSpPr>
+          <p:cNvPr id="18" name="TextBox 17"/>
+          <p:cNvSpPr txBox="1"/>
+          <p:nvPr/>
+        </p:nvSpPr>
+        <p:spPr>
+          <a:xfrm>
+            <a:off x="1975104" y="4425696"/>
+            <a:ext cx="9189720" cy="274320"/>
+          </a:xfrm>
+          <a:prstGeom prst="rect">
+            <a:avLst/>
+          </a:prstGeom>
+          <a:noFill/>
+        </p:spPr>
+        <p:txBody>
+          <a:bodyPr wrap="square" lIns="73152" rIns="73152" tIns="36576" bIns="36576">
+            <a:spAutoFit/>
+          </a:bodyPr>
+          <a:lstStyle/>
+          <a:p>
+            <a:pPr algn="l">
+              <a:spcAft>
+                <a:spcPts val="0"/>
+              </a:spcAft>
+              <a:defRPr sz="1500" b="0">
+                <a:solidFill>
+                  <a:srgbClr val="122C4E"/>
+                </a:solidFill>
+                <a:latin typeface="Noto Sans CJK KR"/>
+              </a:defRPr>
+            </a:pPr>
+            <a:r>
+              <a:t>ROS 2 node 또는 실행 보조 로직</a:t>
+            </a:r>
+          </a:p>
+        </p:txBody>
+      </p:sp>
+      <p:sp>
+        <p:nvSpPr>
+          <p:cNvPr id="19" name="TextBox 18"/>
+          <p:cNvSpPr txBox="1"/>
+          <p:nvPr/>
+        </p:nvSpPr>
+        <p:spPr>
+          <a:xfrm>
+            <a:off x="868680" y="4818888"/>
+            <a:ext cx="1234440" cy="228600"/>
+          </a:xfrm>
+          <a:prstGeom prst="rect">
+            <a:avLst/>
+          </a:prstGeom>
+          <a:noFill/>
+        </p:spPr>
+        <p:txBody>
+          <a:bodyPr wrap="square" lIns="73152" rIns="73152" tIns="36576" bIns="36576">
+            <a:spAutoFit/>
+          </a:bodyPr>
+          <a:lstStyle/>
+          <a:p>
+            <a:pPr algn="l">
+              <a:spcAft>
+                <a:spcPts val="0"/>
+              </a:spcAft>
+              <a:defRPr sz="1500" b="1">
+                <a:solidFill>
+                  <a:srgbClr val="DB7E22"/>
+                </a:solidFill>
+                <a:latin typeface="Noto Sans CJK KR"/>
+              </a:defRPr>
+            </a:pPr>
+            <a:r>
+              <a:t>코드 읽기</a:t>
+            </a:r>
+          </a:p>
+        </p:txBody>
+      </p:sp>
+      <p:sp>
+        <p:nvSpPr>
+          <p:cNvPr id="20" name="TextBox 19"/>
+          <p:cNvSpPr txBox="1"/>
+          <p:nvPr/>
+        </p:nvSpPr>
+        <p:spPr>
+          <a:xfrm>
+            <a:off x="1975104" y="4800600"/>
+            <a:ext cx="9189720" cy="301752"/>
+          </a:xfrm>
+          <a:prstGeom prst="rect">
+            <a:avLst/>
+          </a:prstGeom>
+          <a:noFill/>
+        </p:spPr>
+        <p:txBody>
+          <a:bodyPr wrap="square" lIns="73152" rIns="73152" tIns="36576" bIns="36576">
+            <a:spAutoFit/>
+          </a:bodyPr>
+          <a:lstStyle/>
+          <a:p>
+            <a:pPr algn="l">
+              <a:spcAft>
+                <a:spcPts val="0"/>
+              </a:spcAft>
+              <a:defRPr sz="1400" b="0">
+                <a:solidFill>
+                  <a:srgbClr val="122C4E"/>
+                </a:solidFill>
+                <a:latin typeface="Noto Sans CJK KR"/>
+              </a:defRPr>
+            </a:pPr>
+            <a:r>
+              <a:t>import → Node 생성 → publisher/subscription → callback/main 순서로 읽는다.</a:t>
+            </a:r>
+          </a:p>
+        </p:txBody>
+      </p:sp>
+      <p:sp>
+        <p:nvSpPr>
+          <p:cNvPr id="21" name="TextBox 20"/>
+          <p:cNvSpPr txBox="1"/>
+          <p:nvPr/>
+        </p:nvSpPr>
+        <p:spPr>
+          <a:xfrm>
+            <a:off x="868680" y="5202936"/>
+            <a:ext cx="1234440" cy="228600"/>
+          </a:xfrm>
+          <a:prstGeom prst="rect">
+            <a:avLst/>
+          </a:prstGeom>
+          <a:noFill/>
+        </p:spPr>
+        <p:txBody>
+          <a:bodyPr wrap="square" lIns="73152" rIns="73152" tIns="36576" bIns="36576">
+            <a:spAutoFit/>
+          </a:bodyPr>
+          <a:lstStyle/>
+          <a:p>
+            <a:pPr algn="l">
+              <a:spcAft>
+                <a:spcPts val="0"/>
+              </a:spcAft>
+              <a:defRPr sz="1500" b="1">
+                <a:solidFill>
+                  <a:srgbClr val="225B9B"/>
+                </a:solidFill>
+                <a:latin typeface="Noto Sans CJK KR"/>
+              </a:defRPr>
+            </a:pPr>
+            <a:r>
+              <a:t>사용/확인</a:t>
+            </a:r>
+          </a:p>
+        </p:txBody>
+      </p:sp>
+      <p:sp>
+        <p:nvSpPr>
+          <p:cNvPr id="22" name="TextBox 21"/>
+          <p:cNvSpPr txBox="1"/>
+          <p:nvPr/>
+        </p:nvSpPr>
+        <p:spPr>
+          <a:xfrm>
+            <a:off x="1975104" y="5184648"/>
+            <a:ext cx="9189720" cy="512064"/>
+          </a:xfrm>
+          <a:prstGeom prst="rect">
+            <a:avLst/>
+          </a:prstGeom>
+          <a:noFill/>
+        </p:spPr>
+        <p:txBody>
+          <a:bodyPr wrap="square" lIns="73152" rIns="73152" tIns="36576" bIns="36576">
+            <a:spAutoFit/>
+          </a:bodyPr>
+          <a:lstStyle/>
+          <a:p>
+            <a:pPr algn="l">
+              <a:spcAft>
+                <a:spcPts val="0"/>
+              </a:spcAft>
+              <a:defRPr sz="1300" b="0">
+                <a:solidFill>
+                  <a:srgbClr val="122C4E"/>
+                </a:solidFill>
+                <a:latin typeface="Noto Sans CJK KR"/>
+              </a:defRPr>
+            </a:pPr>
+            <a:r>
+              <a:t>사용: package를 build·source한 뒤 ros2 run 또는 launch에서 실행한다.</a:t>
             </a:r>
             <a:br/>
             <a:r>
-              <a:t>source install/setup.bash</a:t>
-            </a:r>
-          </a:p>
-        </p:txBody>
-      </p:sp>
-      <p:sp>
-        <p:nvSpPr>
-          <p:cNvPr id="10" name="TextBox 9"/>
-          <p:cNvSpPr txBox="1"/>
-          <p:nvPr/>
-        </p:nvSpPr>
-        <p:spPr>
-          <a:xfrm>
-            <a:off x="768096" y="5468112"/>
-            <a:ext cx="1143000" cy="256032"/>
-          </a:xfrm>
-          <a:prstGeom prst="rect">
-            <a:avLst/>
-          </a:prstGeom>
-          <a:noFill/>
-        </p:spPr>
-        <p:txBody>
-          <a:bodyPr wrap="square" lIns="73152" rIns="73152" tIns="36576" bIns="36576">
-            <a:spAutoFit/>
-          </a:bodyPr>
-          <a:lstStyle/>
-          <a:p>
-            <a:pPr algn="l">
-              <a:spcAft>
-                <a:spcPts val="0"/>
-              </a:spcAft>
-              <a:defRPr sz="1800" b="1">
-                <a:solidFill>
-                  <a:srgbClr val="2A8B5A"/>
-                </a:solidFill>
-                <a:latin typeface="Noto Sans CJK KR"/>
-              </a:defRPr>
-            </a:pPr>
-            <a:r>
-              <a:t>확인</a:t>
-            </a:r>
-          </a:p>
-        </p:txBody>
-      </p:sp>
-      <p:sp>
-        <p:nvSpPr>
-          <p:cNvPr id="11" name="TextBox 10"/>
-          <p:cNvSpPr txBox="1"/>
-          <p:nvPr/>
-        </p:nvSpPr>
-        <p:spPr>
-          <a:xfrm>
-            <a:off x="768096" y="5742432"/>
-            <a:ext cx="10561320" cy="347472"/>
-          </a:xfrm>
-          <a:prstGeom prst="rect">
-            <a:avLst/>
-          </a:prstGeom>
-          <a:noFill/>
-        </p:spPr>
-        <p:txBody>
-          <a:bodyPr wrap="square" lIns="73152" rIns="73152" tIns="36576" bIns="36576">
-            <a:spAutoFit/>
-          </a:bodyPr>
-          <a:lstStyle/>
-          <a:p>
-            <a:pPr algn="l">
-              <a:spcAft>
-                <a:spcPts val="0"/>
-              </a:spcAft>
-              <a:defRPr sz="1800" b="0">
-                <a:solidFill>
-                  <a:srgbClr val="122C4E"/>
-                </a:solidFill>
-                <a:latin typeface="Noto Sans CJK KR"/>
-              </a:defRPr>
-            </a:pPr>
-            <a:r>
-              <a:t>명령의 출력에서 topic·frame·파일 이름 또는 성공 메시지를 찾으면 이 단계가 완료됩니다.</a:t>
+              <a:t>화면/출력: terminal의 node/topic/log 출력</a:t>
             </a:r>
           </a:p>
         </p:txBody>
@@ -16656,7 +18728,7 @@
               </a:defRPr>
             </a:pPr>
             <a:r>
-              <a:t>counter 두 노드를 실행한다</a:t>
+              <a:t>코드/설정이 실제로 만드는 것 (2/3)</a:t>
             </a:r>
           </a:p>
         </p:txBody>
@@ -16695,7 +18767,7 @@
               </a:defRPr>
             </a:pPr>
             <a:r>
-              <a:t>한 장에는 한 행동만 수행합니다.</a:t>
+              <a:t>파일을 입력하기 전에 ‘무엇을 만들고 어디서 볼지’를 먼저 연결합니다.</a:t>
             </a:r>
           </a:p>
         </p:txBody>
@@ -16831,109 +18903,31 @@
               </a:defRPr>
             </a:pPr>
             <a:r>
-              <a:t>현재 단계 2/2    |    현재 폴더 ~/ros2_curri/agv_ws    |    현재 터미널</a:t>
-            </a:r>
-          </a:p>
-        </p:txBody>
-      </p:sp>
-      <p:sp>
-        <p:nvSpPr>
-          <p:cNvPr id="7" name="TextBox 6"/>
-          <p:cNvSpPr txBox="1"/>
-          <p:nvPr/>
-        </p:nvSpPr>
-        <p:spPr>
-          <a:xfrm>
-            <a:off x="676656" y="1764792"/>
-            <a:ext cx="1828800" cy="347472"/>
-          </a:xfrm>
-          <a:prstGeom prst="rect">
-            <a:avLst/>
-          </a:prstGeom>
-          <a:noFill/>
-        </p:spPr>
-        <p:txBody>
-          <a:bodyPr wrap="square" lIns="73152" rIns="73152" tIns="36576" bIns="36576">
-            <a:spAutoFit/>
-          </a:bodyPr>
-          <a:lstStyle/>
-          <a:p>
-            <a:pPr algn="l">
-              <a:spcAft>
-                <a:spcPts val="0"/>
-              </a:spcAft>
-              <a:defRPr sz="1800" b="1">
-                <a:solidFill>
-                  <a:srgbClr val="225B9B"/>
-                </a:solidFill>
-                <a:latin typeface="Noto Sans CJK KR"/>
-              </a:defRPr>
-            </a:pPr>
-            <a:r>
-              <a:t>왜 하는가</a:t>
-            </a:r>
-          </a:p>
-        </p:txBody>
-      </p:sp>
-      <p:sp>
-        <p:nvSpPr>
-          <p:cNvPr id="8" name="TextBox 7"/>
-          <p:cNvSpPr txBox="1"/>
-          <p:nvPr/>
-        </p:nvSpPr>
-        <p:spPr>
-          <a:xfrm>
-            <a:off x="676656" y="2103120"/>
-            <a:ext cx="10789920" cy="512064"/>
-          </a:xfrm>
-          <a:prstGeom prst="rect">
-            <a:avLst/>
-          </a:prstGeom>
-          <a:noFill/>
-        </p:spPr>
-        <p:txBody>
-          <a:bodyPr wrap="square" lIns="73152" rIns="73152" tIns="36576" bIns="36576">
-            <a:spAutoFit/>
-          </a:bodyPr>
-          <a:lstStyle/>
-          <a:p>
-            <a:pPr algn="l">
-              <a:spcAft>
-                <a:spcPts val="0"/>
-              </a:spcAft>
-              <a:defRPr sz="2000" b="0">
-                <a:solidFill>
-                  <a:srgbClr val="122C4E"/>
-                </a:solidFill>
-                <a:latin typeface="Noto Sans CJK KR"/>
-              </a:defRPr>
-            </a:pPr>
-            <a:r>
-              <a:t>publisher 출력과 monitor 수신을 분리해 확인한다.</a:t>
-            </a:r>
-          </a:p>
-        </p:txBody>
-      </p:sp>
-      <p:sp>
-        <p:nvSpPr>
-          <p:cNvPr id="9" name="Rounded Rectangle 8"/>
+              <a:t>현재 단계 파일 역할    |    현재 폴더 ~/ros2_curri/agv_ws    |    현재 터미널</a:t>
+            </a:r>
+          </a:p>
+        </p:txBody>
+      </p:sp>
+      <p:sp>
+        <p:nvSpPr>
+          <p:cNvPr id="7" name="Rounded Rectangle 6"/>
           <p:cNvSpPr/>
           <p:nvPr/>
         </p:nvSpPr>
         <p:spPr>
           <a:xfrm>
-            <a:off x="676656" y="2871216"/>
-            <a:ext cx="10835640" cy="2331720"/>
+            <a:off x="640080" y="1627632"/>
+            <a:ext cx="10972800" cy="2048256"/>
           </a:xfrm>
           <a:prstGeom prst="roundRect">
             <a:avLst/>
           </a:prstGeom>
           <a:solidFill>
-            <a:srgbClr val="1D232D"/>
+            <a:srgbClr val="F4F7FB"/>
           </a:solidFill>
           <a:ln>
             <a:solidFill>
-              <a:srgbClr val="1D232D"/>
+              <a:srgbClr val="CCDBEB"/>
             </a:solidFill>
           </a:ln>
         </p:spPr>
@@ -16952,112 +18946,608 @@
           </a:fontRef>
         </p:style>
         <p:txBody>
-          <a:bodyPr rtlCol="0" anchor="ctr" wrap="square" lIns="73152" rIns="73152" tIns="36576" bIns="36576"/>
-          <a:lstStyle/>
-          <a:p>
-            <a:pPr algn="l">
-              <a:spcAft>
-                <a:spcPts val="0"/>
-              </a:spcAft>
-              <a:defRPr sz="1600" b="0">
-                <a:solidFill>
-                  <a:srgbClr val="FFFFFF"/>
+          <a:bodyPr rtlCol="0" anchor="ctr"/>
+          <a:lstStyle/>
+          <a:p>
+            <a:pPr algn="ctr"/>
+          </a:p>
+        </p:txBody>
+      </p:sp>
+      <p:sp>
+        <p:nvSpPr>
+          <p:cNvPr id="8" name="TextBox 7"/>
+          <p:cNvSpPr txBox="1"/>
+          <p:nvPr/>
+        </p:nvSpPr>
+        <p:spPr>
+          <a:xfrm>
+            <a:off x="850392" y="1764792"/>
+            <a:ext cx="10424160" cy="256032"/>
+          </a:xfrm>
+          <a:prstGeom prst="rect">
+            <a:avLst/>
+          </a:prstGeom>
+          <a:noFill/>
+        </p:spPr>
+        <p:txBody>
+          <a:bodyPr wrap="square" lIns="73152" rIns="73152" tIns="36576" bIns="36576">
+            <a:spAutoFit/>
+          </a:bodyPr>
+          <a:lstStyle/>
+          <a:p>
+            <a:pPr algn="l">
+              <a:spcAft>
+                <a:spcPts val="0"/>
+              </a:spcAft>
+              <a:defRPr sz="1300" b="1">
+                <a:solidFill>
+                  <a:srgbClr val="225B9B"/>
                 </a:solidFill>
                 <a:latin typeface="DejaVu Sans Mono"/>
               </a:defRPr>
             </a:pPr>
             <a:r>
-              <a:t># 터미널 1</a:t>
+              <a:t>~/ros2_curri/agv_ws/src/agv_control/agv_control/cmd_test_node.py</a:t>
+            </a:r>
+          </a:p>
+        </p:txBody>
+      </p:sp>
+      <p:sp>
+        <p:nvSpPr>
+          <p:cNvPr id="9" name="TextBox 8"/>
+          <p:cNvSpPr txBox="1"/>
+          <p:nvPr/>
+        </p:nvSpPr>
+        <p:spPr>
+          <a:xfrm>
+            <a:off x="868680" y="2130552"/>
+            <a:ext cx="1234440" cy="228600"/>
+          </a:xfrm>
+          <a:prstGeom prst="rect">
+            <a:avLst/>
+          </a:prstGeom>
+          <a:noFill/>
+        </p:spPr>
+        <p:txBody>
+          <a:bodyPr wrap="square" lIns="73152" rIns="73152" tIns="36576" bIns="36576">
+            <a:spAutoFit/>
+          </a:bodyPr>
+          <a:lstStyle/>
+          <a:p>
+            <a:pPr algn="l">
+              <a:spcAft>
+                <a:spcPts val="0"/>
+              </a:spcAft>
+              <a:defRPr sz="1500" b="1">
+                <a:solidFill>
+                  <a:srgbClr val="2A8B5A"/>
+                </a:solidFill>
+                <a:latin typeface="Noto Sans CJK KR"/>
+              </a:defRPr>
+            </a:pPr>
+            <a:r>
+              <a:t>만드는 것</a:t>
+            </a:r>
+          </a:p>
+        </p:txBody>
+      </p:sp>
+      <p:sp>
+        <p:nvSpPr>
+          <p:cNvPr id="10" name="TextBox 9"/>
+          <p:cNvSpPr txBox="1"/>
+          <p:nvPr/>
+        </p:nvSpPr>
+        <p:spPr>
+          <a:xfrm>
+            <a:off x="1975104" y="2112264"/>
+            <a:ext cx="9189720" cy="274320"/>
+          </a:xfrm>
+          <a:prstGeom prst="rect">
+            <a:avLst/>
+          </a:prstGeom>
+          <a:noFill/>
+        </p:spPr>
+        <p:txBody>
+          <a:bodyPr wrap="square" lIns="73152" rIns="73152" tIns="36576" bIns="36576">
+            <a:spAutoFit/>
+          </a:bodyPr>
+          <a:lstStyle/>
+          <a:p>
+            <a:pPr algn="l">
+              <a:spcAft>
+                <a:spcPts val="0"/>
+              </a:spcAft>
+              <a:defRPr sz="1500" b="0">
+                <a:solidFill>
+                  <a:srgbClr val="122C4E"/>
+                </a:solidFill>
+                <a:latin typeface="Noto Sans CJK KR"/>
+              </a:defRPr>
+            </a:pPr>
+            <a:r>
+              <a:t>ROS 2 node 또는 실행 보조 로직</a:t>
+            </a:r>
+          </a:p>
+        </p:txBody>
+      </p:sp>
+      <p:sp>
+        <p:nvSpPr>
+          <p:cNvPr id="11" name="TextBox 10"/>
+          <p:cNvSpPr txBox="1"/>
+          <p:nvPr/>
+        </p:nvSpPr>
+        <p:spPr>
+          <a:xfrm>
+            <a:off x="868680" y="2505456"/>
+            <a:ext cx="1234440" cy="228600"/>
+          </a:xfrm>
+          <a:prstGeom prst="rect">
+            <a:avLst/>
+          </a:prstGeom>
+          <a:noFill/>
+        </p:spPr>
+        <p:txBody>
+          <a:bodyPr wrap="square" lIns="73152" rIns="73152" tIns="36576" bIns="36576">
+            <a:spAutoFit/>
+          </a:bodyPr>
+          <a:lstStyle/>
+          <a:p>
+            <a:pPr algn="l">
+              <a:spcAft>
+                <a:spcPts val="0"/>
+              </a:spcAft>
+              <a:defRPr sz="1500" b="1">
+                <a:solidFill>
+                  <a:srgbClr val="DB7E22"/>
+                </a:solidFill>
+                <a:latin typeface="Noto Sans CJK KR"/>
+              </a:defRPr>
+            </a:pPr>
+            <a:r>
+              <a:t>코드 읽기</a:t>
+            </a:r>
+          </a:p>
+        </p:txBody>
+      </p:sp>
+      <p:sp>
+        <p:nvSpPr>
+          <p:cNvPr id="12" name="TextBox 11"/>
+          <p:cNvSpPr txBox="1"/>
+          <p:nvPr/>
+        </p:nvSpPr>
+        <p:spPr>
+          <a:xfrm>
+            <a:off x="1975104" y="2487168"/>
+            <a:ext cx="9189720" cy="301752"/>
+          </a:xfrm>
+          <a:prstGeom prst="rect">
+            <a:avLst/>
+          </a:prstGeom>
+          <a:noFill/>
+        </p:spPr>
+        <p:txBody>
+          <a:bodyPr wrap="square" lIns="73152" rIns="73152" tIns="36576" bIns="36576">
+            <a:spAutoFit/>
+          </a:bodyPr>
+          <a:lstStyle/>
+          <a:p>
+            <a:pPr algn="l">
+              <a:spcAft>
+                <a:spcPts val="0"/>
+              </a:spcAft>
+              <a:defRPr sz="1400" b="0">
+                <a:solidFill>
+                  <a:srgbClr val="122C4E"/>
+                </a:solidFill>
+                <a:latin typeface="Noto Sans CJK KR"/>
+              </a:defRPr>
+            </a:pPr>
+            <a:r>
+              <a:t>import → Node 생성 → publisher/subscription → callback/main 순서로 읽는다.</a:t>
+            </a:r>
+          </a:p>
+        </p:txBody>
+      </p:sp>
+      <p:sp>
+        <p:nvSpPr>
+          <p:cNvPr id="13" name="TextBox 12"/>
+          <p:cNvSpPr txBox="1"/>
+          <p:nvPr/>
+        </p:nvSpPr>
+        <p:spPr>
+          <a:xfrm>
+            <a:off x="868680" y="2889504"/>
+            <a:ext cx="1234440" cy="228600"/>
+          </a:xfrm>
+          <a:prstGeom prst="rect">
+            <a:avLst/>
+          </a:prstGeom>
+          <a:noFill/>
+        </p:spPr>
+        <p:txBody>
+          <a:bodyPr wrap="square" lIns="73152" rIns="73152" tIns="36576" bIns="36576">
+            <a:spAutoFit/>
+          </a:bodyPr>
+          <a:lstStyle/>
+          <a:p>
+            <a:pPr algn="l">
+              <a:spcAft>
+                <a:spcPts val="0"/>
+              </a:spcAft>
+              <a:defRPr sz="1500" b="1">
+                <a:solidFill>
+                  <a:srgbClr val="225B9B"/>
+                </a:solidFill>
+                <a:latin typeface="Noto Sans CJK KR"/>
+              </a:defRPr>
+            </a:pPr>
+            <a:r>
+              <a:t>사용/확인</a:t>
+            </a:r>
+          </a:p>
+        </p:txBody>
+      </p:sp>
+      <p:sp>
+        <p:nvSpPr>
+          <p:cNvPr id="14" name="TextBox 13"/>
+          <p:cNvSpPr txBox="1"/>
+          <p:nvPr/>
+        </p:nvSpPr>
+        <p:spPr>
+          <a:xfrm>
+            <a:off x="1975104" y="2871216"/>
+            <a:ext cx="9189720" cy="512064"/>
+          </a:xfrm>
+          <a:prstGeom prst="rect">
+            <a:avLst/>
+          </a:prstGeom>
+          <a:noFill/>
+        </p:spPr>
+        <p:txBody>
+          <a:bodyPr wrap="square" lIns="73152" rIns="73152" tIns="36576" bIns="36576">
+            <a:spAutoFit/>
+          </a:bodyPr>
+          <a:lstStyle/>
+          <a:p>
+            <a:pPr algn="l">
+              <a:spcAft>
+                <a:spcPts val="0"/>
+              </a:spcAft>
+              <a:defRPr sz="1300" b="0">
+                <a:solidFill>
+                  <a:srgbClr val="122C4E"/>
+                </a:solidFill>
+                <a:latin typeface="Noto Sans CJK KR"/>
+              </a:defRPr>
+            </a:pPr>
+            <a:r>
+              <a:t>사용: package를 build·source한 뒤 ros2 run 또는 launch에서 실행한다.</a:t>
             </a:r>
             <a:br/>
             <a:r>
-              <a:t>ros2 run agv_control counter_publisher</a:t>
+              <a:t>화면/출력: terminal의 node/topic/log 출력</a:t>
+            </a:r>
+          </a:p>
+        </p:txBody>
+      </p:sp>
+      <p:sp>
+        <p:nvSpPr>
+          <p:cNvPr id="15" name="Rounded Rectangle 14"/>
+          <p:cNvSpPr/>
+          <p:nvPr/>
+        </p:nvSpPr>
+        <p:spPr>
+          <a:xfrm>
+            <a:off x="640080" y="3941063"/>
+            <a:ext cx="10972800" cy="2048256"/>
+          </a:xfrm>
+          <a:prstGeom prst="roundRect">
+            <a:avLst/>
+          </a:prstGeom>
+          <a:solidFill>
+            <a:srgbClr val="F4F7FB"/>
+          </a:solidFill>
+          <a:ln>
+            <a:solidFill>
+              <a:srgbClr val="CCDBEB"/>
+            </a:solidFill>
+          </a:ln>
+        </p:spPr>
+        <p:style>
+          <a:lnRef idx="1">
+            <a:schemeClr val="accent1"/>
+          </a:lnRef>
+          <a:fillRef idx="3">
+            <a:schemeClr val="accent1"/>
+          </a:fillRef>
+          <a:effectRef idx="2">
+            <a:schemeClr val="accent1"/>
+          </a:effectRef>
+          <a:fontRef idx="minor">
+            <a:schemeClr val="lt1"/>
+          </a:fontRef>
+        </p:style>
+        <p:txBody>
+          <a:bodyPr rtlCol="0" anchor="ctr"/>
+          <a:lstStyle/>
+          <a:p>
+            <a:pPr algn="ctr"/>
+          </a:p>
+        </p:txBody>
+      </p:sp>
+      <p:sp>
+        <p:nvSpPr>
+          <p:cNvPr id="16" name="TextBox 15"/>
+          <p:cNvSpPr txBox="1"/>
+          <p:nvPr/>
+        </p:nvSpPr>
+        <p:spPr>
+          <a:xfrm>
+            <a:off x="850392" y="4078224"/>
+            <a:ext cx="10424160" cy="256032"/>
+          </a:xfrm>
+          <a:prstGeom prst="rect">
+            <a:avLst/>
+          </a:prstGeom>
+          <a:noFill/>
+        </p:spPr>
+        <p:txBody>
+          <a:bodyPr wrap="square" lIns="73152" rIns="73152" tIns="36576" bIns="36576">
+            <a:spAutoFit/>
+          </a:bodyPr>
+          <a:lstStyle/>
+          <a:p>
+            <a:pPr algn="l">
+              <a:spcAft>
+                <a:spcPts val="0"/>
+              </a:spcAft>
+              <a:defRPr sz="1300" b="1">
+                <a:solidFill>
+                  <a:srgbClr val="225B9B"/>
+                </a:solidFill>
+                <a:latin typeface="DejaVu Sans Mono"/>
+              </a:defRPr>
+            </a:pPr>
+            <a:r>
+              <a:t>~/ros2_curri/agv_ws/src/agv_control/agv_control/velocity_monitor.py</a:t>
+            </a:r>
+          </a:p>
+        </p:txBody>
+      </p:sp>
+      <p:sp>
+        <p:nvSpPr>
+          <p:cNvPr id="17" name="TextBox 16"/>
+          <p:cNvSpPr txBox="1"/>
+          <p:nvPr/>
+        </p:nvSpPr>
+        <p:spPr>
+          <a:xfrm>
+            <a:off x="868680" y="4443983"/>
+            <a:ext cx="1234440" cy="228600"/>
+          </a:xfrm>
+          <a:prstGeom prst="rect">
+            <a:avLst/>
+          </a:prstGeom>
+          <a:noFill/>
+        </p:spPr>
+        <p:txBody>
+          <a:bodyPr wrap="square" lIns="73152" rIns="73152" tIns="36576" bIns="36576">
+            <a:spAutoFit/>
+          </a:bodyPr>
+          <a:lstStyle/>
+          <a:p>
+            <a:pPr algn="l">
+              <a:spcAft>
+                <a:spcPts val="0"/>
+              </a:spcAft>
+              <a:defRPr sz="1500" b="1">
+                <a:solidFill>
+                  <a:srgbClr val="2A8B5A"/>
+                </a:solidFill>
+                <a:latin typeface="Noto Sans CJK KR"/>
+              </a:defRPr>
+            </a:pPr>
+            <a:r>
+              <a:t>만드는 것</a:t>
+            </a:r>
+          </a:p>
+        </p:txBody>
+      </p:sp>
+      <p:sp>
+        <p:nvSpPr>
+          <p:cNvPr id="18" name="TextBox 17"/>
+          <p:cNvSpPr txBox="1"/>
+          <p:nvPr/>
+        </p:nvSpPr>
+        <p:spPr>
+          <a:xfrm>
+            <a:off x="1975104" y="4425696"/>
+            <a:ext cx="9189720" cy="274320"/>
+          </a:xfrm>
+          <a:prstGeom prst="rect">
+            <a:avLst/>
+          </a:prstGeom>
+          <a:noFill/>
+        </p:spPr>
+        <p:txBody>
+          <a:bodyPr wrap="square" lIns="73152" rIns="73152" tIns="36576" bIns="36576">
+            <a:spAutoFit/>
+          </a:bodyPr>
+          <a:lstStyle/>
+          <a:p>
+            <a:pPr algn="l">
+              <a:spcAft>
+                <a:spcPts val="0"/>
+              </a:spcAft>
+              <a:defRPr sz="1500" b="0">
+                <a:solidFill>
+                  <a:srgbClr val="122C4E"/>
+                </a:solidFill>
+                <a:latin typeface="Noto Sans CJK KR"/>
+              </a:defRPr>
+            </a:pPr>
+            <a:r>
+              <a:t>ROS 2 node 또는 실행 보조 로직</a:t>
+            </a:r>
+          </a:p>
+        </p:txBody>
+      </p:sp>
+      <p:sp>
+        <p:nvSpPr>
+          <p:cNvPr id="19" name="TextBox 18"/>
+          <p:cNvSpPr txBox="1"/>
+          <p:nvPr/>
+        </p:nvSpPr>
+        <p:spPr>
+          <a:xfrm>
+            <a:off x="868680" y="4818888"/>
+            <a:ext cx="1234440" cy="228600"/>
+          </a:xfrm>
+          <a:prstGeom prst="rect">
+            <a:avLst/>
+          </a:prstGeom>
+          <a:noFill/>
+        </p:spPr>
+        <p:txBody>
+          <a:bodyPr wrap="square" lIns="73152" rIns="73152" tIns="36576" bIns="36576">
+            <a:spAutoFit/>
+          </a:bodyPr>
+          <a:lstStyle/>
+          <a:p>
+            <a:pPr algn="l">
+              <a:spcAft>
+                <a:spcPts val="0"/>
+              </a:spcAft>
+              <a:defRPr sz="1500" b="1">
+                <a:solidFill>
+                  <a:srgbClr val="DB7E22"/>
+                </a:solidFill>
+                <a:latin typeface="Noto Sans CJK KR"/>
+              </a:defRPr>
+            </a:pPr>
+            <a:r>
+              <a:t>코드 읽기</a:t>
+            </a:r>
+          </a:p>
+        </p:txBody>
+      </p:sp>
+      <p:sp>
+        <p:nvSpPr>
+          <p:cNvPr id="20" name="TextBox 19"/>
+          <p:cNvSpPr txBox="1"/>
+          <p:nvPr/>
+        </p:nvSpPr>
+        <p:spPr>
+          <a:xfrm>
+            <a:off x="1975104" y="4800600"/>
+            <a:ext cx="9189720" cy="301752"/>
+          </a:xfrm>
+          <a:prstGeom prst="rect">
+            <a:avLst/>
+          </a:prstGeom>
+          <a:noFill/>
+        </p:spPr>
+        <p:txBody>
+          <a:bodyPr wrap="square" lIns="73152" rIns="73152" tIns="36576" bIns="36576">
+            <a:spAutoFit/>
+          </a:bodyPr>
+          <a:lstStyle/>
+          <a:p>
+            <a:pPr algn="l">
+              <a:spcAft>
+                <a:spcPts val="0"/>
+              </a:spcAft>
+              <a:defRPr sz="1400" b="0">
+                <a:solidFill>
+                  <a:srgbClr val="122C4E"/>
+                </a:solidFill>
+                <a:latin typeface="Noto Sans CJK KR"/>
+              </a:defRPr>
+            </a:pPr>
+            <a:r>
+              <a:t>import → Node 생성 → publisher/subscription → callback/main 순서로 읽는다.</a:t>
+            </a:r>
+          </a:p>
+        </p:txBody>
+      </p:sp>
+      <p:sp>
+        <p:nvSpPr>
+          <p:cNvPr id="21" name="TextBox 20"/>
+          <p:cNvSpPr txBox="1"/>
+          <p:nvPr/>
+        </p:nvSpPr>
+        <p:spPr>
+          <a:xfrm>
+            <a:off x="868680" y="5202936"/>
+            <a:ext cx="1234440" cy="228600"/>
+          </a:xfrm>
+          <a:prstGeom prst="rect">
+            <a:avLst/>
+          </a:prstGeom>
+          <a:noFill/>
+        </p:spPr>
+        <p:txBody>
+          <a:bodyPr wrap="square" lIns="73152" rIns="73152" tIns="36576" bIns="36576">
+            <a:spAutoFit/>
+          </a:bodyPr>
+          <a:lstStyle/>
+          <a:p>
+            <a:pPr algn="l">
+              <a:spcAft>
+                <a:spcPts val="0"/>
+              </a:spcAft>
+              <a:defRPr sz="1500" b="1">
+                <a:solidFill>
+                  <a:srgbClr val="225B9B"/>
+                </a:solidFill>
+                <a:latin typeface="Noto Sans CJK KR"/>
+              </a:defRPr>
+            </a:pPr>
+            <a:r>
+              <a:t>사용/확인</a:t>
+            </a:r>
+          </a:p>
+        </p:txBody>
+      </p:sp>
+      <p:sp>
+        <p:nvSpPr>
+          <p:cNvPr id="22" name="TextBox 21"/>
+          <p:cNvSpPr txBox="1"/>
+          <p:nvPr/>
+        </p:nvSpPr>
+        <p:spPr>
+          <a:xfrm>
+            <a:off x="1975104" y="5184648"/>
+            <a:ext cx="9189720" cy="512064"/>
+          </a:xfrm>
+          <a:prstGeom prst="rect">
+            <a:avLst/>
+          </a:prstGeom>
+          <a:noFill/>
+        </p:spPr>
+        <p:txBody>
+          <a:bodyPr wrap="square" lIns="73152" rIns="73152" tIns="36576" bIns="36576">
+            <a:spAutoFit/>
+          </a:bodyPr>
+          <a:lstStyle/>
+          <a:p>
+            <a:pPr algn="l">
+              <a:spcAft>
+                <a:spcPts val="0"/>
+              </a:spcAft>
+              <a:defRPr sz="1300" b="0">
+                <a:solidFill>
+                  <a:srgbClr val="122C4E"/>
+                </a:solidFill>
+                <a:latin typeface="Noto Sans CJK KR"/>
+              </a:defRPr>
+            </a:pPr>
+            <a:r>
+              <a:t>사용: package를 build·source한 뒤 ros2 run 또는 launch에서 실행한다.</a:t>
             </a:r>
             <a:br/>
             <a:r>
-              <a:t># 터미널 2</a:t>
-            </a:r>
-            <a:br/>
-            <a:r>
-              <a:t>ros2 run agv_control counter_monitor</a:t>
-            </a:r>
-          </a:p>
-        </p:txBody>
-      </p:sp>
-      <p:sp>
-        <p:nvSpPr>
-          <p:cNvPr id="10" name="TextBox 9"/>
-          <p:cNvSpPr txBox="1"/>
-          <p:nvPr/>
-        </p:nvSpPr>
-        <p:spPr>
-          <a:xfrm>
-            <a:off x="768096" y="5468112"/>
-            <a:ext cx="1143000" cy="256032"/>
-          </a:xfrm>
-          <a:prstGeom prst="rect">
-            <a:avLst/>
-          </a:prstGeom>
-          <a:noFill/>
-        </p:spPr>
-        <p:txBody>
-          <a:bodyPr wrap="square" lIns="73152" rIns="73152" tIns="36576" bIns="36576">
-            <a:spAutoFit/>
-          </a:bodyPr>
-          <a:lstStyle/>
-          <a:p>
-            <a:pPr algn="l">
-              <a:spcAft>
-                <a:spcPts val="0"/>
-              </a:spcAft>
-              <a:defRPr sz="1800" b="1">
-                <a:solidFill>
-                  <a:srgbClr val="2A8B5A"/>
-                </a:solidFill>
-                <a:latin typeface="Noto Sans CJK KR"/>
-              </a:defRPr>
-            </a:pPr>
-            <a:r>
-              <a:t>확인</a:t>
-            </a:r>
-          </a:p>
-        </p:txBody>
-      </p:sp>
-      <p:sp>
-        <p:nvSpPr>
-          <p:cNvPr id="11" name="TextBox 10"/>
-          <p:cNvSpPr txBox="1"/>
-          <p:nvPr/>
-        </p:nvSpPr>
-        <p:spPr>
-          <a:xfrm>
-            <a:off x="768096" y="5742432"/>
-            <a:ext cx="10561320" cy="347472"/>
-          </a:xfrm>
-          <a:prstGeom prst="rect">
-            <a:avLst/>
-          </a:prstGeom>
-          <a:noFill/>
-        </p:spPr>
-        <p:txBody>
-          <a:bodyPr wrap="square" lIns="73152" rIns="73152" tIns="36576" bIns="36576">
-            <a:spAutoFit/>
-          </a:bodyPr>
-          <a:lstStyle/>
-          <a:p>
-            <a:pPr algn="l">
-              <a:spcAft>
-                <a:spcPts val="0"/>
-              </a:spcAft>
-              <a:defRPr sz="1800" b="0">
-                <a:solidFill>
-                  <a:srgbClr val="122C4E"/>
-                </a:solidFill>
-                <a:latin typeface="Noto Sans CJK KR"/>
-              </a:defRPr>
-            </a:pPr>
-            <a:r>
-              <a:t>명령의 출력에서 topic·frame·파일 이름 또는 성공 메시지를 찾으면 이 단계가 완료됩니다.</a:t>
+              <a:t>화면/출력: terminal의 node/topic/log 출력</a:t>
             </a:r>
           </a:p>
         </p:txBody>
@@ -17114,7 +19604,7 @@
               </a:defRPr>
             </a:pPr>
             <a:r>
-              <a:t>파일을 새로 만들고 저장한다 (1/3)</a:t>
+              <a:t>코드/설정이 실제로 만드는 것 (3/3)</a:t>
             </a:r>
           </a:p>
         </p:txBody>
@@ -17153,7 +19643,7 @@
               </a:defRPr>
             </a:pPr>
             <a:r>
-              <a:t>~/ros2_curri/agv_ws/src/agv_control/agv_control/counter_publisher.py</a:t>
+              <a:t>파일을 입력하기 전에 ‘무엇을 만들고 어디서 볼지’를 먼저 연결합니다.</a:t>
             </a:r>
           </a:p>
         </p:txBody>
@@ -17289,62 +19779,23 @@
               </a:defRPr>
             </a:pPr>
             <a:r>
-              <a:t>현재 단계 3/6    |    현재 폴더 ~/ros2_curri/agv_ws    |    현재 터미널</a:t>
-            </a:r>
-          </a:p>
-        </p:txBody>
-      </p:sp>
-      <p:sp>
-        <p:nvSpPr>
-          <p:cNvPr id="7" name="TextBox 6"/>
-          <p:cNvSpPr txBox="1"/>
-          <p:nvPr/>
-        </p:nvSpPr>
-        <p:spPr>
-          <a:xfrm>
-            <a:off x="658368" y="1627632"/>
-            <a:ext cx="10972800" cy="256032"/>
-          </a:xfrm>
-          <a:prstGeom prst="rect">
-            <a:avLst/>
-          </a:prstGeom>
-          <a:noFill/>
-        </p:spPr>
-        <p:txBody>
-          <a:bodyPr wrap="square" lIns="73152" rIns="73152" tIns="36576" bIns="36576">
-            <a:spAutoFit/>
-          </a:bodyPr>
-          <a:lstStyle/>
-          <a:p>
-            <a:pPr algn="l">
-              <a:spcAft>
-                <a:spcPts val="0"/>
-              </a:spcAft>
-              <a:defRPr sz="1500" b="1">
-                <a:solidFill>
-                  <a:srgbClr val="122C4E"/>
-                </a:solidFill>
-                <a:latin typeface="Noto Sans CJK KR"/>
-              </a:defRPr>
-            </a:pPr>
-            <a:r>
-              <a:t>이번 단계: 파일의 전체 내용을 중간 생략 없이 작성합니다. 아래 줄 범위를 끝까지 입력하세요.</a:t>
-            </a:r>
-          </a:p>
-        </p:txBody>
-      </p:sp>
-      <p:sp>
-        <p:nvSpPr>
-          <p:cNvPr id="8" name="Rectangle 7"/>
+              <a:t>현재 단계 파일 역할    |    현재 폴더 ~/ros2_curri/agv_ws    |    현재 터미널</a:t>
+            </a:r>
+          </a:p>
+        </p:txBody>
+      </p:sp>
+      <p:sp>
+        <p:nvSpPr>
+          <p:cNvPr id="7" name="Rounded Rectangle 6"/>
           <p:cNvSpPr/>
           <p:nvPr/>
         </p:nvSpPr>
         <p:spPr>
           <a:xfrm>
-            <a:off x="658368" y="1956816"/>
-            <a:ext cx="10972800" cy="603504"/>
-          </a:xfrm>
-          <a:prstGeom prst="rect">
+            <a:off x="640080" y="1627632"/>
+            <a:ext cx="10972800" cy="2048256"/>
+          </a:xfrm>
+          <a:prstGeom prst="roundRect">
             <a:avLst/>
           </a:prstGeom>
           <a:solidFill>
@@ -17352,7 +19803,7 @@
           </a:solidFill>
           <a:ln>
             <a:solidFill>
-              <a:srgbClr val="F4F7FB"/>
+              <a:srgbClr val="CCDBEB"/>
             </a:solidFill>
           </a:ln>
         </p:spPr>
@@ -17371,7 +19822,189 @@
           </a:fontRef>
         </p:style>
         <p:txBody>
-          <a:bodyPr rtlCol="0" anchor="ctr" wrap="square" lIns="73152" rIns="73152" tIns="36576" bIns="36576"/>
+          <a:bodyPr rtlCol="0" anchor="ctr"/>
+          <a:lstStyle/>
+          <a:p>
+            <a:pPr algn="ctr"/>
+          </a:p>
+        </p:txBody>
+      </p:sp>
+      <p:sp>
+        <p:nvSpPr>
+          <p:cNvPr id="8" name="TextBox 7"/>
+          <p:cNvSpPr txBox="1"/>
+          <p:nvPr/>
+        </p:nvSpPr>
+        <p:spPr>
+          <a:xfrm>
+            <a:off x="850392" y="1764792"/>
+            <a:ext cx="10424160" cy="256032"/>
+          </a:xfrm>
+          <a:prstGeom prst="rect">
+            <a:avLst/>
+          </a:prstGeom>
+          <a:noFill/>
+        </p:spPr>
+        <p:txBody>
+          <a:bodyPr wrap="square" lIns="73152" rIns="73152" tIns="36576" bIns="36576">
+            <a:spAutoFit/>
+          </a:bodyPr>
+          <a:lstStyle/>
+          <a:p>
+            <a:pPr algn="l">
+              <a:spcAft>
+                <a:spcPts val="0"/>
+              </a:spcAft>
+              <a:defRPr sz="1300" b="1">
+                <a:solidFill>
+                  <a:srgbClr val="225B9B"/>
+                </a:solidFill>
+                <a:latin typeface="DejaVu Sans Mono"/>
+              </a:defRPr>
+            </a:pPr>
+            <a:r>
+              <a:t>~/ros2_curri/agv_ws/src/agv_control/setup.py</a:t>
+            </a:r>
+          </a:p>
+        </p:txBody>
+      </p:sp>
+      <p:sp>
+        <p:nvSpPr>
+          <p:cNvPr id="9" name="TextBox 8"/>
+          <p:cNvSpPr txBox="1"/>
+          <p:nvPr/>
+        </p:nvSpPr>
+        <p:spPr>
+          <a:xfrm>
+            <a:off x="868680" y="2130552"/>
+            <a:ext cx="1234440" cy="228600"/>
+          </a:xfrm>
+          <a:prstGeom prst="rect">
+            <a:avLst/>
+          </a:prstGeom>
+          <a:noFill/>
+        </p:spPr>
+        <p:txBody>
+          <a:bodyPr wrap="square" lIns="73152" rIns="73152" tIns="36576" bIns="36576">
+            <a:spAutoFit/>
+          </a:bodyPr>
+          <a:lstStyle/>
+          <a:p>
+            <a:pPr algn="l">
+              <a:spcAft>
+                <a:spcPts val="0"/>
+              </a:spcAft>
+              <a:defRPr sz="1500" b="1">
+                <a:solidFill>
+                  <a:srgbClr val="2A8B5A"/>
+                </a:solidFill>
+                <a:latin typeface="Noto Sans CJK KR"/>
+              </a:defRPr>
+            </a:pPr>
+            <a:r>
+              <a:t>만드는 것</a:t>
+            </a:r>
+          </a:p>
+        </p:txBody>
+      </p:sp>
+      <p:sp>
+        <p:nvSpPr>
+          <p:cNvPr id="10" name="TextBox 9"/>
+          <p:cNvSpPr txBox="1"/>
+          <p:nvPr/>
+        </p:nvSpPr>
+        <p:spPr>
+          <a:xfrm>
+            <a:off x="1975104" y="2112264"/>
+            <a:ext cx="9189720" cy="274320"/>
+          </a:xfrm>
+          <a:prstGeom prst="rect">
+            <a:avLst/>
+          </a:prstGeom>
+          <a:noFill/>
+        </p:spPr>
+        <p:txBody>
+          <a:bodyPr wrap="square" lIns="73152" rIns="73152" tIns="36576" bIns="36576">
+            <a:spAutoFit/>
+          </a:bodyPr>
+          <a:lstStyle/>
+          <a:p>
+            <a:pPr algn="l">
+              <a:spcAft>
+                <a:spcPts val="0"/>
+              </a:spcAft>
+              <a:defRPr sz="1500" b="0">
+                <a:solidFill>
+                  <a:srgbClr val="122C4E"/>
+                </a:solidFill>
+                <a:latin typeface="Noto Sans CJK KR"/>
+              </a:defRPr>
+            </a:pPr>
+            <a:r>
+              <a:t>ROS 2 node 또는 실행 보조 로직</a:t>
+            </a:r>
+          </a:p>
+        </p:txBody>
+      </p:sp>
+      <p:sp>
+        <p:nvSpPr>
+          <p:cNvPr id="11" name="TextBox 10"/>
+          <p:cNvSpPr txBox="1"/>
+          <p:nvPr/>
+        </p:nvSpPr>
+        <p:spPr>
+          <a:xfrm>
+            <a:off x="868680" y="2505456"/>
+            <a:ext cx="1234440" cy="228600"/>
+          </a:xfrm>
+          <a:prstGeom prst="rect">
+            <a:avLst/>
+          </a:prstGeom>
+          <a:noFill/>
+        </p:spPr>
+        <p:txBody>
+          <a:bodyPr wrap="square" lIns="73152" rIns="73152" tIns="36576" bIns="36576">
+            <a:spAutoFit/>
+          </a:bodyPr>
+          <a:lstStyle/>
+          <a:p>
+            <a:pPr algn="l">
+              <a:spcAft>
+                <a:spcPts val="0"/>
+              </a:spcAft>
+              <a:defRPr sz="1500" b="1">
+                <a:solidFill>
+                  <a:srgbClr val="DB7E22"/>
+                </a:solidFill>
+                <a:latin typeface="Noto Sans CJK KR"/>
+              </a:defRPr>
+            </a:pPr>
+            <a:r>
+              <a:t>코드 읽기</a:t>
+            </a:r>
+          </a:p>
+        </p:txBody>
+      </p:sp>
+      <p:sp>
+        <p:nvSpPr>
+          <p:cNvPr id="12" name="TextBox 11"/>
+          <p:cNvSpPr txBox="1"/>
+          <p:nvPr/>
+        </p:nvSpPr>
+        <p:spPr>
+          <a:xfrm>
+            <a:off x="1975104" y="2487168"/>
+            <a:ext cx="9189720" cy="301752"/>
+          </a:xfrm>
+          <a:prstGeom prst="rect">
+            <a:avLst/>
+          </a:prstGeom>
+          <a:noFill/>
+        </p:spPr>
+        <p:txBody>
+          <a:bodyPr wrap="square" lIns="73152" rIns="73152" tIns="36576" bIns="36576">
+            <a:spAutoFit/>
+          </a:bodyPr>
           <a:lstStyle/>
           <a:p>
             <a:pPr algn="l">
@@ -17382,147 +20015,93 @@
                 <a:solidFill>
                   <a:srgbClr val="122C4E"/>
                 </a:solidFill>
-                <a:latin typeface="DejaVu Sans Mono"/>
-              </a:defRPr>
-            </a:pPr>
-            <a:r>
-              <a:t>파일 생성: mkdir -p ~/ros2_curri/agv_ws/src/agv_control/agv_control</a:t>
+                <a:latin typeface="Noto Sans CJK KR"/>
+              </a:defRPr>
+            </a:pPr>
+            <a:r>
+              <a:t>import → Node 생성 → publisher/subscription → callback/main 순서로 읽는다.</a:t>
+            </a:r>
+          </a:p>
+        </p:txBody>
+      </p:sp>
+      <p:sp>
+        <p:nvSpPr>
+          <p:cNvPr id="13" name="TextBox 12"/>
+          <p:cNvSpPr txBox="1"/>
+          <p:nvPr/>
+        </p:nvSpPr>
+        <p:spPr>
+          <a:xfrm>
+            <a:off x="868680" y="2889504"/>
+            <a:ext cx="1234440" cy="228600"/>
+          </a:xfrm>
+          <a:prstGeom prst="rect">
+            <a:avLst/>
+          </a:prstGeom>
+          <a:noFill/>
+        </p:spPr>
+        <p:txBody>
+          <a:bodyPr wrap="square" lIns="73152" rIns="73152" tIns="36576" bIns="36576">
+            <a:spAutoFit/>
+          </a:bodyPr>
+          <a:lstStyle/>
+          <a:p>
+            <a:pPr algn="l">
+              <a:spcAft>
+                <a:spcPts val="0"/>
+              </a:spcAft>
+              <a:defRPr sz="1500" b="1">
+                <a:solidFill>
+                  <a:srgbClr val="225B9B"/>
+                </a:solidFill>
+                <a:latin typeface="Noto Sans CJK KR"/>
+              </a:defRPr>
+            </a:pPr>
+            <a:r>
+              <a:t>사용/확인</a:t>
+            </a:r>
+          </a:p>
+        </p:txBody>
+      </p:sp>
+      <p:sp>
+        <p:nvSpPr>
+          <p:cNvPr id="14" name="TextBox 13"/>
+          <p:cNvSpPr txBox="1"/>
+          <p:nvPr/>
+        </p:nvSpPr>
+        <p:spPr>
+          <a:xfrm>
+            <a:off x="1975104" y="2871216"/>
+            <a:ext cx="9189720" cy="512064"/>
+          </a:xfrm>
+          <a:prstGeom prst="rect">
+            <a:avLst/>
+          </a:prstGeom>
+          <a:noFill/>
+        </p:spPr>
+        <p:txBody>
+          <a:bodyPr wrap="square" lIns="73152" rIns="73152" tIns="36576" bIns="36576">
+            <a:spAutoFit/>
+          </a:bodyPr>
+          <a:lstStyle/>
+          <a:p>
+            <a:pPr algn="l">
+              <a:spcAft>
+                <a:spcPts val="0"/>
+              </a:spcAft>
+              <a:defRPr sz="1300" b="0">
+                <a:solidFill>
+                  <a:srgbClr val="122C4E"/>
+                </a:solidFill>
+                <a:latin typeface="Noto Sans CJK KR"/>
+              </a:defRPr>
+            </a:pPr>
+            <a:r>
+              <a:t>사용: package를 build·source한 뒤 ros2 run 또는 launch에서 실행한다.</a:t>
             </a:r>
             <a:br/>
             <a:r>
-              <a:t>파일 열기: nano ~/ros2_curri/agv_ws/src/agv_control/agv_control/counter_publisher.py</a:t>
-            </a:r>
-          </a:p>
-        </p:txBody>
-      </p:sp>
-      <p:sp>
-        <p:nvSpPr>
-          <p:cNvPr id="9" name="Rectangle 8"/>
-          <p:cNvSpPr/>
-          <p:nvPr/>
-        </p:nvSpPr>
-        <p:spPr>
-          <a:xfrm>
-            <a:off x="658368" y="2706624"/>
-            <a:ext cx="10972800" cy="3364992"/>
-          </a:xfrm>
-          <a:prstGeom prst="rect">
-            <a:avLst/>
-          </a:prstGeom>
-          <a:solidFill>
-            <a:srgbClr val="1D232D"/>
-          </a:solidFill>
-          <a:ln>
-            <a:solidFill>
-              <a:srgbClr val="1D232D"/>
-            </a:solidFill>
-          </a:ln>
-        </p:spPr>
-        <p:style>
-          <a:lnRef idx="1">
-            <a:schemeClr val="accent1"/>
-          </a:lnRef>
-          <a:fillRef idx="3">
-            <a:schemeClr val="accent1"/>
-          </a:fillRef>
-          <a:effectRef idx="2">
-            <a:schemeClr val="accent1"/>
-          </a:effectRef>
-          <a:fontRef idx="minor">
-            <a:schemeClr val="lt1"/>
-          </a:fontRef>
-        </p:style>
-        <p:txBody>
-          <a:bodyPr rtlCol="0" anchor="ctr" wrap="square" lIns="164592" rIns="164592" tIns="109728" bIns="36576"/>
-          <a:lstStyle/>
-          <a:p>
-            <a:pPr algn="l">
-              <a:spcAft>
-                <a:spcPts val="0"/>
-              </a:spcAft>
-              <a:defRPr sz="1400" b="0">
-                <a:solidFill>
-                  <a:srgbClr val="FFFFFF"/>
-                </a:solidFill>
-                <a:latin typeface="DejaVu Sans Mono"/>
-              </a:defRPr>
-            </a:pPr>
-            <a:r>
-              <a:t>import rclpy</a:t>
-            </a:r>
-            <a:br/>
-            <a:r>
-              <a:t>from rclpy.node import Node</a:t>
-            </a:r>
-            <a:br/>
-            <a:r>
-              <a:t>from std_msgs.msg import Int32</a:t>
-            </a:r>
-            <a:br/>
-            <a:br/>
-            <a:r>
-              <a:t>class CounterPublisher(Node):</a:t>
-            </a:r>
-            <a:br/>
-            <a:br/>
-            <a:r>
-              <a:t>    def __init__(self):</a:t>
-            </a:r>
-            <a:br/>
-            <a:r>
-              <a:t>        super().__init__('counter_publisher')</a:t>
-            </a:r>
-            <a:br/>
-            <a:r>
-              <a:t>        self.publisher = self.create_publisher(Int32, '/counter', 10)</a:t>
-            </a:r>
-            <a:br/>
-            <a:r>
-              <a:t>        self.value = 0</a:t>
-            </a:r>
-            <a:br/>
-            <a:r>
-              <a:t>        self.create_timer(1.0, self.publish_counter)</a:t>
-            </a:r>
-            <a:br/>
-          </a:p>
-        </p:txBody>
-      </p:sp>
-      <p:sp>
-        <p:nvSpPr>
-          <p:cNvPr id="10" name="TextBox 9"/>
-          <p:cNvSpPr txBox="1"/>
-          <p:nvPr/>
-        </p:nvSpPr>
-        <p:spPr>
-          <a:xfrm>
-            <a:off x="749808" y="6181344"/>
-            <a:ext cx="10789920" cy="201168"/>
-          </a:xfrm>
-          <a:prstGeom prst="rect">
-            <a:avLst/>
-          </a:prstGeom>
-          <a:noFill/>
-        </p:spPr>
-        <p:txBody>
-          <a:bodyPr wrap="square" lIns="73152" rIns="73152" tIns="36576" bIns="36576">
-            <a:spAutoFit/>
-          </a:bodyPr>
-          <a:lstStyle/>
-          <a:p>
-            <a:pPr algn="l">
-              <a:spcAft>
-                <a:spcPts val="0"/>
-              </a:spcAft>
-              <a:defRPr sz="1000" b="0">
-                <a:solidFill>
-                  <a:srgbClr val="5C6672"/>
-                </a:solidFill>
-                <a:latin typeface="Noto Sans CJK KR"/>
-              </a:defRPr>
-            </a:pPr>
-            <a:r>
-              <a:t>파일 전체 1/3 · 이 슬라이드 다음에 같은 파일의 나머지 줄이 이어집니다.</a:t>
+              <a:t>화면/출력: terminal의 node/topic/log 출력</a:t>
             </a:r>
           </a:p>
         </p:txBody>

--- a/blocks/A_ros2_basics/M03_pubsub/M03_Publisher_Subscriber_직접_작성.pptx
+++ b/blocks/A_ros2_basics/M03_pubsub/M03_Publisher_Subscriber_직접_작성.pptx
@@ -8941,7 +8941,7 @@
               <a:spcAft>
                 <a:spcPts val="0"/>
               </a:spcAft>
-              <a:defRPr sz="1800" b="1">
+              <a:defRPr sz="1400" b="1">
                 <a:solidFill>
                   <a:srgbClr val="FFFFFF"/>
                 </a:solidFill>
@@ -8949,7 +8949,7 @@
               </a:defRPr>
             </a:pPr>
             <a:r>
-              <a:t>M03 · Block A · ROS 2 + Gazebo Sim AGV</a:t>
+              <a:t>ROS 2 기반 AGV End-to-End 개발 커리큘럼 · M03 · Block A</a:t>
             </a:r>
           </a:p>
         </p:txBody>
@@ -9159,7 +9159,7 @@
               <a:spcAft>
                 <a:spcPts val="0"/>
               </a:spcAft>
-              <a:defRPr sz="1000" b="0">
+              <a:defRPr sz="900" b="0">
                 <a:solidFill>
                   <a:srgbClr val="5C6672"/>
                 </a:solidFill>
@@ -9167,7 +9167,7 @@
               </a:defRPr>
             </a:pPr>
             <a:r>
-              <a:t>ROS 2 Jazzy · Gazebo Harmonic · M03 · 따라 하기형 AGV 실습</a:t>
+              <a:t>ROS 2 기반 AGV End-to-End 개발 커리큘럼 · M03 · Block A</a:t>
             </a:r>
           </a:p>
         </p:txBody>
@@ -9333,7 +9333,7 @@
               <a:spcAft>
                 <a:spcPts val="0"/>
               </a:spcAft>
-              <a:defRPr sz="1000" b="0">
+              <a:defRPr sz="900" b="0">
                 <a:solidFill>
                   <a:srgbClr val="5C6672"/>
                 </a:solidFill>
@@ -9341,7 +9341,7 @@
               </a:defRPr>
             </a:pPr>
             <a:r>
-              <a:t>ROS 2 Jazzy · Gazebo Harmonic · M03 · 따라 하기형 AGV 실습</a:t>
+              <a:t>ROS 2 기반 AGV End-to-End 개발 커리큘럼 · M03 · Block A</a:t>
             </a:r>
           </a:p>
         </p:txBody>
@@ -9887,7 +9887,7 @@
               <a:spcAft>
                 <a:spcPts val="0"/>
               </a:spcAft>
-              <a:defRPr sz="1000" b="0">
+              <a:defRPr sz="900" b="0">
                 <a:solidFill>
                   <a:srgbClr val="5C6672"/>
                 </a:solidFill>
@@ -9895,7 +9895,7 @@
               </a:defRPr>
             </a:pPr>
             <a:r>
-              <a:t>ROS 2 Jazzy · Gazebo Harmonic · M03 · 따라 하기형 AGV 실습</a:t>
+              <a:t>ROS 2 기반 AGV End-to-End 개발 커리큘럼 · M03 · Block A</a:t>
             </a:r>
           </a:p>
         </p:txBody>
@@ -10415,7 +10415,7 @@
               <a:spcAft>
                 <a:spcPts val="0"/>
               </a:spcAft>
-              <a:defRPr sz="1000" b="0">
+              <a:defRPr sz="900" b="0">
                 <a:solidFill>
                   <a:srgbClr val="5C6672"/>
                 </a:solidFill>
@@ -10423,7 +10423,7 @@
               </a:defRPr>
             </a:pPr>
             <a:r>
-              <a:t>ROS 2 Jazzy · Gazebo Harmonic · M03 · 따라 하기형 AGV 실습</a:t>
+              <a:t>ROS 2 기반 AGV End-to-End 개발 커리큘럼 · M03 · Block A</a:t>
             </a:r>
           </a:p>
         </p:txBody>
@@ -11204,7 +11204,7 @@
               <a:spcAft>
                 <a:spcPts val="0"/>
               </a:spcAft>
-              <a:defRPr sz="1000" b="0">
+              <a:defRPr sz="900" b="0">
                 <a:solidFill>
                   <a:srgbClr val="5C6672"/>
                 </a:solidFill>
@@ -11212,7 +11212,7 @@
               </a:defRPr>
             </a:pPr>
             <a:r>
-              <a:t>ROS 2 Jazzy · Gazebo Harmonic · M03 · 따라 하기형 AGV 실습</a:t>
+              <a:t>ROS 2 기반 AGV End-to-End 개발 커리큘럼 · M03 · Block A</a:t>
             </a:r>
           </a:p>
         </p:txBody>
@@ -11997,7 +11997,7 @@
               <a:spcAft>
                 <a:spcPts val="0"/>
               </a:spcAft>
-              <a:defRPr sz="1000" b="0">
+              <a:defRPr sz="900" b="0">
                 <a:solidFill>
                   <a:srgbClr val="5C6672"/>
                 </a:solidFill>
@@ -12005,7 +12005,7 @@
               </a:defRPr>
             </a:pPr>
             <a:r>
-              <a:t>ROS 2 Jazzy · Gazebo Harmonic · M03 · 따라 하기형 AGV 실습</a:t>
+              <a:t>ROS 2 기반 AGV End-to-End 개발 커리큘럼 · M03 · Block A</a:t>
             </a:r>
           </a:p>
         </p:txBody>
@@ -12786,7 +12786,7 @@
               <a:spcAft>
                 <a:spcPts val="0"/>
               </a:spcAft>
-              <a:defRPr sz="1000" b="0">
+              <a:defRPr sz="900" b="0">
                 <a:solidFill>
                   <a:srgbClr val="5C6672"/>
                 </a:solidFill>
@@ -12794,7 +12794,7 @@
               </a:defRPr>
             </a:pPr>
             <a:r>
-              <a:t>ROS 2 Jazzy · Gazebo Harmonic · M03 · 따라 하기형 AGV 실습</a:t>
+              <a:t>ROS 2 기반 AGV End-to-End 개발 커리큘럼 · M03 · Block A</a:t>
             </a:r>
           </a:p>
         </p:txBody>
@@ -13575,7 +13575,7 @@
               <a:spcAft>
                 <a:spcPts val="0"/>
               </a:spcAft>
-              <a:defRPr sz="1000" b="0">
+              <a:defRPr sz="900" b="0">
                 <a:solidFill>
                   <a:srgbClr val="5C6672"/>
                 </a:solidFill>
@@ -13583,7 +13583,7 @@
               </a:defRPr>
             </a:pPr>
             <a:r>
-              <a:t>ROS 2 Jazzy · Gazebo Harmonic · M03 · 따라 하기형 AGV 실습</a:t>
+              <a:t>ROS 2 기반 AGV End-to-End 개발 커리큘럼 · M03 · Block A</a:t>
             </a:r>
           </a:p>
         </p:txBody>
@@ -14144,7 +14144,7 @@
               <a:spcAft>
                 <a:spcPts val="0"/>
               </a:spcAft>
-              <a:defRPr sz="1000" b="0">
+              <a:defRPr sz="900" b="0">
                 <a:solidFill>
                   <a:srgbClr val="5C6672"/>
                 </a:solidFill>
@@ -14152,7 +14152,7 @@
               </a:defRPr>
             </a:pPr>
             <a:r>
-              <a:t>ROS 2 Jazzy · Gazebo Harmonic · M03 · 따라 하기형 AGV 실습</a:t>
+              <a:t>ROS 2 기반 AGV End-to-End 개발 커리큘럼 · M03 · Block A</a:t>
             </a:r>
           </a:p>
         </p:txBody>
@@ -14609,7 +14609,7 @@
               <a:spcAft>
                 <a:spcPts val="0"/>
               </a:spcAft>
-              <a:defRPr sz="1000" b="0">
+              <a:defRPr sz="900" b="0">
                 <a:solidFill>
                   <a:srgbClr val="5C6672"/>
                 </a:solidFill>
@@ -14617,7 +14617,7 @@
               </a:defRPr>
             </a:pPr>
             <a:r>
-              <a:t>ROS 2 Jazzy · Gazebo Harmonic · M03 · 따라 하기형 AGV 실습</a:t>
+              <a:t>ROS 2 기반 AGV End-to-End 개발 커리큘럼 · M03 · Block A</a:t>
             </a:r>
           </a:p>
         </p:txBody>
@@ -15080,7 +15080,7 @@
               <a:spcAft>
                 <a:spcPts val="0"/>
               </a:spcAft>
-              <a:defRPr sz="1000" b="0">
+              <a:defRPr sz="900" b="0">
                 <a:solidFill>
                   <a:srgbClr val="5C6672"/>
                 </a:solidFill>
@@ -15088,7 +15088,7 @@
               </a:defRPr>
             </a:pPr>
             <a:r>
-              <a:t>ROS 2 Jazzy · Gazebo Harmonic · M03 · 따라 하기형 AGV 실습</a:t>
+              <a:t>ROS 2 기반 AGV End-to-End 개발 커리큘럼 · M03 · Block A</a:t>
             </a:r>
           </a:p>
         </p:txBody>
@@ -15526,7 +15526,7 @@
               <a:spcAft>
                 <a:spcPts val="0"/>
               </a:spcAft>
-              <a:defRPr sz="1000" b="0">
+              <a:defRPr sz="900" b="0">
                 <a:solidFill>
                   <a:srgbClr val="5C6672"/>
                 </a:solidFill>
@@ -15534,7 +15534,7 @@
               </a:defRPr>
             </a:pPr>
             <a:r>
-              <a:t>ROS 2 Jazzy · Gazebo Harmonic · M03 · 따라 하기형 AGV 실습</a:t>
+              <a:t>ROS 2 기반 AGV End-to-End 개발 커리큘럼 · M03 · Block A</a:t>
             </a:r>
           </a:p>
         </p:txBody>
@@ -15987,7 +15987,7 @@
               <a:spcAft>
                 <a:spcPts val="0"/>
               </a:spcAft>
-              <a:defRPr sz="1000" b="0">
+              <a:defRPr sz="900" b="0">
                 <a:solidFill>
                   <a:srgbClr val="5C6672"/>
                 </a:solidFill>
@@ -15995,7 +15995,7 @@
               </a:defRPr>
             </a:pPr>
             <a:r>
-              <a:t>ROS 2 Jazzy · Gazebo Harmonic · M03 · 따라 하기형 AGV 실습</a:t>
+              <a:t>ROS 2 기반 AGV End-to-End 개발 커리큘럼 · M03 · Block A</a:t>
             </a:r>
           </a:p>
         </p:txBody>
@@ -16515,7 +16515,7 @@
               <a:spcAft>
                 <a:spcPts val="0"/>
               </a:spcAft>
-              <a:defRPr sz="1000" b="0">
+              <a:defRPr sz="900" b="0">
                 <a:solidFill>
                   <a:srgbClr val="5C6672"/>
                 </a:solidFill>
@@ -16523,7 +16523,7 @@
               </a:defRPr>
             </a:pPr>
             <a:r>
-              <a:t>ROS 2 Jazzy · Gazebo Harmonic · M03 · 따라 하기형 AGV 실습</a:t>
+              <a:t>ROS 2 기반 AGV End-to-End 개발 커리큘럼 · M03 · Block A</a:t>
             </a:r>
           </a:p>
         </p:txBody>
@@ -17304,7 +17304,7 @@
               <a:spcAft>
                 <a:spcPts val="0"/>
               </a:spcAft>
-              <a:defRPr sz="1000" b="0">
+              <a:defRPr sz="900" b="0">
                 <a:solidFill>
                   <a:srgbClr val="5C6672"/>
                 </a:solidFill>
@@ -17312,7 +17312,7 @@
               </a:defRPr>
             </a:pPr>
             <a:r>
-              <a:t>ROS 2 Jazzy · Gazebo Harmonic · M03 · 따라 하기형 AGV 실습</a:t>
+              <a:t>ROS 2 기반 AGV End-to-End 개발 커리큘럼 · M03 · Block A</a:t>
             </a:r>
           </a:p>
         </p:txBody>
@@ -18097,7 +18097,7 @@
               <a:spcAft>
                 <a:spcPts val="0"/>
               </a:spcAft>
-              <a:defRPr sz="1000" b="0">
+              <a:defRPr sz="900" b="0">
                 <a:solidFill>
                   <a:srgbClr val="5C6672"/>
                 </a:solidFill>
@@ -18105,7 +18105,7 @@
               </a:defRPr>
             </a:pPr>
             <a:r>
-              <a:t>ROS 2 Jazzy · Gazebo Harmonic · M03 · 따라 하기형 AGV 실습</a:t>
+              <a:t>ROS 2 기반 AGV End-to-End 개발 커리큘럼 · M03 · Block A</a:t>
             </a:r>
           </a:p>
         </p:txBody>
@@ -18890,7 +18890,7 @@
               <a:spcAft>
                 <a:spcPts val="0"/>
               </a:spcAft>
-              <a:defRPr sz="1000" b="0">
+              <a:defRPr sz="900" b="0">
                 <a:solidFill>
                   <a:srgbClr val="5C6672"/>
                 </a:solidFill>
@@ -18898,7 +18898,7 @@
               </a:defRPr>
             </a:pPr>
             <a:r>
-              <a:t>ROS 2 Jazzy · Gazebo Harmonic · M03 · 따라 하기형 AGV 실습</a:t>
+              <a:t>ROS 2 기반 AGV End-to-End 개발 커리큘럼 · M03 · Block A</a:t>
             </a:r>
           </a:p>
         </p:txBody>
@@ -19679,7 +19679,7 @@
               <a:spcAft>
                 <a:spcPts val="0"/>
               </a:spcAft>
-              <a:defRPr sz="1000" b="0">
+              <a:defRPr sz="900" b="0">
                 <a:solidFill>
                   <a:srgbClr val="5C6672"/>
                 </a:solidFill>
@@ -19687,7 +19687,7 @@
               </a:defRPr>
             </a:pPr>
             <a:r>
-              <a:t>ROS 2 Jazzy · Gazebo Harmonic · M03 · 따라 하기형 AGV 실습</a:t>
+              <a:t>ROS 2 기반 AGV End-to-End 개발 커리큘럼 · M03 · Block A</a:t>
             </a:r>
           </a:p>
         </p:txBody>
@@ -20248,7 +20248,7 @@
               <a:spcAft>
                 <a:spcPts val="0"/>
               </a:spcAft>
-              <a:defRPr sz="1000" b="0">
+              <a:defRPr sz="900" b="0">
                 <a:solidFill>
                   <a:srgbClr val="5C6672"/>
                 </a:solidFill>
@@ -20256,7 +20256,7 @@
               </a:defRPr>
             </a:pPr>
             <a:r>
-              <a:t>ROS 2 Jazzy · Gazebo Harmonic · M03 · 따라 하기형 AGV 실습</a:t>
+              <a:t>ROS 2 기반 AGV End-to-End 개발 커리큘럼 · M03 · Block A</a:t>
             </a:r>
           </a:p>
         </p:txBody>
@@ -20713,7 +20713,7 @@
               <a:spcAft>
                 <a:spcPts val="0"/>
               </a:spcAft>
-              <a:defRPr sz="1000" b="0">
+              <a:defRPr sz="900" b="0">
                 <a:solidFill>
                   <a:srgbClr val="5C6672"/>
                 </a:solidFill>
@@ -20721,7 +20721,7 @@
               </a:defRPr>
             </a:pPr>
             <a:r>
-              <a:t>ROS 2 Jazzy · Gazebo Harmonic · M03 · 따라 하기형 AGV 실습</a:t>
+              <a:t>ROS 2 기반 AGV End-to-End 개발 커리큘럼 · M03 · Block A</a:t>
             </a:r>
           </a:p>
         </p:txBody>
@@ -21184,7 +21184,7 @@
               <a:spcAft>
                 <a:spcPts val="0"/>
               </a:spcAft>
-              <a:defRPr sz="1000" b="0">
+              <a:defRPr sz="900" b="0">
                 <a:solidFill>
                   <a:srgbClr val="5C6672"/>
                 </a:solidFill>
@@ -21192,7 +21192,7 @@
               </a:defRPr>
             </a:pPr>
             <a:r>
-              <a:t>ROS 2 Jazzy · Gazebo Harmonic · M03 · 따라 하기형 AGV 실습</a:t>
+              <a:t>ROS 2 기반 AGV End-to-End 개발 커리큘럼 · M03 · Block A</a:t>
             </a:r>
           </a:p>
         </p:txBody>
@@ -21712,7 +21712,7 @@
               <a:spcAft>
                 <a:spcPts val="0"/>
               </a:spcAft>
-              <a:defRPr sz="1000" b="0">
+              <a:defRPr sz="900" b="0">
                 <a:solidFill>
                   <a:srgbClr val="5C6672"/>
                 </a:solidFill>
@@ -21720,7 +21720,7 @@
               </a:defRPr>
             </a:pPr>
             <a:r>
-              <a:t>ROS 2 Jazzy · Gazebo Harmonic · M03 · 따라 하기형 AGV 실습</a:t>
+              <a:t>ROS 2 기반 AGV End-to-End 개발 커리큘럼 · M03 · Block A</a:t>
             </a:r>
           </a:p>
         </p:txBody>
@@ -22501,7 +22501,7 @@
               <a:spcAft>
                 <a:spcPts val="0"/>
               </a:spcAft>
-              <a:defRPr sz="1000" b="0">
+              <a:defRPr sz="900" b="0">
                 <a:solidFill>
                   <a:srgbClr val="5C6672"/>
                 </a:solidFill>
@@ -22509,7 +22509,7 @@
               </a:defRPr>
             </a:pPr>
             <a:r>
-              <a:t>ROS 2 Jazzy · Gazebo Harmonic · M03 · 따라 하기형 AGV 실습</a:t>
+              <a:t>ROS 2 기반 AGV End-to-End 개발 커리큘럼 · M03 · Block A</a:t>
             </a:r>
           </a:p>
         </p:txBody>
@@ -22920,7 +22920,7 @@
               <a:spcAft>
                 <a:spcPts val="0"/>
               </a:spcAft>
-              <a:defRPr sz="1000" b="0">
+              <a:defRPr sz="900" b="0">
                 <a:solidFill>
                   <a:srgbClr val="5C6672"/>
                 </a:solidFill>
@@ -22928,7 +22928,7 @@
               </a:defRPr>
             </a:pPr>
             <a:r>
-              <a:t>ROS 2 Jazzy · Gazebo Harmonic · M03 · 따라 하기형 AGV 실습</a:t>
+              <a:t>ROS 2 기반 AGV End-to-End 개발 커리큘럼 · M03 · Block A</a:t>
             </a:r>
           </a:p>
         </p:txBody>
@@ -23709,7 +23709,7 @@
               <a:spcAft>
                 <a:spcPts val="0"/>
               </a:spcAft>
-              <a:defRPr sz="1000" b="0">
+              <a:defRPr sz="900" b="0">
                 <a:solidFill>
                   <a:srgbClr val="5C6672"/>
                 </a:solidFill>
@@ -23717,7 +23717,7 @@
               </a:defRPr>
             </a:pPr>
             <a:r>
-              <a:t>ROS 2 Jazzy · Gazebo Harmonic · M03 · 따라 하기형 AGV 실습</a:t>
+              <a:t>ROS 2 기반 AGV End-to-End 개발 커리큘럼 · M03 · Block A</a:t>
             </a:r>
           </a:p>
         </p:txBody>
@@ -24502,7 +24502,7 @@
               <a:spcAft>
                 <a:spcPts val="0"/>
               </a:spcAft>
-              <a:defRPr sz="1000" b="0">
+              <a:defRPr sz="900" b="0">
                 <a:solidFill>
                   <a:srgbClr val="5C6672"/>
                 </a:solidFill>
@@ -24510,7 +24510,7 @@
               </a:defRPr>
             </a:pPr>
             <a:r>
-              <a:t>ROS 2 Jazzy · Gazebo Harmonic · M03 · 따라 하기형 AGV 실습</a:t>
+              <a:t>ROS 2 기반 AGV End-to-End 개발 커리큘럼 · M03 · Block A</a:t>
             </a:r>
           </a:p>
         </p:txBody>
@@ -25295,7 +25295,7 @@
               <a:spcAft>
                 <a:spcPts val="0"/>
               </a:spcAft>
-              <a:defRPr sz="1000" b="0">
+              <a:defRPr sz="900" b="0">
                 <a:solidFill>
                   <a:srgbClr val="5C6672"/>
                 </a:solidFill>
@@ -25303,7 +25303,7 @@
               </a:defRPr>
             </a:pPr>
             <a:r>
-              <a:t>ROS 2 Jazzy · Gazebo Harmonic · M03 · 따라 하기형 AGV 실습</a:t>
+              <a:t>ROS 2 기반 AGV End-to-End 개발 커리큘럼 · M03 · Block A</a:t>
             </a:r>
           </a:p>
         </p:txBody>
@@ -25864,7 +25864,7 @@
               <a:spcAft>
                 <a:spcPts val="0"/>
               </a:spcAft>
-              <a:defRPr sz="1000" b="0">
+              <a:defRPr sz="900" b="0">
                 <a:solidFill>
                   <a:srgbClr val="5C6672"/>
                 </a:solidFill>
@@ -25872,7 +25872,7 @@
               </a:defRPr>
             </a:pPr>
             <a:r>
-              <a:t>ROS 2 Jazzy · Gazebo Harmonic · M03 · 따라 하기형 AGV 실습</a:t>
+              <a:t>ROS 2 기반 AGV End-to-End 개발 커리큘럼 · M03 · Block A</a:t>
             </a:r>
           </a:p>
         </p:txBody>
@@ -26332,7 +26332,7 @@
               <a:spcAft>
                 <a:spcPts val="0"/>
               </a:spcAft>
-              <a:defRPr sz="1000" b="0">
+              <a:defRPr sz="900" b="0">
                 <a:solidFill>
                   <a:srgbClr val="5C6672"/>
                 </a:solidFill>
@@ -26340,7 +26340,7 @@
               </a:defRPr>
             </a:pPr>
             <a:r>
-              <a:t>ROS 2 Jazzy · Gazebo Harmonic · M03 · 따라 하기형 AGV 실습</a:t>
+              <a:t>ROS 2 기반 AGV End-to-End 개발 커리큘럼 · M03 · Block A</a:t>
             </a:r>
           </a:p>
         </p:txBody>
@@ -26803,7 +26803,7 @@
               <a:spcAft>
                 <a:spcPts val="0"/>
               </a:spcAft>
-              <a:defRPr sz="1000" b="0">
+              <a:defRPr sz="900" b="0">
                 <a:solidFill>
                   <a:srgbClr val="5C6672"/>
                 </a:solidFill>
@@ -26811,7 +26811,7 @@
               </a:defRPr>
             </a:pPr>
             <a:r>
-              <a:t>ROS 2 Jazzy · Gazebo Harmonic · M03 · 따라 하기형 AGV 실습</a:t>
+              <a:t>ROS 2 기반 AGV End-to-End 개발 커리큘럼 · M03 · Block A</a:t>
             </a:r>
           </a:p>
         </p:txBody>
@@ -27274,7 +27274,7 @@
               <a:spcAft>
                 <a:spcPts val="0"/>
               </a:spcAft>
-              <a:defRPr sz="1000" b="0">
+              <a:defRPr sz="900" b="0">
                 <a:solidFill>
                   <a:srgbClr val="5C6672"/>
                 </a:solidFill>
@@ -27282,7 +27282,7 @@
               </a:defRPr>
             </a:pPr>
             <a:r>
-              <a:t>ROS 2 Jazzy · Gazebo Harmonic · M03 · 따라 하기형 AGV 실습</a:t>
+              <a:t>ROS 2 기반 AGV End-to-End 개발 커리큘럼 · M03 · Block A</a:t>
             </a:r>
           </a:p>
         </p:txBody>
@@ -27802,7 +27802,7 @@
               <a:spcAft>
                 <a:spcPts val="0"/>
               </a:spcAft>
-              <a:defRPr sz="1000" b="0">
+              <a:defRPr sz="900" b="0">
                 <a:solidFill>
                   <a:srgbClr val="5C6672"/>
                 </a:solidFill>
@@ -27810,7 +27810,7 @@
               </a:defRPr>
             </a:pPr>
             <a:r>
-              <a:t>ROS 2 Jazzy · Gazebo Harmonic · M03 · 따라 하기형 AGV 실습</a:t>
+              <a:t>ROS 2 기반 AGV End-to-End 개발 커리큘럼 · M03 · Block A</a:t>
             </a:r>
           </a:p>
         </p:txBody>
@@ -28591,7 +28591,7 @@
               <a:spcAft>
                 <a:spcPts val="0"/>
               </a:spcAft>
-              <a:defRPr sz="1000" b="0">
+              <a:defRPr sz="900" b="0">
                 <a:solidFill>
                   <a:srgbClr val="5C6672"/>
                 </a:solidFill>
@@ -28599,7 +28599,7 @@
               </a:defRPr>
             </a:pPr>
             <a:r>
-              <a:t>ROS 2 Jazzy · Gazebo Harmonic · M03 · 따라 하기형 AGV 실습</a:t>
+              <a:t>ROS 2 기반 AGV End-to-End 개발 커리큘럼 · M03 · Block A</a:t>
             </a:r>
           </a:p>
         </p:txBody>
@@ -29384,7 +29384,7 @@
               <a:spcAft>
                 <a:spcPts val="0"/>
               </a:spcAft>
-              <a:defRPr sz="1000" b="0">
+              <a:defRPr sz="900" b="0">
                 <a:solidFill>
                   <a:srgbClr val="5C6672"/>
                 </a:solidFill>
@@ -29392,7 +29392,7 @@
               </a:defRPr>
             </a:pPr>
             <a:r>
-              <a:t>ROS 2 Jazzy · Gazebo Harmonic · M03 · 따라 하기형 AGV 실습</a:t>
+              <a:t>ROS 2 기반 AGV End-to-End 개발 커리큘럼 · M03 · Block A</a:t>
             </a:r>
           </a:p>
         </p:txBody>
@@ -29717,7 +29717,7 @@
               <a:spcAft>
                 <a:spcPts val="0"/>
               </a:spcAft>
-              <a:defRPr sz="1000" b="0">
+              <a:defRPr sz="900" b="0">
                 <a:solidFill>
                   <a:srgbClr val="5C6672"/>
                 </a:solidFill>
@@ -29725,7 +29725,7 @@
               </a:defRPr>
             </a:pPr>
             <a:r>
-              <a:t>ROS 2 Jazzy · Gazebo Harmonic · M03 · 따라 하기형 AGV 실습</a:t>
+              <a:t>ROS 2 기반 AGV End-to-End 개발 커리큘럼 · M03 · Block A</a:t>
             </a:r>
           </a:p>
         </p:txBody>
@@ -30510,7 +30510,7 @@
               <a:spcAft>
                 <a:spcPts val="0"/>
               </a:spcAft>
-              <a:defRPr sz="1000" b="0">
+              <a:defRPr sz="900" b="0">
                 <a:solidFill>
                   <a:srgbClr val="5C6672"/>
                 </a:solidFill>
@@ -30518,7 +30518,7 @@
               </a:defRPr>
             </a:pPr>
             <a:r>
-              <a:t>ROS 2 Jazzy · Gazebo Harmonic · M03 · 따라 하기형 AGV 실습</a:t>
+              <a:t>ROS 2 기반 AGV End-to-End 개발 커리큘럼 · M03 · Block A</a:t>
             </a:r>
           </a:p>
         </p:txBody>
@@ -31299,7 +31299,7 @@
               <a:spcAft>
                 <a:spcPts val="0"/>
               </a:spcAft>
-              <a:defRPr sz="1000" b="0">
+              <a:defRPr sz="900" b="0">
                 <a:solidFill>
                   <a:srgbClr val="5C6672"/>
                 </a:solidFill>
@@ -31307,7 +31307,7 @@
               </a:defRPr>
             </a:pPr>
             <a:r>
-              <a:t>ROS 2 Jazzy · Gazebo Harmonic · M03 · 따라 하기형 AGV 실습</a:t>
+              <a:t>ROS 2 기반 AGV End-to-End 개발 커리큘럼 · M03 · Block A</a:t>
             </a:r>
           </a:p>
         </p:txBody>
@@ -31868,7 +31868,7 @@
               <a:spcAft>
                 <a:spcPts val="0"/>
               </a:spcAft>
-              <a:defRPr sz="1000" b="0">
+              <a:defRPr sz="900" b="0">
                 <a:solidFill>
                   <a:srgbClr val="5C6672"/>
                 </a:solidFill>
@@ -31876,7 +31876,7 @@
               </a:defRPr>
             </a:pPr>
             <a:r>
-              <a:t>ROS 2 Jazzy · Gazebo Harmonic · M03 · 따라 하기형 AGV 실습</a:t>
+              <a:t>ROS 2 기반 AGV End-to-End 개발 커리큘럼 · M03 · Block A</a:t>
             </a:r>
           </a:p>
         </p:txBody>
@@ -32333,7 +32333,7 @@
               <a:spcAft>
                 <a:spcPts val="0"/>
               </a:spcAft>
-              <a:defRPr sz="1000" b="0">
+              <a:defRPr sz="900" b="0">
                 <a:solidFill>
                   <a:srgbClr val="5C6672"/>
                 </a:solidFill>
@@ -32341,7 +32341,7 @@
               </a:defRPr>
             </a:pPr>
             <a:r>
-              <a:t>ROS 2 Jazzy · Gazebo Harmonic · M03 · 따라 하기형 AGV 실습</a:t>
+              <a:t>ROS 2 기반 AGV End-to-End 개발 커리큘럼 · M03 · Block A</a:t>
             </a:r>
           </a:p>
         </p:txBody>
@@ -32804,7 +32804,7 @@
               <a:spcAft>
                 <a:spcPts val="0"/>
               </a:spcAft>
-              <a:defRPr sz="1000" b="0">
+              <a:defRPr sz="900" b="0">
                 <a:solidFill>
                   <a:srgbClr val="5C6672"/>
                 </a:solidFill>
@@ -32812,7 +32812,7 @@
               </a:defRPr>
             </a:pPr>
             <a:r>
-              <a:t>ROS 2 Jazzy · Gazebo Harmonic · M03 · 따라 하기형 AGV 실습</a:t>
+              <a:t>ROS 2 기반 AGV End-to-End 개발 커리큘럼 · M03 · Block A</a:t>
             </a:r>
           </a:p>
         </p:txBody>
@@ -33234,7 +33234,7 @@
               <a:spcAft>
                 <a:spcPts val="0"/>
               </a:spcAft>
-              <a:defRPr sz="1000" b="0">
+              <a:defRPr sz="900" b="0">
                 <a:solidFill>
                   <a:srgbClr val="5C6672"/>
                 </a:solidFill>
@@ -33242,7 +33242,7 @@
               </a:defRPr>
             </a:pPr>
             <a:r>
-              <a:t>ROS 2 Jazzy · Gazebo Harmonic · M03 · 따라 하기형 AGV 실습</a:t>
+              <a:t>ROS 2 기반 AGV End-to-End 개발 커리큘럼 · M03 · Block A</a:t>
             </a:r>
           </a:p>
         </p:txBody>
@@ -33762,7 +33762,7 @@
               <a:spcAft>
                 <a:spcPts val="0"/>
               </a:spcAft>
-              <a:defRPr sz="1000" b="0">
+              <a:defRPr sz="900" b="0">
                 <a:solidFill>
                   <a:srgbClr val="5C6672"/>
                 </a:solidFill>
@@ -33770,7 +33770,7 @@
               </a:defRPr>
             </a:pPr>
             <a:r>
-              <a:t>ROS 2 Jazzy · Gazebo Harmonic · M03 · 따라 하기형 AGV 실습</a:t>
+              <a:t>ROS 2 기반 AGV End-to-End 개발 커리큘럼 · M03 · Block A</a:t>
             </a:r>
           </a:p>
         </p:txBody>
@@ -34555,7 +34555,7 @@
               <a:spcAft>
                 <a:spcPts val="0"/>
               </a:spcAft>
-              <a:defRPr sz="1000" b="0">
+              <a:defRPr sz="900" b="0">
                 <a:solidFill>
                   <a:srgbClr val="5C6672"/>
                 </a:solidFill>
@@ -34563,7 +34563,7 @@
               </a:defRPr>
             </a:pPr>
             <a:r>
-              <a:t>ROS 2 Jazzy · Gazebo Harmonic · M03 · 따라 하기형 AGV 실습</a:t>
+              <a:t>ROS 2 기반 AGV End-to-End 개발 커리큘럼 · M03 · Block A</a:t>
             </a:r>
           </a:p>
         </p:txBody>
@@ -35348,7 +35348,7 @@
               <a:spcAft>
                 <a:spcPts val="0"/>
               </a:spcAft>
-              <a:defRPr sz="1000" b="0">
+              <a:defRPr sz="900" b="0">
                 <a:solidFill>
                   <a:srgbClr val="5C6672"/>
                 </a:solidFill>
@@ -35356,7 +35356,7 @@
               </a:defRPr>
             </a:pPr>
             <a:r>
-              <a:t>ROS 2 Jazzy · Gazebo Harmonic · M03 · 따라 하기형 AGV 실습</a:t>
+              <a:t>ROS 2 기반 AGV End-to-End 개발 커리큘럼 · M03 · Block A</a:t>
             </a:r>
           </a:p>
         </p:txBody>
@@ -35822,7 +35822,7 @@
               <a:spcAft>
                 <a:spcPts val="0"/>
               </a:spcAft>
-              <a:defRPr sz="1000" b="0">
+              <a:defRPr sz="900" b="0">
                 <a:solidFill>
                   <a:srgbClr val="5C6672"/>
                 </a:solidFill>
@@ -35830,7 +35830,7 @@
               </a:defRPr>
             </a:pPr>
             <a:r>
-              <a:t>ROS 2 Jazzy · Gazebo Harmonic · M03 · 따라 하기형 AGV 실습</a:t>
+              <a:t>ROS 2 기반 AGV End-to-End 개발 커리큘럼 · M03 · Block A</a:t>
             </a:r>
           </a:p>
         </p:txBody>
@@ -36462,7 +36462,7 @@
               <a:spcAft>
                 <a:spcPts val="0"/>
               </a:spcAft>
-              <a:defRPr sz="1000" b="0">
+              <a:defRPr sz="900" b="0">
                 <a:solidFill>
                   <a:srgbClr val="5C6672"/>
                 </a:solidFill>
@@ -36470,7 +36470,7 @@
               </a:defRPr>
             </a:pPr>
             <a:r>
-              <a:t>ROS 2 Jazzy · Gazebo Harmonic · M03 · 따라 하기형 AGV 실습</a:t>
+              <a:t>ROS 2 기반 AGV End-to-End 개발 커리큘럼 · M03 · Block A</a:t>
             </a:r>
           </a:p>
         </p:txBody>
@@ -36916,7 +36916,7 @@
               <a:spcAft>
                 <a:spcPts val="0"/>
               </a:spcAft>
-              <a:defRPr sz="1000" b="0">
+              <a:defRPr sz="900" b="0">
                 <a:solidFill>
                   <a:srgbClr val="5C6672"/>
                 </a:solidFill>
@@ -36924,7 +36924,7 @@
               </a:defRPr>
             </a:pPr>
             <a:r>
-              <a:t>ROS 2 Jazzy · Gazebo Harmonic · M03 · 따라 하기형 AGV 실습</a:t>
+              <a:t>ROS 2 기반 AGV End-to-End 개발 커리큘럼 · M03 · Block A</a:t>
             </a:r>
           </a:p>
         </p:txBody>
@@ -37374,7 +37374,7 @@
               <a:spcAft>
                 <a:spcPts val="0"/>
               </a:spcAft>
-              <a:defRPr sz="1000" b="0">
+              <a:defRPr sz="900" b="0">
                 <a:solidFill>
                   <a:srgbClr val="5C6672"/>
                 </a:solidFill>
@@ -37382,7 +37382,7 @@
               </a:defRPr>
             </a:pPr>
             <a:r>
-              <a:t>ROS 2 Jazzy · Gazebo Harmonic · M03 · 따라 하기형 AGV 실습</a:t>
+              <a:t>ROS 2 기반 AGV End-to-End 개발 커리큘럼 · M03 · Block A</a:t>
             </a:r>
           </a:p>
         </p:txBody>
@@ -37750,7 +37750,7 @@
               <a:spcAft>
                 <a:spcPts val="0"/>
               </a:spcAft>
-              <a:defRPr sz="1000" b="0">
+              <a:defRPr sz="900" b="0">
                 <a:solidFill>
                   <a:srgbClr val="5C6672"/>
                 </a:solidFill>
@@ -37758,7 +37758,7 @@
               </a:defRPr>
             </a:pPr>
             <a:r>
-              <a:t>ROS 2 Jazzy · Gazebo Harmonic · M03 · 따라 하기형 AGV 실습</a:t>
+              <a:t>ROS 2 기반 AGV End-to-End 개발 커리큘럼 · M03 · Block A</a:t>
             </a:r>
           </a:p>
         </p:txBody>
@@ -37987,7 +37987,7 @@
               <a:spcAft>
                 <a:spcPts val="0"/>
               </a:spcAft>
-              <a:defRPr sz="1000" b="0">
+              <a:defRPr sz="900" b="0">
                 <a:solidFill>
                   <a:srgbClr val="5C6672"/>
                 </a:solidFill>
@@ -37995,7 +37995,7 @@
               </a:defRPr>
             </a:pPr>
             <a:r>
-              <a:t>ROS 2 Jazzy · Gazebo Harmonic · M03 · 따라 하기형 AGV 실습</a:t>
+              <a:t>ROS 2 기반 AGV End-to-End 개발 커리큘럼 · M03 · Block A</a:t>
             </a:r>
           </a:p>
         </p:txBody>
@@ -38394,7 +38394,7 @@
               <a:spcAft>
                 <a:spcPts val="0"/>
               </a:spcAft>
-              <a:defRPr sz="1000" b="0">
+              <a:defRPr sz="900" b="0">
                 <a:solidFill>
                   <a:srgbClr val="5C6672"/>
                 </a:solidFill>
@@ -38402,7 +38402,7 @@
               </a:defRPr>
             </a:pPr>
             <a:r>
-              <a:t>ROS 2 Jazzy · Gazebo Harmonic · M03 · 따라 하기형 AGV 실습</a:t>
+              <a:t>ROS 2 기반 AGV End-to-End 개발 커리큘럼 · M03 · Block A</a:t>
             </a:r>
           </a:p>
         </p:txBody>
@@ -38919,7 +38919,7 @@
               <a:spcAft>
                 <a:spcPts val="0"/>
               </a:spcAft>
-              <a:defRPr sz="1000" b="0">
+              <a:defRPr sz="900" b="0">
                 <a:solidFill>
                   <a:srgbClr val="5C6672"/>
                 </a:solidFill>
@@ -38927,7 +38927,7 @@
               </a:defRPr>
             </a:pPr>
             <a:r>
-              <a:t>ROS 2 Jazzy · Gazebo Harmonic · M03 · 따라 하기형 AGV 실습</a:t>
+              <a:t>ROS 2 기반 AGV End-to-End 개발 커리큘럼 · M03 · Block A</a:t>
             </a:r>
           </a:p>
         </p:txBody>
@@ -39303,7 +39303,7 @@
               <a:spcAft>
                 <a:spcPts val="0"/>
               </a:spcAft>
-              <a:defRPr sz="1000" b="0">
+              <a:defRPr sz="900" b="0">
                 <a:solidFill>
                   <a:srgbClr val="5C6672"/>
                 </a:solidFill>
@@ -39311,7 +39311,7 @@
               </a:defRPr>
             </a:pPr>
             <a:r>
-              <a:t>ROS 2 Jazzy · Gazebo Harmonic · M03 · 따라 하기형 AGV 실습</a:t>
+              <a:t>ROS 2 기반 AGV End-to-End 개발 커리큘럼 · M03 · Block A</a:t>
             </a:r>
           </a:p>
         </p:txBody>
@@ -39632,7 +39632,7 @@
               <a:spcAft>
                 <a:spcPts val="0"/>
               </a:spcAft>
-              <a:defRPr sz="1000" b="0">
+              <a:defRPr sz="900" b="0">
                 <a:solidFill>
                   <a:srgbClr val="5C6672"/>
                 </a:solidFill>
@@ -39640,7 +39640,7 @@
               </a:defRPr>
             </a:pPr>
             <a:r>
-              <a:t>ROS 2 Jazzy · Gazebo Harmonic · M03 · 따라 하기형 AGV 실습</a:t>
+              <a:t>ROS 2 기반 AGV End-to-End 개발 커리큘럼 · M03 · Block A</a:t>
             </a:r>
           </a:p>
         </p:txBody>
@@ -40051,7 +40051,7 @@
               <a:spcAft>
                 <a:spcPts val="0"/>
               </a:spcAft>
-              <a:defRPr sz="1000" b="0">
+              <a:defRPr sz="900" b="0">
                 <a:solidFill>
                   <a:srgbClr val="5C6672"/>
                 </a:solidFill>
@@ -40059,7 +40059,7 @@
               </a:defRPr>
             </a:pPr>
             <a:r>
-              <a:t>ROS 2 Jazzy · Gazebo Harmonic · M03 · 따라 하기형 AGV 실습</a:t>
+              <a:t>ROS 2 기반 AGV End-to-End 개발 커리큘럼 · M03 · Block A</a:t>
             </a:r>
           </a:p>
         </p:txBody>
@@ -40582,7 +40582,7 @@
               <a:spcAft>
                 <a:spcPts val="0"/>
               </a:spcAft>
-              <a:defRPr sz="1000" b="0">
+              <a:defRPr sz="900" b="0">
                 <a:solidFill>
                   <a:srgbClr val="5C6672"/>
                 </a:solidFill>
@@ -40590,7 +40590,7 @@
               </a:defRPr>
             </a:pPr>
             <a:r>
-              <a:t>ROS 2 Jazzy · Gazebo Harmonic · M03 · 따라 하기형 AGV 실습</a:t>
+              <a:t>ROS 2 기반 AGV End-to-End 개발 커리큘럼 · M03 · Block A</a:t>
             </a:r>
           </a:p>
         </p:txBody>
@@ -41047,7 +41047,7 @@
               <a:spcAft>
                 <a:spcPts val="0"/>
               </a:spcAft>
-              <a:defRPr sz="1000" b="0">
+              <a:defRPr sz="900" b="0">
                 <a:solidFill>
                   <a:srgbClr val="5C6672"/>
                 </a:solidFill>
@@ -41055,7 +41055,7 @@
               </a:defRPr>
             </a:pPr>
             <a:r>
-              <a:t>ROS 2 Jazzy · Gazebo Harmonic · M03 · 따라 하기형 AGV 실습</a:t>
+              <a:t>ROS 2 기반 AGV End-to-End 개발 커리큘럼 · M03 · Block A</a:t>
             </a:r>
           </a:p>
         </p:txBody>
@@ -41338,7 +41338,7 @@
               <a:spcAft>
                 <a:spcPts val="0"/>
               </a:spcAft>
-              <a:defRPr sz="1000" b="0">
+              <a:defRPr sz="900" b="0">
                 <a:solidFill>
                   <a:srgbClr val="5C6672"/>
                 </a:solidFill>
@@ -41346,7 +41346,7 @@
               </a:defRPr>
             </a:pPr>
             <a:r>
-              <a:t>ROS 2 Jazzy · Gazebo Harmonic · M03 · 따라 하기형 AGV 실습</a:t>
+              <a:t>ROS 2 기반 AGV End-to-End 개발 커리큘럼 · M03 · Block A</a:t>
             </a:r>
           </a:p>
         </p:txBody>
@@ -42214,7 +42214,7 @@
               <a:spcAft>
                 <a:spcPts val="0"/>
               </a:spcAft>
-              <a:defRPr sz="1000" b="0">
+              <a:defRPr sz="900" b="0">
                 <a:solidFill>
                   <a:srgbClr val="5C6672"/>
                 </a:solidFill>
@@ -42222,7 +42222,7 @@
               </a:defRPr>
             </a:pPr>
             <a:r>
-              <a:t>ROS 2 Jazzy · Gazebo Harmonic · M03 · 따라 하기형 AGV 실습</a:t>
+              <a:t>ROS 2 기반 AGV End-to-End 개발 커리큘럼 · M03 · Block A</a:t>
             </a:r>
           </a:p>
         </p:txBody>

--- a/blocks/A_ros2_basics/M03_pubsub/M03_Publisher_Subscriber_직접_작성.pptx
+++ b/blocks/A_ros2_basics/M03_pubsub/M03_Publisher_Subscriber_직접_작성.pptx
@@ -4735,7 +4735,7 @@
           <a:lstStyle/>
           <a:p>
             <a:r>
-              <a:t>[설명] publisher 출력과 monitor 수신을 분리해 확인한다.</a:t>
+              <a:t>[설명] publisher 출력과 monitor 수신을 분리해 확인한다. 두 node가 동시에 살아 있어야 /counter를 주고받는다.</a:t>
             </a:r>
           </a:p>
           <a:p>
@@ -4745,12 +4745,33 @@
           </a:p>
           <a:p>
             <a:r>
+              <a:t>source /opt/ros/jazzy/setup.bash</a:t>
+            </a:r>
+          </a:p>
+          <a:p>
+            <a:r>
+              <a:t>source ~/ros2_curri/my_agv_ws/install/setup.bash</a:t>
+            </a:r>
+          </a:p>
+          <a:p>
+            <a:r>
               <a:t>ros2 run agv_control counter_publisher</a:t>
             </a:r>
           </a:p>
+          <a:p/>
           <a:p>
             <a:r>
               <a:t># 터미널 2</a:t>
+            </a:r>
+          </a:p>
+          <a:p>
+            <a:r>
+              <a:t>source /opt/ros/jazzy/setup.bash</a:t>
+            </a:r>
+          </a:p>
+          <a:p>
+            <a:r>
+              <a:t>source ~/ros2_curri/my_agv_ws/install/setup.bash</a:t>
             </a:r>
           </a:p>
           <a:p>
@@ -4845,7 +4866,17 @@
           </a:p>
           <a:p>
             <a:r>
-              <a:t>[실행] cd ~/ros2_curri/my_agv_ws &amp;&amp; source install/setup.bash</a:t>
+              <a:t>[실행] # 터미널 1</a:t>
+            </a:r>
+          </a:p>
+          <a:p>
+            <a:r>
+              <a:t>source /opt/ros/jazzy/setup.bash</a:t>
+            </a:r>
+          </a:p>
+          <a:p>
+            <a:r>
+              <a:t>source ~/ros2_curri/my_agv_ws/install/setup.bash</a:t>
             </a:r>
           </a:p>
           <a:p>
@@ -4853,9 +4884,25 @@
               <a:t>ros2 run agv_control counter_publisher</a:t>
             </a:r>
           </a:p>
-          <a:p>
-            <a:r>
-              <a:t># 새 터미널: ros2 run agv_control counter_monitor</a:t>
+          <a:p/>
+          <a:p>
+            <a:r>
+              <a:t># 터미널 2</a:t>
+            </a:r>
+          </a:p>
+          <a:p>
+            <a:r>
+              <a:t>source /opt/ros/jazzy/setup.bash</a:t>
+            </a:r>
+          </a:p>
+          <a:p>
+            <a:r>
+              <a:t>source ~/ros2_curri/my_agv_ws/install/setup.bash</a:t>
+            </a:r>
+          </a:p>
+          <a:p>
+            <a:r>
+              <a:t>ros2 run agv_control counter_monitor</a:t>
             </a:r>
           </a:p>
           <a:p>
@@ -10191,7 +10238,7 @@
           </a:fontRef>
         </p:style>
         <p:txBody>
-          <a:bodyPr rtlCol="0" anchor="ctr" wrap="square" lIns="73152" rIns="73152" tIns="36576" bIns="36576"/>
+          <a:bodyPr rtlCol="0" anchor="ctr" wrap="square" lIns="109728" rIns="109728" tIns="73152" bIns="73152"/>
           <a:lstStyle/>
           <a:p>
             <a:pPr algn="l">
@@ -10208,7 +10255,19 @@
             <a:r>
               <a:t>mkdir -p ~/ros2_curri/my_agv_ws/src/agv_control/agv_control</a:t>
             </a:r>
-            <a:br/>
+          </a:p>
+          <a:p>
+            <a:pPr algn="l">
+              <a:spcAft>
+                <a:spcPts val="0"/>
+              </a:spcAft>
+              <a:defRPr sz="1600" b="0">
+                <a:solidFill>
+                  <a:srgbClr val="FFFFFF"/>
+                </a:solidFill>
+                <a:latin typeface="DejaVu Sans Mono"/>
+              </a:defRPr>
+            </a:pPr>
             <a:r>
               <a:t>nano ~/ros2_curri/my_agv_ws/src/agv_control/agv_control/counter_publisher.py</a:t>
             </a:r>
@@ -14393,7 +14452,7 @@
           </a:fontRef>
         </p:style>
         <p:txBody>
-          <a:bodyPr rtlCol="0" anchor="ctr" wrap="square" lIns="164592" rIns="164592" tIns="109728" bIns="36576"/>
+          <a:bodyPr rtlCol="0" anchor="ctr" wrap="square" lIns="164592" rIns="164592" tIns="109728" bIns="73152"/>
           <a:lstStyle/>
           <a:p>
             <a:pPr algn="l">
@@ -14410,41 +14469,160 @@
             <a:r>
               <a:t>import rclpy</a:t>
             </a:r>
-            <a:br/>
+          </a:p>
+          <a:p>
+            <a:pPr algn="l">
+              <a:spcAft>
+                <a:spcPts val="0"/>
+              </a:spcAft>
+              <a:defRPr sz="1400" b="0">
+                <a:solidFill>
+                  <a:srgbClr val="FFFFFF"/>
+                </a:solidFill>
+                <a:latin typeface="DejaVu Sans Mono"/>
+              </a:defRPr>
+            </a:pPr>
             <a:r>
               <a:t>from rclpy.node import Node</a:t>
             </a:r>
-            <a:br/>
+          </a:p>
+          <a:p>
+            <a:pPr algn="l">
+              <a:spcAft>
+                <a:spcPts val="0"/>
+              </a:spcAft>
+              <a:defRPr sz="1400" b="0">
+                <a:solidFill>
+                  <a:srgbClr val="FFFFFF"/>
+                </a:solidFill>
+                <a:latin typeface="DejaVu Sans Mono"/>
+              </a:defRPr>
+            </a:pPr>
             <a:r>
               <a:t>from std_msgs.msg import Int32</a:t>
             </a:r>
-            <a:br/>
-            <a:br/>
+          </a:p>
+          <a:p>
+            <a:pPr algn="l">
+              <a:spcAft>
+                <a:spcPts val="0"/>
+              </a:spcAft>
+              <a:defRPr sz="1400" b="0">
+                <a:solidFill>
+                  <a:srgbClr val="FFFFFF"/>
+                </a:solidFill>
+                <a:latin typeface="DejaVu Sans Mono"/>
+              </a:defRPr>
+            </a:pPr>
+          </a:p>
+          <a:p>
+            <a:pPr algn="l">
+              <a:spcAft>
+                <a:spcPts val="0"/>
+              </a:spcAft>
+              <a:defRPr sz="1400" b="0">
+                <a:solidFill>
+                  <a:srgbClr val="FFFFFF"/>
+                </a:solidFill>
+                <a:latin typeface="DejaVu Sans Mono"/>
+              </a:defRPr>
+            </a:pPr>
             <a:r>
               <a:t>class CounterPublisher(Node):</a:t>
             </a:r>
-            <a:br/>
-            <a:br/>
+          </a:p>
+          <a:p>
+            <a:pPr algn="l">
+              <a:spcAft>
+                <a:spcPts val="0"/>
+              </a:spcAft>
+              <a:defRPr sz="1400" b="0">
+                <a:solidFill>
+                  <a:srgbClr val="FFFFFF"/>
+                </a:solidFill>
+                <a:latin typeface="DejaVu Sans Mono"/>
+              </a:defRPr>
+            </a:pPr>
+          </a:p>
+          <a:p>
+            <a:pPr algn="l">
+              <a:spcAft>
+                <a:spcPts val="0"/>
+              </a:spcAft>
+              <a:defRPr sz="1400" b="0">
+                <a:solidFill>
+                  <a:srgbClr val="FFFFFF"/>
+                </a:solidFill>
+                <a:latin typeface="DejaVu Sans Mono"/>
+              </a:defRPr>
+            </a:pPr>
             <a:r>
               <a:t>    def __init__(self):</a:t>
             </a:r>
-            <a:br/>
+          </a:p>
+          <a:p>
+            <a:pPr algn="l">
+              <a:spcAft>
+                <a:spcPts val="0"/>
+              </a:spcAft>
+              <a:defRPr sz="1400" b="0">
+                <a:solidFill>
+                  <a:srgbClr val="FFFFFF"/>
+                </a:solidFill>
+                <a:latin typeface="DejaVu Sans Mono"/>
+              </a:defRPr>
+            </a:pPr>
             <a:r>
               <a:t>        super().__init__('counter_publisher')</a:t>
             </a:r>
-            <a:br/>
+          </a:p>
+          <a:p>
+            <a:pPr algn="l">
+              <a:spcAft>
+                <a:spcPts val="0"/>
+              </a:spcAft>
+              <a:defRPr sz="1400" b="0">
+                <a:solidFill>
+                  <a:srgbClr val="FFFFFF"/>
+                </a:solidFill>
+                <a:latin typeface="DejaVu Sans Mono"/>
+              </a:defRPr>
+            </a:pPr>
             <a:r>
               <a:t>        self.publisher = self.create_publisher(Int32, '/counter', 10)</a:t>
             </a:r>
-            <a:br/>
+          </a:p>
+          <a:p>
+            <a:pPr algn="l">
+              <a:spcAft>
+                <a:spcPts val="0"/>
+              </a:spcAft>
+              <a:defRPr sz="1400" b="0">
+                <a:solidFill>
+                  <a:srgbClr val="FFFFFF"/>
+                </a:solidFill>
+                <a:latin typeface="DejaVu Sans Mono"/>
+              </a:defRPr>
+            </a:pPr>
             <a:r>
               <a:t>        self.value = 0</a:t>
             </a:r>
-            <a:br/>
+          </a:p>
+          <a:p>
+            <a:pPr algn="l">
+              <a:spcAft>
+                <a:spcPts val="0"/>
+              </a:spcAft>
+              <a:defRPr sz="1400" b="0">
+                <a:solidFill>
+                  <a:srgbClr val="FFFFFF"/>
+                </a:solidFill>
+                <a:latin typeface="DejaVu Sans Mono"/>
+              </a:defRPr>
+            </a:pPr>
             <a:r>
               <a:t>        self.create_timer(1.0, self.publish_counter)</a:t>
             </a:r>
-            <a:br/>
           </a:p>
         </p:txBody>
       </p:sp>
@@ -14858,7 +15036,7 @@
           </a:fontRef>
         </p:style>
         <p:txBody>
-          <a:bodyPr rtlCol="0" anchor="ctr" wrap="square" lIns="164592" rIns="164592" tIns="109728" bIns="36576"/>
+          <a:bodyPr rtlCol="0" anchor="ctr" wrap="square" lIns="164592" rIns="164592" tIns="109728" bIns="73152"/>
           <a:lstStyle/>
           <a:p>
             <a:pPr algn="l">
@@ -14875,44 +15053,176 @@
             <a:r>
               <a:t>    def publish_counter(self):</a:t>
             </a:r>
-            <a:br/>
+          </a:p>
+          <a:p>
+            <a:pPr algn="l">
+              <a:spcAft>
+                <a:spcPts val="0"/>
+              </a:spcAft>
+              <a:defRPr sz="1400" b="0">
+                <a:solidFill>
+                  <a:srgbClr val="FFFFFF"/>
+                </a:solidFill>
+                <a:latin typeface="DejaVu Sans Mono"/>
+              </a:defRPr>
+            </a:pPr>
             <a:r>
               <a:t>        message = Int32(data=self.value)</a:t>
             </a:r>
-            <a:br/>
+          </a:p>
+          <a:p>
+            <a:pPr algn="l">
+              <a:spcAft>
+                <a:spcPts val="0"/>
+              </a:spcAft>
+              <a:defRPr sz="1400" b="0">
+                <a:solidFill>
+                  <a:srgbClr val="FFFFFF"/>
+                </a:solidFill>
+                <a:latin typeface="DejaVu Sans Mono"/>
+              </a:defRPr>
+            </a:pPr>
             <a:r>
               <a:t>        self.publisher.publish(message)</a:t>
             </a:r>
-            <a:br/>
+          </a:p>
+          <a:p>
+            <a:pPr algn="l">
+              <a:spcAft>
+                <a:spcPts val="0"/>
+              </a:spcAft>
+              <a:defRPr sz="1400" b="0">
+                <a:solidFill>
+                  <a:srgbClr val="FFFFFF"/>
+                </a:solidFill>
+                <a:latin typeface="DejaVu Sans Mono"/>
+              </a:defRPr>
+            </a:pPr>
             <a:r>
               <a:t>        self.get_logger().info(f'/counter: {message.data}')</a:t>
             </a:r>
-            <a:br/>
+          </a:p>
+          <a:p>
+            <a:pPr algn="l">
+              <a:spcAft>
+                <a:spcPts val="0"/>
+              </a:spcAft>
+              <a:defRPr sz="1400" b="0">
+                <a:solidFill>
+                  <a:srgbClr val="FFFFFF"/>
+                </a:solidFill>
+                <a:latin typeface="DejaVu Sans Mono"/>
+              </a:defRPr>
+            </a:pPr>
             <a:r>
               <a:t>        self.value += 1</a:t>
             </a:r>
-            <a:br/>
-            <a:br/>
+          </a:p>
+          <a:p>
+            <a:pPr algn="l">
+              <a:spcAft>
+                <a:spcPts val="0"/>
+              </a:spcAft>
+              <a:defRPr sz="1400" b="0">
+                <a:solidFill>
+                  <a:srgbClr val="FFFFFF"/>
+                </a:solidFill>
+                <a:latin typeface="DejaVu Sans Mono"/>
+              </a:defRPr>
+            </a:pPr>
+          </a:p>
+          <a:p>
+            <a:pPr algn="l">
+              <a:spcAft>
+                <a:spcPts val="0"/>
+              </a:spcAft>
+              <a:defRPr sz="1400" b="0">
+                <a:solidFill>
+                  <a:srgbClr val="FFFFFF"/>
+                </a:solidFill>
+                <a:latin typeface="DejaVu Sans Mono"/>
+              </a:defRPr>
+            </a:pPr>
             <a:r>
               <a:t>def main():</a:t>
             </a:r>
-            <a:br/>
+          </a:p>
+          <a:p>
+            <a:pPr algn="l">
+              <a:spcAft>
+                <a:spcPts val="0"/>
+              </a:spcAft>
+              <a:defRPr sz="1400" b="0">
+                <a:solidFill>
+                  <a:srgbClr val="FFFFFF"/>
+                </a:solidFill>
+                <a:latin typeface="DejaVu Sans Mono"/>
+              </a:defRPr>
+            </a:pPr>
             <a:r>
               <a:t>    rclpy.init()</a:t>
             </a:r>
-            <a:br/>
+          </a:p>
+          <a:p>
+            <a:pPr algn="l">
+              <a:spcAft>
+                <a:spcPts val="0"/>
+              </a:spcAft>
+              <a:defRPr sz="1400" b="0">
+                <a:solidFill>
+                  <a:srgbClr val="FFFFFF"/>
+                </a:solidFill>
+                <a:latin typeface="DejaVu Sans Mono"/>
+              </a:defRPr>
+            </a:pPr>
             <a:r>
               <a:t>    node = CounterPublisher()</a:t>
             </a:r>
-            <a:br/>
+          </a:p>
+          <a:p>
+            <a:pPr algn="l">
+              <a:spcAft>
+                <a:spcPts val="0"/>
+              </a:spcAft>
+              <a:defRPr sz="1400" b="0">
+                <a:solidFill>
+                  <a:srgbClr val="FFFFFF"/>
+                </a:solidFill>
+                <a:latin typeface="DejaVu Sans Mono"/>
+              </a:defRPr>
+            </a:pPr>
             <a:r>
               <a:t>    try:</a:t>
             </a:r>
-            <a:br/>
+          </a:p>
+          <a:p>
+            <a:pPr algn="l">
+              <a:spcAft>
+                <a:spcPts val="0"/>
+              </a:spcAft>
+              <a:defRPr sz="1400" b="0">
+                <a:solidFill>
+                  <a:srgbClr val="FFFFFF"/>
+                </a:solidFill>
+                <a:latin typeface="DejaVu Sans Mono"/>
+              </a:defRPr>
+            </a:pPr>
             <a:r>
               <a:t>        rclpy.spin(node)</a:t>
             </a:r>
-            <a:br/>
+          </a:p>
+          <a:p>
+            <a:pPr algn="l">
+              <a:spcAft>
+                <a:spcPts val="0"/>
+              </a:spcAft>
+              <a:defRPr sz="1400" b="0">
+                <a:solidFill>
+                  <a:srgbClr val="FFFFFF"/>
+                </a:solidFill>
+                <a:latin typeface="DejaVu Sans Mono"/>
+              </a:defRPr>
+            </a:pPr>
             <a:r>
               <a:t>    except KeyboardInterrupt:</a:t>
             </a:r>
@@ -15329,7 +15639,7 @@
           </a:fontRef>
         </p:style>
         <p:txBody>
-          <a:bodyPr rtlCol="0" anchor="ctr" wrap="square" lIns="164592" rIns="164592" tIns="109728" bIns="36576"/>
+          <a:bodyPr rtlCol="0" anchor="ctr" wrap="square" lIns="164592" rIns="164592" tIns="109728" bIns="73152"/>
           <a:lstStyle/>
           <a:p>
             <a:pPr algn="l">
@@ -15346,19 +15656,67 @@
             <a:r>
               <a:t>        pass</a:t>
             </a:r>
-            <a:br/>
+          </a:p>
+          <a:p>
+            <a:pPr algn="l">
+              <a:spcAft>
+                <a:spcPts val="0"/>
+              </a:spcAft>
+              <a:defRPr sz="1400" b="0">
+                <a:solidFill>
+                  <a:srgbClr val="FFFFFF"/>
+                </a:solidFill>
+                <a:latin typeface="DejaVu Sans Mono"/>
+              </a:defRPr>
+            </a:pPr>
             <a:r>
               <a:t>    finally:</a:t>
             </a:r>
-            <a:br/>
+          </a:p>
+          <a:p>
+            <a:pPr algn="l">
+              <a:spcAft>
+                <a:spcPts val="0"/>
+              </a:spcAft>
+              <a:defRPr sz="1400" b="0">
+                <a:solidFill>
+                  <a:srgbClr val="FFFFFF"/>
+                </a:solidFill>
+                <a:latin typeface="DejaVu Sans Mono"/>
+              </a:defRPr>
+            </a:pPr>
             <a:r>
               <a:t>        node.destroy_node()</a:t>
             </a:r>
-            <a:br/>
+          </a:p>
+          <a:p>
+            <a:pPr algn="l">
+              <a:spcAft>
+                <a:spcPts val="0"/>
+              </a:spcAft>
+              <a:defRPr sz="1400" b="0">
+                <a:solidFill>
+                  <a:srgbClr val="FFFFFF"/>
+                </a:solidFill>
+                <a:latin typeface="DejaVu Sans Mono"/>
+              </a:defRPr>
+            </a:pPr>
             <a:r>
               <a:t>        if rclpy.ok():</a:t>
             </a:r>
-            <a:br/>
+          </a:p>
+          <a:p>
+            <a:pPr algn="l">
+              <a:spcAft>
+                <a:spcPts val="0"/>
+              </a:spcAft>
+              <a:defRPr sz="1400" b="0">
+                <a:solidFill>
+                  <a:srgbClr val="FFFFFF"/>
+                </a:solidFill>
+                <a:latin typeface="DejaVu Sans Mono"/>
+              </a:defRPr>
+            </a:pPr>
             <a:r>
               <a:t>            rclpy.shutdown()</a:t>
             </a:r>
@@ -16291,7 +16649,7 @@
           </a:fontRef>
         </p:style>
         <p:txBody>
-          <a:bodyPr rtlCol="0" anchor="ctr" wrap="square" lIns="73152" rIns="73152" tIns="36576" bIns="36576"/>
+          <a:bodyPr rtlCol="0" anchor="ctr" wrap="square" lIns="109728" rIns="109728" tIns="73152" bIns="73152"/>
           <a:lstStyle/>
           <a:p>
             <a:pPr algn="l">
@@ -16308,7 +16666,19 @@
             <a:r>
               <a:t>mkdir -p ~/ros2_curri/my_agv_ws/src/agv_control/agv_control</a:t>
             </a:r>
-            <a:br/>
+          </a:p>
+          <a:p>
+            <a:pPr algn="l">
+              <a:spcAft>
+                <a:spcPts val="0"/>
+              </a:spcAft>
+              <a:defRPr sz="1600" b="0">
+                <a:solidFill>
+                  <a:srgbClr val="FFFFFF"/>
+                </a:solidFill>
+                <a:latin typeface="DejaVu Sans Mono"/>
+              </a:defRPr>
+            </a:pPr>
             <a:r>
               <a:t>nano ~/ros2_curri/my_agv_ws/src/agv_control/agv_control/counter_monitor.py</a:t>
             </a:r>
@@ -20497,7 +20867,7 @@
           </a:fontRef>
         </p:style>
         <p:txBody>
-          <a:bodyPr rtlCol="0" anchor="ctr" wrap="square" lIns="164592" rIns="164592" tIns="109728" bIns="36576"/>
+          <a:bodyPr rtlCol="0" anchor="ctr" wrap="square" lIns="164592" rIns="164592" tIns="109728" bIns="73152"/>
           <a:lstStyle/>
           <a:p>
             <a:pPr algn="l">
@@ -20514,38 +20884,170 @@
             <a:r>
               <a:t>import rclpy</a:t>
             </a:r>
-            <a:br/>
+          </a:p>
+          <a:p>
+            <a:pPr algn="l">
+              <a:spcAft>
+                <a:spcPts val="0"/>
+              </a:spcAft>
+              <a:defRPr sz="1400" b="0">
+                <a:solidFill>
+                  <a:srgbClr val="FFFFFF"/>
+                </a:solidFill>
+                <a:latin typeface="DejaVu Sans Mono"/>
+              </a:defRPr>
+            </a:pPr>
             <a:r>
               <a:t>from rclpy.node import Node</a:t>
             </a:r>
-            <a:br/>
+          </a:p>
+          <a:p>
+            <a:pPr algn="l">
+              <a:spcAft>
+                <a:spcPts val="0"/>
+              </a:spcAft>
+              <a:defRPr sz="1400" b="0">
+                <a:solidFill>
+                  <a:srgbClr val="FFFFFF"/>
+                </a:solidFill>
+                <a:latin typeface="DejaVu Sans Mono"/>
+              </a:defRPr>
+            </a:pPr>
             <a:r>
               <a:t>from std_msgs.msg import Int32</a:t>
             </a:r>
-            <a:br/>
-            <a:br/>
+          </a:p>
+          <a:p>
+            <a:pPr algn="l">
+              <a:spcAft>
+                <a:spcPts val="0"/>
+              </a:spcAft>
+              <a:defRPr sz="1400" b="0">
+                <a:solidFill>
+                  <a:srgbClr val="FFFFFF"/>
+                </a:solidFill>
+                <a:latin typeface="DejaVu Sans Mono"/>
+              </a:defRPr>
+            </a:pPr>
+          </a:p>
+          <a:p>
+            <a:pPr algn="l">
+              <a:spcAft>
+                <a:spcPts val="0"/>
+              </a:spcAft>
+              <a:defRPr sz="1400" b="0">
+                <a:solidFill>
+                  <a:srgbClr val="FFFFFF"/>
+                </a:solidFill>
+                <a:latin typeface="DejaVu Sans Mono"/>
+              </a:defRPr>
+            </a:pPr>
             <a:r>
               <a:t>class CounterMonitor(Node):</a:t>
             </a:r>
-            <a:br/>
-            <a:br/>
+          </a:p>
+          <a:p>
+            <a:pPr algn="l">
+              <a:spcAft>
+                <a:spcPts val="0"/>
+              </a:spcAft>
+              <a:defRPr sz="1400" b="0">
+                <a:solidFill>
+                  <a:srgbClr val="FFFFFF"/>
+                </a:solidFill>
+                <a:latin typeface="DejaVu Sans Mono"/>
+              </a:defRPr>
+            </a:pPr>
+          </a:p>
+          <a:p>
+            <a:pPr algn="l">
+              <a:spcAft>
+                <a:spcPts val="0"/>
+              </a:spcAft>
+              <a:defRPr sz="1400" b="0">
+                <a:solidFill>
+                  <a:srgbClr val="FFFFFF"/>
+                </a:solidFill>
+                <a:latin typeface="DejaVu Sans Mono"/>
+              </a:defRPr>
+            </a:pPr>
             <a:r>
               <a:t>    def __init__(self):</a:t>
             </a:r>
-            <a:br/>
+          </a:p>
+          <a:p>
+            <a:pPr algn="l">
+              <a:spcAft>
+                <a:spcPts val="0"/>
+              </a:spcAft>
+              <a:defRPr sz="1400" b="0">
+                <a:solidFill>
+                  <a:srgbClr val="FFFFFF"/>
+                </a:solidFill>
+                <a:latin typeface="DejaVu Sans Mono"/>
+              </a:defRPr>
+            </a:pPr>
             <a:r>
               <a:t>        super().__init__('counter_monitor')</a:t>
             </a:r>
-            <a:br/>
+          </a:p>
+          <a:p>
+            <a:pPr algn="l">
+              <a:spcAft>
+                <a:spcPts val="0"/>
+              </a:spcAft>
+              <a:defRPr sz="1400" b="0">
+                <a:solidFill>
+                  <a:srgbClr val="FFFFFF"/>
+                </a:solidFill>
+                <a:latin typeface="DejaVu Sans Mono"/>
+              </a:defRPr>
+            </a:pPr>
             <a:r>
               <a:t>        self.create_subscription(Int32, '/counter', self.callback, 10)</a:t>
             </a:r>
-            <a:br/>
-            <a:br/>
+          </a:p>
+          <a:p>
+            <a:pPr algn="l">
+              <a:spcAft>
+                <a:spcPts val="0"/>
+              </a:spcAft>
+              <a:defRPr sz="1400" b="0">
+                <a:solidFill>
+                  <a:srgbClr val="FFFFFF"/>
+                </a:solidFill>
+                <a:latin typeface="DejaVu Sans Mono"/>
+              </a:defRPr>
+            </a:pPr>
+          </a:p>
+          <a:p>
+            <a:pPr algn="l">
+              <a:spcAft>
+                <a:spcPts val="0"/>
+              </a:spcAft>
+              <a:defRPr sz="1400" b="0">
+                <a:solidFill>
+                  <a:srgbClr val="FFFFFF"/>
+                </a:solidFill>
+                <a:latin typeface="DejaVu Sans Mono"/>
+              </a:defRPr>
+            </a:pPr>
             <a:r>
               <a:t>    def callback(self, message):</a:t>
             </a:r>
-            <a:br/>
+          </a:p>
+          <a:p>
+            <a:pPr algn="l">
+              <a:spcAft>
+                <a:spcPts val="0"/>
+              </a:spcAft>
+              <a:defRPr sz="1400" b="0">
+                <a:solidFill>
+                  <a:srgbClr val="FFFFFF"/>
+                </a:solidFill>
+                <a:latin typeface="DejaVu Sans Mono"/>
+              </a:defRPr>
+            </a:pPr>
             <a:r>
               <a:t>        self.get_logger().info(f'received /counter: {message.data}')</a:t>
             </a:r>
@@ -20962,7 +21464,7 @@
           </a:fontRef>
         </p:style>
         <p:txBody>
-          <a:bodyPr rtlCol="0" anchor="ctr" wrap="square" lIns="164592" rIns="164592" tIns="109728" bIns="36576"/>
+          <a:bodyPr rtlCol="0" anchor="ctr" wrap="square" lIns="164592" rIns="164592" tIns="109728" bIns="73152"/>
           <a:lstStyle/>
           <a:p>
             <a:pPr algn="l">
@@ -20976,47 +21478,179 @@
                 <a:latin typeface="DejaVu Sans Mono"/>
               </a:defRPr>
             </a:pPr>
-            <a:br/>
+          </a:p>
+          <a:p>
+            <a:pPr algn="l">
+              <a:spcAft>
+                <a:spcPts val="0"/>
+              </a:spcAft>
+              <a:defRPr sz="1400" b="0">
+                <a:solidFill>
+                  <a:srgbClr val="FFFFFF"/>
+                </a:solidFill>
+                <a:latin typeface="DejaVu Sans Mono"/>
+              </a:defRPr>
+            </a:pPr>
             <a:r>
               <a:t>def main():</a:t>
             </a:r>
-            <a:br/>
+          </a:p>
+          <a:p>
+            <a:pPr algn="l">
+              <a:spcAft>
+                <a:spcPts val="0"/>
+              </a:spcAft>
+              <a:defRPr sz="1400" b="0">
+                <a:solidFill>
+                  <a:srgbClr val="FFFFFF"/>
+                </a:solidFill>
+                <a:latin typeface="DejaVu Sans Mono"/>
+              </a:defRPr>
+            </a:pPr>
             <a:r>
               <a:t>    rclpy.init()</a:t>
             </a:r>
-            <a:br/>
+          </a:p>
+          <a:p>
+            <a:pPr algn="l">
+              <a:spcAft>
+                <a:spcPts val="0"/>
+              </a:spcAft>
+              <a:defRPr sz="1400" b="0">
+                <a:solidFill>
+                  <a:srgbClr val="FFFFFF"/>
+                </a:solidFill>
+                <a:latin typeface="DejaVu Sans Mono"/>
+              </a:defRPr>
+            </a:pPr>
             <a:r>
               <a:t>    node = CounterMonitor()</a:t>
             </a:r>
-            <a:br/>
+          </a:p>
+          <a:p>
+            <a:pPr algn="l">
+              <a:spcAft>
+                <a:spcPts val="0"/>
+              </a:spcAft>
+              <a:defRPr sz="1400" b="0">
+                <a:solidFill>
+                  <a:srgbClr val="FFFFFF"/>
+                </a:solidFill>
+                <a:latin typeface="DejaVu Sans Mono"/>
+              </a:defRPr>
+            </a:pPr>
             <a:r>
               <a:t>    try:</a:t>
             </a:r>
-            <a:br/>
+          </a:p>
+          <a:p>
+            <a:pPr algn="l">
+              <a:spcAft>
+                <a:spcPts val="0"/>
+              </a:spcAft>
+              <a:defRPr sz="1400" b="0">
+                <a:solidFill>
+                  <a:srgbClr val="FFFFFF"/>
+                </a:solidFill>
+                <a:latin typeface="DejaVu Sans Mono"/>
+              </a:defRPr>
+            </a:pPr>
             <a:r>
               <a:t>        rclpy.spin(node)</a:t>
             </a:r>
-            <a:br/>
+          </a:p>
+          <a:p>
+            <a:pPr algn="l">
+              <a:spcAft>
+                <a:spcPts val="0"/>
+              </a:spcAft>
+              <a:defRPr sz="1400" b="0">
+                <a:solidFill>
+                  <a:srgbClr val="FFFFFF"/>
+                </a:solidFill>
+                <a:latin typeface="DejaVu Sans Mono"/>
+              </a:defRPr>
+            </a:pPr>
             <a:r>
               <a:t>    except KeyboardInterrupt:</a:t>
             </a:r>
-            <a:br/>
+          </a:p>
+          <a:p>
+            <a:pPr algn="l">
+              <a:spcAft>
+                <a:spcPts val="0"/>
+              </a:spcAft>
+              <a:defRPr sz="1400" b="0">
+                <a:solidFill>
+                  <a:srgbClr val="FFFFFF"/>
+                </a:solidFill>
+                <a:latin typeface="DejaVu Sans Mono"/>
+              </a:defRPr>
+            </a:pPr>
             <a:r>
               <a:t>        pass</a:t>
             </a:r>
-            <a:br/>
+          </a:p>
+          <a:p>
+            <a:pPr algn="l">
+              <a:spcAft>
+                <a:spcPts val="0"/>
+              </a:spcAft>
+              <a:defRPr sz="1400" b="0">
+                <a:solidFill>
+                  <a:srgbClr val="FFFFFF"/>
+                </a:solidFill>
+                <a:latin typeface="DejaVu Sans Mono"/>
+              </a:defRPr>
+            </a:pPr>
             <a:r>
               <a:t>    finally:</a:t>
             </a:r>
-            <a:br/>
+          </a:p>
+          <a:p>
+            <a:pPr algn="l">
+              <a:spcAft>
+                <a:spcPts val="0"/>
+              </a:spcAft>
+              <a:defRPr sz="1400" b="0">
+                <a:solidFill>
+                  <a:srgbClr val="FFFFFF"/>
+                </a:solidFill>
+                <a:latin typeface="DejaVu Sans Mono"/>
+              </a:defRPr>
+            </a:pPr>
             <a:r>
               <a:t>        node.destroy_node()</a:t>
             </a:r>
-            <a:br/>
+          </a:p>
+          <a:p>
+            <a:pPr algn="l">
+              <a:spcAft>
+                <a:spcPts val="0"/>
+              </a:spcAft>
+              <a:defRPr sz="1400" b="0">
+                <a:solidFill>
+                  <a:srgbClr val="FFFFFF"/>
+                </a:solidFill>
+                <a:latin typeface="DejaVu Sans Mono"/>
+              </a:defRPr>
+            </a:pPr>
             <a:r>
               <a:t>        if rclpy.ok():</a:t>
             </a:r>
-            <a:br/>
+          </a:p>
+          <a:p>
+            <a:pPr algn="l">
+              <a:spcAft>
+                <a:spcPts val="0"/>
+              </a:spcAft>
+              <a:defRPr sz="1400" b="0">
+                <a:solidFill>
+                  <a:srgbClr val="FFFFFF"/>
+                </a:solidFill>
+                <a:latin typeface="DejaVu Sans Mono"/>
+              </a:defRPr>
+            </a:pPr>
             <a:r>
               <a:t>            rclpy.shutdown()</a:t>
             </a:r>
@@ -21488,7 +22122,7 @@
           </a:fontRef>
         </p:style>
         <p:txBody>
-          <a:bodyPr rtlCol="0" anchor="ctr" wrap="square" lIns="73152" rIns="73152" tIns="36576" bIns="36576"/>
+          <a:bodyPr rtlCol="0" anchor="ctr" wrap="square" lIns="109728" rIns="109728" tIns="73152" bIns="73152"/>
           <a:lstStyle/>
           <a:p>
             <a:pPr algn="l">
@@ -21505,7 +22139,19 @@
             <a:r>
               <a:t>mkdir -p ~/ros2_curri/my_agv_ws/src/agv_control/agv_control</a:t>
             </a:r>
-            <a:br/>
+          </a:p>
+          <a:p>
+            <a:pPr algn="l">
+              <a:spcAft>
+                <a:spcPts val="0"/>
+              </a:spcAft>
+              <a:defRPr sz="1600" b="0">
+                <a:solidFill>
+                  <a:srgbClr val="FFFFFF"/>
+                </a:solidFill>
+                <a:latin typeface="DejaVu Sans Mono"/>
+              </a:defRPr>
+            </a:pPr>
             <a:r>
               <a:t>nano ~/ros2_curri/my_agv_ws/src/agv_control/agv_control/cmd_test_node.py</a:t>
             </a:r>
@@ -26113,7 +26759,7 @@
           </a:fontRef>
         </p:style>
         <p:txBody>
-          <a:bodyPr rtlCol="0" anchor="ctr" wrap="square" lIns="164592" rIns="164592" tIns="109728" bIns="36576"/>
+          <a:bodyPr rtlCol="0" anchor="ctr" wrap="square" lIns="164592" rIns="164592" tIns="109728" bIns="73152"/>
           <a:lstStyle/>
           <a:p>
             <a:pPr algn="l">
@@ -26130,41 +26776,173 @@
             <a:r>
               <a:t>import rclpy</a:t>
             </a:r>
-            <a:br/>
+          </a:p>
+          <a:p>
+            <a:pPr algn="l">
+              <a:spcAft>
+                <a:spcPts val="0"/>
+              </a:spcAft>
+              <a:defRPr sz="1400" b="0">
+                <a:solidFill>
+                  <a:srgbClr val="FFFFFF"/>
+                </a:solidFill>
+                <a:latin typeface="DejaVu Sans Mono"/>
+              </a:defRPr>
+            </a:pPr>
             <a:r>
               <a:t>from rclpy.node import Node</a:t>
             </a:r>
-            <a:br/>
+          </a:p>
+          <a:p>
+            <a:pPr algn="l">
+              <a:spcAft>
+                <a:spcPts val="0"/>
+              </a:spcAft>
+              <a:defRPr sz="1400" b="0">
+                <a:solidFill>
+                  <a:srgbClr val="FFFFFF"/>
+                </a:solidFill>
+                <a:latin typeface="DejaVu Sans Mono"/>
+              </a:defRPr>
+            </a:pPr>
             <a:r>
               <a:t>from geometry_msgs.msg import Twist</a:t>
             </a:r>
-            <a:br/>
-            <a:br/>
+          </a:p>
+          <a:p>
+            <a:pPr algn="l">
+              <a:spcAft>
+                <a:spcPts val="0"/>
+              </a:spcAft>
+              <a:defRPr sz="1400" b="0">
+                <a:solidFill>
+                  <a:srgbClr val="FFFFFF"/>
+                </a:solidFill>
+                <a:latin typeface="DejaVu Sans Mono"/>
+              </a:defRPr>
+            </a:pPr>
+          </a:p>
+          <a:p>
+            <a:pPr algn="l">
+              <a:spcAft>
+                <a:spcPts val="0"/>
+              </a:spcAft>
+              <a:defRPr sz="1400" b="0">
+                <a:solidFill>
+                  <a:srgbClr val="FFFFFF"/>
+                </a:solidFill>
+                <a:latin typeface="DejaVu Sans Mono"/>
+              </a:defRPr>
+            </a:pPr>
             <a:r>
               <a:t>class CmdTestNode(Node):</a:t>
             </a:r>
-            <a:br/>
-            <a:br/>
+          </a:p>
+          <a:p>
+            <a:pPr algn="l">
+              <a:spcAft>
+                <a:spcPts val="0"/>
+              </a:spcAft>
+              <a:defRPr sz="1400" b="0">
+                <a:solidFill>
+                  <a:srgbClr val="FFFFFF"/>
+                </a:solidFill>
+                <a:latin typeface="DejaVu Sans Mono"/>
+              </a:defRPr>
+            </a:pPr>
+          </a:p>
+          <a:p>
+            <a:pPr algn="l">
+              <a:spcAft>
+                <a:spcPts val="0"/>
+              </a:spcAft>
+              <a:defRPr sz="1400" b="0">
+                <a:solidFill>
+                  <a:srgbClr val="FFFFFF"/>
+                </a:solidFill>
+                <a:latin typeface="DejaVu Sans Mono"/>
+              </a:defRPr>
+            </a:pPr>
             <a:r>
               <a:t>    def __init__(self):</a:t>
             </a:r>
-            <a:br/>
+          </a:p>
+          <a:p>
+            <a:pPr algn="l">
+              <a:spcAft>
+                <a:spcPts val="0"/>
+              </a:spcAft>
+              <a:defRPr sz="1400" b="0">
+                <a:solidFill>
+                  <a:srgbClr val="FFFFFF"/>
+                </a:solidFill>
+                <a:latin typeface="DejaVu Sans Mono"/>
+              </a:defRPr>
+            </a:pPr>
             <a:r>
               <a:t>        super().__init__('cmd_test_node')</a:t>
             </a:r>
-            <a:br/>
+          </a:p>
+          <a:p>
+            <a:pPr algn="l">
+              <a:spcAft>
+                <a:spcPts val="0"/>
+              </a:spcAft>
+              <a:defRPr sz="1400" b="0">
+                <a:solidFill>
+                  <a:srgbClr val="FFFFFF"/>
+                </a:solidFill>
+                <a:latin typeface="DejaVu Sans Mono"/>
+              </a:defRPr>
+            </a:pPr>
             <a:r>
               <a:t>        self.declare_parameter('linear_speed', 0.15)</a:t>
             </a:r>
-            <a:br/>
+          </a:p>
+          <a:p>
+            <a:pPr algn="l">
+              <a:spcAft>
+                <a:spcPts val="0"/>
+              </a:spcAft>
+              <a:defRPr sz="1400" b="0">
+                <a:solidFill>
+                  <a:srgbClr val="FFFFFF"/>
+                </a:solidFill>
+                <a:latin typeface="DejaVu Sans Mono"/>
+              </a:defRPr>
+            </a:pPr>
             <a:r>
               <a:t>        self.declare_parameter('angular_speed', 0.0)</a:t>
             </a:r>
-            <a:br/>
+          </a:p>
+          <a:p>
+            <a:pPr algn="l">
+              <a:spcAft>
+                <a:spcPts val="0"/>
+              </a:spcAft>
+              <a:defRPr sz="1400" b="0">
+                <a:solidFill>
+                  <a:srgbClr val="FFFFFF"/>
+                </a:solidFill>
+                <a:latin typeface="DejaVu Sans Mono"/>
+              </a:defRPr>
+            </a:pPr>
             <a:r>
               <a:t>        self.publisher = self.create_publisher(Twist, '/cmd_vel', 10)</a:t>
             </a:r>
-            <a:br/>
+          </a:p>
+          <a:p>
+            <a:pPr algn="l">
+              <a:spcAft>
+                <a:spcPts val="0"/>
+              </a:spcAft>
+              <a:defRPr sz="1400" b="0">
+                <a:solidFill>
+                  <a:srgbClr val="FFFFFF"/>
+                </a:solidFill>
+                <a:latin typeface="DejaVu Sans Mono"/>
+              </a:defRPr>
+            </a:pPr>
             <a:r>
               <a:t>        self.remaining = 30</a:t>
             </a:r>
@@ -26581,7 +27359,7 @@
           </a:fontRef>
         </p:style>
         <p:txBody>
-          <a:bodyPr rtlCol="0" anchor="ctr" wrap="square" lIns="164592" rIns="164592" tIns="109728" bIns="36576"/>
+          <a:bodyPr rtlCol="0" anchor="ctr" wrap="square" lIns="164592" rIns="164592" tIns="109728" bIns="73152"/>
           <a:lstStyle/>
           <a:p>
             <a:pPr algn="l">
@@ -26598,44 +27376,176 @@
             <a:r>
               <a:t>        self.create_timer(0.1, self.publish_once)</a:t>
             </a:r>
-            <a:br/>
-            <a:br/>
+          </a:p>
+          <a:p>
+            <a:pPr algn="l">
+              <a:spcAft>
+                <a:spcPts val="0"/>
+              </a:spcAft>
+              <a:defRPr sz="1400" b="0">
+                <a:solidFill>
+                  <a:srgbClr val="FFFFFF"/>
+                </a:solidFill>
+                <a:latin typeface="DejaVu Sans Mono"/>
+              </a:defRPr>
+            </a:pPr>
+          </a:p>
+          <a:p>
+            <a:pPr algn="l">
+              <a:spcAft>
+                <a:spcPts val="0"/>
+              </a:spcAft>
+              <a:defRPr sz="1400" b="0">
+                <a:solidFill>
+                  <a:srgbClr val="FFFFFF"/>
+                </a:solidFill>
+                <a:latin typeface="DejaVu Sans Mono"/>
+              </a:defRPr>
+            </a:pPr>
             <a:r>
               <a:t>    def publish_once(self):</a:t>
             </a:r>
-            <a:br/>
+          </a:p>
+          <a:p>
+            <a:pPr algn="l">
+              <a:spcAft>
+                <a:spcPts val="0"/>
+              </a:spcAft>
+              <a:defRPr sz="1400" b="0">
+                <a:solidFill>
+                  <a:srgbClr val="FFFFFF"/>
+                </a:solidFill>
+                <a:latin typeface="DejaVu Sans Mono"/>
+              </a:defRPr>
+            </a:pPr>
             <a:r>
               <a:t>        command = Twist()</a:t>
             </a:r>
-            <a:br/>
+          </a:p>
+          <a:p>
+            <a:pPr algn="l">
+              <a:spcAft>
+                <a:spcPts val="0"/>
+              </a:spcAft>
+              <a:defRPr sz="1400" b="0">
+                <a:solidFill>
+                  <a:srgbClr val="FFFFFF"/>
+                </a:solidFill>
+                <a:latin typeface="DejaVu Sans Mono"/>
+              </a:defRPr>
+            </a:pPr>
             <a:r>
               <a:t>        if self.remaining &gt; 0:</a:t>
             </a:r>
-            <a:br/>
+          </a:p>
+          <a:p>
+            <a:pPr algn="l">
+              <a:spcAft>
+                <a:spcPts val="0"/>
+              </a:spcAft>
+              <a:defRPr sz="1400" b="0">
+                <a:solidFill>
+                  <a:srgbClr val="FFFFFF"/>
+                </a:solidFill>
+                <a:latin typeface="DejaVu Sans Mono"/>
+              </a:defRPr>
+            </a:pPr>
             <a:r>
               <a:t>            command.linear.x = self.get_parameter('linear_speed').value</a:t>
             </a:r>
-            <a:br/>
+          </a:p>
+          <a:p>
+            <a:pPr algn="l">
+              <a:spcAft>
+                <a:spcPts val="0"/>
+              </a:spcAft>
+              <a:defRPr sz="1400" b="0">
+                <a:solidFill>
+                  <a:srgbClr val="FFFFFF"/>
+                </a:solidFill>
+                <a:latin typeface="DejaVu Sans Mono"/>
+              </a:defRPr>
+            </a:pPr>
             <a:r>
               <a:t>            command.angular.z = self.get_parameter('angular_speed').value</a:t>
             </a:r>
-            <a:br/>
+          </a:p>
+          <a:p>
+            <a:pPr algn="l">
+              <a:spcAft>
+                <a:spcPts val="0"/>
+              </a:spcAft>
+              <a:defRPr sz="1400" b="0">
+                <a:solidFill>
+                  <a:srgbClr val="FFFFFF"/>
+                </a:solidFill>
+                <a:latin typeface="DejaVu Sans Mono"/>
+              </a:defRPr>
+            </a:pPr>
             <a:r>
               <a:t>            self.remaining -= 1</a:t>
             </a:r>
-            <a:br/>
+          </a:p>
+          <a:p>
+            <a:pPr algn="l">
+              <a:spcAft>
+                <a:spcPts val="0"/>
+              </a:spcAft>
+              <a:defRPr sz="1400" b="0">
+                <a:solidFill>
+                  <a:srgbClr val="FFFFFF"/>
+                </a:solidFill>
+                <a:latin typeface="DejaVu Sans Mono"/>
+              </a:defRPr>
+            </a:pPr>
             <a:r>
               <a:t>        self.publisher.publish(command)</a:t>
             </a:r>
-            <a:br/>
+          </a:p>
+          <a:p>
+            <a:pPr algn="l">
+              <a:spcAft>
+                <a:spcPts val="0"/>
+              </a:spcAft>
+              <a:defRPr sz="1400" b="0">
+                <a:solidFill>
+                  <a:srgbClr val="FFFFFF"/>
+                </a:solidFill>
+                <a:latin typeface="DejaVu Sans Mono"/>
+              </a:defRPr>
+            </a:pPr>
             <a:r>
               <a:t>        if self.remaining == 0:</a:t>
             </a:r>
-            <a:br/>
+          </a:p>
+          <a:p>
+            <a:pPr algn="l">
+              <a:spcAft>
+                <a:spcPts val="0"/>
+              </a:spcAft>
+              <a:defRPr sz="1400" b="0">
+                <a:solidFill>
+                  <a:srgbClr val="FFFFFF"/>
+                </a:solidFill>
+                <a:latin typeface="DejaVu Sans Mono"/>
+              </a:defRPr>
+            </a:pPr>
             <a:r>
               <a:t>            self.get_logger().info('test command finished; publishing zero Twist')</a:t>
             </a:r>
-            <a:br/>
+          </a:p>
+          <a:p>
+            <a:pPr algn="l">
+              <a:spcAft>
+                <a:spcPts val="0"/>
+              </a:spcAft>
+              <a:defRPr sz="1400" b="0">
+                <a:solidFill>
+                  <a:srgbClr val="FFFFFF"/>
+                </a:solidFill>
+                <a:latin typeface="DejaVu Sans Mono"/>
+              </a:defRPr>
+            </a:pPr>
             <a:r>
               <a:t>            self.remaining = -1</a:t>
             </a:r>
@@ -27052,7 +27962,7 @@
           </a:fontRef>
         </p:style>
         <p:txBody>
-          <a:bodyPr rtlCol="0" anchor="ctr" wrap="square" lIns="164592" rIns="164592" tIns="109728" bIns="36576"/>
+          <a:bodyPr rtlCol="0" anchor="ctr" wrap="square" lIns="164592" rIns="164592" tIns="109728" bIns="73152"/>
           <a:lstStyle/>
           <a:p>
             <a:pPr algn="l">
@@ -27066,47 +27976,179 @@
                 <a:latin typeface="DejaVu Sans Mono"/>
               </a:defRPr>
             </a:pPr>
-            <a:br/>
+          </a:p>
+          <a:p>
+            <a:pPr algn="l">
+              <a:spcAft>
+                <a:spcPts val="0"/>
+              </a:spcAft>
+              <a:defRPr sz="1400" b="0">
+                <a:solidFill>
+                  <a:srgbClr val="FFFFFF"/>
+                </a:solidFill>
+                <a:latin typeface="DejaVu Sans Mono"/>
+              </a:defRPr>
+            </a:pPr>
             <a:r>
               <a:t>def main():</a:t>
             </a:r>
-            <a:br/>
+          </a:p>
+          <a:p>
+            <a:pPr algn="l">
+              <a:spcAft>
+                <a:spcPts val="0"/>
+              </a:spcAft>
+              <a:defRPr sz="1400" b="0">
+                <a:solidFill>
+                  <a:srgbClr val="FFFFFF"/>
+                </a:solidFill>
+                <a:latin typeface="DejaVu Sans Mono"/>
+              </a:defRPr>
+            </a:pPr>
             <a:r>
               <a:t>    rclpy.init()</a:t>
             </a:r>
-            <a:br/>
+          </a:p>
+          <a:p>
+            <a:pPr algn="l">
+              <a:spcAft>
+                <a:spcPts val="0"/>
+              </a:spcAft>
+              <a:defRPr sz="1400" b="0">
+                <a:solidFill>
+                  <a:srgbClr val="FFFFFF"/>
+                </a:solidFill>
+                <a:latin typeface="DejaVu Sans Mono"/>
+              </a:defRPr>
+            </a:pPr>
             <a:r>
               <a:t>    node = CmdTestNode()</a:t>
             </a:r>
-            <a:br/>
+          </a:p>
+          <a:p>
+            <a:pPr algn="l">
+              <a:spcAft>
+                <a:spcPts val="0"/>
+              </a:spcAft>
+              <a:defRPr sz="1400" b="0">
+                <a:solidFill>
+                  <a:srgbClr val="FFFFFF"/>
+                </a:solidFill>
+                <a:latin typeface="DejaVu Sans Mono"/>
+              </a:defRPr>
+            </a:pPr>
             <a:r>
               <a:t>    try:</a:t>
             </a:r>
-            <a:br/>
+          </a:p>
+          <a:p>
+            <a:pPr algn="l">
+              <a:spcAft>
+                <a:spcPts val="0"/>
+              </a:spcAft>
+              <a:defRPr sz="1400" b="0">
+                <a:solidFill>
+                  <a:srgbClr val="FFFFFF"/>
+                </a:solidFill>
+                <a:latin typeface="DejaVu Sans Mono"/>
+              </a:defRPr>
+            </a:pPr>
             <a:r>
               <a:t>        rclpy.spin(node)</a:t>
             </a:r>
-            <a:br/>
+          </a:p>
+          <a:p>
+            <a:pPr algn="l">
+              <a:spcAft>
+                <a:spcPts val="0"/>
+              </a:spcAft>
+              <a:defRPr sz="1400" b="0">
+                <a:solidFill>
+                  <a:srgbClr val="FFFFFF"/>
+                </a:solidFill>
+                <a:latin typeface="DejaVu Sans Mono"/>
+              </a:defRPr>
+            </a:pPr>
             <a:r>
               <a:t>    except KeyboardInterrupt:</a:t>
             </a:r>
-            <a:br/>
+          </a:p>
+          <a:p>
+            <a:pPr algn="l">
+              <a:spcAft>
+                <a:spcPts val="0"/>
+              </a:spcAft>
+              <a:defRPr sz="1400" b="0">
+                <a:solidFill>
+                  <a:srgbClr val="FFFFFF"/>
+                </a:solidFill>
+                <a:latin typeface="DejaVu Sans Mono"/>
+              </a:defRPr>
+            </a:pPr>
             <a:r>
               <a:t>        pass</a:t>
             </a:r>
-            <a:br/>
+          </a:p>
+          <a:p>
+            <a:pPr algn="l">
+              <a:spcAft>
+                <a:spcPts val="0"/>
+              </a:spcAft>
+              <a:defRPr sz="1400" b="0">
+                <a:solidFill>
+                  <a:srgbClr val="FFFFFF"/>
+                </a:solidFill>
+                <a:latin typeface="DejaVu Sans Mono"/>
+              </a:defRPr>
+            </a:pPr>
             <a:r>
               <a:t>    finally:</a:t>
             </a:r>
-            <a:br/>
+          </a:p>
+          <a:p>
+            <a:pPr algn="l">
+              <a:spcAft>
+                <a:spcPts val="0"/>
+              </a:spcAft>
+              <a:defRPr sz="1400" b="0">
+                <a:solidFill>
+                  <a:srgbClr val="FFFFFF"/>
+                </a:solidFill>
+                <a:latin typeface="DejaVu Sans Mono"/>
+              </a:defRPr>
+            </a:pPr>
             <a:r>
               <a:t>        node.destroy_node()</a:t>
             </a:r>
-            <a:br/>
+          </a:p>
+          <a:p>
+            <a:pPr algn="l">
+              <a:spcAft>
+                <a:spcPts val="0"/>
+              </a:spcAft>
+              <a:defRPr sz="1400" b="0">
+                <a:solidFill>
+                  <a:srgbClr val="FFFFFF"/>
+                </a:solidFill>
+                <a:latin typeface="DejaVu Sans Mono"/>
+              </a:defRPr>
+            </a:pPr>
             <a:r>
               <a:t>        if rclpy.ok():</a:t>
             </a:r>
-            <a:br/>
+          </a:p>
+          <a:p>
+            <a:pPr algn="l">
+              <a:spcAft>
+                <a:spcPts val="0"/>
+              </a:spcAft>
+              <a:defRPr sz="1400" b="0">
+                <a:solidFill>
+                  <a:srgbClr val="FFFFFF"/>
+                </a:solidFill>
+                <a:latin typeface="DejaVu Sans Mono"/>
+              </a:defRPr>
+            </a:pPr>
             <a:r>
               <a:t>            rclpy.shutdown()</a:t>
             </a:r>
@@ -27578,7 +28620,7 @@
           </a:fontRef>
         </p:style>
         <p:txBody>
-          <a:bodyPr rtlCol="0" anchor="ctr" wrap="square" lIns="73152" rIns="73152" tIns="36576" bIns="36576"/>
+          <a:bodyPr rtlCol="0" anchor="ctr" wrap="square" lIns="109728" rIns="109728" tIns="73152" bIns="73152"/>
           <a:lstStyle/>
           <a:p>
             <a:pPr algn="l">
@@ -27595,7 +28637,19 @@
             <a:r>
               <a:t>mkdir -p ~/ros2_curri/my_agv_ws/src/agv_control/agv_control</a:t>
             </a:r>
-            <a:br/>
+          </a:p>
+          <a:p>
+            <a:pPr algn="l">
+              <a:spcAft>
+                <a:spcPts val="0"/>
+              </a:spcAft>
+              <a:defRPr sz="1600" b="0">
+                <a:solidFill>
+                  <a:srgbClr val="FFFFFF"/>
+                </a:solidFill>
+                <a:latin typeface="DejaVu Sans Mono"/>
+              </a:defRPr>
+            </a:pPr>
             <a:r>
               <a:t>nano ~/ros2_curri/my_agv_ws/src/agv_control/agv_control/velocity_monitor.py</a:t>
             </a:r>
@@ -32117,7 +33171,7 @@
           </a:fontRef>
         </p:style>
         <p:txBody>
-          <a:bodyPr rtlCol="0" anchor="ctr" wrap="square" lIns="164592" rIns="164592" tIns="109728" bIns="36576"/>
+          <a:bodyPr rtlCol="0" anchor="ctr" wrap="square" lIns="164592" rIns="164592" tIns="109728" bIns="73152"/>
           <a:lstStyle/>
           <a:p>
             <a:pPr algn="l">
@@ -32134,38 +33188,170 @@
             <a:r>
               <a:t>import rclpy</a:t>
             </a:r>
-            <a:br/>
+          </a:p>
+          <a:p>
+            <a:pPr algn="l">
+              <a:spcAft>
+                <a:spcPts val="0"/>
+              </a:spcAft>
+              <a:defRPr sz="1400" b="0">
+                <a:solidFill>
+                  <a:srgbClr val="FFFFFF"/>
+                </a:solidFill>
+                <a:latin typeface="DejaVu Sans Mono"/>
+              </a:defRPr>
+            </a:pPr>
             <a:r>
               <a:t>from rclpy.node import Node</a:t>
             </a:r>
-            <a:br/>
+          </a:p>
+          <a:p>
+            <a:pPr algn="l">
+              <a:spcAft>
+                <a:spcPts val="0"/>
+              </a:spcAft>
+              <a:defRPr sz="1400" b="0">
+                <a:solidFill>
+                  <a:srgbClr val="FFFFFF"/>
+                </a:solidFill>
+                <a:latin typeface="DejaVu Sans Mono"/>
+              </a:defRPr>
+            </a:pPr>
             <a:r>
               <a:t>from geometry_msgs.msg import Twist</a:t>
             </a:r>
-            <a:br/>
-            <a:br/>
+          </a:p>
+          <a:p>
+            <a:pPr algn="l">
+              <a:spcAft>
+                <a:spcPts val="0"/>
+              </a:spcAft>
+              <a:defRPr sz="1400" b="0">
+                <a:solidFill>
+                  <a:srgbClr val="FFFFFF"/>
+                </a:solidFill>
+                <a:latin typeface="DejaVu Sans Mono"/>
+              </a:defRPr>
+            </a:pPr>
+          </a:p>
+          <a:p>
+            <a:pPr algn="l">
+              <a:spcAft>
+                <a:spcPts val="0"/>
+              </a:spcAft>
+              <a:defRPr sz="1400" b="0">
+                <a:solidFill>
+                  <a:srgbClr val="FFFFFF"/>
+                </a:solidFill>
+                <a:latin typeface="DejaVu Sans Mono"/>
+              </a:defRPr>
+            </a:pPr>
             <a:r>
               <a:t>class VelocityMonitor(Node):</a:t>
             </a:r>
-            <a:br/>
-            <a:br/>
+          </a:p>
+          <a:p>
+            <a:pPr algn="l">
+              <a:spcAft>
+                <a:spcPts val="0"/>
+              </a:spcAft>
+              <a:defRPr sz="1400" b="0">
+                <a:solidFill>
+                  <a:srgbClr val="FFFFFF"/>
+                </a:solidFill>
+                <a:latin typeface="DejaVu Sans Mono"/>
+              </a:defRPr>
+            </a:pPr>
+          </a:p>
+          <a:p>
+            <a:pPr algn="l">
+              <a:spcAft>
+                <a:spcPts val="0"/>
+              </a:spcAft>
+              <a:defRPr sz="1400" b="0">
+                <a:solidFill>
+                  <a:srgbClr val="FFFFFF"/>
+                </a:solidFill>
+                <a:latin typeface="DejaVu Sans Mono"/>
+              </a:defRPr>
+            </a:pPr>
             <a:r>
               <a:t>    def __init__(self):</a:t>
             </a:r>
-            <a:br/>
+          </a:p>
+          <a:p>
+            <a:pPr algn="l">
+              <a:spcAft>
+                <a:spcPts val="0"/>
+              </a:spcAft>
+              <a:defRPr sz="1400" b="0">
+                <a:solidFill>
+                  <a:srgbClr val="FFFFFF"/>
+                </a:solidFill>
+                <a:latin typeface="DejaVu Sans Mono"/>
+              </a:defRPr>
+            </a:pPr>
             <a:r>
               <a:t>        super().__init__('velocity_monitor')</a:t>
             </a:r>
-            <a:br/>
+          </a:p>
+          <a:p>
+            <a:pPr algn="l">
+              <a:spcAft>
+                <a:spcPts val="0"/>
+              </a:spcAft>
+              <a:defRPr sz="1400" b="0">
+                <a:solidFill>
+                  <a:srgbClr val="FFFFFF"/>
+                </a:solidFill>
+                <a:latin typeface="DejaVu Sans Mono"/>
+              </a:defRPr>
+            </a:pPr>
             <a:r>
               <a:t>        self.create_subscription(Twist, '/cmd_vel', self.callback, 10)</a:t>
             </a:r>
-            <a:br/>
-            <a:br/>
+          </a:p>
+          <a:p>
+            <a:pPr algn="l">
+              <a:spcAft>
+                <a:spcPts val="0"/>
+              </a:spcAft>
+              <a:defRPr sz="1400" b="0">
+                <a:solidFill>
+                  <a:srgbClr val="FFFFFF"/>
+                </a:solidFill>
+                <a:latin typeface="DejaVu Sans Mono"/>
+              </a:defRPr>
+            </a:pPr>
+          </a:p>
+          <a:p>
+            <a:pPr algn="l">
+              <a:spcAft>
+                <a:spcPts val="0"/>
+              </a:spcAft>
+              <a:defRPr sz="1400" b="0">
+                <a:solidFill>
+                  <a:srgbClr val="FFFFFF"/>
+                </a:solidFill>
+                <a:latin typeface="DejaVu Sans Mono"/>
+              </a:defRPr>
+            </a:pPr>
             <a:r>
               <a:t>    def callback(self, message):</a:t>
             </a:r>
-            <a:br/>
+          </a:p>
+          <a:p>
+            <a:pPr algn="l">
+              <a:spcAft>
+                <a:spcPts val="0"/>
+              </a:spcAft>
+              <a:defRPr sz="1400" b="0">
+                <a:solidFill>
+                  <a:srgbClr val="FFFFFF"/>
+                </a:solidFill>
+                <a:latin typeface="DejaVu Sans Mono"/>
+              </a:defRPr>
+            </a:pPr>
             <a:r>
               <a:t>        self.get_logger().info('cmd_vel linear.x=%.3f angular.z=%.3f' % (message.linear.x,</a:t>
             </a:r>
@@ -32582,7 +33768,7 @@
           </a:fontRef>
         </p:style>
         <p:txBody>
-          <a:bodyPr rtlCol="0" anchor="ctr" wrap="square" lIns="164592" rIns="164592" tIns="109728" bIns="36576"/>
+          <a:bodyPr rtlCol="0" anchor="ctr" wrap="square" lIns="164592" rIns="164592" tIns="109728" bIns="73152"/>
           <a:lstStyle/>
           <a:p>
             <a:pPr algn="l">
@@ -32599,44 +33785,176 @@
             <a:r>
               <a:t>             message.angular.z))</a:t>
             </a:r>
-            <a:br/>
-            <a:br/>
+          </a:p>
+          <a:p>
+            <a:pPr algn="l">
+              <a:spcAft>
+                <a:spcPts val="0"/>
+              </a:spcAft>
+              <a:defRPr sz="1400" b="0">
+                <a:solidFill>
+                  <a:srgbClr val="FFFFFF"/>
+                </a:solidFill>
+                <a:latin typeface="DejaVu Sans Mono"/>
+              </a:defRPr>
+            </a:pPr>
+          </a:p>
+          <a:p>
+            <a:pPr algn="l">
+              <a:spcAft>
+                <a:spcPts val="0"/>
+              </a:spcAft>
+              <a:defRPr sz="1400" b="0">
+                <a:solidFill>
+                  <a:srgbClr val="FFFFFF"/>
+                </a:solidFill>
+                <a:latin typeface="DejaVu Sans Mono"/>
+              </a:defRPr>
+            </a:pPr>
             <a:r>
               <a:t>def main():</a:t>
             </a:r>
-            <a:br/>
+          </a:p>
+          <a:p>
+            <a:pPr algn="l">
+              <a:spcAft>
+                <a:spcPts val="0"/>
+              </a:spcAft>
+              <a:defRPr sz="1400" b="0">
+                <a:solidFill>
+                  <a:srgbClr val="FFFFFF"/>
+                </a:solidFill>
+                <a:latin typeface="DejaVu Sans Mono"/>
+              </a:defRPr>
+            </a:pPr>
             <a:r>
               <a:t>    rclpy.init()</a:t>
             </a:r>
-            <a:br/>
+          </a:p>
+          <a:p>
+            <a:pPr algn="l">
+              <a:spcAft>
+                <a:spcPts val="0"/>
+              </a:spcAft>
+              <a:defRPr sz="1400" b="0">
+                <a:solidFill>
+                  <a:srgbClr val="FFFFFF"/>
+                </a:solidFill>
+                <a:latin typeface="DejaVu Sans Mono"/>
+              </a:defRPr>
+            </a:pPr>
             <a:r>
               <a:t>    node = VelocityMonitor()</a:t>
             </a:r>
-            <a:br/>
+          </a:p>
+          <a:p>
+            <a:pPr algn="l">
+              <a:spcAft>
+                <a:spcPts val="0"/>
+              </a:spcAft>
+              <a:defRPr sz="1400" b="0">
+                <a:solidFill>
+                  <a:srgbClr val="FFFFFF"/>
+                </a:solidFill>
+                <a:latin typeface="DejaVu Sans Mono"/>
+              </a:defRPr>
+            </a:pPr>
             <a:r>
               <a:t>    try:</a:t>
             </a:r>
-            <a:br/>
+          </a:p>
+          <a:p>
+            <a:pPr algn="l">
+              <a:spcAft>
+                <a:spcPts val="0"/>
+              </a:spcAft>
+              <a:defRPr sz="1400" b="0">
+                <a:solidFill>
+                  <a:srgbClr val="FFFFFF"/>
+                </a:solidFill>
+                <a:latin typeface="DejaVu Sans Mono"/>
+              </a:defRPr>
+            </a:pPr>
             <a:r>
               <a:t>        rclpy.spin(node)</a:t>
             </a:r>
-            <a:br/>
+          </a:p>
+          <a:p>
+            <a:pPr algn="l">
+              <a:spcAft>
+                <a:spcPts val="0"/>
+              </a:spcAft>
+              <a:defRPr sz="1400" b="0">
+                <a:solidFill>
+                  <a:srgbClr val="FFFFFF"/>
+                </a:solidFill>
+                <a:latin typeface="DejaVu Sans Mono"/>
+              </a:defRPr>
+            </a:pPr>
             <a:r>
               <a:t>    except KeyboardInterrupt:</a:t>
             </a:r>
-            <a:br/>
+          </a:p>
+          <a:p>
+            <a:pPr algn="l">
+              <a:spcAft>
+                <a:spcPts val="0"/>
+              </a:spcAft>
+              <a:defRPr sz="1400" b="0">
+                <a:solidFill>
+                  <a:srgbClr val="FFFFFF"/>
+                </a:solidFill>
+                <a:latin typeface="DejaVu Sans Mono"/>
+              </a:defRPr>
+            </a:pPr>
             <a:r>
               <a:t>        pass</a:t>
             </a:r>
-            <a:br/>
+          </a:p>
+          <a:p>
+            <a:pPr algn="l">
+              <a:spcAft>
+                <a:spcPts val="0"/>
+              </a:spcAft>
+              <a:defRPr sz="1400" b="0">
+                <a:solidFill>
+                  <a:srgbClr val="FFFFFF"/>
+                </a:solidFill>
+                <a:latin typeface="DejaVu Sans Mono"/>
+              </a:defRPr>
+            </a:pPr>
             <a:r>
               <a:t>    finally:</a:t>
             </a:r>
-            <a:br/>
+          </a:p>
+          <a:p>
+            <a:pPr algn="l">
+              <a:spcAft>
+                <a:spcPts val="0"/>
+              </a:spcAft>
+              <a:defRPr sz="1400" b="0">
+                <a:solidFill>
+                  <a:srgbClr val="FFFFFF"/>
+                </a:solidFill>
+                <a:latin typeface="DejaVu Sans Mono"/>
+              </a:defRPr>
+            </a:pPr>
             <a:r>
               <a:t>        node.destroy_node()</a:t>
             </a:r>
-            <a:br/>
+          </a:p>
+          <a:p>
+            <a:pPr algn="l">
+              <a:spcAft>
+                <a:spcPts val="0"/>
+              </a:spcAft>
+              <a:defRPr sz="1400" b="0">
+                <a:solidFill>
+                  <a:srgbClr val="FFFFFF"/>
+                </a:solidFill>
+                <a:latin typeface="DejaVu Sans Mono"/>
+              </a:defRPr>
+            </a:pPr>
             <a:r>
               <a:t>        if rclpy.ok():</a:t>
             </a:r>
@@ -33053,7 +34371,7 @@
           </a:fontRef>
         </p:style>
         <p:txBody>
-          <a:bodyPr rtlCol="0" anchor="ctr" wrap="square" lIns="164592" rIns="164592" tIns="109728" bIns="36576"/>
+          <a:bodyPr rtlCol="0" anchor="ctr" wrap="square" lIns="164592" rIns="164592" tIns="109728" bIns="73152"/>
           <a:lstStyle/>
           <a:p>
             <a:pPr algn="l">
@@ -33538,7 +34856,7 @@
           </a:fontRef>
         </p:style>
         <p:txBody>
-          <a:bodyPr rtlCol="0" anchor="ctr" wrap="square" lIns="73152" rIns="73152" tIns="36576" bIns="36576"/>
+          <a:bodyPr rtlCol="0" anchor="ctr" wrap="square" lIns="109728" rIns="109728" tIns="73152" bIns="73152"/>
           <a:lstStyle/>
           <a:p>
             <a:pPr algn="l">
@@ -33555,7 +34873,19 @@
             <a:r>
               <a:t>mkdir -p ~/ros2_curri/my_agv_ws/src/agv_control</a:t>
             </a:r>
-            <a:br/>
+          </a:p>
+          <a:p>
+            <a:pPr algn="l">
+              <a:spcAft>
+                <a:spcPts val="0"/>
+              </a:spcAft>
+              <a:defRPr sz="1600" b="0">
+                <a:solidFill>
+                  <a:srgbClr val="FFFFFF"/>
+                </a:solidFill>
+                <a:latin typeface="DejaVu Sans Mono"/>
+              </a:defRPr>
+            </a:pPr>
             <a:r>
               <a:t>nano ~/ros2_curri/my_agv_ws/src/agv_control/setup.py</a:t>
             </a:r>
@@ -35597,7 +36927,7 @@
           </a:fontRef>
         </p:style>
         <p:txBody>
-          <a:bodyPr rtlCol="0" anchor="ctr" wrap="square" lIns="164592" rIns="164592" tIns="109728" bIns="36576"/>
+          <a:bodyPr rtlCol="0" anchor="ctr" wrap="square" lIns="164592" rIns="164592" tIns="109728" bIns="73152"/>
           <a:lstStyle/>
           <a:p>
             <a:pPr algn="l">
@@ -35614,47 +36944,179 @@
             <a:r>
               <a:t>from setuptools import find_packages, setup</a:t>
             </a:r>
-            <a:br/>
+          </a:p>
+          <a:p>
+            <a:pPr algn="l">
+              <a:spcAft>
+                <a:spcPts val="0"/>
+              </a:spcAft>
+              <a:defRPr sz="1400" b="0">
+                <a:solidFill>
+                  <a:srgbClr val="FFFFFF"/>
+                </a:solidFill>
+                <a:latin typeface="DejaVu Sans Mono"/>
+              </a:defRPr>
+            </a:pPr>
             <a:r>
               <a:t>package_name = 'agv_control'</a:t>
             </a:r>
-            <a:br/>
+          </a:p>
+          <a:p>
+            <a:pPr algn="l">
+              <a:spcAft>
+                <a:spcPts val="0"/>
+              </a:spcAft>
+              <a:defRPr sz="1400" b="0">
+                <a:solidFill>
+                  <a:srgbClr val="FFFFFF"/>
+                </a:solidFill>
+                <a:latin typeface="DejaVu Sans Mono"/>
+              </a:defRPr>
+            </a:pPr>
             <a:r>
               <a:t>setup(name=package_name, version='0.1.0', packages=find_packages(exclude=['test']),</a:t>
             </a:r>
-            <a:br/>
+          </a:p>
+          <a:p>
+            <a:pPr algn="l">
+              <a:spcAft>
+                <a:spcPts val="0"/>
+              </a:spcAft>
+              <a:defRPr sz="1400" b="0">
+                <a:solidFill>
+                  <a:srgbClr val="FFFFFF"/>
+                </a:solidFill>
+                <a:latin typeface="DejaVu Sans Mono"/>
+              </a:defRPr>
+            </a:pPr>
             <a:r>
               <a:t>    data_files=[('share/ament_index/resource_index/packages',</a:t>
             </a:r>
-            <a:br/>
+          </a:p>
+          <a:p>
+            <a:pPr algn="l">
+              <a:spcAft>
+                <a:spcPts val="0"/>
+              </a:spcAft>
+              <a:defRPr sz="1400" b="0">
+                <a:solidFill>
+                  <a:srgbClr val="FFFFFF"/>
+                </a:solidFill>
+                <a:latin typeface="DejaVu Sans Mono"/>
+              </a:defRPr>
+            </a:pPr>
             <a:r>
               <a:t>    ['resource/' + package_name]), ('share/' + package_name, ['package.xml']),</a:t>
             </a:r>
-            <a:br/>
+          </a:p>
+          <a:p>
+            <a:pPr algn="l">
+              <a:spcAft>
+                <a:spcPts val="0"/>
+              </a:spcAft>
+              <a:defRPr sz="1400" b="0">
+                <a:solidFill>
+                  <a:srgbClr val="FFFFFF"/>
+                </a:solidFill>
+                <a:latin typeface="DejaVu Sans Mono"/>
+              </a:defRPr>
+            </a:pPr>
             <a:r>
               <a:t>    ('share/' + package_name + '/config', ['config/controllers.yaml'])],</a:t>
             </a:r>
-            <a:br/>
+          </a:p>
+          <a:p>
+            <a:pPr algn="l">
+              <a:spcAft>
+                <a:spcPts val="0"/>
+              </a:spcAft>
+              <a:defRPr sz="1400" b="0">
+                <a:solidFill>
+                  <a:srgbClr val="FFFFFF"/>
+                </a:solidFill>
+                <a:latin typeface="DejaVu Sans Mono"/>
+              </a:defRPr>
+            </a:pPr>
             <a:r>
               <a:t>    install_requires=['setuptools'], zip_safe=True, maintainer='AGV student',</a:t>
             </a:r>
-            <a:br/>
+          </a:p>
+          <a:p>
+            <a:pPr algn="l">
+              <a:spcAft>
+                <a:spcPts val="0"/>
+              </a:spcAft>
+              <a:defRPr sz="1400" b="0">
+                <a:solidFill>
+                  <a:srgbClr val="FFFFFF"/>
+                </a:solidFill>
+                <a:latin typeface="DejaVu Sans Mono"/>
+              </a:defRPr>
+            </a:pPr>
             <a:r>
               <a:t>    maintainer_email='student@example.com', license='Apache-2.0',</a:t>
             </a:r>
-            <a:br/>
+          </a:p>
+          <a:p>
+            <a:pPr algn="l">
+              <a:spcAft>
+                <a:spcPts val="0"/>
+              </a:spcAft>
+              <a:defRPr sz="1400" b="0">
+                <a:solidFill>
+                  <a:srgbClr val="FFFFFF"/>
+                </a:solidFill>
+                <a:latin typeface="DejaVu Sans Mono"/>
+              </a:defRPr>
+            </a:pPr>
             <a:r>
               <a:t>    entry_points={'console_scripts': ['counter_publisher = agv_control.counter_publisher:main',</a:t>
             </a:r>
-            <a:br/>
+          </a:p>
+          <a:p>
+            <a:pPr algn="l">
+              <a:spcAft>
+                <a:spcPts val="0"/>
+              </a:spcAft>
+              <a:defRPr sz="1400" b="0">
+                <a:solidFill>
+                  <a:srgbClr val="FFFFFF"/>
+                </a:solidFill>
+                <a:latin typeface="DejaVu Sans Mono"/>
+              </a:defRPr>
+            </a:pPr>
             <a:r>
               <a:t>     'counter_monitor = agv_control.counter_monitor:main', 'cmd_test_node = agv_control.cmd_test_node:main',</a:t>
             </a:r>
-            <a:br/>
+          </a:p>
+          <a:p>
+            <a:pPr algn="l">
+              <a:spcAft>
+                <a:spcPts val="0"/>
+              </a:spcAft>
+              <a:defRPr sz="1400" b="0">
+                <a:solidFill>
+                  <a:srgbClr val="FFFFFF"/>
+                </a:solidFill>
+                <a:latin typeface="DejaVu Sans Mono"/>
+              </a:defRPr>
+            </a:pPr>
             <a:r>
               <a:t>     'velocity_monitor = agv_control.velocity_monitor:main', 'safety_controller = agv_control.safety_controller:main',</a:t>
             </a:r>
-            <a:br/>
+          </a:p>
+          <a:p>
+            <a:pPr algn="l">
+              <a:spcAft>
+                <a:spcPts val="0"/>
+              </a:spcAft>
+              <a:defRPr sz="1400" b="0">
+                <a:solidFill>
+                  <a:srgbClr val="FFFFFF"/>
+                </a:solidFill>
+                <a:latin typeface="DejaVu Sans Mono"/>
+              </a:defRPr>
+            </a:pPr>
             <a:r>
               <a:t>     'pid_controller = agv_control.pid_controller:main']})</a:t>
             </a:r>
@@ -36567,7 +38029,7 @@
               </a:defRPr>
             </a:pPr>
             <a:r>
-              <a:t>현재 단계 실행 1/2    |    현재 폴더 ~/ros2_curri/my_agv_ws    |    현재 터미널</a:t>
+              <a:t>현재 단계 실행 1/2    |    현재 폴더 ~/ros2_curri/my_agv_ws    |    터미널 1</a:t>
             </a:r>
           </a:p>
         </p:txBody>
@@ -36580,25 +38042,25 @@
         </p:nvSpPr>
         <p:spPr>
           <a:xfrm>
-            <a:off x="676656" y="1764792"/>
-            <a:ext cx="1828800" cy="347472"/>
-          </a:xfrm>
-          <a:prstGeom prst="rect">
-            <a:avLst/>
-          </a:prstGeom>
-          <a:noFill/>
-        </p:spPr>
-        <p:txBody>
-          <a:bodyPr wrap="square" lIns="73152" rIns="73152" tIns="36576" bIns="36576">
-            <a:spAutoFit/>
-          </a:bodyPr>
-          <a:lstStyle/>
-          <a:p>
-            <a:pPr algn="l">
-              <a:spcAft>
-                <a:spcPts val="0"/>
-              </a:spcAft>
-              <a:defRPr sz="1800" b="1">
+            <a:off x="676656" y="1719072"/>
+            <a:ext cx="1691640" cy="274320"/>
+          </a:xfrm>
+          <a:prstGeom prst="rect">
+            <a:avLst/>
+          </a:prstGeom>
+          <a:noFill/>
+        </p:spPr>
+        <p:txBody>
+          <a:bodyPr wrap="square" lIns="73152" rIns="73152" tIns="36576" bIns="36576">
+            <a:spAutoFit/>
+          </a:bodyPr>
+          <a:lstStyle/>
+          <a:p>
+            <a:pPr algn="l">
+              <a:spcAft>
+                <a:spcPts val="0"/>
+              </a:spcAft>
+              <a:defRPr sz="1700" b="1">
                 <a:solidFill>
                   <a:srgbClr val="225B9B"/>
                 </a:solidFill>
@@ -36606,7 +38068,7 @@
               </a:defRPr>
             </a:pPr>
             <a:r>
-              <a:t>왜 하는가</a:t>
+              <a:t>명령의 목적</a:t>
             </a:r>
           </a:p>
         </p:txBody>
@@ -36619,7 +38081,7 @@
         </p:nvSpPr>
         <p:spPr>
           <a:xfrm>
-            <a:off x="676656" y="2103120"/>
+            <a:off x="676656" y="2002536"/>
             <a:ext cx="10789920" cy="512064"/>
           </a:xfrm>
           <a:prstGeom prst="rect">
@@ -36637,7 +38099,7 @@
               <a:spcAft>
                 <a:spcPts val="0"/>
               </a:spcAft>
-              <a:defRPr sz="2000" b="0">
+              <a:defRPr sz="1800" b="0">
                 <a:solidFill>
                   <a:srgbClr val="122C4E"/>
                 </a:solidFill>
@@ -36652,14 +38114,53 @@
       </p:sp>
       <p:sp>
         <p:nvSpPr>
-          <p:cNvPr id="9" name="Rounded Rectangle 8"/>
+          <p:cNvPr id="9" name="TextBox 8"/>
+          <p:cNvSpPr txBox="1"/>
+          <p:nvPr/>
+        </p:nvSpPr>
+        <p:spPr>
+          <a:xfrm>
+            <a:off x="676656" y="2816352"/>
+            <a:ext cx="10835640" cy="256032"/>
+          </a:xfrm>
+          <a:prstGeom prst="rect">
+            <a:avLst/>
+          </a:prstGeom>
+          <a:noFill/>
+        </p:spPr>
+        <p:txBody>
+          <a:bodyPr wrap="square" lIns="73152" rIns="73152" tIns="36576" bIns="36576">
+            <a:spAutoFit/>
+          </a:bodyPr>
+          <a:lstStyle/>
+          <a:p>
+            <a:pPr algn="ctr">
+              <a:spcAft>
+                <a:spcPts val="0"/>
+              </a:spcAft>
+              <a:defRPr sz="1600" b="1">
+                <a:solidFill>
+                  <a:srgbClr val="225B9B"/>
+                </a:solidFill>
+                <a:latin typeface="Noto Sans CJK KR"/>
+              </a:defRPr>
+            </a:pPr>
+            <a:r>
+              <a:t>터미널 1 — 아래 검은 블록은 명령만 복사합니다.</a:t>
+            </a:r>
+          </a:p>
+        </p:txBody>
+      </p:sp>
+      <p:sp>
+        <p:nvSpPr>
+          <p:cNvPr id="10" name="Rounded Rectangle 9"/>
           <p:cNvSpPr/>
           <p:nvPr/>
         </p:nvSpPr>
         <p:spPr>
           <a:xfrm>
-            <a:off x="676656" y="2871216"/>
-            <a:ext cx="10835640" cy="2331720"/>
+            <a:off x="676656" y="3154680"/>
+            <a:ext cx="10835640" cy="1938528"/>
           </a:xfrm>
           <a:prstGeom prst="roundRect">
             <a:avLst/>
@@ -36688,7 +38189,7 @@
           </a:fontRef>
         </p:style>
         <p:txBody>
-          <a:bodyPr rtlCol="0" anchor="ctr" wrap="square" lIns="73152" rIns="73152" tIns="36576" bIns="36576"/>
+          <a:bodyPr rtlCol="0" anchor="ctr" wrap="square" lIns="109728" rIns="109728" tIns="73152" bIns="73152"/>
           <a:lstStyle/>
           <a:p>
             <a:pPr algn="l">
@@ -36705,11 +38206,35 @@
             <a:r>
               <a:t>cd ~/ros2_curri/my_agv_ws</a:t>
             </a:r>
-            <a:br/>
+          </a:p>
+          <a:p>
+            <a:pPr algn="l">
+              <a:spcAft>
+                <a:spcPts val="0"/>
+              </a:spcAft>
+              <a:defRPr sz="1600" b="0">
+                <a:solidFill>
+                  <a:srgbClr val="FFFFFF"/>
+                </a:solidFill>
+                <a:latin typeface="DejaVu Sans Mono"/>
+              </a:defRPr>
+            </a:pPr>
             <a:r>
               <a:t>colcon build --symlink-install --packages-select agv_control</a:t>
             </a:r>
-            <a:br/>
+          </a:p>
+          <a:p>
+            <a:pPr algn="l">
+              <a:spcAft>
+                <a:spcPts val="0"/>
+              </a:spcAft>
+              <a:defRPr sz="1600" b="0">
+                <a:solidFill>
+                  <a:srgbClr val="FFFFFF"/>
+                </a:solidFill>
+                <a:latin typeface="DejaVu Sans Mono"/>
+              </a:defRPr>
+            </a:pPr>
             <a:r>
               <a:t>source install/setup.bash</a:t>
             </a:r>
@@ -36718,31 +38243,31 @@
       </p:sp>
       <p:sp>
         <p:nvSpPr>
-          <p:cNvPr id="10" name="TextBox 9"/>
-          <p:cNvSpPr txBox="1"/>
-          <p:nvPr/>
-        </p:nvSpPr>
-        <p:spPr>
-          <a:xfrm>
-            <a:off x="768096" y="5468112"/>
-            <a:ext cx="1143000" cy="256032"/>
-          </a:xfrm>
-          <a:prstGeom prst="rect">
-            <a:avLst/>
-          </a:prstGeom>
-          <a:noFill/>
-        </p:spPr>
-        <p:txBody>
-          <a:bodyPr wrap="square" lIns="73152" rIns="73152" tIns="36576" bIns="36576">
-            <a:spAutoFit/>
-          </a:bodyPr>
-          <a:lstStyle/>
-          <a:p>
-            <a:pPr algn="l">
-              <a:spcAft>
-                <a:spcPts val="0"/>
-              </a:spcAft>
-              <a:defRPr sz="1800" b="1">
+          <p:cNvPr id="11" name="TextBox 10"/>
+          <p:cNvSpPr txBox="1"/>
+          <p:nvPr/>
+        </p:nvSpPr>
+        <p:spPr>
+          <a:xfrm>
+            <a:off x="768096" y="5276088"/>
+            <a:ext cx="10561320" cy="384048"/>
+          </a:xfrm>
+          <a:prstGeom prst="rect">
+            <a:avLst/>
+          </a:prstGeom>
+          <a:noFill/>
+        </p:spPr>
+        <p:txBody>
+          <a:bodyPr wrap="square" lIns="73152" rIns="73152" tIns="36576" bIns="36576">
+            <a:spAutoFit/>
+          </a:bodyPr>
+          <a:lstStyle/>
+          <a:p>
+            <a:pPr algn="ctr">
+              <a:spcAft>
+                <a:spcPts val="0"/>
+              </a:spcAft>
+              <a:defRPr sz="1500" b="1">
                 <a:solidFill>
                   <a:srgbClr val="2A8B5A"/>
                 </a:solidFill>
@@ -36750,38 +38275,38 @@
               </a:defRPr>
             </a:pPr>
             <a:r>
-              <a:t>확인</a:t>
-            </a:r>
-          </a:p>
-        </p:txBody>
-      </p:sp>
-      <p:sp>
-        <p:nvSpPr>
-          <p:cNvPr id="11" name="TextBox 10"/>
-          <p:cNvSpPr txBox="1"/>
-          <p:nvPr/>
-        </p:nvSpPr>
-        <p:spPr>
-          <a:xfrm>
-            <a:off x="768096" y="5742432"/>
-            <a:ext cx="10561320" cy="347472"/>
-          </a:xfrm>
-          <a:prstGeom prst="rect">
-            <a:avLst/>
-          </a:prstGeom>
-          <a:noFill/>
-        </p:spPr>
-        <p:txBody>
-          <a:bodyPr wrap="square" lIns="73152" rIns="73152" tIns="36576" bIns="36576">
-            <a:spAutoFit/>
-          </a:bodyPr>
-          <a:lstStyle/>
-          <a:p>
-            <a:pPr algn="l">
-              <a:spcAft>
-                <a:spcPts val="0"/>
-              </a:spcAft>
-              <a:defRPr sz="1800" b="0">
+              <a:t>터미널 1 역할: 터미널 1에서 이 명령만 그대로 복사해 실행합니다.</a:t>
+            </a:r>
+          </a:p>
+        </p:txBody>
+      </p:sp>
+      <p:sp>
+        <p:nvSpPr>
+          <p:cNvPr id="12" name="TextBox 11"/>
+          <p:cNvSpPr txBox="1"/>
+          <p:nvPr/>
+        </p:nvSpPr>
+        <p:spPr>
+          <a:xfrm>
+            <a:off x="768096" y="5916168"/>
+            <a:ext cx="10561320" cy="292608"/>
+          </a:xfrm>
+          <a:prstGeom prst="rect">
+            <a:avLst/>
+          </a:prstGeom>
+          <a:noFill/>
+        </p:spPr>
+        <p:txBody>
+          <a:bodyPr wrap="square" lIns="73152" rIns="73152" tIns="36576" bIns="36576">
+            <a:spAutoFit/>
+          </a:bodyPr>
+          <a:lstStyle/>
+          <a:p>
+            <a:pPr algn="ctr">
+              <a:spcAft>
+                <a:spcPts val="0"/>
+              </a:spcAft>
+              <a:defRPr sz="1500" b="1">
                 <a:solidFill>
                   <a:srgbClr val="122C4E"/>
                 </a:solidFill>
@@ -36789,7 +38314,7 @@
               </a:defRPr>
             </a:pPr>
             <a:r>
-              <a:t>출력에서 topic·frame·파일 이름 또는 성공 메시지를 찾고, 맞지 않으면 다음 파일로 가지 않습니다.</a:t>
+              <a:t>확인: 출력에서 topic·frame·파일 이름 또는 성공 메시지를 찾고, 맞지 않으면 다음 파일로 가지 않습니다.</a:t>
             </a:r>
           </a:p>
         </p:txBody>
@@ -37021,7 +38546,7 @@
               </a:defRPr>
             </a:pPr>
             <a:r>
-              <a:t>현재 단계 실행 2/2    |    현재 폴더 ~/ros2_curri/my_agv_ws    |    현재 터미널</a:t>
+              <a:t>현재 단계 실행 2/2    |    현재 폴더 ~/ros2_curri/my_agv_ws    |    터미널 1 + 2</a:t>
             </a:r>
           </a:p>
         </p:txBody>
@@ -37034,25 +38559,25 @@
         </p:nvSpPr>
         <p:spPr>
           <a:xfrm>
-            <a:off x="676656" y="1764792"/>
-            <a:ext cx="1828800" cy="347472"/>
-          </a:xfrm>
-          <a:prstGeom prst="rect">
-            <a:avLst/>
-          </a:prstGeom>
-          <a:noFill/>
-        </p:spPr>
-        <p:txBody>
-          <a:bodyPr wrap="square" lIns="73152" rIns="73152" tIns="36576" bIns="36576">
-            <a:spAutoFit/>
-          </a:bodyPr>
-          <a:lstStyle/>
-          <a:p>
-            <a:pPr algn="l">
-              <a:spcAft>
-                <a:spcPts val="0"/>
-              </a:spcAft>
-              <a:defRPr sz="1800" b="1">
+            <a:off x="676656" y="1719072"/>
+            <a:ext cx="1691640" cy="274320"/>
+          </a:xfrm>
+          <a:prstGeom prst="rect">
+            <a:avLst/>
+          </a:prstGeom>
+          <a:noFill/>
+        </p:spPr>
+        <p:txBody>
+          <a:bodyPr wrap="square" lIns="73152" rIns="73152" tIns="36576" bIns="36576">
+            <a:spAutoFit/>
+          </a:bodyPr>
+          <a:lstStyle/>
+          <a:p>
+            <a:pPr algn="l">
+              <a:spcAft>
+                <a:spcPts val="0"/>
+              </a:spcAft>
+              <a:defRPr sz="1700" b="1">
                 <a:solidFill>
                   <a:srgbClr val="225B9B"/>
                 </a:solidFill>
@@ -37060,7 +38585,7 @@
               </a:defRPr>
             </a:pPr>
             <a:r>
-              <a:t>왜 하는가</a:t>
+              <a:t>명령의 목적</a:t>
             </a:r>
           </a:p>
         </p:txBody>
@@ -37073,7 +38598,7 @@
         </p:nvSpPr>
         <p:spPr>
           <a:xfrm>
-            <a:off x="676656" y="2103120"/>
+            <a:off x="676656" y="2002536"/>
             <a:ext cx="10789920" cy="512064"/>
           </a:xfrm>
           <a:prstGeom prst="rect">
@@ -37091,7 +38616,7 @@
               <a:spcAft>
                 <a:spcPts val="0"/>
               </a:spcAft>
-              <a:defRPr sz="2000" b="0">
+              <a:defRPr sz="1800" b="0">
                 <a:solidFill>
                   <a:srgbClr val="122C4E"/>
                 </a:solidFill>
@@ -37099,21 +38624,99 @@
               </a:defRPr>
             </a:pPr>
             <a:r>
-              <a:t>publisher 출력과 monitor 수신을 분리해 확인한다.</a:t>
-            </a:r>
-          </a:p>
-        </p:txBody>
-      </p:sp>
-      <p:sp>
-        <p:nvSpPr>
-          <p:cNvPr id="9" name="Rounded Rectangle 8"/>
+              <a:t>publisher 출력과 monitor 수신을 분리해 확인한다. 두 node가 동시에 살아 있어야 /counter를 주고받는다.</a:t>
+            </a:r>
+          </a:p>
+        </p:txBody>
+      </p:sp>
+      <p:sp>
+        <p:nvSpPr>
+          <p:cNvPr id="9" name="TextBox 8"/>
+          <p:cNvSpPr txBox="1"/>
+          <p:nvPr/>
+        </p:nvSpPr>
+        <p:spPr>
+          <a:xfrm>
+            <a:off x="676656" y="2679192"/>
+            <a:ext cx="10789920" cy="237744"/>
+          </a:xfrm>
+          <a:prstGeom prst="rect">
+            <a:avLst/>
+          </a:prstGeom>
+          <a:noFill/>
+        </p:spPr>
+        <p:txBody>
+          <a:bodyPr wrap="square" lIns="73152" rIns="73152" tIns="36576" bIns="36576">
+            <a:spAutoFit/>
+          </a:bodyPr>
+          <a:lstStyle/>
+          <a:p>
+            <a:pPr algn="ctr">
+              <a:spcAft>
+                <a:spcPts val="0"/>
+              </a:spcAft>
+              <a:defRPr sz="1400" b="1">
+                <a:solidFill>
+                  <a:srgbClr val="DB7E22"/>
+                </a:solidFill>
+                <a:latin typeface="Noto Sans CJK KR"/>
+              </a:defRPr>
+            </a:pPr>
+            <a:r>
+              <a:t>두 터미널은 동시에 필요합니다. 각 검은 블록에는 그대로 복사할 명령만 들어 있습니다.</a:t>
+            </a:r>
+          </a:p>
+        </p:txBody>
+      </p:sp>
+      <p:sp>
+        <p:nvSpPr>
+          <p:cNvPr id="10" name="TextBox 9"/>
+          <p:cNvSpPr txBox="1"/>
+          <p:nvPr/>
+        </p:nvSpPr>
+        <p:spPr>
+          <a:xfrm>
+            <a:off x="676656" y="3017520"/>
+            <a:ext cx="5138928" cy="256032"/>
+          </a:xfrm>
+          <a:prstGeom prst="rect">
+            <a:avLst/>
+          </a:prstGeom>
+          <a:noFill/>
+        </p:spPr>
+        <p:txBody>
+          <a:bodyPr wrap="square" lIns="73152" rIns="73152" tIns="36576" bIns="36576">
+            <a:spAutoFit/>
+          </a:bodyPr>
+          <a:lstStyle/>
+          <a:p>
+            <a:pPr algn="ctr">
+              <a:spcAft>
+                <a:spcPts val="0"/>
+              </a:spcAft>
+              <a:defRPr sz="1600" b="1">
+                <a:solidFill>
+                  <a:srgbClr val="225B9B"/>
+                </a:solidFill>
+                <a:latin typeface="Noto Sans CJK KR"/>
+              </a:defRPr>
+            </a:pPr>
+            <a:r>
+              <a:t>터미널 1 — 명령만 복사</a:t>
+            </a:r>
+          </a:p>
+        </p:txBody>
+      </p:sp>
+      <p:sp>
+        <p:nvSpPr>
+          <p:cNvPr id="11" name="Rounded Rectangle 10"/>
           <p:cNvSpPr/>
           <p:nvPr/>
         </p:nvSpPr>
         <p:spPr>
           <a:xfrm>
-            <a:off x="676656" y="2871216"/>
-            <a:ext cx="10835640" cy="2331720"/>
+            <a:off x="676656" y="3328416"/>
+            <a:ext cx="5138928" cy="1700784"/>
           </a:xfrm>
           <a:prstGeom prst="roundRect">
             <a:avLst/>
@@ -37142,14 +38745,14 @@
           </a:fontRef>
         </p:style>
         <p:txBody>
-          <a:bodyPr rtlCol="0" anchor="ctr" wrap="square" lIns="73152" rIns="73152" tIns="36576" bIns="36576"/>
-          <a:lstStyle/>
-          <a:p>
-            <a:pPr algn="l">
-              <a:spcAft>
-                <a:spcPts val="0"/>
-              </a:spcAft>
-              <a:defRPr sz="1600" b="0">
+          <a:bodyPr rtlCol="0" anchor="ctr" wrap="square" lIns="109728" rIns="109728" tIns="73152" bIns="73152"/>
+          <a:lstStyle/>
+          <a:p>
+            <a:pPr algn="l">
+              <a:spcAft>
+                <a:spcPts val="0"/>
+              </a:spcAft>
+              <a:defRPr sz="1400" b="0">
                 <a:solidFill>
                   <a:srgbClr val="FFFFFF"/>
                 </a:solidFill>
@@ -37157,17 +38760,205 @@
               </a:defRPr>
             </a:pPr>
             <a:r>
-              <a:t># 터미널 1</a:t>
-            </a:r>
-            <a:br/>
+              <a:t>source /opt/ros/jazzy/setup.bash</a:t>
+            </a:r>
+          </a:p>
+          <a:p>
+            <a:pPr algn="l">
+              <a:spcAft>
+                <a:spcPts val="0"/>
+              </a:spcAft>
+              <a:defRPr sz="1400" b="0">
+                <a:solidFill>
+                  <a:srgbClr val="FFFFFF"/>
+                </a:solidFill>
+                <a:latin typeface="DejaVu Sans Mono"/>
+              </a:defRPr>
+            </a:pPr>
+            <a:r>
+              <a:t>source ~/ros2_curri/my_agv_ws/install/setup.bash</a:t>
+            </a:r>
+          </a:p>
+          <a:p>
+            <a:pPr algn="l">
+              <a:spcAft>
+                <a:spcPts val="0"/>
+              </a:spcAft>
+              <a:defRPr sz="1400" b="0">
+                <a:solidFill>
+                  <a:srgbClr val="FFFFFF"/>
+                </a:solidFill>
+                <a:latin typeface="DejaVu Sans Mono"/>
+              </a:defRPr>
+            </a:pPr>
             <a:r>
               <a:t>ros2 run agv_control counter_publisher</a:t>
             </a:r>
-            <a:br/>
-            <a:r>
-              <a:t># 터미널 2</a:t>
-            </a:r>
-            <a:br/>
+          </a:p>
+        </p:txBody>
+      </p:sp>
+      <p:sp>
+        <p:nvSpPr>
+          <p:cNvPr id="12" name="TextBox 11"/>
+          <p:cNvSpPr txBox="1"/>
+          <p:nvPr/>
+        </p:nvSpPr>
+        <p:spPr>
+          <a:xfrm>
+            <a:off x="749808" y="5166360"/>
+            <a:ext cx="4992624" cy="438912"/>
+          </a:xfrm>
+          <a:prstGeom prst="rect">
+            <a:avLst/>
+          </a:prstGeom>
+          <a:noFill/>
+        </p:spPr>
+        <p:txBody>
+          <a:bodyPr wrap="square" lIns="73152" rIns="73152" tIns="36576" bIns="36576">
+            <a:spAutoFit/>
+          </a:bodyPr>
+          <a:lstStyle/>
+          <a:p>
+            <a:pPr algn="ctr">
+              <a:spcAft>
+                <a:spcPts val="0"/>
+              </a:spcAft>
+              <a:defRPr sz="1300" b="1">
+                <a:solidFill>
+                  <a:srgbClr val="2A8B5A"/>
+                </a:solidFill>
+                <a:latin typeface="Noto Sans CJK KR"/>
+              </a:defRPr>
+            </a:pPr>
+            <a:r>
+              <a:t>터미널 1 역할: 이 node를 실행합니다. 출력이 계속 나오는 동안 Ctrl+C로 종료하지 않습니다.</a:t>
+            </a:r>
+          </a:p>
+        </p:txBody>
+      </p:sp>
+      <p:sp>
+        <p:nvSpPr>
+          <p:cNvPr id="13" name="TextBox 12"/>
+          <p:cNvSpPr txBox="1"/>
+          <p:nvPr/>
+        </p:nvSpPr>
+        <p:spPr>
+          <a:xfrm>
+            <a:off x="6190488" y="3017520"/>
+            <a:ext cx="5138928" cy="256032"/>
+          </a:xfrm>
+          <a:prstGeom prst="rect">
+            <a:avLst/>
+          </a:prstGeom>
+          <a:noFill/>
+        </p:spPr>
+        <p:txBody>
+          <a:bodyPr wrap="square" lIns="73152" rIns="73152" tIns="36576" bIns="36576">
+            <a:spAutoFit/>
+          </a:bodyPr>
+          <a:lstStyle/>
+          <a:p>
+            <a:pPr algn="ctr">
+              <a:spcAft>
+                <a:spcPts val="0"/>
+              </a:spcAft>
+              <a:defRPr sz="1600" b="1">
+                <a:solidFill>
+                  <a:srgbClr val="225B9B"/>
+                </a:solidFill>
+                <a:latin typeface="Noto Sans CJK KR"/>
+              </a:defRPr>
+            </a:pPr>
+            <a:r>
+              <a:t>터미널 2 — 명령만 복사</a:t>
+            </a:r>
+          </a:p>
+        </p:txBody>
+      </p:sp>
+      <p:sp>
+        <p:nvSpPr>
+          <p:cNvPr id="14" name="Rounded Rectangle 13"/>
+          <p:cNvSpPr/>
+          <p:nvPr/>
+        </p:nvSpPr>
+        <p:spPr>
+          <a:xfrm>
+            <a:off x="6190488" y="3328416"/>
+            <a:ext cx="5138928" cy="1700784"/>
+          </a:xfrm>
+          <a:prstGeom prst="roundRect">
+            <a:avLst/>
+          </a:prstGeom>
+          <a:solidFill>
+            <a:srgbClr val="1D232D"/>
+          </a:solidFill>
+          <a:ln>
+            <a:solidFill>
+              <a:srgbClr val="1D232D"/>
+            </a:solidFill>
+          </a:ln>
+        </p:spPr>
+        <p:style>
+          <a:lnRef idx="1">
+            <a:schemeClr val="accent1"/>
+          </a:lnRef>
+          <a:fillRef idx="3">
+            <a:schemeClr val="accent1"/>
+          </a:fillRef>
+          <a:effectRef idx="2">
+            <a:schemeClr val="accent1"/>
+          </a:effectRef>
+          <a:fontRef idx="minor">
+            <a:schemeClr val="lt1"/>
+          </a:fontRef>
+        </p:style>
+        <p:txBody>
+          <a:bodyPr rtlCol="0" anchor="ctr" wrap="square" lIns="109728" rIns="109728" tIns="73152" bIns="73152"/>
+          <a:lstStyle/>
+          <a:p>
+            <a:pPr algn="l">
+              <a:spcAft>
+                <a:spcPts val="0"/>
+              </a:spcAft>
+              <a:defRPr sz="1400" b="0">
+                <a:solidFill>
+                  <a:srgbClr val="FFFFFF"/>
+                </a:solidFill>
+                <a:latin typeface="DejaVu Sans Mono"/>
+              </a:defRPr>
+            </a:pPr>
+            <a:r>
+              <a:t>source /opt/ros/jazzy/setup.bash</a:t>
+            </a:r>
+          </a:p>
+          <a:p>
+            <a:pPr algn="l">
+              <a:spcAft>
+                <a:spcPts val="0"/>
+              </a:spcAft>
+              <a:defRPr sz="1400" b="0">
+                <a:solidFill>
+                  <a:srgbClr val="FFFFFF"/>
+                </a:solidFill>
+                <a:latin typeface="DejaVu Sans Mono"/>
+              </a:defRPr>
+            </a:pPr>
+            <a:r>
+              <a:t>source ~/ros2_curri/my_agv_ws/install/setup.bash</a:t>
+            </a:r>
+          </a:p>
+          <a:p>
+            <a:pPr algn="l">
+              <a:spcAft>
+                <a:spcPts val="0"/>
+              </a:spcAft>
+              <a:defRPr sz="1400" b="0">
+                <a:solidFill>
+                  <a:srgbClr val="FFFFFF"/>
+                </a:solidFill>
+                <a:latin typeface="DejaVu Sans Mono"/>
+              </a:defRPr>
+            </a:pPr>
             <a:r>
               <a:t>ros2 run agv_control counter_monitor</a:t>
             </a:r>
@@ -37176,31 +38967,31 @@
       </p:sp>
       <p:sp>
         <p:nvSpPr>
-          <p:cNvPr id="10" name="TextBox 9"/>
-          <p:cNvSpPr txBox="1"/>
-          <p:nvPr/>
-        </p:nvSpPr>
-        <p:spPr>
-          <a:xfrm>
-            <a:off x="768096" y="5468112"/>
-            <a:ext cx="1143000" cy="256032"/>
-          </a:xfrm>
-          <a:prstGeom prst="rect">
-            <a:avLst/>
-          </a:prstGeom>
-          <a:noFill/>
-        </p:spPr>
-        <p:txBody>
-          <a:bodyPr wrap="square" lIns="73152" rIns="73152" tIns="36576" bIns="36576">
-            <a:spAutoFit/>
-          </a:bodyPr>
-          <a:lstStyle/>
-          <a:p>
-            <a:pPr algn="l">
-              <a:spcAft>
-                <a:spcPts val="0"/>
-              </a:spcAft>
-              <a:defRPr sz="1800" b="1">
+          <p:cNvPr id="15" name="TextBox 14"/>
+          <p:cNvSpPr txBox="1"/>
+          <p:nvPr/>
+        </p:nvSpPr>
+        <p:spPr>
+          <a:xfrm>
+            <a:off x="6263640" y="5166360"/>
+            <a:ext cx="4992624" cy="438912"/>
+          </a:xfrm>
+          <a:prstGeom prst="rect">
+            <a:avLst/>
+          </a:prstGeom>
+          <a:noFill/>
+        </p:spPr>
+        <p:txBody>
+          <a:bodyPr wrap="square" lIns="73152" rIns="73152" tIns="36576" bIns="36576">
+            <a:spAutoFit/>
+          </a:bodyPr>
+          <a:lstStyle/>
+          <a:p>
+            <a:pPr algn="ctr">
+              <a:spcAft>
+                <a:spcPts val="0"/>
+              </a:spcAft>
+              <a:defRPr sz="1300" b="1">
                 <a:solidFill>
                   <a:srgbClr val="2A8B5A"/>
                 </a:solidFill>
@@ -37208,38 +38999,38 @@
               </a:defRPr>
             </a:pPr>
             <a:r>
-              <a:t>확인</a:t>
-            </a:r>
-          </a:p>
-        </p:txBody>
-      </p:sp>
-      <p:sp>
-        <p:nvSpPr>
-          <p:cNvPr id="11" name="TextBox 10"/>
-          <p:cNvSpPr txBox="1"/>
-          <p:nvPr/>
-        </p:nvSpPr>
-        <p:spPr>
-          <a:xfrm>
-            <a:off x="768096" y="5742432"/>
-            <a:ext cx="10561320" cy="347472"/>
-          </a:xfrm>
-          <a:prstGeom prst="rect">
-            <a:avLst/>
-          </a:prstGeom>
-          <a:noFill/>
-        </p:spPr>
-        <p:txBody>
-          <a:bodyPr wrap="square" lIns="73152" rIns="73152" tIns="36576" bIns="36576">
-            <a:spAutoFit/>
-          </a:bodyPr>
-          <a:lstStyle/>
-          <a:p>
-            <a:pPr algn="l">
-              <a:spcAft>
-                <a:spcPts val="0"/>
-              </a:spcAft>
-              <a:defRPr sz="1800" b="0">
+              <a:t>터미널 2 역할: 이 node를 실행합니다. 출력이 계속 나오는 동안 Ctrl+C로 종료하지 않습니다.</a:t>
+            </a:r>
+          </a:p>
+        </p:txBody>
+      </p:sp>
+      <p:sp>
+        <p:nvSpPr>
+          <p:cNvPr id="16" name="TextBox 15"/>
+          <p:cNvSpPr txBox="1"/>
+          <p:nvPr/>
+        </p:nvSpPr>
+        <p:spPr>
+          <a:xfrm>
+            <a:off x="768096" y="5916168"/>
+            <a:ext cx="10561320" cy="292608"/>
+          </a:xfrm>
+          <a:prstGeom prst="rect">
+            <a:avLst/>
+          </a:prstGeom>
+          <a:noFill/>
+        </p:spPr>
+        <p:txBody>
+          <a:bodyPr wrap="square" lIns="73152" rIns="73152" tIns="36576" bIns="36576">
+            <a:spAutoFit/>
+          </a:bodyPr>
+          <a:lstStyle/>
+          <a:p>
+            <a:pPr algn="ctr">
+              <a:spcAft>
+                <a:spcPts val="0"/>
+              </a:spcAft>
+              <a:defRPr sz="1500" b="1">
                 <a:solidFill>
                   <a:srgbClr val="122C4E"/>
                 </a:solidFill>
@@ -37247,7 +39038,7 @@
               </a:defRPr>
             </a:pPr>
             <a:r>
-              <a:t>출력에서 topic·frame·파일 이름 또는 성공 메시지를 찾고, 맞지 않으면 다음 파일로 가지 않습니다.</a:t>
+              <a:t>확인: 출력에서 topic·frame·파일 이름 또는 성공 메시지를 찾고, 맞지 않으면 다음 파일로 가지 않습니다.</a:t>
             </a:r>
           </a:p>
         </p:txBody>
@@ -37479,21 +39270,177 @@
               </a:defRPr>
             </a:pPr>
             <a:r>
-              <a:t>현재 단계 실행    |    현재 폴더 ~/ros2_curri/my_agv_ws    |    현재 터미널</a:t>
-            </a:r>
-          </a:p>
-        </p:txBody>
-      </p:sp>
-      <p:sp>
-        <p:nvSpPr>
-          <p:cNvPr id="7" name="Rounded Rectangle 6"/>
+              <a:t>현재 단계 실행    |    현재 폴더 ~/ros2_curri/my_agv_ws    |    터미널 1 + 2</a:t>
+            </a:r>
+          </a:p>
+        </p:txBody>
+      </p:sp>
+      <p:sp>
+        <p:nvSpPr>
+          <p:cNvPr id="7" name="TextBox 6"/>
+          <p:cNvSpPr txBox="1"/>
+          <p:nvPr/>
+        </p:nvSpPr>
+        <p:spPr>
+          <a:xfrm>
+            <a:off x="676656" y="1719072"/>
+            <a:ext cx="1691640" cy="274320"/>
+          </a:xfrm>
+          <a:prstGeom prst="rect">
+            <a:avLst/>
+          </a:prstGeom>
+          <a:noFill/>
+        </p:spPr>
+        <p:txBody>
+          <a:bodyPr wrap="square" lIns="73152" rIns="73152" tIns="36576" bIns="36576">
+            <a:spAutoFit/>
+          </a:bodyPr>
+          <a:lstStyle/>
+          <a:p>
+            <a:pPr algn="l">
+              <a:spcAft>
+                <a:spcPts val="0"/>
+              </a:spcAft>
+              <a:defRPr sz="1700" b="1">
+                <a:solidFill>
+                  <a:srgbClr val="225B9B"/>
+                </a:solidFill>
+                <a:latin typeface="Noto Sans CJK KR"/>
+              </a:defRPr>
+            </a:pPr>
+            <a:r>
+              <a:t>명령의 목적</a:t>
+            </a:r>
+          </a:p>
+        </p:txBody>
+      </p:sp>
+      <p:sp>
+        <p:nvSpPr>
+          <p:cNvPr id="8" name="TextBox 7"/>
+          <p:cNvSpPr txBox="1"/>
+          <p:nvPr/>
+        </p:nvSpPr>
+        <p:spPr>
+          <a:xfrm>
+            <a:off x="676656" y="2002536"/>
+            <a:ext cx="10789920" cy="512064"/>
+          </a:xfrm>
+          <a:prstGeom prst="rect">
+            <a:avLst/>
+          </a:prstGeom>
+          <a:noFill/>
+        </p:spPr>
+        <p:txBody>
+          <a:bodyPr wrap="square" lIns="73152" rIns="73152" tIns="36576" bIns="36576">
+            <a:spAutoFit/>
+          </a:bodyPr>
+          <a:lstStyle/>
+          <a:p>
+            <a:pPr algn="l">
+              <a:spcAft>
+                <a:spcPts val="0"/>
+              </a:spcAft>
+              <a:defRPr sz="1800" b="0">
+                <a:solidFill>
+                  <a:srgbClr val="122C4E"/>
+                </a:solidFill>
+                <a:latin typeface="Noto Sans CJK KR"/>
+              </a:defRPr>
+            </a:pPr>
+            <a:r>
+              <a:t>명령 순서를 바꾸지 않습니다. build가 끝난 뒤 source하고, 마지막 명령으로 node·Gazebo·RViz를 실행합니다.</a:t>
+            </a:r>
+          </a:p>
+        </p:txBody>
+      </p:sp>
+      <p:sp>
+        <p:nvSpPr>
+          <p:cNvPr id="9" name="TextBox 8"/>
+          <p:cNvSpPr txBox="1"/>
+          <p:nvPr/>
+        </p:nvSpPr>
+        <p:spPr>
+          <a:xfrm>
+            <a:off x="676656" y="2679192"/>
+            <a:ext cx="10789920" cy="237744"/>
+          </a:xfrm>
+          <a:prstGeom prst="rect">
+            <a:avLst/>
+          </a:prstGeom>
+          <a:noFill/>
+        </p:spPr>
+        <p:txBody>
+          <a:bodyPr wrap="square" lIns="73152" rIns="73152" tIns="36576" bIns="36576">
+            <a:spAutoFit/>
+          </a:bodyPr>
+          <a:lstStyle/>
+          <a:p>
+            <a:pPr algn="ctr">
+              <a:spcAft>
+                <a:spcPts val="0"/>
+              </a:spcAft>
+              <a:defRPr sz="1400" b="1">
+                <a:solidFill>
+                  <a:srgbClr val="DB7E22"/>
+                </a:solidFill>
+                <a:latin typeface="Noto Sans CJK KR"/>
+              </a:defRPr>
+            </a:pPr>
+            <a:r>
+              <a:t>두 터미널은 동시에 필요합니다. 각 검은 블록에는 그대로 복사할 명령만 들어 있습니다.</a:t>
+            </a:r>
+          </a:p>
+        </p:txBody>
+      </p:sp>
+      <p:sp>
+        <p:nvSpPr>
+          <p:cNvPr id="10" name="TextBox 9"/>
+          <p:cNvSpPr txBox="1"/>
+          <p:nvPr/>
+        </p:nvSpPr>
+        <p:spPr>
+          <a:xfrm>
+            <a:off x="676656" y="3017520"/>
+            <a:ext cx="5138928" cy="256032"/>
+          </a:xfrm>
+          <a:prstGeom prst="rect">
+            <a:avLst/>
+          </a:prstGeom>
+          <a:noFill/>
+        </p:spPr>
+        <p:txBody>
+          <a:bodyPr wrap="square" lIns="73152" rIns="73152" tIns="36576" bIns="36576">
+            <a:spAutoFit/>
+          </a:bodyPr>
+          <a:lstStyle/>
+          <a:p>
+            <a:pPr algn="ctr">
+              <a:spcAft>
+                <a:spcPts val="0"/>
+              </a:spcAft>
+              <a:defRPr sz="1600" b="1">
+                <a:solidFill>
+                  <a:srgbClr val="225B9B"/>
+                </a:solidFill>
+                <a:latin typeface="Noto Sans CJK KR"/>
+              </a:defRPr>
+            </a:pPr>
+            <a:r>
+              <a:t>터미널 1 — 명령만 복사</a:t>
+            </a:r>
+          </a:p>
+        </p:txBody>
+      </p:sp>
+      <p:sp>
+        <p:nvSpPr>
+          <p:cNvPr id="11" name="Rounded Rectangle 10"/>
           <p:cNvSpPr/>
           <p:nvPr/>
         </p:nvSpPr>
         <p:spPr>
           <a:xfrm>
-            <a:off x="658368" y="1700784"/>
-            <a:ext cx="10972800" cy="3182112"/>
+            <a:off x="676656" y="3328416"/>
+            <a:ext cx="5138928" cy="1700784"/>
           </a:xfrm>
           <a:prstGeom prst="roundRect">
             <a:avLst/>
@@ -37522,14 +39469,14 @@
           </a:fontRef>
         </p:style>
         <p:txBody>
-          <a:bodyPr rtlCol="0" anchor="ctr" wrap="square" lIns="73152" rIns="73152" tIns="36576" bIns="36576"/>
-          <a:lstStyle/>
-          <a:p>
-            <a:pPr algn="l">
-              <a:spcAft>
-                <a:spcPts val="0"/>
-              </a:spcAft>
-              <a:defRPr sz="1600" b="0">
+          <a:bodyPr rtlCol="0" anchor="ctr" wrap="square" lIns="109728" rIns="109728" tIns="73152" bIns="73152"/>
+          <a:lstStyle/>
+          <a:p>
+            <a:pPr algn="l">
+              <a:spcAft>
+                <a:spcPts val="0"/>
+              </a:spcAft>
+              <a:defRPr sz="1400" b="0">
                 <a:solidFill>
                   <a:srgbClr val="FFFFFF"/>
                 </a:solidFill>
@@ -37537,46 +39484,70 @@
               </a:defRPr>
             </a:pPr>
             <a:r>
-              <a:t>cd ~/ros2_curri/my_agv_ws &amp;&amp; source install/setup.bash</a:t>
-            </a:r>
-            <a:br/>
+              <a:t>source /opt/ros/jazzy/setup.bash</a:t>
+            </a:r>
+          </a:p>
+          <a:p>
+            <a:pPr algn="l">
+              <a:spcAft>
+                <a:spcPts val="0"/>
+              </a:spcAft>
+              <a:defRPr sz="1400" b="0">
+                <a:solidFill>
+                  <a:srgbClr val="FFFFFF"/>
+                </a:solidFill>
+                <a:latin typeface="DejaVu Sans Mono"/>
+              </a:defRPr>
+            </a:pPr>
+            <a:r>
+              <a:t>source ~/ros2_curri/my_agv_ws/install/setup.bash</a:t>
+            </a:r>
+          </a:p>
+          <a:p>
+            <a:pPr algn="l">
+              <a:spcAft>
+                <a:spcPts val="0"/>
+              </a:spcAft>
+              <a:defRPr sz="1400" b="0">
+                <a:solidFill>
+                  <a:srgbClr val="FFFFFF"/>
+                </a:solidFill>
+                <a:latin typeface="DejaVu Sans Mono"/>
+              </a:defRPr>
+            </a:pPr>
             <a:r>
               <a:t>ros2 run agv_control counter_publisher</a:t>
             </a:r>
-            <a:br/>
-            <a:r>
-              <a:t># 새 터미널: ros2 run agv_control counter_monitor</a:t>
-            </a:r>
-          </a:p>
-        </p:txBody>
-      </p:sp>
-      <p:sp>
-        <p:nvSpPr>
-          <p:cNvPr id="8" name="TextBox 7"/>
-          <p:cNvSpPr txBox="1"/>
-          <p:nvPr/>
-        </p:nvSpPr>
-        <p:spPr>
-          <a:xfrm>
-            <a:off x="786384" y="5239512"/>
-            <a:ext cx="1261872" cy="237744"/>
-          </a:xfrm>
-          <a:prstGeom prst="rect">
-            <a:avLst/>
-          </a:prstGeom>
-          <a:noFill/>
-        </p:spPr>
-        <p:txBody>
-          <a:bodyPr wrap="square" lIns="73152" rIns="73152" tIns="36576" bIns="36576">
-            <a:spAutoFit/>
-          </a:bodyPr>
-          <a:lstStyle/>
-          <a:p>
-            <a:pPr algn="l">
-              <a:spcAft>
-                <a:spcPts val="0"/>
-              </a:spcAft>
-              <a:defRPr sz="1800" b="1">
+          </a:p>
+        </p:txBody>
+      </p:sp>
+      <p:sp>
+        <p:nvSpPr>
+          <p:cNvPr id="12" name="TextBox 11"/>
+          <p:cNvSpPr txBox="1"/>
+          <p:nvPr/>
+        </p:nvSpPr>
+        <p:spPr>
+          <a:xfrm>
+            <a:off x="749808" y="5166360"/>
+            <a:ext cx="4992624" cy="438912"/>
+          </a:xfrm>
+          <a:prstGeom prst="rect">
+            <a:avLst/>
+          </a:prstGeom>
+          <a:noFill/>
+        </p:spPr>
+        <p:txBody>
+          <a:bodyPr wrap="square" lIns="73152" rIns="73152" tIns="36576" bIns="36576">
+            <a:spAutoFit/>
+          </a:bodyPr>
+          <a:lstStyle/>
+          <a:p>
+            <a:pPr algn="ctr">
+              <a:spcAft>
+                <a:spcPts val="0"/>
+              </a:spcAft>
+              <a:defRPr sz="1300" b="1">
                 <a:solidFill>
                   <a:srgbClr val="2A8B5A"/>
                 </a:solidFill>
@@ -37584,38 +39555,206 @@
               </a:defRPr>
             </a:pPr>
             <a:r>
-              <a:t>확인 기준</a:t>
-            </a:r>
-          </a:p>
-        </p:txBody>
-      </p:sp>
-      <p:sp>
-        <p:nvSpPr>
-          <p:cNvPr id="9" name="TextBox 8"/>
-          <p:cNvSpPr txBox="1"/>
-          <p:nvPr/>
-        </p:nvSpPr>
-        <p:spPr>
-          <a:xfrm>
-            <a:off x="786384" y="5532120"/>
-            <a:ext cx="10469880" cy="420624"/>
-          </a:xfrm>
-          <a:prstGeom prst="rect">
-            <a:avLst/>
-          </a:prstGeom>
-          <a:noFill/>
-        </p:spPr>
-        <p:txBody>
-          <a:bodyPr wrap="square" lIns="73152" rIns="73152" tIns="36576" bIns="36576">
-            <a:spAutoFit/>
-          </a:bodyPr>
-          <a:lstStyle/>
-          <a:p>
-            <a:pPr algn="l">
-              <a:spcAft>
-                <a:spcPts val="0"/>
-              </a:spcAft>
-              <a:defRPr sz="1800" b="0">
+              <a:t>터미널 1 역할: 이 node를 실행합니다. 출력이 계속 나오는 동안 Ctrl+C로 종료하지 않습니다.</a:t>
+            </a:r>
+          </a:p>
+        </p:txBody>
+      </p:sp>
+      <p:sp>
+        <p:nvSpPr>
+          <p:cNvPr id="13" name="TextBox 12"/>
+          <p:cNvSpPr txBox="1"/>
+          <p:nvPr/>
+        </p:nvSpPr>
+        <p:spPr>
+          <a:xfrm>
+            <a:off x="6190488" y="3017520"/>
+            <a:ext cx="5138928" cy="256032"/>
+          </a:xfrm>
+          <a:prstGeom prst="rect">
+            <a:avLst/>
+          </a:prstGeom>
+          <a:noFill/>
+        </p:spPr>
+        <p:txBody>
+          <a:bodyPr wrap="square" lIns="73152" rIns="73152" tIns="36576" bIns="36576">
+            <a:spAutoFit/>
+          </a:bodyPr>
+          <a:lstStyle/>
+          <a:p>
+            <a:pPr algn="ctr">
+              <a:spcAft>
+                <a:spcPts val="0"/>
+              </a:spcAft>
+              <a:defRPr sz="1600" b="1">
+                <a:solidFill>
+                  <a:srgbClr val="225B9B"/>
+                </a:solidFill>
+                <a:latin typeface="Noto Sans CJK KR"/>
+              </a:defRPr>
+            </a:pPr>
+            <a:r>
+              <a:t>터미널 2 — 명령만 복사</a:t>
+            </a:r>
+          </a:p>
+        </p:txBody>
+      </p:sp>
+      <p:sp>
+        <p:nvSpPr>
+          <p:cNvPr id="14" name="Rounded Rectangle 13"/>
+          <p:cNvSpPr/>
+          <p:nvPr/>
+        </p:nvSpPr>
+        <p:spPr>
+          <a:xfrm>
+            <a:off x="6190488" y="3328416"/>
+            <a:ext cx="5138928" cy="1700784"/>
+          </a:xfrm>
+          <a:prstGeom prst="roundRect">
+            <a:avLst/>
+          </a:prstGeom>
+          <a:solidFill>
+            <a:srgbClr val="1D232D"/>
+          </a:solidFill>
+          <a:ln>
+            <a:solidFill>
+              <a:srgbClr val="1D232D"/>
+            </a:solidFill>
+          </a:ln>
+        </p:spPr>
+        <p:style>
+          <a:lnRef idx="1">
+            <a:schemeClr val="accent1"/>
+          </a:lnRef>
+          <a:fillRef idx="3">
+            <a:schemeClr val="accent1"/>
+          </a:fillRef>
+          <a:effectRef idx="2">
+            <a:schemeClr val="accent1"/>
+          </a:effectRef>
+          <a:fontRef idx="minor">
+            <a:schemeClr val="lt1"/>
+          </a:fontRef>
+        </p:style>
+        <p:txBody>
+          <a:bodyPr rtlCol="0" anchor="ctr" wrap="square" lIns="109728" rIns="109728" tIns="73152" bIns="73152"/>
+          <a:lstStyle/>
+          <a:p>
+            <a:pPr algn="l">
+              <a:spcAft>
+                <a:spcPts val="0"/>
+              </a:spcAft>
+              <a:defRPr sz="1400" b="0">
+                <a:solidFill>
+                  <a:srgbClr val="FFFFFF"/>
+                </a:solidFill>
+                <a:latin typeface="DejaVu Sans Mono"/>
+              </a:defRPr>
+            </a:pPr>
+            <a:r>
+              <a:t>source /opt/ros/jazzy/setup.bash</a:t>
+            </a:r>
+          </a:p>
+          <a:p>
+            <a:pPr algn="l">
+              <a:spcAft>
+                <a:spcPts val="0"/>
+              </a:spcAft>
+              <a:defRPr sz="1400" b="0">
+                <a:solidFill>
+                  <a:srgbClr val="FFFFFF"/>
+                </a:solidFill>
+                <a:latin typeface="DejaVu Sans Mono"/>
+              </a:defRPr>
+            </a:pPr>
+            <a:r>
+              <a:t>source ~/ros2_curri/my_agv_ws/install/setup.bash</a:t>
+            </a:r>
+          </a:p>
+          <a:p>
+            <a:pPr algn="l">
+              <a:spcAft>
+                <a:spcPts val="0"/>
+              </a:spcAft>
+              <a:defRPr sz="1400" b="0">
+                <a:solidFill>
+                  <a:srgbClr val="FFFFFF"/>
+                </a:solidFill>
+                <a:latin typeface="DejaVu Sans Mono"/>
+              </a:defRPr>
+            </a:pPr>
+            <a:r>
+              <a:t>ros2 run agv_control counter_monitor</a:t>
+            </a:r>
+          </a:p>
+        </p:txBody>
+      </p:sp>
+      <p:sp>
+        <p:nvSpPr>
+          <p:cNvPr id="15" name="TextBox 14"/>
+          <p:cNvSpPr txBox="1"/>
+          <p:nvPr/>
+        </p:nvSpPr>
+        <p:spPr>
+          <a:xfrm>
+            <a:off x="6263640" y="5166360"/>
+            <a:ext cx="4992624" cy="438912"/>
+          </a:xfrm>
+          <a:prstGeom prst="rect">
+            <a:avLst/>
+          </a:prstGeom>
+          <a:noFill/>
+        </p:spPr>
+        <p:txBody>
+          <a:bodyPr wrap="square" lIns="73152" rIns="73152" tIns="36576" bIns="36576">
+            <a:spAutoFit/>
+          </a:bodyPr>
+          <a:lstStyle/>
+          <a:p>
+            <a:pPr algn="ctr">
+              <a:spcAft>
+                <a:spcPts val="0"/>
+              </a:spcAft>
+              <a:defRPr sz="1300" b="1">
+                <a:solidFill>
+                  <a:srgbClr val="2A8B5A"/>
+                </a:solidFill>
+                <a:latin typeface="Noto Sans CJK KR"/>
+              </a:defRPr>
+            </a:pPr>
+            <a:r>
+              <a:t>터미널 2 역할: 이 node를 실행합니다. 출력이 계속 나오는 동안 Ctrl+C로 종료하지 않습니다.</a:t>
+            </a:r>
+          </a:p>
+        </p:txBody>
+      </p:sp>
+      <p:sp>
+        <p:nvSpPr>
+          <p:cNvPr id="16" name="TextBox 15"/>
+          <p:cNvSpPr txBox="1"/>
+          <p:nvPr/>
+        </p:nvSpPr>
+        <p:spPr>
+          <a:xfrm>
+            <a:off x="768096" y="5916168"/>
+            <a:ext cx="10561320" cy="292608"/>
+          </a:xfrm>
+          <a:prstGeom prst="rect">
+            <a:avLst/>
+          </a:prstGeom>
+          <a:noFill/>
+        </p:spPr>
+        <p:txBody>
+          <a:bodyPr wrap="square" lIns="73152" rIns="73152" tIns="36576" bIns="36576">
+            <a:spAutoFit/>
+          </a:bodyPr>
+          <a:lstStyle/>
+          <a:p>
+            <a:pPr algn="ctr">
+              <a:spcAft>
+                <a:spcPts val="0"/>
+              </a:spcAft>
+              <a:defRPr sz="1500" b="1">
                 <a:solidFill>
                   <a:srgbClr val="122C4E"/>
                 </a:solidFill>
@@ -37623,7 +39762,7 @@
               </a:defRPr>
             </a:pPr>
             <a:r>
-              <a:t>/counter와 /cmd_vel의 값·message type·연결 수를 terminal에서 확인한다.</a:t>
+              <a:t>확인: /counter와 /cmd_vel의 값·message type·연결 수를 terminal에서 확인한다.</a:t>
             </a:r>
           </a:p>
         </p:txBody>
@@ -38135,7 +40274,7 @@
           </a:fontRef>
         </p:style>
         <p:txBody>
-          <a:bodyPr rtlCol="0" anchor="ctr" wrap="square" lIns="73152" rIns="73152" tIns="36576" bIns="36576"/>
+          <a:bodyPr rtlCol="0" anchor="ctr" wrap="square" lIns="109728" rIns="109728" tIns="73152" bIns="73152"/>
           <a:lstStyle/>
           <a:p>
             <a:pPr algn="l">
@@ -38152,11 +40291,35 @@
             <a:r>
               <a:t>ros2 topic info /counter</a:t>
             </a:r>
-            <a:br/>
+          </a:p>
+          <a:p>
+            <a:pPr algn="l">
+              <a:spcAft>
+                <a:spcPts val="0"/>
+              </a:spcAft>
+              <a:defRPr sz="1600" b="0">
+                <a:solidFill>
+                  <a:srgbClr val="FFFFFF"/>
+                </a:solidFill>
+                <a:latin typeface="DejaVu Sans Mono"/>
+              </a:defRPr>
+            </a:pPr>
             <a:r>
               <a:t>ros2 topic echo /counter --once</a:t>
             </a:r>
-            <a:br/>
+          </a:p>
+          <a:p>
+            <a:pPr algn="l">
+              <a:spcAft>
+                <a:spcPts val="0"/>
+              </a:spcAft>
+              <a:defRPr sz="1600" b="0">
+                <a:solidFill>
+                  <a:srgbClr val="FFFFFF"/>
+                </a:solidFill>
+                <a:latin typeface="DejaVu Sans Mono"/>
+              </a:defRPr>
+            </a:pPr>
             <a:r>
               <a:t>ros2 interface show geometry_msgs/msg/Twist</a:t>
             </a:r>
@@ -39106,7 +41269,7 @@
           </a:fontRef>
         </p:style>
         <p:txBody>
-          <a:bodyPr rtlCol="0" anchor="ctr" wrap="square" lIns="73152" rIns="73152" tIns="36576" bIns="36576"/>
+          <a:bodyPr rtlCol="0" anchor="ctr" wrap="square" lIns="109728" rIns="109728" tIns="73152" bIns="73152"/>
           <a:lstStyle/>
           <a:p>
             <a:pPr algn="l">
@@ -39123,19 +41286,67 @@
             <a:r>
               <a:t>cd ~/ros2_curri</a:t>
             </a:r>
-            <a:br/>
+          </a:p>
+          <a:p>
+            <a:pPr algn="l">
+              <a:spcAft>
+                <a:spcPts val="0"/>
+              </a:spcAft>
+              <a:defRPr sz="1400" b="0">
+                <a:solidFill>
+                  <a:srgbClr val="FFFFFF"/>
+                </a:solidFill>
+                <a:latin typeface="DejaVu Sans Mono"/>
+              </a:defRPr>
+            </a:pPr>
             <a:r>
               <a:t>diff -ru my_agv_ws/src blocks/A_ros2_basics/M03_pubsub/complete/agv_ws/src || true</a:t>
             </a:r>
-            <a:br/>
+          </a:p>
+          <a:p>
+            <a:pPr algn="l">
+              <a:spcAft>
+                <a:spcPts val="0"/>
+              </a:spcAft>
+              <a:defRPr sz="1400" b="0">
+                <a:solidFill>
+                  <a:srgbClr val="FFFFFF"/>
+                </a:solidFill>
+                <a:latin typeface="DejaVu Sans Mono"/>
+              </a:defRPr>
+            </a:pPr>
             <a:r>
               <a:t>cp -a my_agv_ws/src my_agv_ws/src_before_M03</a:t>
             </a:r>
-            <a:br/>
+          </a:p>
+          <a:p>
+            <a:pPr algn="l">
+              <a:spcAft>
+                <a:spcPts val="0"/>
+              </a:spcAft>
+              <a:defRPr sz="1400" b="0">
+                <a:solidFill>
+                  <a:srgbClr val="FFFFFF"/>
+                </a:solidFill>
+                <a:latin typeface="DejaVu Sans Mono"/>
+              </a:defRPr>
+            </a:pPr>
             <a:r>
               <a:t>cp -a blocks/A_ros2_basics/M03_pubsub/complete/agv_ws/src/. my_agv_ws/src/</a:t>
             </a:r>
-            <a:br/>
+          </a:p>
+          <a:p>
+            <a:pPr algn="l">
+              <a:spcAft>
+                <a:spcPts val="0"/>
+              </a:spcAft>
+              <a:defRPr sz="1400" b="0">
+                <a:solidFill>
+                  <a:srgbClr val="FFFFFF"/>
+                </a:solidFill>
+                <a:latin typeface="DejaVu Sans Mono"/>
+              </a:defRPr>
+            </a:pPr>
             <a:r>
               <a:t>cd my_agv_ws &amp;&amp; colcon build --symlink-install &amp;&amp; source install/setup.bash</a:t>
             </a:r>
